--- a/Comixplain_Assets/Comixplain Template.pptx
+++ b/Comixplain_Assets/Comixplain Template.pptx
@@ -5,36 +5,39 @@
     <p:sldMasterId id="2147483660" r:id="rId4"/>
   </p:sldMasterIdLst>
   <p:notesMasterIdLst>
-    <p:notesMasterId r:id="rId6"/>
+    <p:notesMasterId r:id="rId9"/>
   </p:notesMasterIdLst>
   <p:handoutMasterIdLst>
-    <p:handoutMasterId r:id="rId7"/>
+    <p:handoutMasterId r:id="rId10"/>
   </p:handoutMasterIdLst>
   <p:sldIdLst>
     <p:sldId id="282" r:id="rId5"/>
+    <p:sldId id="284" r:id="rId6"/>
+    <p:sldId id="283" r:id="rId7"/>
+    <p:sldId id="286" r:id="rId8"/>
   </p:sldIdLst>
   <p:sldSz cx="6858000" cy="9906000" type="A4"/>
   <p:notesSz cx="6858000" cy="9144000"/>
   <p:embeddedFontLst>
     <p:embeddedFont>
       <p:font typeface="Oswald ExtraLight" panose="00000300000000000000" pitchFamily="2" charset="0"/>
-      <p:regular r:id="rId8"/>
+      <p:regular r:id="rId11"/>
     </p:embeddedFont>
     <p:embeddedFont>
       <p:font typeface="Oswald Light" panose="00000400000000000000" pitchFamily="2" charset="0"/>
-      <p:regular r:id="rId9"/>
+      <p:regular r:id="rId12"/>
     </p:embeddedFont>
     <p:embeddedFont>
       <p:font typeface="Oswald Medium" panose="00000600000000000000" pitchFamily="2" charset="0"/>
-      <p:regular r:id="rId10"/>
+      <p:regular r:id="rId13"/>
     </p:embeddedFont>
     <p:embeddedFont>
       <p:font typeface="Palace Script MT" panose="030303020206070C0B05" pitchFamily="66" charset="0"/>
-      <p:italic r:id="rId11"/>
+      <p:italic r:id="rId14"/>
     </p:embeddedFont>
     <p:embeddedFont>
       <p:font typeface="Pangolin" panose="00000500000000000000" pitchFamily="2" charset="0"/>
-      <p:regular r:id="rId12"/>
+      <p:regular r:id="rId15"/>
     </p:embeddedFont>
   </p:embeddedFontLst>
   <p:defaultTextStyle>
@@ -204,7 +207,7 @@
 <file path=ppt/revisionInfo.xml><?xml version="1.0" encoding="utf-8"?>
 <p1510:revInfo xmlns:a="http://schemas.openxmlformats.org/drawingml/2006/main" xmlns:r="http://schemas.openxmlformats.org/officeDocument/2006/relationships" xmlns:p1510="http://schemas.microsoft.com/office/powerpoint/2015/10/main">
   <p1510:revLst>
-    <p1510:client id="{2A40DF4B-0BA5-495C-9FFD-8CF0A4698B08}" v="13" dt="2026-08-24T05:00:05.490"/>
+    <p1510:client id="{2A40DF4B-0BA5-495C-9FFD-8CF0A4698B08}" v="17" dt="2026-08-24T05:15:56.216"/>
   </p1510:revLst>
 </p1510:revInfo>
 </file>
@@ -213,8 +216,8 @@
 <pc:chgInfo xmlns:a="http://schemas.openxmlformats.org/drawingml/2006/main" xmlns:r="http://schemas.openxmlformats.org/officeDocument/2006/relationships" xmlns:ac="http://schemas.microsoft.com/office/drawing/2013/main/command" xmlns:pc="http://schemas.microsoft.com/office/powerpoint/2013/main/command">
   <pc:docChgLst>
     <pc:chgData name="de-Jesus-Oliveira Victor-Adriel" userId="a708fc36-3c1b-42ab-b5e9-2e1fa3c6605e" providerId="ADAL" clId="{39AA12F0-CB51-4D67-A3A6-7C3EC2C345CA}"/>
-    <pc:docChg chg="undo custSel addSld delSld modSld modMainMaster">
-      <pc:chgData name="de-Jesus-Oliveira Victor-Adriel" userId="a708fc36-3c1b-42ab-b5e9-2e1fa3c6605e" providerId="ADAL" clId="{39AA12F0-CB51-4D67-A3A6-7C3EC2C345CA}" dt="2026-08-24T05:03:17.186" v="227"/>
+    <pc:docChg chg="undo custSel addSld delSld modSld sldOrd modMainMaster">
+      <pc:chgData name="de-Jesus-Oliveira Victor-Adriel" userId="a708fc36-3c1b-42ab-b5e9-2e1fa3c6605e" providerId="ADAL" clId="{39AA12F0-CB51-4D67-A3A6-7C3EC2C345CA}" dt="2026-08-24T05:16:06.753" v="246" actId="47"/>
       <pc:docMkLst>
         <pc:docMk/>
       </pc:docMkLst>
@@ -476,6 +479,109 @@
           <pc:sldMk cId="1073153420" sldId="283"/>
         </pc:sldMkLst>
       </pc:sldChg>
+      <pc:sldChg chg="addSp delSp modSp new mod modClrScheme chgLayout">
+        <pc:chgData name="de-Jesus-Oliveira Victor-Adriel" userId="a708fc36-3c1b-42ab-b5e9-2e1fa3c6605e" providerId="ADAL" clId="{39AA12F0-CB51-4D67-A3A6-7C3EC2C345CA}" dt="2026-08-24T05:12:28.759" v="232" actId="255"/>
+        <pc:sldMkLst>
+          <pc:docMk/>
+          <pc:sldMk cId="1148238684" sldId="283"/>
+        </pc:sldMkLst>
+        <pc:spChg chg="mod ord">
+          <ac:chgData name="de-Jesus-Oliveira Victor-Adriel" userId="a708fc36-3c1b-42ab-b5e9-2e1fa3c6605e" providerId="ADAL" clId="{39AA12F0-CB51-4D67-A3A6-7C3EC2C345CA}" dt="2026-08-24T05:12:12.911" v="229" actId="700"/>
+          <ac:spMkLst>
+            <pc:docMk/>
+            <pc:sldMk cId="1148238684" sldId="283"/>
+            <ac:spMk id="2" creationId="{9B5F35AF-FCA3-698A-9EFF-6635CDE7C510}"/>
+          </ac:spMkLst>
+        </pc:spChg>
+        <pc:spChg chg="del mod ord">
+          <ac:chgData name="de-Jesus-Oliveira Victor-Adriel" userId="a708fc36-3c1b-42ab-b5e9-2e1fa3c6605e" providerId="ADAL" clId="{39AA12F0-CB51-4D67-A3A6-7C3EC2C345CA}" dt="2026-08-24T05:12:12.911" v="229" actId="700"/>
+          <ac:spMkLst>
+            <pc:docMk/>
+            <pc:sldMk cId="1148238684" sldId="283"/>
+            <ac:spMk id="3" creationId="{0166D358-C638-CC64-C2E9-EE3A25FD1448}"/>
+          </ac:spMkLst>
+        </pc:spChg>
+        <pc:spChg chg="add mod ord">
+          <ac:chgData name="de-Jesus-Oliveira Victor-Adriel" userId="a708fc36-3c1b-42ab-b5e9-2e1fa3c6605e" providerId="ADAL" clId="{39AA12F0-CB51-4D67-A3A6-7C3EC2C345CA}" dt="2026-08-24T05:12:28.759" v="232" actId="255"/>
+          <ac:spMkLst>
+            <pc:docMk/>
+            <pc:sldMk cId="1148238684" sldId="283"/>
+            <ac:spMk id="4" creationId="{FD4CBBB4-C4BF-1C28-9E1B-021370D54D78}"/>
+          </ac:spMkLst>
+        </pc:spChg>
+        <pc:spChg chg="add">
+          <ac:chgData name="de-Jesus-Oliveira Victor-Adriel" userId="a708fc36-3c1b-42ab-b5e9-2e1fa3c6605e" providerId="ADAL" clId="{39AA12F0-CB51-4D67-A3A6-7C3EC2C345CA}" dt="2026-08-24T05:12:15.814" v="230" actId="22"/>
+          <ac:spMkLst>
+            <pc:docMk/>
+            <pc:sldMk cId="1148238684" sldId="283"/>
+            <ac:spMk id="6" creationId="{469474F8-568B-B960-152F-A30F12D3D653}"/>
+          </ac:spMkLst>
+        </pc:spChg>
+        <pc:spChg chg="add">
+          <ac:chgData name="de-Jesus-Oliveira Victor-Adriel" userId="a708fc36-3c1b-42ab-b5e9-2e1fa3c6605e" providerId="ADAL" clId="{39AA12F0-CB51-4D67-A3A6-7C3EC2C345CA}" dt="2026-08-24T05:12:15.814" v="230" actId="22"/>
+          <ac:spMkLst>
+            <pc:docMk/>
+            <pc:sldMk cId="1148238684" sldId="283"/>
+            <ac:spMk id="8" creationId="{484FF906-7B9B-BC0C-B069-005A2D3E62B9}"/>
+          </ac:spMkLst>
+        </pc:spChg>
+        <pc:spChg chg="add">
+          <ac:chgData name="de-Jesus-Oliveira Victor-Adriel" userId="a708fc36-3c1b-42ab-b5e9-2e1fa3c6605e" providerId="ADAL" clId="{39AA12F0-CB51-4D67-A3A6-7C3EC2C345CA}" dt="2026-08-24T05:12:15.814" v="230" actId="22"/>
+          <ac:spMkLst>
+            <pc:docMk/>
+            <pc:sldMk cId="1148238684" sldId="283"/>
+            <ac:spMk id="10" creationId="{06425659-00EF-DAA2-A1EF-9CED0407A812}"/>
+          </ac:spMkLst>
+        </pc:spChg>
+        <pc:spChg chg="add">
+          <ac:chgData name="de-Jesus-Oliveira Victor-Adriel" userId="a708fc36-3c1b-42ab-b5e9-2e1fa3c6605e" providerId="ADAL" clId="{39AA12F0-CB51-4D67-A3A6-7C3EC2C345CA}" dt="2026-08-24T05:12:15.814" v="230" actId="22"/>
+          <ac:spMkLst>
+            <pc:docMk/>
+            <pc:sldMk cId="1148238684" sldId="283"/>
+            <ac:spMk id="12" creationId="{3D8EF94D-8EB1-37EB-0955-F5FFEF7FA334}"/>
+          </ac:spMkLst>
+        </pc:spChg>
+        <pc:spChg chg="add">
+          <ac:chgData name="de-Jesus-Oliveira Victor-Adriel" userId="a708fc36-3c1b-42ab-b5e9-2e1fa3c6605e" providerId="ADAL" clId="{39AA12F0-CB51-4D67-A3A6-7C3EC2C345CA}" dt="2026-08-24T05:12:15.814" v="230" actId="22"/>
+          <ac:spMkLst>
+            <pc:docMk/>
+            <pc:sldMk cId="1148238684" sldId="283"/>
+            <ac:spMk id="14" creationId="{FCCC295C-8AA4-9629-E9E8-6DC2E7CFF622}"/>
+          </ac:spMkLst>
+        </pc:spChg>
+        <pc:spChg chg="add">
+          <ac:chgData name="de-Jesus-Oliveira Victor-Adriel" userId="a708fc36-3c1b-42ab-b5e9-2e1fa3c6605e" providerId="ADAL" clId="{39AA12F0-CB51-4D67-A3A6-7C3EC2C345CA}" dt="2026-08-24T05:12:15.814" v="230" actId="22"/>
+          <ac:spMkLst>
+            <pc:docMk/>
+            <pc:sldMk cId="1148238684" sldId="283"/>
+            <ac:spMk id="16" creationId="{1255A5B6-41AA-D249-4606-CD299E775F60}"/>
+          </ac:spMkLst>
+        </pc:spChg>
+        <pc:spChg chg="add">
+          <ac:chgData name="de-Jesus-Oliveira Victor-Adriel" userId="a708fc36-3c1b-42ab-b5e9-2e1fa3c6605e" providerId="ADAL" clId="{39AA12F0-CB51-4D67-A3A6-7C3EC2C345CA}" dt="2026-08-24T05:12:15.814" v="230" actId="22"/>
+          <ac:spMkLst>
+            <pc:docMk/>
+            <pc:sldMk cId="1148238684" sldId="283"/>
+            <ac:spMk id="18" creationId="{EDF6B5D4-E29A-9775-78F5-7857BDF1E1CA}"/>
+          </ac:spMkLst>
+        </pc:spChg>
+        <pc:spChg chg="add">
+          <ac:chgData name="de-Jesus-Oliveira Victor-Adriel" userId="a708fc36-3c1b-42ab-b5e9-2e1fa3c6605e" providerId="ADAL" clId="{39AA12F0-CB51-4D67-A3A6-7C3EC2C345CA}" dt="2026-08-24T05:12:15.814" v="230" actId="22"/>
+          <ac:spMkLst>
+            <pc:docMk/>
+            <pc:sldMk cId="1148238684" sldId="283"/>
+            <ac:spMk id="20" creationId="{2CD46CE6-F763-54B9-1D74-5F14523CE637}"/>
+          </ac:spMkLst>
+        </pc:spChg>
+        <pc:spChg chg="add">
+          <ac:chgData name="de-Jesus-Oliveira Victor-Adriel" userId="a708fc36-3c1b-42ab-b5e9-2e1fa3c6605e" providerId="ADAL" clId="{39AA12F0-CB51-4D67-A3A6-7C3EC2C345CA}" dt="2026-08-24T05:12:15.814" v="230" actId="22"/>
+          <ac:spMkLst>
+            <pc:docMk/>
+            <pc:sldMk cId="1148238684" sldId="283"/>
+            <ac:spMk id="22" creationId="{D4C17E7D-8E2E-1A12-1F86-EAAF634D6369}"/>
+          </ac:spMkLst>
+        </pc:spChg>
+      </pc:sldChg>
       <pc:sldChg chg="modSp new del mod">
         <pc:chgData name="de-Jesus-Oliveira Victor-Adriel" userId="a708fc36-3c1b-42ab-b5e9-2e1fa3c6605e" providerId="ADAL" clId="{39AA12F0-CB51-4D67-A3A6-7C3EC2C345CA}" dt="2026-08-24T04:47:38.590" v="68" actId="47"/>
         <pc:sldMkLst>
@@ -504,6 +610,210 @@
           <pc:docMk/>
           <pc:sldMk cId="4217387265" sldId="283"/>
         </pc:sldMkLst>
+      </pc:sldChg>
+      <pc:sldChg chg="addSp delSp modSp add mod ord">
+        <pc:chgData name="de-Jesus-Oliveira Victor-Adriel" userId="a708fc36-3c1b-42ab-b5e9-2e1fa3c6605e" providerId="ADAL" clId="{39AA12F0-CB51-4D67-A3A6-7C3EC2C345CA}" dt="2026-08-24T05:13:37.064" v="240"/>
+        <pc:sldMkLst>
+          <pc:docMk/>
+          <pc:sldMk cId="1861485868" sldId="284"/>
+        </pc:sldMkLst>
+        <pc:spChg chg="mod">
+          <ac:chgData name="de-Jesus-Oliveira Victor-Adriel" userId="a708fc36-3c1b-42ab-b5e9-2e1fa3c6605e" providerId="ADAL" clId="{39AA12F0-CB51-4D67-A3A6-7C3EC2C345CA}" dt="2026-08-24T05:13:02.100" v="234" actId="255"/>
+          <ac:spMkLst>
+            <pc:docMk/>
+            <pc:sldMk cId="1861485868" sldId="284"/>
+            <ac:spMk id="4" creationId="{0CEC03E3-1DDE-9464-574D-A19060512D22}"/>
+          </ac:spMkLst>
+        </pc:spChg>
+        <pc:spChg chg="add">
+          <ac:chgData name="de-Jesus-Oliveira Victor-Adriel" userId="a708fc36-3c1b-42ab-b5e9-2e1fa3c6605e" providerId="ADAL" clId="{39AA12F0-CB51-4D67-A3A6-7C3EC2C345CA}" dt="2026-08-24T05:13:32.383" v="238" actId="22"/>
+          <ac:spMkLst>
+            <pc:docMk/>
+            <pc:sldMk cId="1861485868" sldId="284"/>
+            <ac:spMk id="5" creationId="{E8CF5295-F679-F153-5F66-A807245CF10D}"/>
+          </ac:spMkLst>
+        </pc:spChg>
+        <pc:spChg chg="del">
+          <ac:chgData name="de-Jesus-Oliveira Victor-Adriel" userId="a708fc36-3c1b-42ab-b5e9-2e1fa3c6605e" providerId="ADAL" clId="{39AA12F0-CB51-4D67-A3A6-7C3EC2C345CA}" dt="2026-08-24T05:13:08.959" v="235" actId="478"/>
+          <ac:spMkLst>
+            <pc:docMk/>
+            <pc:sldMk cId="1861485868" sldId="284"/>
+            <ac:spMk id="6" creationId="{CC04187F-77E6-6186-4B89-58213E242ACE}"/>
+          </ac:spMkLst>
+        </pc:spChg>
+        <pc:spChg chg="del">
+          <ac:chgData name="de-Jesus-Oliveira Victor-Adriel" userId="a708fc36-3c1b-42ab-b5e9-2e1fa3c6605e" providerId="ADAL" clId="{39AA12F0-CB51-4D67-A3A6-7C3EC2C345CA}" dt="2026-08-24T05:13:08.959" v="235" actId="478"/>
+          <ac:spMkLst>
+            <pc:docMk/>
+            <pc:sldMk cId="1861485868" sldId="284"/>
+            <ac:spMk id="8" creationId="{CB49B3C5-FB7A-E371-61B2-77CA5F7F78E1}"/>
+          </ac:spMkLst>
+        </pc:spChg>
+        <pc:spChg chg="add">
+          <ac:chgData name="de-Jesus-Oliveira Victor-Adriel" userId="a708fc36-3c1b-42ab-b5e9-2e1fa3c6605e" providerId="ADAL" clId="{39AA12F0-CB51-4D67-A3A6-7C3EC2C345CA}" dt="2026-08-24T05:13:32.383" v="238" actId="22"/>
+          <ac:spMkLst>
+            <pc:docMk/>
+            <pc:sldMk cId="1861485868" sldId="284"/>
+            <ac:spMk id="9" creationId="{0FA451E3-6E2F-3D3E-34EF-DEA5DFBDF183}"/>
+          </ac:spMkLst>
+        </pc:spChg>
+        <pc:spChg chg="del">
+          <ac:chgData name="de-Jesus-Oliveira Victor-Adriel" userId="a708fc36-3c1b-42ab-b5e9-2e1fa3c6605e" providerId="ADAL" clId="{39AA12F0-CB51-4D67-A3A6-7C3EC2C345CA}" dt="2026-08-24T05:13:08.959" v="235" actId="478"/>
+          <ac:spMkLst>
+            <pc:docMk/>
+            <pc:sldMk cId="1861485868" sldId="284"/>
+            <ac:spMk id="10" creationId="{30D6224F-6C46-A9E2-FABA-7FF4A7E156E5}"/>
+          </ac:spMkLst>
+        </pc:spChg>
+        <pc:spChg chg="del">
+          <ac:chgData name="de-Jesus-Oliveira Victor-Adriel" userId="a708fc36-3c1b-42ab-b5e9-2e1fa3c6605e" providerId="ADAL" clId="{39AA12F0-CB51-4D67-A3A6-7C3EC2C345CA}" dt="2026-08-24T05:13:08.959" v="235" actId="478"/>
+          <ac:spMkLst>
+            <pc:docMk/>
+            <pc:sldMk cId="1861485868" sldId="284"/>
+            <ac:spMk id="12" creationId="{C42B2868-F93C-E34F-6287-386271D96F20}"/>
+          </ac:spMkLst>
+        </pc:spChg>
+        <pc:spChg chg="add">
+          <ac:chgData name="de-Jesus-Oliveira Victor-Adriel" userId="a708fc36-3c1b-42ab-b5e9-2e1fa3c6605e" providerId="ADAL" clId="{39AA12F0-CB51-4D67-A3A6-7C3EC2C345CA}" dt="2026-08-24T05:13:32.383" v="238" actId="22"/>
+          <ac:spMkLst>
+            <pc:docMk/>
+            <pc:sldMk cId="1861485868" sldId="284"/>
+            <ac:spMk id="13" creationId="{1A967792-97C0-2AE0-5B2C-5095DEA6F0EC}"/>
+          </ac:spMkLst>
+        </pc:spChg>
+        <pc:spChg chg="del">
+          <ac:chgData name="de-Jesus-Oliveira Victor-Adriel" userId="a708fc36-3c1b-42ab-b5e9-2e1fa3c6605e" providerId="ADAL" clId="{39AA12F0-CB51-4D67-A3A6-7C3EC2C345CA}" dt="2026-08-24T05:13:08.959" v="235" actId="478"/>
+          <ac:spMkLst>
+            <pc:docMk/>
+            <pc:sldMk cId="1861485868" sldId="284"/>
+            <ac:spMk id="14" creationId="{C92BBE41-E686-116A-9292-D40BE28903A2}"/>
+          </ac:spMkLst>
+        </pc:spChg>
+        <pc:spChg chg="del">
+          <ac:chgData name="de-Jesus-Oliveira Victor-Adriel" userId="a708fc36-3c1b-42ab-b5e9-2e1fa3c6605e" providerId="ADAL" clId="{39AA12F0-CB51-4D67-A3A6-7C3EC2C345CA}" dt="2026-08-24T05:13:08.959" v="235" actId="478"/>
+          <ac:spMkLst>
+            <pc:docMk/>
+            <pc:sldMk cId="1861485868" sldId="284"/>
+            <ac:spMk id="16" creationId="{C1195490-E4E5-9FC0-8A34-F4600B826BFB}"/>
+          </ac:spMkLst>
+        </pc:spChg>
+        <pc:spChg chg="add">
+          <ac:chgData name="de-Jesus-Oliveira Victor-Adriel" userId="a708fc36-3c1b-42ab-b5e9-2e1fa3c6605e" providerId="ADAL" clId="{39AA12F0-CB51-4D67-A3A6-7C3EC2C345CA}" dt="2026-08-24T05:13:32.383" v="238" actId="22"/>
+          <ac:spMkLst>
+            <pc:docMk/>
+            <pc:sldMk cId="1861485868" sldId="284"/>
+            <ac:spMk id="17" creationId="{89AC66E1-7A90-D7B5-5909-B82623B48D72}"/>
+          </ac:spMkLst>
+        </pc:spChg>
+        <pc:spChg chg="del">
+          <ac:chgData name="de-Jesus-Oliveira Victor-Adriel" userId="a708fc36-3c1b-42ab-b5e9-2e1fa3c6605e" providerId="ADAL" clId="{39AA12F0-CB51-4D67-A3A6-7C3EC2C345CA}" dt="2026-08-24T05:13:08.959" v="235" actId="478"/>
+          <ac:spMkLst>
+            <pc:docMk/>
+            <pc:sldMk cId="1861485868" sldId="284"/>
+            <ac:spMk id="18" creationId="{FE3D47CE-7CAC-C420-8936-118D18EF5F6C}"/>
+          </ac:spMkLst>
+        </pc:spChg>
+        <pc:spChg chg="del">
+          <ac:chgData name="de-Jesus-Oliveira Victor-Adriel" userId="a708fc36-3c1b-42ab-b5e9-2e1fa3c6605e" providerId="ADAL" clId="{39AA12F0-CB51-4D67-A3A6-7C3EC2C345CA}" dt="2026-08-24T05:13:08.959" v="235" actId="478"/>
+          <ac:spMkLst>
+            <pc:docMk/>
+            <pc:sldMk cId="1861485868" sldId="284"/>
+            <ac:spMk id="20" creationId="{DBFA2475-EFAE-938F-A6E7-FF0ED46AF702}"/>
+          </ac:spMkLst>
+        </pc:spChg>
+        <pc:spChg chg="add">
+          <ac:chgData name="de-Jesus-Oliveira Victor-Adriel" userId="a708fc36-3c1b-42ab-b5e9-2e1fa3c6605e" providerId="ADAL" clId="{39AA12F0-CB51-4D67-A3A6-7C3EC2C345CA}" dt="2026-08-24T05:13:32.383" v="238" actId="22"/>
+          <ac:spMkLst>
+            <pc:docMk/>
+            <pc:sldMk cId="1861485868" sldId="284"/>
+            <ac:spMk id="21" creationId="{0C5D7FD3-5450-6C35-362A-5AA9B41716E6}"/>
+          </ac:spMkLst>
+        </pc:spChg>
+        <pc:spChg chg="del">
+          <ac:chgData name="de-Jesus-Oliveira Victor-Adriel" userId="a708fc36-3c1b-42ab-b5e9-2e1fa3c6605e" providerId="ADAL" clId="{39AA12F0-CB51-4D67-A3A6-7C3EC2C345CA}" dt="2026-08-24T05:13:08.959" v="235" actId="478"/>
+          <ac:spMkLst>
+            <pc:docMk/>
+            <pc:sldMk cId="1861485868" sldId="284"/>
+            <ac:spMk id="22" creationId="{00D1EA7D-E4DA-C2C4-2FD9-4594C9A12C30}"/>
+          </ac:spMkLst>
+        </pc:spChg>
+        <pc:spChg chg="add">
+          <ac:chgData name="de-Jesus-Oliveira Victor-Adriel" userId="a708fc36-3c1b-42ab-b5e9-2e1fa3c6605e" providerId="ADAL" clId="{39AA12F0-CB51-4D67-A3A6-7C3EC2C345CA}" dt="2026-08-24T05:13:32.383" v="238" actId="22"/>
+          <ac:spMkLst>
+            <pc:docMk/>
+            <pc:sldMk cId="1861485868" sldId="284"/>
+            <ac:spMk id="24" creationId="{72309147-1EA1-D510-AE8F-C857585A78B3}"/>
+          </ac:spMkLst>
+        </pc:spChg>
+      </pc:sldChg>
+      <pc:sldChg chg="add del">
+        <pc:chgData name="de-Jesus-Oliveira Victor-Adriel" userId="a708fc36-3c1b-42ab-b5e9-2e1fa3c6605e" providerId="ADAL" clId="{39AA12F0-CB51-4D67-A3A6-7C3EC2C345CA}" dt="2026-08-24T05:14:07.392" v="241" actId="47"/>
+        <pc:sldMkLst>
+          <pc:docMk/>
+          <pc:sldMk cId="832298491" sldId="285"/>
+        </pc:sldMkLst>
+      </pc:sldChg>
+      <pc:sldChg chg="addSp add mod">
+        <pc:chgData name="de-Jesus-Oliveira Victor-Adriel" userId="a708fc36-3c1b-42ab-b5e9-2e1fa3c6605e" providerId="ADAL" clId="{39AA12F0-CB51-4D67-A3A6-7C3EC2C345CA}" dt="2026-08-24T05:14:26.587" v="242" actId="22"/>
+        <pc:sldMkLst>
+          <pc:docMk/>
+          <pc:sldMk cId="1375120078" sldId="286"/>
+        </pc:sldMkLst>
+        <pc:spChg chg="add">
+          <ac:chgData name="de-Jesus-Oliveira Victor-Adriel" userId="a708fc36-3c1b-42ab-b5e9-2e1fa3c6605e" providerId="ADAL" clId="{39AA12F0-CB51-4D67-A3A6-7C3EC2C345CA}" dt="2026-08-24T05:14:26.587" v="242" actId="22"/>
+          <ac:spMkLst>
+            <pc:docMk/>
+            <pc:sldMk cId="1375120078" sldId="286"/>
+            <ac:spMk id="5" creationId="{F435C4AC-76DD-8EBC-E6B8-C2FDBB20C20C}"/>
+          </ac:spMkLst>
+        </pc:spChg>
+        <pc:spChg chg="add">
+          <ac:chgData name="de-Jesus-Oliveira Victor-Adriel" userId="a708fc36-3c1b-42ab-b5e9-2e1fa3c6605e" providerId="ADAL" clId="{39AA12F0-CB51-4D67-A3A6-7C3EC2C345CA}" dt="2026-08-24T05:14:26.587" v="242" actId="22"/>
+          <ac:spMkLst>
+            <pc:docMk/>
+            <pc:sldMk cId="1375120078" sldId="286"/>
+            <ac:spMk id="7" creationId="{C262763A-6C3B-1812-1C7C-E12E8CC787BB}"/>
+          </ac:spMkLst>
+        </pc:spChg>
+        <pc:picChg chg="add">
+          <ac:chgData name="de-Jesus-Oliveira Victor-Adriel" userId="a708fc36-3c1b-42ab-b5e9-2e1fa3c6605e" providerId="ADAL" clId="{39AA12F0-CB51-4D67-A3A6-7C3EC2C345CA}" dt="2026-08-24T05:14:26.587" v="242" actId="22"/>
+          <ac:picMkLst>
+            <pc:docMk/>
+            <pc:sldMk cId="1375120078" sldId="286"/>
+            <ac:picMk id="9" creationId="{B744471A-6F9E-6C5C-B103-F15415802752}"/>
+          </ac:picMkLst>
+        </pc:picChg>
+      </pc:sldChg>
+      <pc:sldChg chg="addSp delSp modSp add del mod chgLayout">
+        <pc:chgData name="de-Jesus-Oliveira Victor-Adriel" userId="a708fc36-3c1b-42ab-b5e9-2e1fa3c6605e" providerId="ADAL" clId="{39AA12F0-CB51-4D67-A3A6-7C3EC2C345CA}" dt="2026-08-24T05:16:06.753" v="246" actId="47"/>
+        <pc:sldMkLst>
+          <pc:docMk/>
+          <pc:sldMk cId="1229211540" sldId="287"/>
+        </pc:sldMkLst>
+        <pc:spChg chg="mod ord">
+          <ac:chgData name="de-Jesus-Oliveira Victor-Adriel" userId="a708fc36-3c1b-42ab-b5e9-2e1fa3c6605e" providerId="ADAL" clId="{39AA12F0-CB51-4D67-A3A6-7C3EC2C345CA}" dt="2026-08-24T05:16:02.240" v="245" actId="700"/>
+          <ac:spMkLst>
+            <pc:docMk/>
+            <pc:sldMk cId="1229211540" sldId="287"/>
+            <ac:spMk id="2" creationId="{801502B9-1936-1E2D-967B-44FC0FAC4104}"/>
+          </ac:spMkLst>
+        </pc:spChg>
+        <pc:spChg chg="add del mod ord">
+          <ac:chgData name="de-Jesus-Oliveira Victor-Adriel" userId="a708fc36-3c1b-42ab-b5e9-2e1fa3c6605e" providerId="ADAL" clId="{39AA12F0-CB51-4D67-A3A6-7C3EC2C345CA}" dt="2026-08-24T05:16:02.240" v="245" actId="700"/>
+          <ac:spMkLst>
+            <pc:docMk/>
+            <pc:sldMk cId="1229211540" sldId="287"/>
+            <ac:spMk id="3" creationId="{4A8B455F-8E6B-0063-0D72-92D271928C90}"/>
+          </ac:spMkLst>
+        </pc:spChg>
+        <pc:spChg chg="add del">
+          <ac:chgData name="de-Jesus-Oliveira Victor-Adriel" userId="a708fc36-3c1b-42ab-b5e9-2e1fa3c6605e" providerId="ADAL" clId="{39AA12F0-CB51-4D67-A3A6-7C3EC2C345CA}" dt="2026-08-24T05:16:02.240" v="245" actId="700"/>
+          <ac:spMkLst>
+            <pc:docMk/>
+            <pc:sldMk cId="1229211540" sldId="287"/>
+            <ac:spMk id="4" creationId="{9115A36D-C274-E95F-7FCD-828396674981}"/>
+          </ac:spMkLst>
+        </pc:spChg>
       </pc:sldChg>
       <pc:sldMasterChg chg="addSp delSp modSp mod modSldLayout sldLayoutOrd">
         <pc:chgData name="de-Jesus-Oliveira Victor-Adriel" userId="a708fc36-3c1b-42ab-b5e9-2e1fa3c6605e" providerId="ADAL" clId="{39AA12F0-CB51-4D67-A3A6-7C3EC2C345CA}" dt="2026-08-24T04:58:17.288" v="124" actId="255"/>
@@ -1784,38 +2094,36 @@
             <a:gdLst>
               <a:gd name="csX0" fmla="*/ 0 w 2048256"/>
               <a:gd name="csY0" fmla="*/ 0 h 2951163"/>
-              <a:gd name="csX1" fmla="*/ 621304 w 2048256"/>
+              <a:gd name="csX1" fmla="*/ 682752 w 2048256"/>
               <a:gd name="csY1" fmla="*/ 0 h 2951163"/>
-              <a:gd name="csX2" fmla="*/ 1263091 w 2048256"/>
+              <a:gd name="csX2" fmla="*/ 1304056 w 2048256"/>
               <a:gd name="csY2" fmla="*/ 0 h 2951163"/>
               <a:gd name="csX3" fmla="*/ 2048256 w 2048256"/>
               <a:gd name="csY3" fmla="*/ 0 h 2951163"/>
               <a:gd name="csX4" fmla="*/ 2048256 w 2048256"/>
-              <a:gd name="csY4" fmla="*/ 560721 h 2951163"/>
+              <a:gd name="csY4" fmla="*/ 619744 h 2951163"/>
               <a:gd name="csX5" fmla="*/ 2048256 w 2048256"/>
-              <a:gd name="csY5" fmla="*/ 1209977 h 2951163"/>
+              <a:gd name="csY5" fmla="*/ 1239488 h 2951163"/>
               <a:gd name="csX6" fmla="*/ 2048256 w 2048256"/>
-              <a:gd name="csY6" fmla="*/ 1711675 h 2951163"/>
+              <a:gd name="csY6" fmla="*/ 1770698 h 2951163"/>
               <a:gd name="csX7" fmla="*/ 2048256 w 2048256"/>
-              <a:gd name="csY7" fmla="*/ 2242884 h 2951163"/>
+              <a:gd name="csY7" fmla="*/ 2360930 h 2951163"/>
               <a:gd name="csX8" fmla="*/ 2048256 w 2048256"/>
               <a:gd name="csY8" fmla="*/ 2951163 h 2951163"/>
-              <a:gd name="csX9" fmla="*/ 1426952 w 2048256"/>
+              <a:gd name="csX9" fmla="*/ 1385987 w 2048256"/>
               <a:gd name="csY9" fmla="*/ 2951163 h 2951163"/>
-              <a:gd name="csX10" fmla="*/ 785165 w 2048256"/>
+              <a:gd name="csX10" fmla="*/ 703235 w 2048256"/>
               <a:gd name="csY10" fmla="*/ 2951163 h 2951163"/>
               <a:gd name="csX11" fmla="*/ 0 w 2048256"/>
               <a:gd name="csY11" fmla="*/ 2951163 h 2951163"/>
               <a:gd name="csX12" fmla="*/ 0 w 2048256"/>
-              <a:gd name="csY12" fmla="*/ 2449465 h 2951163"/>
+              <a:gd name="csY12" fmla="*/ 2331419 h 2951163"/>
               <a:gd name="csX13" fmla="*/ 0 w 2048256"/>
-              <a:gd name="csY13" fmla="*/ 1829721 h 2951163"/>
+              <a:gd name="csY13" fmla="*/ 1682163 h 2951163"/>
               <a:gd name="csX14" fmla="*/ 0 w 2048256"/>
-              <a:gd name="csY14" fmla="*/ 1239488 h 2951163"/>
+              <a:gd name="csY14" fmla="*/ 1062419 h 2951163"/>
               <a:gd name="csX15" fmla="*/ 0 w 2048256"/>
-              <a:gd name="csY15" fmla="*/ 708279 h 2951163"/>
-              <a:gd name="csX16" fmla="*/ 0 w 2048256"/>
-              <a:gd name="csY16" fmla="*/ 0 h 2951163"/>
+              <a:gd name="csY15" fmla="*/ 0 h 2951163"/>
             </a:gdLst>
             <a:ahLst/>
             <a:cxnLst>
@@ -1867,13 +2175,91 @@
               <a:cxn ang="0">
                 <a:pos x="csX15" y="csY15"/>
               </a:cxn>
-              <a:cxn ang="0">
-                <a:pos x="csX16" y="csY16"/>
-              </a:cxn>
             </a:cxnLst>
             <a:rect l="l" t="t" r="r" b="b"/>
             <a:pathLst>
-              <a:path w="2048256" h="2951163" extrusionOk="0">
+              <a:path w="2048256" h="2951163" fill="none" extrusionOk="0">
+                <a:moveTo>
+                  <a:pt x="0" y="0"/>
+                </a:moveTo>
+                <a:cubicBezTo>
+                  <a:pt x="145745" y="-14563"/>
+                  <a:pt x="443531" y="-7277"/>
+                  <a:pt x="682752" y="0"/>
+                </a:cubicBezTo>
+                <a:cubicBezTo>
+                  <a:pt x="921973" y="7277"/>
+                  <a:pt x="1028656" y="-16000"/>
+                  <a:pt x="1304056" y="0"/>
+                </a:cubicBezTo>
+                <a:cubicBezTo>
+                  <a:pt x="1579456" y="16000"/>
+                  <a:pt x="1703881" y="12176"/>
+                  <a:pt x="2048256" y="0"/>
+                </a:cubicBezTo>
+                <a:cubicBezTo>
+                  <a:pt x="2046264" y="239847"/>
+                  <a:pt x="2076706" y="432103"/>
+                  <a:pt x="2048256" y="619744"/>
+                </a:cubicBezTo>
+                <a:cubicBezTo>
+                  <a:pt x="2019806" y="807385"/>
+                  <a:pt x="2034863" y="1080410"/>
+                  <a:pt x="2048256" y="1239488"/>
+                </a:cubicBezTo>
+                <a:cubicBezTo>
+                  <a:pt x="2061649" y="1398566"/>
+                  <a:pt x="2045510" y="1613183"/>
+                  <a:pt x="2048256" y="1770698"/>
+                </a:cubicBezTo>
+                <a:cubicBezTo>
+                  <a:pt x="2051003" y="1928213"/>
+                  <a:pt x="2074513" y="2089042"/>
+                  <a:pt x="2048256" y="2360930"/>
+                </a:cubicBezTo>
+                <a:cubicBezTo>
+                  <a:pt x="2021999" y="2632818"/>
+                  <a:pt x="2041826" y="2795804"/>
+                  <a:pt x="2048256" y="2951163"/>
+                </a:cubicBezTo>
+                <a:cubicBezTo>
+                  <a:pt x="1777615" y="2949990"/>
+                  <a:pt x="1590074" y="2922595"/>
+                  <a:pt x="1385987" y="2951163"/>
+                </a:cubicBezTo>
+                <a:cubicBezTo>
+                  <a:pt x="1181900" y="2979731"/>
+                  <a:pt x="937289" y="2925220"/>
+                  <a:pt x="703235" y="2951163"/>
+                </a:cubicBezTo>
+                <a:cubicBezTo>
+                  <a:pt x="469181" y="2977106"/>
+                  <a:pt x="279028" y="2952897"/>
+                  <a:pt x="0" y="2951163"/>
+                </a:cubicBezTo>
+                <a:cubicBezTo>
+                  <a:pt x="-12688" y="2660430"/>
+                  <a:pt x="3295" y="2469288"/>
+                  <a:pt x="0" y="2331419"/>
+                </a:cubicBezTo>
+                <a:cubicBezTo>
+                  <a:pt x="-3295" y="2193550"/>
+                  <a:pt x="-19903" y="1834509"/>
+                  <a:pt x="0" y="1682163"/>
+                </a:cubicBezTo>
+                <a:cubicBezTo>
+                  <a:pt x="19903" y="1529817"/>
+                  <a:pt x="4229" y="1363192"/>
+                  <a:pt x="0" y="1062419"/>
+                </a:cubicBezTo>
+                <a:cubicBezTo>
+                  <a:pt x="-4229" y="761646"/>
+                  <a:pt x="529" y="476222"/>
+                  <a:pt x="0" y="0"/>
+                </a:cubicBezTo>
+                <a:close/>
+              </a:path>
+              <a:path w="2048256" h="2951163" stroke="0" extrusionOk="0">
                 <a:moveTo>
                   <a:pt x="0" y="0"/>
                 </a:moveTo>
@@ -2035,38 +2421,36 @@
             <a:gdLst>
               <a:gd name="csX0" fmla="*/ 0 w 2051050"/>
               <a:gd name="csY0" fmla="*/ 0 h 2951163"/>
-              <a:gd name="csX1" fmla="*/ 622152 w 2051050"/>
+              <a:gd name="csX1" fmla="*/ 683683 w 2051050"/>
               <a:gd name="csY1" fmla="*/ 0 h 2951163"/>
-              <a:gd name="csX2" fmla="*/ 1264814 w 2051050"/>
+              <a:gd name="csX2" fmla="*/ 1305835 w 2051050"/>
               <a:gd name="csY2" fmla="*/ 0 h 2951163"/>
               <a:gd name="csX3" fmla="*/ 2051050 w 2051050"/>
               <a:gd name="csY3" fmla="*/ 0 h 2951163"/>
               <a:gd name="csX4" fmla="*/ 2051050 w 2051050"/>
-              <a:gd name="csY4" fmla="*/ 560721 h 2951163"/>
+              <a:gd name="csY4" fmla="*/ 619744 h 2951163"/>
               <a:gd name="csX5" fmla="*/ 2051050 w 2051050"/>
-              <a:gd name="csY5" fmla="*/ 1209977 h 2951163"/>
+              <a:gd name="csY5" fmla="*/ 1239488 h 2951163"/>
               <a:gd name="csX6" fmla="*/ 2051050 w 2051050"/>
-              <a:gd name="csY6" fmla="*/ 1711675 h 2951163"/>
+              <a:gd name="csY6" fmla="*/ 1770698 h 2951163"/>
               <a:gd name="csX7" fmla="*/ 2051050 w 2051050"/>
-              <a:gd name="csY7" fmla="*/ 2242884 h 2951163"/>
+              <a:gd name="csY7" fmla="*/ 2360930 h 2951163"/>
               <a:gd name="csX8" fmla="*/ 2051050 w 2051050"/>
               <a:gd name="csY8" fmla="*/ 2951163 h 2951163"/>
-              <a:gd name="csX9" fmla="*/ 1428898 w 2051050"/>
+              <a:gd name="csX9" fmla="*/ 1387877 w 2051050"/>
               <a:gd name="csY9" fmla="*/ 2951163 h 2951163"/>
-              <a:gd name="csX10" fmla="*/ 786236 w 2051050"/>
+              <a:gd name="csX10" fmla="*/ 704194 w 2051050"/>
               <a:gd name="csY10" fmla="*/ 2951163 h 2951163"/>
               <a:gd name="csX11" fmla="*/ 0 w 2051050"/>
               <a:gd name="csY11" fmla="*/ 2951163 h 2951163"/>
               <a:gd name="csX12" fmla="*/ 0 w 2051050"/>
-              <a:gd name="csY12" fmla="*/ 2449465 h 2951163"/>
+              <a:gd name="csY12" fmla="*/ 2331419 h 2951163"/>
               <a:gd name="csX13" fmla="*/ 0 w 2051050"/>
-              <a:gd name="csY13" fmla="*/ 1829721 h 2951163"/>
+              <a:gd name="csY13" fmla="*/ 1682163 h 2951163"/>
               <a:gd name="csX14" fmla="*/ 0 w 2051050"/>
-              <a:gd name="csY14" fmla="*/ 1239488 h 2951163"/>
+              <a:gd name="csY14" fmla="*/ 1062419 h 2951163"/>
               <a:gd name="csX15" fmla="*/ 0 w 2051050"/>
-              <a:gd name="csY15" fmla="*/ 708279 h 2951163"/>
-              <a:gd name="csX16" fmla="*/ 0 w 2051050"/>
-              <a:gd name="csY16" fmla="*/ 0 h 2951163"/>
+              <a:gd name="csY15" fmla="*/ 0 h 2951163"/>
             </a:gdLst>
             <a:ahLst/>
             <a:cxnLst>
@@ -2118,13 +2502,91 @@
               <a:cxn ang="0">
                 <a:pos x="csX15" y="csY15"/>
               </a:cxn>
-              <a:cxn ang="0">
-                <a:pos x="csX16" y="csY16"/>
-              </a:cxn>
             </a:cxnLst>
             <a:rect l="l" t="t" r="r" b="b"/>
             <a:pathLst>
-              <a:path w="2051050" h="2951163" extrusionOk="0">
+              <a:path w="2051050" h="2951163" fill="none" extrusionOk="0">
+                <a:moveTo>
+                  <a:pt x="0" y="0"/>
+                </a:moveTo>
+                <a:cubicBezTo>
+                  <a:pt x="267367" y="14427"/>
+                  <a:pt x="349033" y="-12086"/>
+                  <a:pt x="683683" y="0"/>
+                </a:cubicBezTo>
+                <a:cubicBezTo>
+                  <a:pt x="1018333" y="12086"/>
+                  <a:pt x="1022416" y="-8631"/>
+                  <a:pt x="1305835" y="0"/>
+                </a:cubicBezTo>
+                <a:cubicBezTo>
+                  <a:pt x="1589254" y="8631"/>
+                  <a:pt x="1888174" y="-24305"/>
+                  <a:pt x="2051050" y="0"/>
+                </a:cubicBezTo>
+                <a:cubicBezTo>
+                  <a:pt x="2049058" y="239847"/>
+                  <a:pt x="2079500" y="432103"/>
+                  <a:pt x="2051050" y="619744"/>
+                </a:cubicBezTo>
+                <a:cubicBezTo>
+                  <a:pt x="2022600" y="807385"/>
+                  <a:pt x="2037657" y="1080410"/>
+                  <a:pt x="2051050" y="1239488"/>
+                </a:cubicBezTo>
+                <a:cubicBezTo>
+                  <a:pt x="2064443" y="1398566"/>
+                  <a:pt x="2048304" y="1613183"/>
+                  <a:pt x="2051050" y="1770698"/>
+                </a:cubicBezTo>
+                <a:cubicBezTo>
+                  <a:pt x="2053797" y="1928213"/>
+                  <a:pt x="2077307" y="2089042"/>
+                  <a:pt x="2051050" y="2360930"/>
+                </a:cubicBezTo>
+                <a:cubicBezTo>
+                  <a:pt x="2024793" y="2632818"/>
+                  <a:pt x="2044620" y="2795804"/>
+                  <a:pt x="2051050" y="2951163"/>
+                </a:cubicBezTo>
+                <a:cubicBezTo>
+                  <a:pt x="1792864" y="2945869"/>
+                  <a:pt x="1550867" y="2982853"/>
+                  <a:pt x="1387877" y="2951163"/>
+                </a:cubicBezTo>
+                <a:cubicBezTo>
+                  <a:pt x="1224887" y="2919473"/>
+                  <a:pt x="943563" y="2930389"/>
+                  <a:pt x="704194" y="2951163"/>
+                </a:cubicBezTo>
+                <a:cubicBezTo>
+                  <a:pt x="464825" y="2971937"/>
+                  <a:pt x="330882" y="2923973"/>
+                  <a:pt x="0" y="2951163"/>
+                </a:cubicBezTo>
+                <a:cubicBezTo>
+                  <a:pt x="-12688" y="2660430"/>
+                  <a:pt x="3295" y="2469288"/>
+                  <a:pt x="0" y="2331419"/>
+                </a:cubicBezTo>
+                <a:cubicBezTo>
+                  <a:pt x="-3295" y="2193550"/>
+                  <a:pt x="-19903" y="1834509"/>
+                  <a:pt x="0" y="1682163"/>
+                </a:cubicBezTo>
+                <a:cubicBezTo>
+                  <a:pt x="19903" y="1529817"/>
+                  <a:pt x="4229" y="1363192"/>
+                  <a:pt x="0" y="1062419"/>
+                </a:cubicBezTo>
+                <a:cubicBezTo>
+                  <a:pt x="-4229" y="761646"/>
+                  <a:pt x="529" y="476222"/>
+                  <a:pt x="0" y="0"/>
+                </a:cubicBezTo>
+                <a:close/>
+              </a:path>
+              <a:path w="2051050" h="2951163" stroke="0" extrusionOk="0">
                 <a:moveTo>
                   <a:pt x="0" y="0"/>
                 </a:moveTo>
@@ -2286,54 +2748,52 @@
             <a:gdLst>
               <a:gd name="csX0" fmla="*/ 0 w 4248150"/>
               <a:gd name="csY0" fmla="*/ 0 h 2951163"/>
-              <a:gd name="csX1" fmla="*/ 479434 w 4248150"/>
+              <a:gd name="csX1" fmla="*/ 649360 w 4248150"/>
               <a:gd name="csY1" fmla="*/ 0 h 2951163"/>
-              <a:gd name="csX2" fmla="*/ 1001350 w 4248150"/>
+              <a:gd name="csX2" fmla="*/ 1256239 w 4248150"/>
               <a:gd name="csY2" fmla="*/ 0 h 2951163"/>
-              <a:gd name="csX3" fmla="*/ 1608228 w 4248150"/>
+              <a:gd name="csX3" fmla="*/ 1820636 w 4248150"/>
               <a:gd name="csY3" fmla="*/ 0 h 2951163"/>
-              <a:gd name="csX4" fmla="*/ 2172625 w 4248150"/>
+              <a:gd name="csX4" fmla="*/ 2512477 w 4248150"/>
               <a:gd name="csY4" fmla="*/ 0 h 2951163"/>
-              <a:gd name="csX5" fmla="*/ 2694541 w 4248150"/>
+              <a:gd name="csX5" fmla="*/ 3204319 w 4248150"/>
               <a:gd name="csY5" fmla="*/ 0 h 2951163"/>
-              <a:gd name="csX6" fmla="*/ 3343901 w 4248150"/>
+              <a:gd name="csX6" fmla="*/ 4248150 w 4248150"/>
               <a:gd name="csY6" fmla="*/ 0 h 2951163"/>
               <a:gd name="csX7" fmla="*/ 4248150 w 4248150"/>
-              <a:gd name="csY7" fmla="*/ 0 h 2951163"/>
+              <a:gd name="csY7" fmla="*/ 649256 h 2951163"/>
               <a:gd name="csX8" fmla="*/ 4248150 w 4248150"/>
-              <a:gd name="csY8" fmla="*/ 649256 h 2951163"/>
+              <a:gd name="csY8" fmla="*/ 1239488 h 2951163"/>
               <a:gd name="csX9" fmla="*/ 4248150 w 4248150"/>
-              <a:gd name="csY9" fmla="*/ 1150954 h 2951163"/>
+              <a:gd name="csY9" fmla="*/ 1829721 h 2951163"/>
               <a:gd name="csX10" fmla="*/ 4248150 w 4248150"/>
-              <a:gd name="csY10" fmla="*/ 1800209 h 2951163"/>
+              <a:gd name="csY10" fmla="*/ 2360930 h 2951163"/>
               <a:gd name="csX11" fmla="*/ 4248150 w 4248150"/>
-              <a:gd name="csY11" fmla="*/ 2331419 h 2951163"/>
-              <a:gd name="csX12" fmla="*/ 4248150 w 4248150"/>
+              <a:gd name="csY11" fmla="*/ 2951163 h 2951163"/>
+              <a:gd name="csX12" fmla="*/ 3683753 w 4248150"/>
               <a:gd name="csY12" fmla="*/ 2951163 h 2951163"/>
-              <a:gd name="csX13" fmla="*/ 3556308 w 4248150"/>
+              <a:gd name="csX13" fmla="*/ 3161837 w 4248150"/>
               <a:gd name="csY13" fmla="*/ 2951163 h 2951163"/>
-              <a:gd name="csX14" fmla="*/ 2991911 w 4248150"/>
+              <a:gd name="csX14" fmla="*/ 2554959 w 4248150"/>
               <a:gd name="csY14" fmla="*/ 2951163 h 2951163"/>
-              <a:gd name="csX15" fmla="*/ 2342551 w 4248150"/>
+              <a:gd name="csX15" fmla="*/ 2033043 w 4248150"/>
               <a:gd name="csY15" fmla="*/ 2951163 h 2951163"/>
-              <a:gd name="csX16" fmla="*/ 1863117 w 4248150"/>
+              <a:gd name="csX16" fmla="*/ 1383683 w 4248150"/>
               <a:gd name="csY16" fmla="*/ 2951163 h 2951163"/>
-              <a:gd name="csX17" fmla="*/ 1383683 w 4248150"/>
+              <a:gd name="csX17" fmla="*/ 819286 w 4248150"/>
               <a:gd name="csY17" fmla="*/ 2951163 h 2951163"/>
-              <a:gd name="csX18" fmla="*/ 861768 w 4248150"/>
+              <a:gd name="csX18" fmla="*/ 0 w 4248150"/>
               <a:gd name="csY18" fmla="*/ 2951163 h 2951163"/>
               <a:gd name="csX19" fmla="*/ 0 w 4248150"/>
-              <a:gd name="csY19" fmla="*/ 2951163 h 2951163"/>
+              <a:gd name="csY19" fmla="*/ 2449465 h 2951163"/>
               <a:gd name="csX20" fmla="*/ 0 w 4248150"/>
-              <a:gd name="csY20" fmla="*/ 2390442 h 2951163"/>
+              <a:gd name="csY20" fmla="*/ 1947768 h 2951163"/>
               <a:gd name="csX21" fmla="*/ 0 w 4248150"/>
-              <a:gd name="csY21" fmla="*/ 1800209 h 2951163"/>
+              <a:gd name="csY21" fmla="*/ 1328023 h 2951163"/>
               <a:gd name="csX22" fmla="*/ 0 w 4248150"/>
-              <a:gd name="csY22" fmla="*/ 1269000 h 2951163"/>
+              <a:gd name="csY22" fmla="*/ 737791 h 2951163"/>
               <a:gd name="csX23" fmla="*/ 0 w 4248150"/>
-              <a:gd name="csY23" fmla="*/ 737791 h 2951163"/>
-              <a:gd name="csX24" fmla="*/ 0 w 4248150"/>
-              <a:gd name="csY24" fmla="*/ 0 h 2951163"/>
+              <a:gd name="csY23" fmla="*/ 0 h 2951163"/>
             </a:gdLst>
             <a:ahLst/>
             <a:cxnLst>
@@ -2409,13 +2869,131 @@
               <a:cxn ang="0">
                 <a:pos x="csX23" y="csY23"/>
               </a:cxn>
-              <a:cxn ang="0">
-                <a:pos x="csX24" y="csY24"/>
-              </a:cxn>
             </a:cxnLst>
             <a:rect l="l" t="t" r="r" b="b"/>
             <a:pathLst>
-              <a:path w="4248150" h="2951163" extrusionOk="0">
+              <a:path w="4248150" h="2951163" fill="none" extrusionOk="0">
+                <a:moveTo>
+                  <a:pt x="0" y="0"/>
+                </a:moveTo>
+                <a:cubicBezTo>
+                  <a:pt x="317880" y="21825"/>
+                  <a:pt x="434834" y="10906"/>
+                  <a:pt x="649360" y="0"/>
+                </a:cubicBezTo>
+                <a:cubicBezTo>
+                  <a:pt x="863886" y="-10906"/>
+                  <a:pt x="1065298" y="24423"/>
+                  <a:pt x="1256239" y="0"/>
+                </a:cubicBezTo>
+                <a:cubicBezTo>
+                  <a:pt x="1447180" y="-24423"/>
+                  <a:pt x="1566806" y="19345"/>
+                  <a:pt x="1820636" y="0"/>
+                </a:cubicBezTo>
+                <a:cubicBezTo>
+                  <a:pt x="2074466" y="-19345"/>
+                  <a:pt x="2354963" y="-20815"/>
+                  <a:pt x="2512477" y="0"/>
+                </a:cubicBezTo>
+                <a:cubicBezTo>
+                  <a:pt x="2669991" y="20815"/>
+                  <a:pt x="2900936" y="19344"/>
+                  <a:pt x="3204319" y="0"/>
+                </a:cubicBezTo>
+                <a:cubicBezTo>
+                  <a:pt x="3507702" y="-19344"/>
+                  <a:pt x="3769996" y="45574"/>
+                  <a:pt x="4248150" y="0"/>
+                </a:cubicBezTo>
+                <a:cubicBezTo>
+                  <a:pt x="4268053" y="302134"/>
+                  <a:pt x="4217183" y="366146"/>
+                  <a:pt x="4248150" y="649256"/>
+                </a:cubicBezTo>
+                <a:cubicBezTo>
+                  <a:pt x="4279117" y="932366"/>
+                  <a:pt x="4244680" y="948471"/>
+                  <a:pt x="4248150" y="1239488"/>
+                </a:cubicBezTo>
+                <a:cubicBezTo>
+                  <a:pt x="4251620" y="1530505"/>
+                  <a:pt x="4229121" y="1579728"/>
+                  <a:pt x="4248150" y="1829721"/>
+                </a:cubicBezTo>
+                <a:cubicBezTo>
+                  <a:pt x="4267179" y="2079714"/>
+                  <a:pt x="4253357" y="2167357"/>
+                  <a:pt x="4248150" y="2360930"/>
+                </a:cubicBezTo>
+                <a:cubicBezTo>
+                  <a:pt x="4242943" y="2554503"/>
+                  <a:pt x="4222023" y="2716323"/>
+                  <a:pt x="4248150" y="2951163"/>
+                </a:cubicBezTo>
+                <a:cubicBezTo>
+                  <a:pt x="4003048" y="2941943"/>
+                  <a:pt x="3963122" y="2961960"/>
+                  <a:pt x="3683753" y="2951163"/>
+                </a:cubicBezTo>
+                <a:cubicBezTo>
+                  <a:pt x="3404384" y="2940366"/>
+                  <a:pt x="3365316" y="2937697"/>
+                  <a:pt x="3161837" y="2951163"/>
+                </a:cubicBezTo>
+                <a:cubicBezTo>
+                  <a:pt x="2958358" y="2964629"/>
+                  <a:pt x="2816511" y="2935387"/>
+                  <a:pt x="2554959" y="2951163"/>
+                </a:cubicBezTo>
+                <a:cubicBezTo>
+                  <a:pt x="2293407" y="2966939"/>
+                  <a:pt x="2215392" y="2951286"/>
+                  <a:pt x="2033043" y="2951163"/>
+                </a:cubicBezTo>
+                <a:cubicBezTo>
+                  <a:pt x="1850694" y="2951040"/>
+                  <a:pt x="1623404" y="2938797"/>
+                  <a:pt x="1383683" y="2951163"/>
+                </a:cubicBezTo>
+                <a:cubicBezTo>
+                  <a:pt x="1143962" y="2963529"/>
+                  <a:pt x="974086" y="2978242"/>
+                  <a:pt x="819286" y="2951163"/>
+                </a:cubicBezTo>
+                <a:cubicBezTo>
+                  <a:pt x="664486" y="2924084"/>
+                  <a:pt x="314977" y="2985871"/>
+                  <a:pt x="0" y="2951163"/>
+                </a:cubicBezTo>
+                <a:cubicBezTo>
+                  <a:pt x="10400" y="2833403"/>
+                  <a:pt x="-8079" y="2689741"/>
+                  <a:pt x="0" y="2449465"/>
+                </a:cubicBezTo>
+                <a:cubicBezTo>
+                  <a:pt x="8079" y="2209189"/>
+                  <a:pt x="-20119" y="2145230"/>
+                  <a:pt x="0" y="1947768"/>
+                </a:cubicBezTo>
+                <a:cubicBezTo>
+                  <a:pt x="20119" y="1750306"/>
+                  <a:pt x="3698" y="1536620"/>
+                  <a:pt x="0" y="1328023"/>
+                </a:cubicBezTo>
+                <a:cubicBezTo>
+                  <a:pt x="-3698" y="1119426"/>
+                  <a:pt x="-18480" y="909479"/>
+                  <a:pt x="0" y="737791"/>
+                </a:cubicBezTo>
+                <a:cubicBezTo>
+                  <a:pt x="18480" y="566103"/>
+                  <a:pt x="-6834" y="283797"/>
+                  <a:pt x="0" y="0"/>
+                </a:cubicBezTo>
+                <a:close/>
+              </a:path>
+              <a:path w="4248150" h="2951163" stroke="0" extrusionOk="0">
                 <a:moveTo>
                   <a:pt x="0" y="0"/>
                 </a:moveTo>
@@ -2617,38 +3195,36 @@
             <a:gdLst>
               <a:gd name="csX0" fmla="*/ 0 w 2051050"/>
               <a:gd name="csY0" fmla="*/ 0 h 2951163"/>
-              <a:gd name="csX1" fmla="*/ 622152 w 2051050"/>
+              <a:gd name="csX1" fmla="*/ 683683 w 2051050"/>
               <a:gd name="csY1" fmla="*/ 0 h 2951163"/>
-              <a:gd name="csX2" fmla="*/ 1264814 w 2051050"/>
+              <a:gd name="csX2" fmla="*/ 1305835 w 2051050"/>
               <a:gd name="csY2" fmla="*/ 0 h 2951163"/>
               <a:gd name="csX3" fmla="*/ 2051050 w 2051050"/>
               <a:gd name="csY3" fmla="*/ 0 h 2951163"/>
               <a:gd name="csX4" fmla="*/ 2051050 w 2051050"/>
-              <a:gd name="csY4" fmla="*/ 560721 h 2951163"/>
+              <a:gd name="csY4" fmla="*/ 619744 h 2951163"/>
               <a:gd name="csX5" fmla="*/ 2051050 w 2051050"/>
-              <a:gd name="csY5" fmla="*/ 1209977 h 2951163"/>
+              <a:gd name="csY5" fmla="*/ 1239488 h 2951163"/>
               <a:gd name="csX6" fmla="*/ 2051050 w 2051050"/>
-              <a:gd name="csY6" fmla="*/ 1711675 h 2951163"/>
+              <a:gd name="csY6" fmla="*/ 1770698 h 2951163"/>
               <a:gd name="csX7" fmla="*/ 2051050 w 2051050"/>
-              <a:gd name="csY7" fmla="*/ 2242884 h 2951163"/>
+              <a:gd name="csY7" fmla="*/ 2360930 h 2951163"/>
               <a:gd name="csX8" fmla="*/ 2051050 w 2051050"/>
               <a:gd name="csY8" fmla="*/ 2951163 h 2951163"/>
-              <a:gd name="csX9" fmla="*/ 1428898 w 2051050"/>
+              <a:gd name="csX9" fmla="*/ 1387877 w 2051050"/>
               <a:gd name="csY9" fmla="*/ 2951163 h 2951163"/>
-              <a:gd name="csX10" fmla="*/ 786236 w 2051050"/>
+              <a:gd name="csX10" fmla="*/ 704194 w 2051050"/>
               <a:gd name="csY10" fmla="*/ 2951163 h 2951163"/>
               <a:gd name="csX11" fmla="*/ 0 w 2051050"/>
               <a:gd name="csY11" fmla="*/ 2951163 h 2951163"/>
               <a:gd name="csX12" fmla="*/ 0 w 2051050"/>
-              <a:gd name="csY12" fmla="*/ 2449465 h 2951163"/>
+              <a:gd name="csY12" fmla="*/ 2331419 h 2951163"/>
               <a:gd name="csX13" fmla="*/ 0 w 2051050"/>
-              <a:gd name="csY13" fmla="*/ 1829721 h 2951163"/>
+              <a:gd name="csY13" fmla="*/ 1682163 h 2951163"/>
               <a:gd name="csX14" fmla="*/ 0 w 2051050"/>
-              <a:gd name="csY14" fmla="*/ 1239488 h 2951163"/>
+              <a:gd name="csY14" fmla="*/ 1062419 h 2951163"/>
               <a:gd name="csX15" fmla="*/ 0 w 2051050"/>
-              <a:gd name="csY15" fmla="*/ 708279 h 2951163"/>
-              <a:gd name="csX16" fmla="*/ 0 w 2051050"/>
-              <a:gd name="csY16" fmla="*/ 0 h 2951163"/>
+              <a:gd name="csY15" fmla="*/ 0 h 2951163"/>
             </a:gdLst>
             <a:ahLst/>
             <a:cxnLst>
@@ -2700,13 +3276,91 @@
               <a:cxn ang="0">
                 <a:pos x="csX15" y="csY15"/>
               </a:cxn>
-              <a:cxn ang="0">
-                <a:pos x="csX16" y="csY16"/>
-              </a:cxn>
             </a:cxnLst>
             <a:rect l="l" t="t" r="r" b="b"/>
             <a:pathLst>
-              <a:path w="2051050" h="2951163" extrusionOk="0">
+              <a:path w="2051050" h="2951163" fill="none" extrusionOk="0">
+                <a:moveTo>
+                  <a:pt x="0" y="0"/>
+                </a:moveTo>
+                <a:cubicBezTo>
+                  <a:pt x="267367" y="14427"/>
+                  <a:pt x="349033" y="-12086"/>
+                  <a:pt x="683683" y="0"/>
+                </a:cubicBezTo>
+                <a:cubicBezTo>
+                  <a:pt x="1018333" y="12086"/>
+                  <a:pt x="1022416" y="-8631"/>
+                  <a:pt x="1305835" y="0"/>
+                </a:cubicBezTo>
+                <a:cubicBezTo>
+                  <a:pt x="1589254" y="8631"/>
+                  <a:pt x="1888174" y="-24305"/>
+                  <a:pt x="2051050" y="0"/>
+                </a:cubicBezTo>
+                <a:cubicBezTo>
+                  <a:pt x="2049058" y="239847"/>
+                  <a:pt x="2079500" y="432103"/>
+                  <a:pt x="2051050" y="619744"/>
+                </a:cubicBezTo>
+                <a:cubicBezTo>
+                  <a:pt x="2022600" y="807385"/>
+                  <a:pt x="2037657" y="1080410"/>
+                  <a:pt x="2051050" y="1239488"/>
+                </a:cubicBezTo>
+                <a:cubicBezTo>
+                  <a:pt x="2064443" y="1398566"/>
+                  <a:pt x="2048304" y="1613183"/>
+                  <a:pt x="2051050" y="1770698"/>
+                </a:cubicBezTo>
+                <a:cubicBezTo>
+                  <a:pt x="2053797" y="1928213"/>
+                  <a:pt x="2077307" y="2089042"/>
+                  <a:pt x="2051050" y="2360930"/>
+                </a:cubicBezTo>
+                <a:cubicBezTo>
+                  <a:pt x="2024793" y="2632818"/>
+                  <a:pt x="2044620" y="2795804"/>
+                  <a:pt x="2051050" y="2951163"/>
+                </a:cubicBezTo>
+                <a:cubicBezTo>
+                  <a:pt x="1792864" y="2945869"/>
+                  <a:pt x="1550867" y="2982853"/>
+                  <a:pt x="1387877" y="2951163"/>
+                </a:cubicBezTo>
+                <a:cubicBezTo>
+                  <a:pt x="1224887" y="2919473"/>
+                  <a:pt x="943563" y="2930389"/>
+                  <a:pt x="704194" y="2951163"/>
+                </a:cubicBezTo>
+                <a:cubicBezTo>
+                  <a:pt x="464825" y="2971937"/>
+                  <a:pt x="330882" y="2923973"/>
+                  <a:pt x="0" y="2951163"/>
+                </a:cubicBezTo>
+                <a:cubicBezTo>
+                  <a:pt x="-12688" y="2660430"/>
+                  <a:pt x="3295" y="2469288"/>
+                  <a:pt x="0" y="2331419"/>
+                </a:cubicBezTo>
+                <a:cubicBezTo>
+                  <a:pt x="-3295" y="2193550"/>
+                  <a:pt x="-19903" y="1834509"/>
+                  <a:pt x="0" y="1682163"/>
+                </a:cubicBezTo>
+                <a:cubicBezTo>
+                  <a:pt x="19903" y="1529817"/>
+                  <a:pt x="4229" y="1363192"/>
+                  <a:pt x="0" y="1062419"/>
+                </a:cubicBezTo>
+                <a:cubicBezTo>
+                  <a:pt x="-4229" y="761646"/>
+                  <a:pt x="529" y="476222"/>
+                  <a:pt x="0" y="0"/>
+                </a:cubicBezTo>
+                <a:close/>
+              </a:path>
+              <a:path w="2051050" h="2951163" stroke="0" extrusionOk="0">
                 <a:moveTo>
                   <a:pt x="0" y="0"/>
                 </a:moveTo>
@@ -2868,68 +3522,66 @@
             <a:gdLst>
               <a:gd name="csX0" fmla="*/ 0 w 6400269"/>
               <a:gd name="csY0" fmla="*/ 0 h 2951163"/>
-              <a:gd name="csX1" fmla="*/ 448019 w 6400269"/>
+              <a:gd name="csX1" fmla="*/ 512022 w 6400269"/>
               <a:gd name="csY1" fmla="*/ 0 h 2951163"/>
-              <a:gd name="csX2" fmla="*/ 960040 w 6400269"/>
+              <a:gd name="csX2" fmla="*/ 1152048 w 6400269"/>
               <a:gd name="csY2" fmla="*/ 0 h 2951163"/>
-              <a:gd name="csX3" fmla="*/ 1600067 w 6400269"/>
+              <a:gd name="csX3" fmla="*/ 1664070 w 6400269"/>
               <a:gd name="csY3" fmla="*/ 0 h 2951163"/>
-              <a:gd name="csX4" fmla="*/ 2176091 w 6400269"/>
+              <a:gd name="csX4" fmla="*/ 2368100 w 6400269"/>
               <a:gd name="csY4" fmla="*/ 0 h 2951163"/>
-              <a:gd name="csX5" fmla="*/ 2688113 w 6400269"/>
+              <a:gd name="csX5" fmla="*/ 3072129 w 6400269"/>
               <a:gd name="csY5" fmla="*/ 0 h 2951163"/>
-              <a:gd name="csX6" fmla="*/ 3392143 w 6400269"/>
+              <a:gd name="csX6" fmla="*/ 3584151 w 6400269"/>
               <a:gd name="csY6" fmla="*/ 0 h 2951163"/>
-              <a:gd name="csX7" fmla="*/ 4096172 w 6400269"/>
+              <a:gd name="csX7" fmla="*/ 4032169 w 6400269"/>
               <a:gd name="csY7" fmla="*/ 0 h 2951163"/>
-              <a:gd name="csX8" fmla="*/ 4864204 w 6400269"/>
+              <a:gd name="csX8" fmla="*/ 4672196 w 6400269"/>
               <a:gd name="csY8" fmla="*/ 0 h 2951163"/>
               <a:gd name="csX9" fmla="*/ 5440229 w 6400269"/>
               <a:gd name="csY9" fmla="*/ 0 h 2951163"/>
               <a:gd name="csX10" fmla="*/ 6400269 w 6400269"/>
               <a:gd name="csY10" fmla="*/ 0 h 2951163"/>
               <a:gd name="csX11" fmla="*/ 6400269 w 6400269"/>
-              <a:gd name="csY11" fmla="*/ 590233 h 2951163"/>
+              <a:gd name="csY11" fmla="*/ 560721 h 2951163"/>
               <a:gd name="csX12" fmla="*/ 6400269 w 6400269"/>
               <a:gd name="csY12" fmla="*/ 1091930 h 2951163"/>
               <a:gd name="csX13" fmla="*/ 6400269 w 6400269"/>
-              <a:gd name="csY13" fmla="*/ 1741186 h 2951163"/>
+              <a:gd name="csY13" fmla="*/ 1711675 h 2951163"/>
               <a:gd name="csX14" fmla="*/ 6400269 w 6400269"/>
-              <a:gd name="csY14" fmla="*/ 2242884 h 2951163"/>
+              <a:gd name="csY14" fmla="*/ 2272396 h 2951163"/>
               <a:gd name="csX15" fmla="*/ 6400269 w 6400269"/>
               <a:gd name="csY15" fmla="*/ 2951163 h 2951163"/>
-              <a:gd name="csX16" fmla="*/ 5952250 w 6400269"/>
+              <a:gd name="csX16" fmla="*/ 5824245 w 6400269"/>
               <a:gd name="csY16" fmla="*/ 2951163 h 2951163"/>
-              <a:gd name="csX17" fmla="*/ 5504231 w 6400269"/>
+              <a:gd name="csX17" fmla="*/ 5248221 w 6400269"/>
               <a:gd name="csY17" fmla="*/ 2951163 h 2951163"/>
-              <a:gd name="csX18" fmla="*/ 4992210 w 6400269"/>
+              <a:gd name="csX18" fmla="*/ 4608194 w 6400269"/>
               <a:gd name="csY18" fmla="*/ 2951163 h 2951163"/>
-              <a:gd name="csX19" fmla="*/ 4416186 w 6400269"/>
+              <a:gd name="csX19" fmla="*/ 3840161 w 6400269"/>
               <a:gd name="csY19" fmla="*/ 2951163 h 2951163"/>
-              <a:gd name="csX20" fmla="*/ 3840161 w 6400269"/>
+              <a:gd name="csX20" fmla="*/ 3328140 w 6400269"/>
               <a:gd name="csY20" fmla="*/ 2951163 h 2951163"/>
-              <a:gd name="csX21" fmla="*/ 3392143 w 6400269"/>
+              <a:gd name="csX21" fmla="*/ 2688113 w 6400269"/>
               <a:gd name="csY21" fmla="*/ 2951163 h 2951163"/>
-              <a:gd name="csX22" fmla="*/ 2944124 w 6400269"/>
+              <a:gd name="csX22" fmla="*/ 2176091 w 6400269"/>
               <a:gd name="csY22" fmla="*/ 2951163 h 2951163"/>
-              <a:gd name="csX23" fmla="*/ 2240094 w 6400269"/>
+              <a:gd name="csX23" fmla="*/ 1600067 w 6400269"/>
               <a:gd name="csY23" fmla="*/ 2951163 h 2951163"/>
-              <a:gd name="csX24" fmla="*/ 1728073 w 6400269"/>
+              <a:gd name="csX24" fmla="*/ 896038 w 6400269"/>
               <a:gd name="csY24" fmla="*/ 2951163 h 2951163"/>
-              <a:gd name="csX25" fmla="*/ 1088046 w 6400269"/>
+              <a:gd name="csX25" fmla="*/ 0 w 6400269"/>
               <a:gd name="csY25" fmla="*/ 2951163 h 2951163"/>
               <a:gd name="csX26" fmla="*/ 0 w 6400269"/>
-              <a:gd name="csY26" fmla="*/ 2951163 h 2951163"/>
+              <a:gd name="csY26" fmla="*/ 2449465 h 2951163"/>
               <a:gd name="csX27" fmla="*/ 0 w 6400269"/>
-              <a:gd name="csY27" fmla="*/ 2390442 h 2951163"/>
+              <a:gd name="csY27" fmla="*/ 1947768 h 2951163"/>
               <a:gd name="csX28" fmla="*/ 0 w 6400269"/>
-              <a:gd name="csY28" fmla="*/ 1800209 h 2951163"/>
+              <a:gd name="csY28" fmla="*/ 1298512 h 2951163"/>
               <a:gd name="csX29" fmla="*/ 0 w 6400269"/>
-              <a:gd name="csY29" fmla="*/ 1269000 h 2951163"/>
+              <a:gd name="csY29" fmla="*/ 796814 h 2951163"/>
               <a:gd name="csX30" fmla="*/ 0 w 6400269"/>
-              <a:gd name="csY30" fmla="*/ 649256 h 2951163"/>
-              <a:gd name="csX31" fmla="*/ 0 w 6400269"/>
-              <a:gd name="csY31" fmla="*/ 0 h 2951163"/>
+              <a:gd name="csY30" fmla="*/ 0 h 2951163"/>
             </a:gdLst>
             <a:ahLst/>
             <a:cxnLst>
@@ -3026,13 +3678,166 @@
               <a:cxn ang="0">
                 <a:pos x="csX30" y="csY30"/>
               </a:cxn>
-              <a:cxn ang="0">
-                <a:pos x="csX31" y="csY31"/>
-              </a:cxn>
             </a:cxnLst>
             <a:rect l="l" t="t" r="r" b="b"/>
             <a:pathLst>
-              <a:path w="6400269" h="2951163" extrusionOk="0">
+              <a:path w="6400269" h="2951163" fill="none" extrusionOk="0">
+                <a:moveTo>
+                  <a:pt x="0" y="0"/>
+                </a:moveTo>
+                <a:cubicBezTo>
+                  <a:pt x="155627" y="-18505"/>
+                  <a:pt x="372887" y="-1088"/>
+                  <a:pt x="512022" y="0"/>
+                </a:cubicBezTo>
+                <a:cubicBezTo>
+                  <a:pt x="651157" y="1088"/>
+                  <a:pt x="904976" y="-24611"/>
+                  <a:pt x="1152048" y="0"/>
+                </a:cubicBezTo>
+                <a:cubicBezTo>
+                  <a:pt x="1399120" y="24611"/>
+                  <a:pt x="1519881" y="-22310"/>
+                  <a:pt x="1664070" y="0"/>
+                </a:cubicBezTo>
+                <a:cubicBezTo>
+                  <a:pt x="1808259" y="22310"/>
+                  <a:pt x="2142216" y="-19893"/>
+                  <a:pt x="2368100" y="0"/>
+                </a:cubicBezTo>
+                <a:cubicBezTo>
+                  <a:pt x="2593984" y="19893"/>
+                  <a:pt x="2732400" y="-13337"/>
+                  <a:pt x="3072129" y="0"/>
+                </a:cubicBezTo>
+                <a:cubicBezTo>
+                  <a:pt x="3411858" y="13337"/>
+                  <a:pt x="3422584" y="7131"/>
+                  <a:pt x="3584151" y="0"/>
+                </a:cubicBezTo>
+                <a:cubicBezTo>
+                  <a:pt x="3745718" y="-7131"/>
+                  <a:pt x="3856681" y="-15587"/>
+                  <a:pt x="4032169" y="0"/>
+                </a:cubicBezTo>
+                <a:cubicBezTo>
+                  <a:pt x="4207657" y="15587"/>
+                  <a:pt x="4440680" y="3571"/>
+                  <a:pt x="4672196" y="0"/>
+                </a:cubicBezTo>
+                <a:cubicBezTo>
+                  <a:pt x="4903712" y="-3571"/>
+                  <a:pt x="5142227" y="10125"/>
+                  <a:pt x="5440229" y="0"/>
+                </a:cubicBezTo>
+                <a:cubicBezTo>
+                  <a:pt x="5738231" y="-10125"/>
+                  <a:pt x="6118982" y="-23249"/>
+                  <a:pt x="6400269" y="0"/>
+                </a:cubicBezTo>
+                <a:cubicBezTo>
+                  <a:pt x="6390288" y="231921"/>
+                  <a:pt x="6407697" y="367775"/>
+                  <a:pt x="6400269" y="560721"/>
+                </a:cubicBezTo>
+                <a:cubicBezTo>
+                  <a:pt x="6392841" y="753667"/>
+                  <a:pt x="6402638" y="843367"/>
+                  <a:pt x="6400269" y="1091930"/>
+                </a:cubicBezTo>
+                <a:cubicBezTo>
+                  <a:pt x="6397900" y="1340493"/>
+                  <a:pt x="6418642" y="1483989"/>
+                  <a:pt x="6400269" y="1711675"/>
+                </a:cubicBezTo>
+                <a:cubicBezTo>
+                  <a:pt x="6381896" y="1939362"/>
+                  <a:pt x="6416956" y="2014409"/>
+                  <a:pt x="6400269" y="2272396"/>
+                </a:cubicBezTo>
+                <a:cubicBezTo>
+                  <a:pt x="6383582" y="2530383"/>
+                  <a:pt x="6397198" y="2641221"/>
+                  <a:pt x="6400269" y="2951163"/>
+                </a:cubicBezTo>
+                <a:cubicBezTo>
+                  <a:pt x="6240632" y="2964985"/>
+                  <a:pt x="6081192" y="2929533"/>
+                  <a:pt x="5824245" y="2951163"/>
+                </a:cubicBezTo>
+                <a:cubicBezTo>
+                  <a:pt x="5567298" y="2972793"/>
+                  <a:pt x="5511873" y="2946992"/>
+                  <a:pt x="5248221" y="2951163"/>
+                </a:cubicBezTo>
+                <a:cubicBezTo>
+                  <a:pt x="4984569" y="2955334"/>
+                  <a:pt x="4799896" y="2942007"/>
+                  <a:pt x="4608194" y="2951163"/>
+                </a:cubicBezTo>
+                <a:cubicBezTo>
+                  <a:pt x="4416492" y="2960319"/>
+                  <a:pt x="4008282" y="2984949"/>
+                  <a:pt x="3840161" y="2951163"/>
+                </a:cubicBezTo>
+                <a:cubicBezTo>
+                  <a:pt x="3672040" y="2917377"/>
+                  <a:pt x="3485187" y="2937173"/>
+                  <a:pt x="3328140" y="2951163"/>
+                </a:cubicBezTo>
+                <a:cubicBezTo>
+                  <a:pt x="3171093" y="2965153"/>
+                  <a:pt x="2933283" y="2978693"/>
+                  <a:pt x="2688113" y="2951163"/>
+                </a:cubicBezTo>
+                <a:cubicBezTo>
+                  <a:pt x="2442943" y="2923633"/>
+                  <a:pt x="2395014" y="2941007"/>
+                  <a:pt x="2176091" y="2951163"/>
+                </a:cubicBezTo>
+                <a:cubicBezTo>
+                  <a:pt x="1957168" y="2961319"/>
+                  <a:pt x="1856637" y="2971909"/>
+                  <a:pt x="1600067" y="2951163"/>
+                </a:cubicBezTo>
+                <a:cubicBezTo>
+                  <a:pt x="1343497" y="2930417"/>
+                  <a:pt x="1224441" y="2972847"/>
+                  <a:pt x="896038" y="2951163"/>
+                </a:cubicBezTo>
+                <a:cubicBezTo>
+                  <a:pt x="567635" y="2929479"/>
+                  <a:pt x="384134" y="2973404"/>
+                  <a:pt x="0" y="2951163"/>
+                </a:cubicBezTo>
+                <a:cubicBezTo>
+                  <a:pt x="-21148" y="2823962"/>
+                  <a:pt x="4380" y="2677191"/>
+                  <a:pt x="0" y="2449465"/>
+                </a:cubicBezTo>
+                <a:cubicBezTo>
+                  <a:pt x="-4380" y="2221739"/>
+                  <a:pt x="5500" y="2141376"/>
+                  <a:pt x="0" y="1947768"/>
+                </a:cubicBezTo>
+                <a:cubicBezTo>
+                  <a:pt x="-5500" y="1754160"/>
+                  <a:pt x="1517" y="1622425"/>
+                  <a:pt x="0" y="1298512"/>
+                </a:cubicBezTo>
+                <a:cubicBezTo>
+                  <a:pt x="-1517" y="974599"/>
+                  <a:pt x="13448" y="936950"/>
+                  <a:pt x="0" y="796814"/>
+                </a:cubicBezTo>
+                <a:cubicBezTo>
+                  <a:pt x="-13448" y="656678"/>
+                  <a:pt x="18167" y="293421"/>
+                  <a:pt x="0" y="0"/>
+                </a:cubicBezTo>
+                <a:close/>
+              </a:path>
+              <a:path w="6400269" h="2951163" stroke="0" extrusionOk="0">
                 <a:moveTo>
                   <a:pt x="0" y="0"/>
                 </a:moveTo>
@@ -3269,38 +4074,36 @@
             <a:gdLst>
               <a:gd name="csX0" fmla="*/ 0 w 2051050"/>
               <a:gd name="csY0" fmla="*/ 0 h 2951163"/>
-              <a:gd name="csX1" fmla="*/ 622152 w 2051050"/>
+              <a:gd name="csX1" fmla="*/ 683683 w 2051050"/>
               <a:gd name="csY1" fmla="*/ 0 h 2951163"/>
-              <a:gd name="csX2" fmla="*/ 1264814 w 2051050"/>
+              <a:gd name="csX2" fmla="*/ 1305835 w 2051050"/>
               <a:gd name="csY2" fmla="*/ 0 h 2951163"/>
               <a:gd name="csX3" fmla="*/ 2051050 w 2051050"/>
               <a:gd name="csY3" fmla="*/ 0 h 2951163"/>
               <a:gd name="csX4" fmla="*/ 2051050 w 2051050"/>
-              <a:gd name="csY4" fmla="*/ 560721 h 2951163"/>
+              <a:gd name="csY4" fmla="*/ 619744 h 2951163"/>
               <a:gd name="csX5" fmla="*/ 2051050 w 2051050"/>
-              <a:gd name="csY5" fmla="*/ 1209977 h 2951163"/>
+              <a:gd name="csY5" fmla="*/ 1239488 h 2951163"/>
               <a:gd name="csX6" fmla="*/ 2051050 w 2051050"/>
-              <a:gd name="csY6" fmla="*/ 1711675 h 2951163"/>
+              <a:gd name="csY6" fmla="*/ 1770698 h 2951163"/>
               <a:gd name="csX7" fmla="*/ 2051050 w 2051050"/>
-              <a:gd name="csY7" fmla="*/ 2242884 h 2951163"/>
+              <a:gd name="csY7" fmla="*/ 2360930 h 2951163"/>
               <a:gd name="csX8" fmla="*/ 2051050 w 2051050"/>
               <a:gd name="csY8" fmla="*/ 2951163 h 2951163"/>
-              <a:gd name="csX9" fmla="*/ 1428898 w 2051050"/>
+              <a:gd name="csX9" fmla="*/ 1387877 w 2051050"/>
               <a:gd name="csY9" fmla="*/ 2951163 h 2951163"/>
-              <a:gd name="csX10" fmla="*/ 786236 w 2051050"/>
+              <a:gd name="csX10" fmla="*/ 704194 w 2051050"/>
               <a:gd name="csY10" fmla="*/ 2951163 h 2951163"/>
               <a:gd name="csX11" fmla="*/ 0 w 2051050"/>
               <a:gd name="csY11" fmla="*/ 2951163 h 2951163"/>
               <a:gd name="csX12" fmla="*/ 0 w 2051050"/>
-              <a:gd name="csY12" fmla="*/ 2449465 h 2951163"/>
+              <a:gd name="csY12" fmla="*/ 2331419 h 2951163"/>
               <a:gd name="csX13" fmla="*/ 0 w 2051050"/>
-              <a:gd name="csY13" fmla="*/ 1829721 h 2951163"/>
+              <a:gd name="csY13" fmla="*/ 1682163 h 2951163"/>
               <a:gd name="csX14" fmla="*/ 0 w 2051050"/>
-              <a:gd name="csY14" fmla="*/ 1239488 h 2951163"/>
+              <a:gd name="csY14" fmla="*/ 1062419 h 2951163"/>
               <a:gd name="csX15" fmla="*/ 0 w 2051050"/>
-              <a:gd name="csY15" fmla="*/ 708279 h 2951163"/>
-              <a:gd name="csX16" fmla="*/ 0 w 2051050"/>
-              <a:gd name="csY16" fmla="*/ 0 h 2951163"/>
+              <a:gd name="csY15" fmla="*/ 0 h 2951163"/>
             </a:gdLst>
             <a:ahLst/>
             <a:cxnLst>
@@ -3352,13 +4155,91 @@
               <a:cxn ang="0">
                 <a:pos x="csX15" y="csY15"/>
               </a:cxn>
-              <a:cxn ang="0">
-                <a:pos x="csX16" y="csY16"/>
-              </a:cxn>
             </a:cxnLst>
             <a:rect l="l" t="t" r="r" b="b"/>
             <a:pathLst>
-              <a:path w="2051050" h="2951163" extrusionOk="0">
+              <a:path w="2051050" h="2951163" fill="none" extrusionOk="0">
+                <a:moveTo>
+                  <a:pt x="0" y="0"/>
+                </a:moveTo>
+                <a:cubicBezTo>
+                  <a:pt x="267367" y="14427"/>
+                  <a:pt x="349033" y="-12086"/>
+                  <a:pt x="683683" y="0"/>
+                </a:cubicBezTo>
+                <a:cubicBezTo>
+                  <a:pt x="1018333" y="12086"/>
+                  <a:pt x="1022416" y="-8631"/>
+                  <a:pt x="1305835" y="0"/>
+                </a:cubicBezTo>
+                <a:cubicBezTo>
+                  <a:pt x="1589254" y="8631"/>
+                  <a:pt x="1888174" y="-24305"/>
+                  <a:pt x="2051050" y="0"/>
+                </a:cubicBezTo>
+                <a:cubicBezTo>
+                  <a:pt x="2049058" y="239847"/>
+                  <a:pt x="2079500" y="432103"/>
+                  <a:pt x="2051050" y="619744"/>
+                </a:cubicBezTo>
+                <a:cubicBezTo>
+                  <a:pt x="2022600" y="807385"/>
+                  <a:pt x="2037657" y="1080410"/>
+                  <a:pt x="2051050" y="1239488"/>
+                </a:cubicBezTo>
+                <a:cubicBezTo>
+                  <a:pt x="2064443" y="1398566"/>
+                  <a:pt x="2048304" y="1613183"/>
+                  <a:pt x="2051050" y="1770698"/>
+                </a:cubicBezTo>
+                <a:cubicBezTo>
+                  <a:pt x="2053797" y="1928213"/>
+                  <a:pt x="2077307" y="2089042"/>
+                  <a:pt x="2051050" y="2360930"/>
+                </a:cubicBezTo>
+                <a:cubicBezTo>
+                  <a:pt x="2024793" y="2632818"/>
+                  <a:pt x="2044620" y="2795804"/>
+                  <a:pt x="2051050" y="2951163"/>
+                </a:cubicBezTo>
+                <a:cubicBezTo>
+                  <a:pt x="1792864" y="2945869"/>
+                  <a:pt x="1550867" y="2982853"/>
+                  <a:pt x="1387877" y="2951163"/>
+                </a:cubicBezTo>
+                <a:cubicBezTo>
+                  <a:pt x="1224887" y="2919473"/>
+                  <a:pt x="943563" y="2930389"/>
+                  <a:pt x="704194" y="2951163"/>
+                </a:cubicBezTo>
+                <a:cubicBezTo>
+                  <a:pt x="464825" y="2971937"/>
+                  <a:pt x="330882" y="2923973"/>
+                  <a:pt x="0" y="2951163"/>
+                </a:cubicBezTo>
+                <a:cubicBezTo>
+                  <a:pt x="-12688" y="2660430"/>
+                  <a:pt x="3295" y="2469288"/>
+                  <a:pt x="0" y="2331419"/>
+                </a:cubicBezTo>
+                <a:cubicBezTo>
+                  <a:pt x="-3295" y="2193550"/>
+                  <a:pt x="-19903" y="1834509"/>
+                  <a:pt x="0" y="1682163"/>
+                </a:cubicBezTo>
+                <a:cubicBezTo>
+                  <a:pt x="19903" y="1529817"/>
+                  <a:pt x="4229" y="1363192"/>
+                  <a:pt x="0" y="1062419"/>
+                </a:cubicBezTo>
+                <a:cubicBezTo>
+                  <a:pt x="-4229" y="761646"/>
+                  <a:pt x="529" y="476222"/>
+                  <a:pt x="0" y="0"/>
+                </a:cubicBezTo>
+                <a:close/>
+              </a:path>
+              <a:path w="2051050" h="2951163" stroke="0" extrusionOk="0">
                 <a:moveTo>
                   <a:pt x="0" y="0"/>
                 </a:moveTo>
@@ -3653,38 +4534,36 @@
             <a:gdLst>
               <a:gd name="csX0" fmla="*/ 0 w 2048256"/>
               <a:gd name="csY0" fmla="*/ 0 h 2951163"/>
-              <a:gd name="csX1" fmla="*/ 621304 w 2048256"/>
+              <a:gd name="csX1" fmla="*/ 682752 w 2048256"/>
               <a:gd name="csY1" fmla="*/ 0 h 2951163"/>
-              <a:gd name="csX2" fmla="*/ 1263091 w 2048256"/>
+              <a:gd name="csX2" fmla="*/ 1304056 w 2048256"/>
               <a:gd name="csY2" fmla="*/ 0 h 2951163"/>
               <a:gd name="csX3" fmla="*/ 2048256 w 2048256"/>
               <a:gd name="csY3" fmla="*/ 0 h 2951163"/>
               <a:gd name="csX4" fmla="*/ 2048256 w 2048256"/>
-              <a:gd name="csY4" fmla="*/ 560721 h 2951163"/>
+              <a:gd name="csY4" fmla="*/ 619744 h 2951163"/>
               <a:gd name="csX5" fmla="*/ 2048256 w 2048256"/>
-              <a:gd name="csY5" fmla="*/ 1209977 h 2951163"/>
+              <a:gd name="csY5" fmla="*/ 1239488 h 2951163"/>
               <a:gd name="csX6" fmla="*/ 2048256 w 2048256"/>
-              <a:gd name="csY6" fmla="*/ 1711675 h 2951163"/>
+              <a:gd name="csY6" fmla="*/ 1770698 h 2951163"/>
               <a:gd name="csX7" fmla="*/ 2048256 w 2048256"/>
-              <a:gd name="csY7" fmla="*/ 2242884 h 2951163"/>
+              <a:gd name="csY7" fmla="*/ 2360930 h 2951163"/>
               <a:gd name="csX8" fmla="*/ 2048256 w 2048256"/>
               <a:gd name="csY8" fmla="*/ 2951163 h 2951163"/>
-              <a:gd name="csX9" fmla="*/ 1426952 w 2048256"/>
+              <a:gd name="csX9" fmla="*/ 1385987 w 2048256"/>
               <a:gd name="csY9" fmla="*/ 2951163 h 2951163"/>
-              <a:gd name="csX10" fmla="*/ 785165 w 2048256"/>
+              <a:gd name="csX10" fmla="*/ 703235 w 2048256"/>
               <a:gd name="csY10" fmla="*/ 2951163 h 2951163"/>
               <a:gd name="csX11" fmla="*/ 0 w 2048256"/>
               <a:gd name="csY11" fmla="*/ 2951163 h 2951163"/>
               <a:gd name="csX12" fmla="*/ 0 w 2048256"/>
-              <a:gd name="csY12" fmla="*/ 2449465 h 2951163"/>
+              <a:gd name="csY12" fmla="*/ 2331419 h 2951163"/>
               <a:gd name="csX13" fmla="*/ 0 w 2048256"/>
-              <a:gd name="csY13" fmla="*/ 1829721 h 2951163"/>
+              <a:gd name="csY13" fmla="*/ 1682163 h 2951163"/>
               <a:gd name="csX14" fmla="*/ 0 w 2048256"/>
-              <a:gd name="csY14" fmla="*/ 1239488 h 2951163"/>
+              <a:gd name="csY14" fmla="*/ 1062419 h 2951163"/>
               <a:gd name="csX15" fmla="*/ 0 w 2048256"/>
-              <a:gd name="csY15" fmla="*/ 708279 h 2951163"/>
-              <a:gd name="csX16" fmla="*/ 0 w 2048256"/>
-              <a:gd name="csY16" fmla="*/ 0 h 2951163"/>
+              <a:gd name="csY15" fmla="*/ 0 h 2951163"/>
             </a:gdLst>
             <a:ahLst/>
             <a:cxnLst>
@@ -3736,13 +4615,91 @@
               <a:cxn ang="0">
                 <a:pos x="csX15" y="csY15"/>
               </a:cxn>
-              <a:cxn ang="0">
-                <a:pos x="csX16" y="csY16"/>
-              </a:cxn>
             </a:cxnLst>
             <a:rect l="l" t="t" r="r" b="b"/>
             <a:pathLst>
-              <a:path w="2048256" h="2951163" extrusionOk="0">
+              <a:path w="2048256" h="2951163" fill="none" extrusionOk="0">
+                <a:moveTo>
+                  <a:pt x="0" y="0"/>
+                </a:moveTo>
+                <a:cubicBezTo>
+                  <a:pt x="145745" y="-14563"/>
+                  <a:pt x="443531" y="-7277"/>
+                  <a:pt x="682752" y="0"/>
+                </a:cubicBezTo>
+                <a:cubicBezTo>
+                  <a:pt x="921973" y="7277"/>
+                  <a:pt x="1028656" y="-16000"/>
+                  <a:pt x="1304056" y="0"/>
+                </a:cubicBezTo>
+                <a:cubicBezTo>
+                  <a:pt x="1579456" y="16000"/>
+                  <a:pt x="1703881" y="12176"/>
+                  <a:pt x="2048256" y="0"/>
+                </a:cubicBezTo>
+                <a:cubicBezTo>
+                  <a:pt x="2046264" y="239847"/>
+                  <a:pt x="2076706" y="432103"/>
+                  <a:pt x="2048256" y="619744"/>
+                </a:cubicBezTo>
+                <a:cubicBezTo>
+                  <a:pt x="2019806" y="807385"/>
+                  <a:pt x="2034863" y="1080410"/>
+                  <a:pt x="2048256" y="1239488"/>
+                </a:cubicBezTo>
+                <a:cubicBezTo>
+                  <a:pt x="2061649" y="1398566"/>
+                  <a:pt x="2045510" y="1613183"/>
+                  <a:pt x="2048256" y="1770698"/>
+                </a:cubicBezTo>
+                <a:cubicBezTo>
+                  <a:pt x="2051003" y="1928213"/>
+                  <a:pt x="2074513" y="2089042"/>
+                  <a:pt x="2048256" y="2360930"/>
+                </a:cubicBezTo>
+                <a:cubicBezTo>
+                  <a:pt x="2021999" y="2632818"/>
+                  <a:pt x="2041826" y="2795804"/>
+                  <a:pt x="2048256" y="2951163"/>
+                </a:cubicBezTo>
+                <a:cubicBezTo>
+                  <a:pt x="1777615" y="2949990"/>
+                  <a:pt x="1590074" y="2922595"/>
+                  <a:pt x="1385987" y="2951163"/>
+                </a:cubicBezTo>
+                <a:cubicBezTo>
+                  <a:pt x="1181900" y="2979731"/>
+                  <a:pt x="937289" y="2925220"/>
+                  <a:pt x="703235" y="2951163"/>
+                </a:cubicBezTo>
+                <a:cubicBezTo>
+                  <a:pt x="469181" y="2977106"/>
+                  <a:pt x="279028" y="2952897"/>
+                  <a:pt x="0" y="2951163"/>
+                </a:cubicBezTo>
+                <a:cubicBezTo>
+                  <a:pt x="-12688" y="2660430"/>
+                  <a:pt x="3295" y="2469288"/>
+                  <a:pt x="0" y="2331419"/>
+                </a:cubicBezTo>
+                <a:cubicBezTo>
+                  <a:pt x="-3295" y="2193550"/>
+                  <a:pt x="-19903" y="1834509"/>
+                  <a:pt x="0" y="1682163"/>
+                </a:cubicBezTo>
+                <a:cubicBezTo>
+                  <a:pt x="19903" y="1529817"/>
+                  <a:pt x="4229" y="1363192"/>
+                  <a:pt x="0" y="1062419"/>
+                </a:cubicBezTo>
+                <a:cubicBezTo>
+                  <a:pt x="-4229" y="761646"/>
+                  <a:pt x="529" y="476222"/>
+                  <a:pt x="0" y="0"/>
+                </a:cubicBezTo>
+                <a:close/>
+              </a:path>
+              <a:path w="2048256" h="2951163" stroke="0" extrusionOk="0">
                 <a:moveTo>
                   <a:pt x="0" y="0"/>
                 </a:moveTo>
@@ -3904,38 +4861,36 @@
             <a:gdLst>
               <a:gd name="csX0" fmla="*/ 0 w 2051050"/>
               <a:gd name="csY0" fmla="*/ 0 h 2951163"/>
-              <a:gd name="csX1" fmla="*/ 622152 w 2051050"/>
+              <a:gd name="csX1" fmla="*/ 683683 w 2051050"/>
               <a:gd name="csY1" fmla="*/ 0 h 2951163"/>
-              <a:gd name="csX2" fmla="*/ 1264814 w 2051050"/>
+              <a:gd name="csX2" fmla="*/ 1305835 w 2051050"/>
               <a:gd name="csY2" fmla="*/ 0 h 2951163"/>
               <a:gd name="csX3" fmla="*/ 2051050 w 2051050"/>
               <a:gd name="csY3" fmla="*/ 0 h 2951163"/>
               <a:gd name="csX4" fmla="*/ 2051050 w 2051050"/>
-              <a:gd name="csY4" fmla="*/ 560721 h 2951163"/>
+              <a:gd name="csY4" fmla="*/ 619744 h 2951163"/>
               <a:gd name="csX5" fmla="*/ 2051050 w 2051050"/>
-              <a:gd name="csY5" fmla="*/ 1209977 h 2951163"/>
+              <a:gd name="csY5" fmla="*/ 1239488 h 2951163"/>
               <a:gd name="csX6" fmla="*/ 2051050 w 2051050"/>
-              <a:gd name="csY6" fmla="*/ 1711675 h 2951163"/>
+              <a:gd name="csY6" fmla="*/ 1770698 h 2951163"/>
               <a:gd name="csX7" fmla="*/ 2051050 w 2051050"/>
-              <a:gd name="csY7" fmla="*/ 2242884 h 2951163"/>
+              <a:gd name="csY7" fmla="*/ 2360930 h 2951163"/>
               <a:gd name="csX8" fmla="*/ 2051050 w 2051050"/>
               <a:gd name="csY8" fmla="*/ 2951163 h 2951163"/>
-              <a:gd name="csX9" fmla="*/ 1428898 w 2051050"/>
+              <a:gd name="csX9" fmla="*/ 1387877 w 2051050"/>
               <a:gd name="csY9" fmla="*/ 2951163 h 2951163"/>
-              <a:gd name="csX10" fmla="*/ 786236 w 2051050"/>
+              <a:gd name="csX10" fmla="*/ 704194 w 2051050"/>
               <a:gd name="csY10" fmla="*/ 2951163 h 2951163"/>
               <a:gd name="csX11" fmla="*/ 0 w 2051050"/>
               <a:gd name="csY11" fmla="*/ 2951163 h 2951163"/>
               <a:gd name="csX12" fmla="*/ 0 w 2051050"/>
-              <a:gd name="csY12" fmla="*/ 2449465 h 2951163"/>
+              <a:gd name="csY12" fmla="*/ 2331419 h 2951163"/>
               <a:gd name="csX13" fmla="*/ 0 w 2051050"/>
-              <a:gd name="csY13" fmla="*/ 1829721 h 2951163"/>
+              <a:gd name="csY13" fmla="*/ 1682163 h 2951163"/>
               <a:gd name="csX14" fmla="*/ 0 w 2051050"/>
-              <a:gd name="csY14" fmla="*/ 1239488 h 2951163"/>
+              <a:gd name="csY14" fmla="*/ 1062419 h 2951163"/>
               <a:gd name="csX15" fmla="*/ 0 w 2051050"/>
-              <a:gd name="csY15" fmla="*/ 708279 h 2951163"/>
-              <a:gd name="csX16" fmla="*/ 0 w 2051050"/>
-              <a:gd name="csY16" fmla="*/ 0 h 2951163"/>
+              <a:gd name="csY15" fmla="*/ 0 h 2951163"/>
             </a:gdLst>
             <a:ahLst/>
             <a:cxnLst>
@@ -3987,13 +4942,91 @@
               <a:cxn ang="0">
                 <a:pos x="csX15" y="csY15"/>
               </a:cxn>
-              <a:cxn ang="0">
-                <a:pos x="csX16" y="csY16"/>
-              </a:cxn>
             </a:cxnLst>
             <a:rect l="l" t="t" r="r" b="b"/>
             <a:pathLst>
-              <a:path w="2051050" h="2951163" extrusionOk="0">
+              <a:path w="2051050" h="2951163" fill="none" extrusionOk="0">
+                <a:moveTo>
+                  <a:pt x="0" y="0"/>
+                </a:moveTo>
+                <a:cubicBezTo>
+                  <a:pt x="267367" y="14427"/>
+                  <a:pt x="349033" y="-12086"/>
+                  <a:pt x="683683" y="0"/>
+                </a:cubicBezTo>
+                <a:cubicBezTo>
+                  <a:pt x="1018333" y="12086"/>
+                  <a:pt x="1022416" y="-8631"/>
+                  <a:pt x="1305835" y="0"/>
+                </a:cubicBezTo>
+                <a:cubicBezTo>
+                  <a:pt x="1589254" y="8631"/>
+                  <a:pt x="1888174" y="-24305"/>
+                  <a:pt x="2051050" y="0"/>
+                </a:cubicBezTo>
+                <a:cubicBezTo>
+                  <a:pt x="2049058" y="239847"/>
+                  <a:pt x="2079500" y="432103"/>
+                  <a:pt x="2051050" y="619744"/>
+                </a:cubicBezTo>
+                <a:cubicBezTo>
+                  <a:pt x="2022600" y="807385"/>
+                  <a:pt x="2037657" y="1080410"/>
+                  <a:pt x="2051050" y="1239488"/>
+                </a:cubicBezTo>
+                <a:cubicBezTo>
+                  <a:pt x="2064443" y="1398566"/>
+                  <a:pt x="2048304" y="1613183"/>
+                  <a:pt x="2051050" y="1770698"/>
+                </a:cubicBezTo>
+                <a:cubicBezTo>
+                  <a:pt x="2053797" y="1928213"/>
+                  <a:pt x="2077307" y="2089042"/>
+                  <a:pt x="2051050" y="2360930"/>
+                </a:cubicBezTo>
+                <a:cubicBezTo>
+                  <a:pt x="2024793" y="2632818"/>
+                  <a:pt x="2044620" y="2795804"/>
+                  <a:pt x="2051050" y="2951163"/>
+                </a:cubicBezTo>
+                <a:cubicBezTo>
+                  <a:pt x="1792864" y="2945869"/>
+                  <a:pt x="1550867" y="2982853"/>
+                  <a:pt x="1387877" y="2951163"/>
+                </a:cubicBezTo>
+                <a:cubicBezTo>
+                  <a:pt x="1224887" y="2919473"/>
+                  <a:pt x="943563" y="2930389"/>
+                  <a:pt x="704194" y="2951163"/>
+                </a:cubicBezTo>
+                <a:cubicBezTo>
+                  <a:pt x="464825" y="2971937"/>
+                  <a:pt x="330882" y="2923973"/>
+                  <a:pt x="0" y="2951163"/>
+                </a:cubicBezTo>
+                <a:cubicBezTo>
+                  <a:pt x="-12688" y="2660430"/>
+                  <a:pt x="3295" y="2469288"/>
+                  <a:pt x="0" y="2331419"/>
+                </a:cubicBezTo>
+                <a:cubicBezTo>
+                  <a:pt x="-3295" y="2193550"/>
+                  <a:pt x="-19903" y="1834509"/>
+                  <a:pt x="0" y="1682163"/>
+                </a:cubicBezTo>
+                <a:cubicBezTo>
+                  <a:pt x="19903" y="1529817"/>
+                  <a:pt x="4229" y="1363192"/>
+                  <a:pt x="0" y="1062419"/>
+                </a:cubicBezTo>
+                <a:cubicBezTo>
+                  <a:pt x="-4229" y="761646"/>
+                  <a:pt x="529" y="476222"/>
+                  <a:pt x="0" y="0"/>
+                </a:cubicBezTo>
+                <a:close/>
+              </a:path>
+              <a:path w="2051050" h="2951163" stroke="0" extrusionOk="0">
                 <a:moveTo>
                   <a:pt x="0" y="0"/>
                 </a:moveTo>
@@ -4155,38 +5188,36 @@
             <a:gdLst>
               <a:gd name="csX0" fmla="*/ 0 w 2051050"/>
               <a:gd name="csY0" fmla="*/ 0 h 2951163"/>
-              <a:gd name="csX1" fmla="*/ 622152 w 2051050"/>
+              <a:gd name="csX1" fmla="*/ 683683 w 2051050"/>
               <a:gd name="csY1" fmla="*/ 0 h 2951163"/>
-              <a:gd name="csX2" fmla="*/ 1264814 w 2051050"/>
+              <a:gd name="csX2" fmla="*/ 1305835 w 2051050"/>
               <a:gd name="csY2" fmla="*/ 0 h 2951163"/>
               <a:gd name="csX3" fmla="*/ 2051050 w 2051050"/>
               <a:gd name="csY3" fmla="*/ 0 h 2951163"/>
               <a:gd name="csX4" fmla="*/ 2051050 w 2051050"/>
-              <a:gd name="csY4" fmla="*/ 560721 h 2951163"/>
+              <a:gd name="csY4" fmla="*/ 619744 h 2951163"/>
               <a:gd name="csX5" fmla="*/ 2051050 w 2051050"/>
-              <a:gd name="csY5" fmla="*/ 1209977 h 2951163"/>
+              <a:gd name="csY5" fmla="*/ 1239488 h 2951163"/>
               <a:gd name="csX6" fmla="*/ 2051050 w 2051050"/>
-              <a:gd name="csY6" fmla="*/ 1711675 h 2951163"/>
+              <a:gd name="csY6" fmla="*/ 1770698 h 2951163"/>
               <a:gd name="csX7" fmla="*/ 2051050 w 2051050"/>
-              <a:gd name="csY7" fmla="*/ 2242884 h 2951163"/>
+              <a:gd name="csY7" fmla="*/ 2360930 h 2951163"/>
               <a:gd name="csX8" fmla="*/ 2051050 w 2051050"/>
               <a:gd name="csY8" fmla="*/ 2951163 h 2951163"/>
-              <a:gd name="csX9" fmla="*/ 1428898 w 2051050"/>
+              <a:gd name="csX9" fmla="*/ 1387877 w 2051050"/>
               <a:gd name="csY9" fmla="*/ 2951163 h 2951163"/>
-              <a:gd name="csX10" fmla="*/ 786236 w 2051050"/>
+              <a:gd name="csX10" fmla="*/ 704194 w 2051050"/>
               <a:gd name="csY10" fmla="*/ 2951163 h 2951163"/>
               <a:gd name="csX11" fmla="*/ 0 w 2051050"/>
               <a:gd name="csY11" fmla="*/ 2951163 h 2951163"/>
               <a:gd name="csX12" fmla="*/ 0 w 2051050"/>
-              <a:gd name="csY12" fmla="*/ 2449465 h 2951163"/>
+              <a:gd name="csY12" fmla="*/ 2331419 h 2951163"/>
               <a:gd name="csX13" fmla="*/ 0 w 2051050"/>
-              <a:gd name="csY13" fmla="*/ 1829721 h 2951163"/>
+              <a:gd name="csY13" fmla="*/ 1682163 h 2951163"/>
               <a:gd name="csX14" fmla="*/ 0 w 2051050"/>
-              <a:gd name="csY14" fmla="*/ 1239488 h 2951163"/>
+              <a:gd name="csY14" fmla="*/ 1062419 h 2951163"/>
               <a:gd name="csX15" fmla="*/ 0 w 2051050"/>
-              <a:gd name="csY15" fmla="*/ 708279 h 2951163"/>
-              <a:gd name="csX16" fmla="*/ 0 w 2051050"/>
-              <a:gd name="csY16" fmla="*/ 0 h 2951163"/>
+              <a:gd name="csY15" fmla="*/ 0 h 2951163"/>
             </a:gdLst>
             <a:ahLst/>
             <a:cxnLst>
@@ -4238,13 +5269,91 @@
               <a:cxn ang="0">
                 <a:pos x="csX15" y="csY15"/>
               </a:cxn>
-              <a:cxn ang="0">
-                <a:pos x="csX16" y="csY16"/>
-              </a:cxn>
             </a:cxnLst>
             <a:rect l="l" t="t" r="r" b="b"/>
             <a:pathLst>
-              <a:path w="2051050" h="2951163" extrusionOk="0">
+              <a:path w="2051050" h="2951163" fill="none" extrusionOk="0">
+                <a:moveTo>
+                  <a:pt x="0" y="0"/>
+                </a:moveTo>
+                <a:cubicBezTo>
+                  <a:pt x="267367" y="14427"/>
+                  <a:pt x="349033" y="-12086"/>
+                  <a:pt x="683683" y="0"/>
+                </a:cubicBezTo>
+                <a:cubicBezTo>
+                  <a:pt x="1018333" y="12086"/>
+                  <a:pt x="1022416" y="-8631"/>
+                  <a:pt x="1305835" y="0"/>
+                </a:cubicBezTo>
+                <a:cubicBezTo>
+                  <a:pt x="1589254" y="8631"/>
+                  <a:pt x="1888174" y="-24305"/>
+                  <a:pt x="2051050" y="0"/>
+                </a:cubicBezTo>
+                <a:cubicBezTo>
+                  <a:pt x="2049058" y="239847"/>
+                  <a:pt x="2079500" y="432103"/>
+                  <a:pt x="2051050" y="619744"/>
+                </a:cubicBezTo>
+                <a:cubicBezTo>
+                  <a:pt x="2022600" y="807385"/>
+                  <a:pt x="2037657" y="1080410"/>
+                  <a:pt x="2051050" y="1239488"/>
+                </a:cubicBezTo>
+                <a:cubicBezTo>
+                  <a:pt x="2064443" y="1398566"/>
+                  <a:pt x="2048304" y="1613183"/>
+                  <a:pt x="2051050" y="1770698"/>
+                </a:cubicBezTo>
+                <a:cubicBezTo>
+                  <a:pt x="2053797" y="1928213"/>
+                  <a:pt x="2077307" y="2089042"/>
+                  <a:pt x="2051050" y="2360930"/>
+                </a:cubicBezTo>
+                <a:cubicBezTo>
+                  <a:pt x="2024793" y="2632818"/>
+                  <a:pt x="2044620" y="2795804"/>
+                  <a:pt x="2051050" y="2951163"/>
+                </a:cubicBezTo>
+                <a:cubicBezTo>
+                  <a:pt x="1792864" y="2945869"/>
+                  <a:pt x="1550867" y="2982853"/>
+                  <a:pt x="1387877" y="2951163"/>
+                </a:cubicBezTo>
+                <a:cubicBezTo>
+                  <a:pt x="1224887" y="2919473"/>
+                  <a:pt x="943563" y="2930389"/>
+                  <a:pt x="704194" y="2951163"/>
+                </a:cubicBezTo>
+                <a:cubicBezTo>
+                  <a:pt x="464825" y="2971937"/>
+                  <a:pt x="330882" y="2923973"/>
+                  <a:pt x="0" y="2951163"/>
+                </a:cubicBezTo>
+                <a:cubicBezTo>
+                  <a:pt x="-12688" y="2660430"/>
+                  <a:pt x="3295" y="2469288"/>
+                  <a:pt x="0" y="2331419"/>
+                </a:cubicBezTo>
+                <a:cubicBezTo>
+                  <a:pt x="-3295" y="2193550"/>
+                  <a:pt x="-19903" y="1834509"/>
+                  <a:pt x="0" y="1682163"/>
+                </a:cubicBezTo>
+                <a:cubicBezTo>
+                  <a:pt x="19903" y="1529817"/>
+                  <a:pt x="4229" y="1363192"/>
+                  <a:pt x="0" y="1062419"/>
+                </a:cubicBezTo>
+                <a:cubicBezTo>
+                  <a:pt x="-4229" y="761646"/>
+                  <a:pt x="529" y="476222"/>
+                  <a:pt x="0" y="0"/>
+                </a:cubicBezTo>
+                <a:close/>
+              </a:path>
+              <a:path w="2051050" h="2951163" stroke="0" extrusionOk="0">
                 <a:moveTo>
                   <a:pt x="0" y="0"/>
                 </a:moveTo>
@@ -4406,38 +5515,36 @@
             <a:gdLst>
               <a:gd name="csX0" fmla="*/ 0 w 2051050"/>
               <a:gd name="csY0" fmla="*/ 0 h 2951163"/>
-              <a:gd name="csX1" fmla="*/ 622152 w 2051050"/>
+              <a:gd name="csX1" fmla="*/ 683683 w 2051050"/>
               <a:gd name="csY1" fmla="*/ 0 h 2951163"/>
-              <a:gd name="csX2" fmla="*/ 1264814 w 2051050"/>
+              <a:gd name="csX2" fmla="*/ 1305835 w 2051050"/>
               <a:gd name="csY2" fmla="*/ 0 h 2951163"/>
               <a:gd name="csX3" fmla="*/ 2051050 w 2051050"/>
               <a:gd name="csY3" fmla="*/ 0 h 2951163"/>
               <a:gd name="csX4" fmla="*/ 2051050 w 2051050"/>
-              <a:gd name="csY4" fmla="*/ 560721 h 2951163"/>
+              <a:gd name="csY4" fmla="*/ 619744 h 2951163"/>
               <a:gd name="csX5" fmla="*/ 2051050 w 2051050"/>
-              <a:gd name="csY5" fmla="*/ 1209977 h 2951163"/>
+              <a:gd name="csY5" fmla="*/ 1239488 h 2951163"/>
               <a:gd name="csX6" fmla="*/ 2051050 w 2051050"/>
-              <a:gd name="csY6" fmla="*/ 1711675 h 2951163"/>
+              <a:gd name="csY6" fmla="*/ 1770698 h 2951163"/>
               <a:gd name="csX7" fmla="*/ 2051050 w 2051050"/>
-              <a:gd name="csY7" fmla="*/ 2242884 h 2951163"/>
+              <a:gd name="csY7" fmla="*/ 2360930 h 2951163"/>
               <a:gd name="csX8" fmla="*/ 2051050 w 2051050"/>
               <a:gd name="csY8" fmla="*/ 2951163 h 2951163"/>
-              <a:gd name="csX9" fmla="*/ 1428898 w 2051050"/>
+              <a:gd name="csX9" fmla="*/ 1387877 w 2051050"/>
               <a:gd name="csY9" fmla="*/ 2951163 h 2951163"/>
-              <a:gd name="csX10" fmla="*/ 786236 w 2051050"/>
+              <a:gd name="csX10" fmla="*/ 704194 w 2051050"/>
               <a:gd name="csY10" fmla="*/ 2951163 h 2951163"/>
               <a:gd name="csX11" fmla="*/ 0 w 2051050"/>
               <a:gd name="csY11" fmla="*/ 2951163 h 2951163"/>
               <a:gd name="csX12" fmla="*/ 0 w 2051050"/>
-              <a:gd name="csY12" fmla="*/ 2449465 h 2951163"/>
+              <a:gd name="csY12" fmla="*/ 2331419 h 2951163"/>
               <a:gd name="csX13" fmla="*/ 0 w 2051050"/>
-              <a:gd name="csY13" fmla="*/ 1829721 h 2951163"/>
+              <a:gd name="csY13" fmla="*/ 1682163 h 2951163"/>
               <a:gd name="csX14" fmla="*/ 0 w 2051050"/>
-              <a:gd name="csY14" fmla="*/ 1239488 h 2951163"/>
+              <a:gd name="csY14" fmla="*/ 1062419 h 2951163"/>
               <a:gd name="csX15" fmla="*/ 0 w 2051050"/>
-              <a:gd name="csY15" fmla="*/ 708279 h 2951163"/>
-              <a:gd name="csX16" fmla="*/ 0 w 2051050"/>
-              <a:gd name="csY16" fmla="*/ 0 h 2951163"/>
+              <a:gd name="csY15" fmla="*/ 0 h 2951163"/>
             </a:gdLst>
             <a:ahLst/>
             <a:cxnLst>
@@ -4489,13 +5596,91 @@
               <a:cxn ang="0">
                 <a:pos x="csX15" y="csY15"/>
               </a:cxn>
-              <a:cxn ang="0">
-                <a:pos x="csX16" y="csY16"/>
-              </a:cxn>
             </a:cxnLst>
             <a:rect l="l" t="t" r="r" b="b"/>
             <a:pathLst>
-              <a:path w="2051050" h="2951163" extrusionOk="0">
+              <a:path w="2051050" h="2951163" fill="none" extrusionOk="0">
+                <a:moveTo>
+                  <a:pt x="0" y="0"/>
+                </a:moveTo>
+                <a:cubicBezTo>
+                  <a:pt x="267367" y="14427"/>
+                  <a:pt x="349033" y="-12086"/>
+                  <a:pt x="683683" y="0"/>
+                </a:cubicBezTo>
+                <a:cubicBezTo>
+                  <a:pt x="1018333" y="12086"/>
+                  <a:pt x="1022416" y="-8631"/>
+                  <a:pt x="1305835" y="0"/>
+                </a:cubicBezTo>
+                <a:cubicBezTo>
+                  <a:pt x="1589254" y="8631"/>
+                  <a:pt x="1888174" y="-24305"/>
+                  <a:pt x="2051050" y="0"/>
+                </a:cubicBezTo>
+                <a:cubicBezTo>
+                  <a:pt x="2049058" y="239847"/>
+                  <a:pt x="2079500" y="432103"/>
+                  <a:pt x="2051050" y="619744"/>
+                </a:cubicBezTo>
+                <a:cubicBezTo>
+                  <a:pt x="2022600" y="807385"/>
+                  <a:pt x="2037657" y="1080410"/>
+                  <a:pt x="2051050" y="1239488"/>
+                </a:cubicBezTo>
+                <a:cubicBezTo>
+                  <a:pt x="2064443" y="1398566"/>
+                  <a:pt x="2048304" y="1613183"/>
+                  <a:pt x="2051050" y="1770698"/>
+                </a:cubicBezTo>
+                <a:cubicBezTo>
+                  <a:pt x="2053797" y="1928213"/>
+                  <a:pt x="2077307" y="2089042"/>
+                  <a:pt x="2051050" y="2360930"/>
+                </a:cubicBezTo>
+                <a:cubicBezTo>
+                  <a:pt x="2024793" y="2632818"/>
+                  <a:pt x="2044620" y="2795804"/>
+                  <a:pt x="2051050" y="2951163"/>
+                </a:cubicBezTo>
+                <a:cubicBezTo>
+                  <a:pt x="1792864" y="2945869"/>
+                  <a:pt x="1550867" y="2982853"/>
+                  <a:pt x="1387877" y="2951163"/>
+                </a:cubicBezTo>
+                <a:cubicBezTo>
+                  <a:pt x="1224887" y="2919473"/>
+                  <a:pt x="943563" y="2930389"/>
+                  <a:pt x="704194" y="2951163"/>
+                </a:cubicBezTo>
+                <a:cubicBezTo>
+                  <a:pt x="464825" y="2971937"/>
+                  <a:pt x="330882" y="2923973"/>
+                  <a:pt x="0" y="2951163"/>
+                </a:cubicBezTo>
+                <a:cubicBezTo>
+                  <a:pt x="-12688" y="2660430"/>
+                  <a:pt x="3295" y="2469288"/>
+                  <a:pt x="0" y="2331419"/>
+                </a:cubicBezTo>
+                <a:cubicBezTo>
+                  <a:pt x="-3295" y="2193550"/>
+                  <a:pt x="-19903" y="1834509"/>
+                  <a:pt x="0" y="1682163"/>
+                </a:cubicBezTo>
+                <a:cubicBezTo>
+                  <a:pt x="19903" y="1529817"/>
+                  <a:pt x="4229" y="1363192"/>
+                  <a:pt x="0" y="1062419"/>
+                </a:cubicBezTo>
+                <a:cubicBezTo>
+                  <a:pt x="-4229" y="761646"/>
+                  <a:pt x="529" y="476222"/>
+                  <a:pt x="0" y="0"/>
+                </a:cubicBezTo>
+                <a:close/>
+              </a:path>
+              <a:path w="2051050" h="2951163" stroke="0" extrusionOk="0">
                 <a:moveTo>
                   <a:pt x="0" y="0"/>
                 </a:moveTo>
@@ -4657,38 +5842,36 @@
             <a:gdLst>
               <a:gd name="csX0" fmla="*/ 0 w 2057932"/>
               <a:gd name="csY0" fmla="*/ 0 h 2951163"/>
-              <a:gd name="csX1" fmla="*/ 624239 w 2057932"/>
+              <a:gd name="csX1" fmla="*/ 685977 w 2057932"/>
               <a:gd name="csY1" fmla="*/ 0 h 2951163"/>
-              <a:gd name="csX2" fmla="*/ 1269058 w 2057932"/>
+              <a:gd name="csX2" fmla="*/ 1310217 w 2057932"/>
               <a:gd name="csY2" fmla="*/ 0 h 2951163"/>
               <a:gd name="csX3" fmla="*/ 2057932 w 2057932"/>
               <a:gd name="csY3" fmla="*/ 0 h 2951163"/>
               <a:gd name="csX4" fmla="*/ 2057932 w 2057932"/>
-              <a:gd name="csY4" fmla="*/ 560721 h 2951163"/>
+              <a:gd name="csY4" fmla="*/ 619744 h 2951163"/>
               <a:gd name="csX5" fmla="*/ 2057932 w 2057932"/>
-              <a:gd name="csY5" fmla="*/ 1209977 h 2951163"/>
+              <a:gd name="csY5" fmla="*/ 1239488 h 2951163"/>
               <a:gd name="csX6" fmla="*/ 2057932 w 2057932"/>
-              <a:gd name="csY6" fmla="*/ 1711675 h 2951163"/>
+              <a:gd name="csY6" fmla="*/ 1770698 h 2951163"/>
               <a:gd name="csX7" fmla="*/ 2057932 w 2057932"/>
-              <a:gd name="csY7" fmla="*/ 2242884 h 2951163"/>
+              <a:gd name="csY7" fmla="*/ 2360930 h 2951163"/>
               <a:gd name="csX8" fmla="*/ 2057932 w 2057932"/>
               <a:gd name="csY8" fmla="*/ 2951163 h 2951163"/>
-              <a:gd name="csX9" fmla="*/ 1433693 w 2057932"/>
+              <a:gd name="csX9" fmla="*/ 1392534 w 2057932"/>
               <a:gd name="csY9" fmla="*/ 2951163 h 2951163"/>
-              <a:gd name="csX10" fmla="*/ 788874 w 2057932"/>
+              <a:gd name="csX10" fmla="*/ 706557 w 2057932"/>
               <a:gd name="csY10" fmla="*/ 2951163 h 2951163"/>
               <a:gd name="csX11" fmla="*/ 0 w 2057932"/>
               <a:gd name="csY11" fmla="*/ 2951163 h 2951163"/>
               <a:gd name="csX12" fmla="*/ 0 w 2057932"/>
-              <a:gd name="csY12" fmla="*/ 2449465 h 2951163"/>
+              <a:gd name="csY12" fmla="*/ 2331419 h 2951163"/>
               <a:gd name="csX13" fmla="*/ 0 w 2057932"/>
-              <a:gd name="csY13" fmla="*/ 1829721 h 2951163"/>
+              <a:gd name="csY13" fmla="*/ 1682163 h 2951163"/>
               <a:gd name="csX14" fmla="*/ 0 w 2057932"/>
-              <a:gd name="csY14" fmla="*/ 1239488 h 2951163"/>
+              <a:gd name="csY14" fmla="*/ 1062419 h 2951163"/>
               <a:gd name="csX15" fmla="*/ 0 w 2057932"/>
-              <a:gd name="csY15" fmla="*/ 708279 h 2951163"/>
-              <a:gd name="csX16" fmla="*/ 0 w 2057932"/>
-              <a:gd name="csY16" fmla="*/ 0 h 2951163"/>
+              <a:gd name="csY15" fmla="*/ 0 h 2951163"/>
             </a:gdLst>
             <a:ahLst/>
             <a:cxnLst>
@@ -4740,13 +5923,91 @@
               <a:cxn ang="0">
                 <a:pos x="csX15" y="csY15"/>
               </a:cxn>
-              <a:cxn ang="0">
-                <a:pos x="csX16" y="csY16"/>
-              </a:cxn>
             </a:cxnLst>
             <a:rect l="l" t="t" r="r" b="b"/>
             <a:pathLst>
-              <a:path w="2057932" h="2951163" extrusionOk="0">
+              <a:path w="2057932" h="2951163" fill="none" extrusionOk="0">
+                <a:moveTo>
+                  <a:pt x="0" y="0"/>
+                </a:moveTo>
+                <a:cubicBezTo>
+                  <a:pt x="307298" y="18856"/>
+                  <a:pt x="390280" y="-2913"/>
+                  <a:pt x="685977" y="0"/>
+                </a:cubicBezTo>
+                <a:cubicBezTo>
+                  <a:pt x="981674" y="2913"/>
+                  <a:pt x="1107368" y="8660"/>
+                  <a:pt x="1310217" y="0"/>
+                </a:cubicBezTo>
+                <a:cubicBezTo>
+                  <a:pt x="1513066" y="-8660"/>
+                  <a:pt x="1807343" y="30970"/>
+                  <a:pt x="2057932" y="0"/>
+                </a:cubicBezTo>
+                <a:cubicBezTo>
+                  <a:pt x="2055940" y="239847"/>
+                  <a:pt x="2086382" y="432103"/>
+                  <a:pt x="2057932" y="619744"/>
+                </a:cubicBezTo>
+                <a:cubicBezTo>
+                  <a:pt x="2029482" y="807385"/>
+                  <a:pt x="2044539" y="1080410"/>
+                  <a:pt x="2057932" y="1239488"/>
+                </a:cubicBezTo>
+                <a:cubicBezTo>
+                  <a:pt x="2071325" y="1398566"/>
+                  <a:pt x="2055186" y="1613183"/>
+                  <a:pt x="2057932" y="1770698"/>
+                </a:cubicBezTo>
+                <a:cubicBezTo>
+                  <a:pt x="2060679" y="1928213"/>
+                  <a:pt x="2084189" y="2089042"/>
+                  <a:pt x="2057932" y="2360930"/>
+                </a:cubicBezTo>
+                <a:cubicBezTo>
+                  <a:pt x="2031675" y="2632818"/>
+                  <a:pt x="2051502" y="2795804"/>
+                  <a:pt x="2057932" y="2951163"/>
+                </a:cubicBezTo>
+                <a:cubicBezTo>
+                  <a:pt x="1790244" y="2960948"/>
+                  <a:pt x="1633915" y="2930769"/>
+                  <a:pt x="1392534" y="2951163"/>
+                </a:cubicBezTo>
+                <a:cubicBezTo>
+                  <a:pt x="1151153" y="2971557"/>
+                  <a:pt x="1003410" y="2949952"/>
+                  <a:pt x="706557" y="2951163"/>
+                </a:cubicBezTo>
+                <a:cubicBezTo>
+                  <a:pt x="409704" y="2952374"/>
+                  <a:pt x="166034" y="2972217"/>
+                  <a:pt x="0" y="2951163"/>
+                </a:cubicBezTo>
+                <a:cubicBezTo>
+                  <a:pt x="-12688" y="2660430"/>
+                  <a:pt x="3295" y="2469288"/>
+                  <a:pt x="0" y="2331419"/>
+                </a:cubicBezTo>
+                <a:cubicBezTo>
+                  <a:pt x="-3295" y="2193550"/>
+                  <a:pt x="-19903" y="1834509"/>
+                  <a:pt x="0" y="1682163"/>
+                </a:cubicBezTo>
+                <a:cubicBezTo>
+                  <a:pt x="19903" y="1529817"/>
+                  <a:pt x="4229" y="1363192"/>
+                  <a:pt x="0" y="1062419"/>
+                </a:cubicBezTo>
+                <a:cubicBezTo>
+                  <a:pt x="-4229" y="761646"/>
+                  <a:pt x="529" y="476222"/>
+                  <a:pt x="0" y="0"/>
+                </a:cubicBezTo>
+                <a:close/>
+              </a:path>
+              <a:path w="2057932" h="2951163" stroke="0" extrusionOk="0">
                 <a:moveTo>
                   <a:pt x="0" y="0"/>
                 </a:moveTo>
@@ -4988,38 +6249,36 @@
             <a:gdLst>
               <a:gd name="csX0" fmla="*/ 0 w 2051050"/>
               <a:gd name="csY0" fmla="*/ 0 h 2951163"/>
-              <a:gd name="csX1" fmla="*/ 622152 w 2051050"/>
+              <a:gd name="csX1" fmla="*/ 683683 w 2051050"/>
               <a:gd name="csY1" fmla="*/ 0 h 2951163"/>
-              <a:gd name="csX2" fmla="*/ 1264814 w 2051050"/>
+              <a:gd name="csX2" fmla="*/ 1305835 w 2051050"/>
               <a:gd name="csY2" fmla="*/ 0 h 2951163"/>
               <a:gd name="csX3" fmla="*/ 2051050 w 2051050"/>
               <a:gd name="csY3" fmla="*/ 0 h 2951163"/>
               <a:gd name="csX4" fmla="*/ 2051050 w 2051050"/>
-              <a:gd name="csY4" fmla="*/ 560721 h 2951163"/>
+              <a:gd name="csY4" fmla="*/ 619744 h 2951163"/>
               <a:gd name="csX5" fmla="*/ 2051050 w 2051050"/>
-              <a:gd name="csY5" fmla="*/ 1209977 h 2951163"/>
+              <a:gd name="csY5" fmla="*/ 1239488 h 2951163"/>
               <a:gd name="csX6" fmla="*/ 2051050 w 2051050"/>
-              <a:gd name="csY6" fmla="*/ 1711675 h 2951163"/>
+              <a:gd name="csY6" fmla="*/ 1770698 h 2951163"/>
               <a:gd name="csX7" fmla="*/ 2051050 w 2051050"/>
-              <a:gd name="csY7" fmla="*/ 2242884 h 2951163"/>
+              <a:gd name="csY7" fmla="*/ 2360930 h 2951163"/>
               <a:gd name="csX8" fmla="*/ 2051050 w 2051050"/>
               <a:gd name="csY8" fmla="*/ 2951163 h 2951163"/>
-              <a:gd name="csX9" fmla="*/ 1428898 w 2051050"/>
+              <a:gd name="csX9" fmla="*/ 1387877 w 2051050"/>
               <a:gd name="csY9" fmla="*/ 2951163 h 2951163"/>
-              <a:gd name="csX10" fmla="*/ 786236 w 2051050"/>
+              <a:gd name="csX10" fmla="*/ 704194 w 2051050"/>
               <a:gd name="csY10" fmla="*/ 2951163 h 2951163"/>
               <a:gd name="csX11" fmla="*/ 0 w 2051050"/>
               <a:gd name="csY11" fmla="*/ 2951163 h 2951163"/>
               <a:gd name="csX12" fmla="*/ 0 w 2051050"/>
-              <a:gd name="csY12" fmla="*/ 2449465 h 2951163"/>
+              <a:gd name="csY12" fmla="*/ 2331419 h 2951163"/>
               <a:gd name="csX13" fmla="*/ 0 w 2051050"/>
-              <a:gd name="csY13" fmla="*/ 1829721 h 2951163"/>
+              <a:gd name="csY13" fmla="*/ 1682163 h 2951163"/>
               <a:gd name="csX14" fmla="*/ 0 w 2051050"/>
-              <a:gd name="csY14" fmla="*/ 1239488 h 2951163"/>
+              <a:gd name="csY14" fmla="*/ 1062419 h 2951163"/>
               <a:gd name="csX15" fmla="*/ 0 w 2051050"/>
-              <a:gd name="csY15" fmla="*/ 708279 h 2951163"/>
-              <a:gd name="csX16" fmla="*/ 0 w 2051050"/>
-              <a:gd name="csY16" fmla="*/ 0 h 2951163"/>
+              <a:gd name="csY15" fmla="*/ 0 h 2951163"/>
             </a:gdLst>
             <a:ahLst/>
             <a:cxnLst>
@@ -5071,13 +6330,91 @@
               <a:cxn ang="0">
                 <a:pos x="csX15" y="csY15"/>
               </a:cxn>
-              <a:cxn ang="0">
-                <a:pos x="csX16" y="csY16"/>
-              </a:cxn>
             </a:cxnLst>
             <a:rect l="l" t="t" r="r" b="b"/>
             <a:pathLst>
-              <a:path w="2051050" h="2951163" extrusionOk="0">
+              <a:path w="2051050" h="2951163" fill="none" extrusionOk="0">
+                <a:moveTo>
+                  <a:pt x="0" y="0"/>
+                </a:moveTo>
+                <a:cubicBezTo>
+                  <a:pt x="267367" y="14427"/>
+                  <a:pt x="349033" y="-12086"/>
+                  <a:pt x="683683" y="0"/>
+                </a:cubicBezTo>
+                <a:cubicBezTo>
+                  <a:pt x="1018333" y="12086"/>
+                  <a:pt x="1022416" y="-8631"/>
+                  <a:pt x="1305835" y="0"/>
+                </a:cubicBezTo>
+                <a:cubicBezTo>
+                  <a:pt x="1589254" y="8631"/>
+                  <a:pt x="1888174" y="-24305"/>
+                  <a:pt x="2051050" y="0"/>
+                </a:cubicBezTo>
+                <a:cubicBezTo>
+                  <a:pt x="2049058" y="239847"/>
+                  <a:pt x="2079500" y="432103"/>
+                  <a:pt x="2051050" y="619744"/>
+                </a:cubicBezTo>
+                <a:cubicBezTo>
+                  <a:pt x="2022600" y="807385"/>
+                  <a:pt x="2037657" y="1080410"/>
+                  <a:pt x="2051050" y="1239488"/>
+                </a:cubicBezTo>
+                <a:cubicBezTo>
+                  <a:pt x="2064443" y="1398566"/>
+                  <a:pt x="2048304" y="1613183"/>
+                  <a:pt x="2051050" y="1770698"/>
+                </a:cubicBezTo>
+                <a:cubicBezTo>
+                  <a:pt x="2053797" y="1928213"/>
+                  <a:pt x="2077307" y="2089042"/>
+                  <a:pt x="2051050" y="2360930"/>
+                </a:cubicBezTo>
+                <a:cubicBezTo>
+                  <a:pt x="2024793" y="2632818"/>
+                  <a:pt x="2044620" y="2795804"/>
+                  <a:pt x="2051050" y="2951163"/>
+                </a:cubicBezTo>
+                <a:cubicBezTo>
+                  <a:pt x="1792864" y="2945869"/>
+                  <a:pt x="1550867" y="2982853"/>
+                  <a:pt x="1387877" y="2951163"/>
+                </a:cubicBezTo>
+                <a:cubicBezTo>
+                  <a:pt x="1224887" y="2919473"/>
+                  <a:pt x="943563" y="2930389"/>
+                  <a:pt x="704194" y="2951163"/>
+                </a:cubicBezTo>
+                <a:cubicBezTo>
+                  <a:pt x="464825" y="2971937"/>
+                  <a:pt x="330882" y="2923973"/>
+                  <a:pt x="0" y="2951163"/>
+                </a:cubicBezTo>
+                <a:cubicBezTo>
+                  <a:pt x="-12688" y="2660430"/>
+                  <a:pt x="3295" y="2469288"/>
+                  <a:pt x="0" y="2331419"/>
+                </a:cubicBezTo>
+                <a:cubicBezTo>
+                  <a:pt x="-3295" y="2193550"/>
+                  <a:pt x="-19903" y="1834509"/>
+                  <a:pt x="0" y="1682163"/>
+                </a:cubicBezTo>
+                <a:cubicBezTo>
+                  <a:pt x="19903" y="1529817"/>
+                  <a:pt x="4229" y="1363192"/>
+                  <a:pt x="0" y="1062419"/>
+                </a:cubicBezTo>
+                <a:cubicBezTo>
+                  <a:pt x="-4229" y="761646"/>
+                  <a:pt x="529" y="476222"/>
+                  <a:pt x="0" y="0"/>
+                </a:cubicBezTo>
+                <a:close/>
+              </a:path>
+              <a:path w="2051050" h="2951163" stroke="0" extrusionOk="0">
                 <a:moveTo>
                   <a:pt x="0" y="0"/>
                 </a:moveTo>
@@ -5239,38 +6576,36 @@
             <a:gdLst>
               <a:gd name="csX0" fmla="*/ 0 w 2048256"/>
               <a:gd name="csY0" fmla="*/ 0 h 2951163"/>
-              <a:gd name="csX1" fmla="*/ 621304 w 2048256"/>
+              <a:gd name="csX1" fmla="*/ 682752 w 2048256"/>
               <a:gd name="csY1" fmla="*/ 0 h 2951163"/>
-              <a:gd name="csX2" fmla="*/ 1263091 w 2048256"/>
+              <a:gd name="csX2" fmla="*/ 1304056 w 2048256"/>
               <a:gd name="csY2" fmla="*/ 0 h 2951163"/>
               <a:gd name="csX3" fmla="*/ 2048256 w 2048256"/>
               <a:gd name="csY3" fmla="*/ 0 h 2951163"/>
               <a:gd name="csX4" fmla="*/ 2048256 w 2048256"/>
-              <a:gd name="csY4" fmla="*/ 560721 h 2951163"/>
+              <a:gd name="csY4" fmla="*/ 619744 h 2951163"/>
               <a:gd name="csX5" fmla="*/ 2048256 w 2048256"/>
-              <a:gd name="csY5" fmla="*/ 1209977 h 2951163"/>
+              <a:gd name="csY5" fmla="*/ 1239488 h 2951163"/>
               <a:gd name="csX6" fmla="*/ 2048256 w 2048256"/>
-              <a:gd name="csY6" fmla="*/ 1711675 h 2951163"/>
+              <a:gd name="csY6" fmla="*/ 1770698 h 2951163"/>
               <a:gd name="csX7" fmla="*/ 2048256 w 2048256"/>
-              <a:gd name="csY7" fmla="*/ 2242884 h 2951163"/>
+              <a:gd name="csY7" fmla="*/ 2360930 h 2951163"/>
               <a:gd name="csX8" fmla="*/ 2048256 w 2048256"/>
               <a:gd name="csY8" fmla="*/ 2951163 h 2951163"/>
-              <a:gd name="csX9" fmla="*/ 1426952 w 2048256"/>
+              <a:gd name="csX9" fmla="*/ 1385987 w 2048256"/>
               <a:gd name="csY9" fmla="*/ 2951163 h 2951163"/>
-              <a:gd name="csX10" fmla="*/ 785165 w 2048256"/>
+              <a:gd name="csX10" fmla="*/ 703235 w 2048256"/>
               <a:gd name="csY10" fmla="*/ 2951163 h 2951163"/>
               <a:gd name="csX11" fmla="*/ 0 w 2048256"/>
               <a:gd name="csY11" fmla="*/ 2951163 h 2951163"/>
               <a:gd name="csX12" fmla="*/ 0 w 2048256"/>
-              <a:gd name="csY12" fmla="*/ 2449465 h 2951163"/>
+              <a:gd name="csY12" fmla="*/ 2331419 h 2951163"/>
               <a:gd name="csX13" fmla="*/ 0 w 2048256"/>
-              <a:gd name="csY13" fmla="*/ 1829721 h 2951163"/>
+              <a:gd name="csY13" fmla="*/ 1682163 h 2951163"/>
               <a:gd name="csX14" fmla="*/ 0 w 2048256"/>
-              <a:gd name="csY14" fmla="*/ 1239488 h 2951163"/>
+              <a:gd name="csY14" fmla="*/ 1062419 h 2951163"/>
               <a:gd name="csX15" fmla="*/ 0 w 2048256"/>
-              <a:gd name="csY15" fmla="*/ 708279 h 2951163"/>
-              <a:gd name="csX16" fmla="*/ 0 w 2048256"/>
-              <a:gd name="csY16" fmla="*/ 0 h 2951163"/>
+              <a:gd name="csY15" fmla="*/ 0 h 2951163"/>
             </a:gdLst>
             <a:ahLst/>
             <a:cxnLst>
@@ -5322,13 +6657,91 @@
               <a:cxn ang="0">
                 <a:pos x="csX15" y="csY15"/>
               </a:cxn>
-              <a:cxn ang="0">
-                <a:pos x="csX16" y="csY16"/>
-              </a:cxn>
             </a:cxnLst>
             <a:rect l="l" t="t" r="r" b="b"/>
             <a:pathLst>
-              <a:path w="2048256" h="2951163" extrusionOk="0">
+              <a:path w="2048256" h="2951163" fill="none" extrusionOk="0">
+                <a:moveTo>
+                  <a:pt x="0" y="0"/>
+                </a:moveTo>
+                <a:cubicBezTo>
+                  <a:pt x="145745" y="-14563"/>
+                  <a:pt x="443531" y="-7277"/>
+                  <a:pt x="682752" y="0"/>
+                </a:cubicBezTo>
+                <a:cubicBezTo>
+                  <a:pt x="921973" y="7277"/>
+                  <a:pt x="1028656" y="-16000"/>
+                  <a:pt x="1304056" y="0"/>
+                </a:cubicBezTo>
+                <a:cubicBezTo>
+                  <a:pt x="1579456" y="16000"/>
+                  <a:pt x="1703881" y="12176"/>
+                  <a:pt x="2048256" y="0"/>
+                </a:cubicBezTo>
+                <a:cubicBezTo>
+                  <a:pt x="2046264" y="239847"/>
+                  <a:pt x="2076706" y="432103"/>
+                  <a:pt x="2048256" y="619744"/>
+                </a:cubicBezTo>
+                <a:cubicBezTo>
+                  <a:pt x="2019806" y="807385"/>
+                  <a:pt x="2034863" y="1080410"/>
+                  <a:pt x="2048256" y="1239488"/>
+                </a:cubicBezTo>
+                <a:cubicBezTo>
+                  <a:pt x="2061649" y="1398566"/>
+                  <a:pt x="2045510" y="1613183"/>
+                  <a:pt x="2048256" y="1770698"/>
+                </a:cubicBezTo>
+                <a:cubicBezTo>
+                  <a:pt x="2051003" y="1928213"/>
+                  <a:pt x="2074513" y="2089042"/>
+                  <a:pt x="2048256" y="2360930"/>
+                </a:cubicBezTo>
+                <a:cubicBezTo>
+                  <a:pt x="2021999" y="2632818"/>
+                  <a:pt x="2041826" y="2795804"/>
+                  <a:pt x="2048256" y="2951163"/>
+                </a:cubicBezTo>
+                <a:cubicBezTo>
+                  <a:pt x="1777615" y="2949990"/>
+                  <a:pt x="1590074" y="2922595"/>
+                  <a:pt x="1385987" y="2951163"/>
+                </a:cubicBezTo>
+                <a:cubicBezTo>
+                  <a:pt x="1181900" y="2979731"/>
+                  <a:pt x="937289" y="2925220"/>
+                  <a:pt x="703235" y="2951163"/>
+                </a:cubicBezTo>
+                <a:cubicBezTo>
+                  <a:pt x="469181" y="2977106"/>
+                  <a:pt x="279028" y="2952897"/>
+                  <a:pt x="0" y="2951163"/>
+                </a:cubicBezTo>
+                <a:cubicBezTo>
+                  <a:pt x="-12688" y="2660430"/>
+                  <a:pt x="3295" y="2469288"/>
+                  <a:pt x="0" y="2331419"/>
+                </a:cubicBezTo>
+                <a:cubicBezTo>
+                  <a:pt x="-3295" y="2193550"/>
+                  <a:pt x="-19903" y="1834509"/>
+                  <a:pt x="0" y="1682163"/>
+                </a:cubicBezTo>
+                <a:cubicBezTo>
+                  <a:pt x="19903" y="1529817"/>
+                  <a:pt x="4229" y="1363192"/>
+                  <a:pt x="0" y="1062419"/>
+                </a:cubicBezTo>
+                <a:cubicBezTo>
+                  <a:pt x="-4229" y="761646"/>
+                  <a:pt x="529" y="476222"/>
+                  <a:pt x="0" y="0"/>
+                </a:cubicBezTo>
+                <a:close/>
+              </a:path>
+              <a:path w="2048256" h="2951163" stroke="0" extrusionOk="0">
                 <a:moveTo>
                   <a:pt x="0" y="0"/>
                 </a:moveTo>
@@ -5490,38 +6903,36 @@
             <a:gdLst>
               <a:gd name="csX0" fmla="*/ 0 w 2051050"/>
               <a:gd name="csY0" fmla="*/ 0 h 2951163"/>
-              <a:gd name="csX1" fmla="*/ 622152 w 2051050"/>
+              <a:gd name="csX1" fmla="*/ 683683 w 2051050"/>
               <a:gd name="csY1" fmla="*/ 0 h 2951163"/>
-              <a:gd name="csX2" fmla="*/ 1264814 w 2051050"/>
+              <a:gd name="csX2" fmla="*/ 1305835 w 2051050"/>
               <a:gd name="csY2" fmla="*/ 0 h 2951163"/>
               <a:gd name="csX3" fmla="*/ 2051050 w 2051050"/>
               <a:gd name="csY3" fmla="*/ 0 h 2951163"/>
               <a:gd name="csX4" fmla="*/ 2051050 w 2051050"/>
-              <a:gd name="csY4" fmla="*/ 560721 h 2951163"/>
+              <a:gd name="csY4" fmla="*/ 619744 h 2951163"/>
               <a:gd name="csX5" fmla="*/ 2051050 w 2051050"/>
-              <a:gd name="csY5" fmla="*/ 1209977 h 2951163"/>
+              <a:gd name="csY5" fmla="*/ 1239488 h 2951163"/>
               <a:gd name="csX6" fmla="*/ 2051050 w 2051050"/>
-              <a:gd name="csY6" fmla="*/ 1711675 h 2951163"/>
+              <a:gd name="csY6" fmla="*/ 1770698 h 2951163"/>
               <a:gd name="csX7" fmla="*/ 2051050 w 2051050"/>
-              <a:gd name="csY7" fmla="*/ 2242884 h 2951163"/>
+              <a:gd name="csY7" fmla="*/ 2360930 h 2951163"/>
               <a:gd name="csX8" fmla="*/ 2051050 w 2051050"/>
               <a:gd name="csY8" fmla="*/ 2951163 h 2951163"/>
-              <a:gd name="csX9" fmla="*/ 1428898 w 2051050"/>
+              <a:gd name="csX9" fmla="*/ 1387877 w 2051050"/>
               <a:gd name="csY9" fmla="*/ 2951163 h 2951163"/>
-              <a:gd name="csX10" fmla="*/ 786236 w 2051050"/>
+              <a:gd name="csX10" fmla="*/ 704194 w 2051050"/>
               <a:gd name="csY10" fmla="*/ 2951163 h 2951163"/>
               <a:gd name="csX11" fmla="*/ 0 w 2051050"/>
               <a:gd name="csY11" fmla="*/ 2951163 h 2951163"/>
               <a:gd name="csX12" fmla="*/ 0 w 2051050"/>
-              <a:gd name="csY12" fmla="*/ 2449465 h 2951163"/>
+              <a:gd name="csY12" fmla="*/ 2331419 h 2951163"/>
               <a:gd name="csX13" fmla="*/ 0 w 2051050"/>
-              <a:gd name="csY13" fmla="*/ 1829721 h 2951163"/>
+              <a:gd name="csY13" fmla="*/ 1682163 h 2951163"/>
               <a:gd name="csX14" fmla="*/ 0 w 2051050"/>
-              <a:gd name="csY14" fmla="*/ 1239488 h 2951163"/>
+              <a:gd name="csY14" fmla="*/ 1062419 h 2951163"/>
               <a:gd name="csX15" fmla="*/ 0 w 2051050"/>
-              <a:gd name="csY15" fmla="*/ 708279 h 2951163"/>
-              <a:gd name="csX16" fmla="*/ 0 w 2051050"/>
-              <a:gd name="csY16" fmla="*/ 0 h 2951163"/>
+              <a:gd name="csY15" fmla="*/ 0 h 2951163"/>
             </a:gdLst>
             <a:ahLst/>
             <a:cxnLst>
@@ -5573,13 +6984,91 @@
               <a:cxn ang="0">
                 <a:pos x="csX15" y="csY15"/>
               </a:cxn>
-              <a:cxn ang="0">
-                <a:pos x="csX16" y="csY16"/>
-              </a:cxn>
             </a:cxnLst>
             <a:rect l="l" t="t" r="r" b="b"/>
             <a:pathLst>
-              <a:path w="2051050" h="2951163" extrusionOk="0">
+              <a:path w="2051050" h="2951163" fill="none" extrusionOk="0">
+                <a:moveTo>
+                  <a:pt x="0" y="0"/>
+                </a:moveTo>
+                <a:cubicBezTo>
+                  <a:pt x="267367" y="14427"/>
+                  <a:pt x="349033" y="-12086"/>
+                  <a:pt x="683683" y="0"/>
+                </a:cubicBezTo>
+                <a:cubicBezTo>
+                  <a:pt x="1018333" y="12086"/>
+                  <a:pt x="1022416" y="-8631"/>
+                  <a:pt x="1305835" y="0"/>
+                </a:cubicBezTo>
+                <a:cubicBezTo>
+                  <a:pt x="1589254" y="8631"/>
+                  <a:pt x="1888174" y="-24305"/>
+                  <a:pt x="2051050" y="0"/>
+                </a:cubicBezTo>
+                <a:cubicBezTo>
+                  <a:pt x="2049058" y="239847"/>
+                  <a:pt x="2079500" y="432103"/>
+                  <a:pt x="2051050" y="619744"/>
+                </a:cubicBezTo>
+                <a:cubicBezTo>
+                  <a:pt x="2022600" y="807385"/>
+                  <a:pt x="2037657" y="1080410"/>
+                  <a:pt x="2051050" y="1239488"/>
+                </a:cubicBezTo>
+                <a:cubicBezTo>
+                  <a:pt x="2064443" y="1398566"/>
+                  <a:pt x="2048304" y="1613183"/>
+                  <a:pt x="2051050" y="1770698"/>
+                </a:cubicBezTo>
+                <a:cubicBezTo>
+                  <a:pt x="2053797" y="1928213"/>
+                  <a:pt x="2077307" y="2089042"/>
+                  <a:pt x="2051050" y="2360930"/>
+                </a:cubicBezTo>
+                <a:cubicBezTo>
+                  <a:pt x="2024793" y="2632818"/>
+                  <a:pt x="2044620" y="2795804"/>
+                  <a:pt x="2051050" y="2951163"/>
+                </a:cubicBezTo>
+                <a:cubicBezTo>
+                  <a:pt x="1792864" y="2945869"/>
+                  <a:pt x="1550867" y="2982853"/>
+                  <a:pt x="1387877" y="2951163"/>
+                </a:cubicBezTo>
+                <a:cubicBezTo>
+                  <a:pt x="1224887" y="2919473"/>
+                  <a:pt x="943563" y="2930389"/>
+                  <a:pt x="704194" y="2951163"/>
+                </a:cubicBezTo>
+                <a:cubicBezTo>
+                  <a:pt x="464825" y="2971937"/>
+                  <a:pt x="330882" y="2923973"/>
+                  <a:pt x="0" y="2951163"/>
+                </a:cubicBezTo>
+                <a:cubicBezTo>
+                  <a:pt x="-12688" y="2660430"/>
+                  <a:pt x="3295" y="2469288"/>
+                  <a:pt x="0" y="2331419"/>
+                </a:cubicBezTo>
+                <a:cubicBezTo>
+                  <a:pt x="-3295" y="2193550"/>
+                  <a:pt x="-19903" y="1834509"/>
+                  <a:pt x="0" y="1682163"/>
+                </a:cubicBezTo>
+                <a:cubicBezTo>
+                  <a:pt x="19903" y="1529817"/>
+                  <a:pt x="4229" y="1363192"/>
+                  <a:pt x="0" y="1062419"/>
+                </a:cubicBezTo>
+                <a:cubicBezTo>
+                  <a:pt x="-4229" y="761646"/>
+                  <a:pt x="529" y="476222"/>
+                  <a:pt x="0" y="0"/>
+                </a:cubicBezTo>
+                <a:close/>
+              </a:path>
+              <a:path w="2051050" h="2951163" stroke="0" extrusionOk="0">
                 <a:moveTo>
                   <a:pt x="0" y="0"/>
                 </a:moveTo>
@@ -5741,38 +7230,36 @@
             <a:gdLst>
               <a:gd name="csX0" fmla="*/ 0 w 2048256"/>
               <a:gd name="csY0" fmla="*/ 0 h 2951163"/>
-              <a:gd name="csX1" fmla="*/ 621304 w 2048256"/>
+              <a:gd name="csX1" fmla="*/ 682752 w 2048256"/>
               <a:gd name="csY1" fmla="*/ 0 h 2951163"/>
-              <a:gd name="csX2" fmla="*/ 1263091 w 2048256"/>
+              <a:gd name="csX2" fmla="*/ 1304056 w 2048256"/>
               <a:gd name="csY2" fmla="*/ 0 h 2951163"/>
               <a:gd name="csX3" fmla="*/ 2048256 w 2048256"/>
               <a:gd name="csY3" fmla="*/ 0 h 2951163"/>
               <a:gd name="csX4" fmla="*/ 2048256 w 2048256"/>
-              <a:gd name="csY4" fmla="*/ 560721 h 2951163"/>
+              <a:gd name="csY4" fmla="*/ 619744 h 2951163"/>
               <a:gd name="csX5" fmla="*/ 2048256 w 2048256"/>
-              <a:gd name="csY5" fmla="*/ 1209977 h 2951163"/>
+              <a:gd name="csY5" fmla="*/ 1239488 h 2951163"/>
               <a:gd name="csX6" fmla="*/ 2048256 w 2048256"/>
-              <a:gd name="csY6" fmla="*/ 1711675 h 2951163"/>
+              <a:gd name="csY6" fmla="*/ 1770698 h 2951163"/>
               <a:gd name="csX7" fmla="*/ 2048256 w 2048256"/>
-              <a:gd name="csY7" fmla="*/ 2242884 h 2951163"/>
+              <a:gd name="csY7" fmla="*/ 2360930 h 2951163"/>
               <a:gd name="csX8" fmla="*/ 2048256 w 2048256"/>
               <a:gd name="csY8" fmla="*/ 2951163 h 2951163"/>
-              <a:gd name="csX9" fmla="*/ 1426952 w 2048256"/>
+              <a:gd name="csX9" fmla="*/ 1385987 w 2048256"/>
               <a:gd name="csY9" fmla="*/ 2951163 h 2951163"/>
-              <a:gd name="csX10" fmla="*/ 785165 w 2048256"/>
+              <a:gd name="csX10" fmla="*/ 703235 w 2048256"/>
               <a:gd name="csY10" fmla="*/ 2951163 h 2951163"/>
               <a:gd name="csX11" fmla="*/ 0 w 2048256"/>
               <a:gd name="csY11" fmla="*/ 2951163 h 2951163"/>
               <a:gd name="csX12" fmla="*/ 0 w 2048256"/>
-              <a:gd name="csY12" fmla="*/ 2449465 h 2951163"/>
+              <a:gd name="csY12" fmla="*/ 2331419 h 2951163"/>
               <a:gd name="csX13" fmla="*/ 0 w 2048256"/>
-              <a:gd name="csY13" fmla="*/ 1829721 h 2951163"/>
+              <a:gd name="csY13" fmla="*/ 1682163 h 2951163"/>
               <a:gd name="csX14" fmla="*/ 0 w 2048256"/>
-              <a:gd name="csY14" fmla="*/ 1239488 h 2951163"/>
+              <a:gd name="csY14" fmla="*/ 1062419 h 2951163"/>
               <a:gd name="csX15" fmla="*/ 0 w 2048256"/>
-              <a:gd name="csY15" fmla="*/ 708279 h 2951163"/>
-              <a:gd name="csX16" fmla="*/ 0 w 2048256"/>
-              <a:gd name="csY16" fmla="*/ 0 h 2951163"/>
+              <a:gd name="csY15" fmla="*/ 0 h 2951163"/>
             </a:gdLst>
             <a:ahLst/>
             <a:cxnLst>
@@ -5824,13 +7311,91 @@
               <a:cxn ang="0">
                 <a:pos x="csX15" y="csY15"/>
               </a:cxn>
-              <a:cxn ang="0">
-                <a:pos x="csX16" y="csY16"/>
-              </a:cxn>
             </a:cxnLst>
             <a:rect l="l" t="t" r="r" b="b"/>
             <a:pathLst>
-              <a:path w="2048256" h="2951163" extrusionOk="0">
+              <a:path w="2048256" h="2951163" fill="none" extrusionOk="0">
+                <a:moveTo>
+                  <a:pt x="0" y="0"/>
+                </a:moveTo>
+                <a:cubicBezTo>
+                  <a:pt x="145745" y="-14563"/>
+                  <a:pt x="443531" y="-7277"/>
+                  <a:pt x="682752" y="0"/>
+                </a:cubicBezTo>
+                <a:cubicBezTo>
+                  <a:pt x="921973" y="7277"/>
+                  <a:pt x="1028656" y="-16000"/>
+                  <a:pt x="1304056" y="0"/>
+                </a:cubicBezTo>
+                <a:cubicBezTo>
+                  <a:pt x="1579456" y="16000"/>
+                  <a:pt x="1703881" y="12176"/>
+                  <a:pt x="2048256" y="0"/>
+                </a:cubicBezTo>
+                <a:cubicBezTo>
+                  <a:pt x="2046264" y="239847"/>
+                  <a:pt x="2076706" y="432103"/>
+                  <a:pt x="2048256" y="619744"/>
+                </a:cubicBezTo>
+                <a:cubicBezTo>
+                  <a:pt x="2019806" y="807385"/>
+                  <a:pt x="2034863" y="1080410"/>
+                  <a:pt x="2048256" y="1239488"/>
+                </a:cubicBezTo>
+                <a:cubicBezTo>
+                  <a:pt x="2061649" y="1398566"/>
+                  <a:pt x="2045510" y="1613183"/>
+                  <a:pt x="2048256" y="1770698"/>
+                </a:cubicBezTo>
+                <a:cubicBezTo>
+                  <a:pt x="2051003" y="1928213"/>
+                  <a:pt x="2074513" y="2089042"/>
+                  <a:pt x="2048256" y="2360930"/>
+                </a:cubicBezTo>
+                <a:cubicBezTo>
+                  <a:pt x="2021999" y="2632818"/>
+                  <a:pt x="2041826" y="2795804"/>
+                  <a:pt x="2048256" y="2951163"/>
+                </a:cubicBezTo>
+                <a:cubicBezTo>
+                  <a:pt x="1777615" y="2949990"/>
+                  <a:pt x="1590074" y="2922595"/>
+                  <a:pt x="1385987" y="2951163"/>
+                </a:cubicBezTo>
+                <a:cubicBezTo>
+                  <a:pt x="1181900" y="2979731"/>
+                  <a:pt x="937289" y="2925220"/>
+                  <a:pt x="703235" y="2951163"/>
+                </a:cubicBezTo>
+                <a:cubicBezTo>
+                  <a:pt x="469181" y="2977106"/>
+                  <a:pt x="279028" y="2952897"/>
+                  <a:pt x="0" y="2951163"/>
+                </a:cubicBezTo>
+                <a:cubicBezTo>
+                  <a:pt x="-12688" y="2660430"/>
+                  <a:pt x="3295" y="2469288"/>
+                  <a:pt x="0" y="2331419"/>
+                </a:cubicBezTo>
+                <a:cubicBezTo>
+                  <a:pt x="-3295" y="2193550"/>
+                  <a:pt x="-19903" y="1834509"/>
+                  <a:pt x="0" y="1682163"/>
+                </a:cubicBezTo>
+                <a:cubicBezTo>
+                  <a:pt x="19903" y="1529817"/>
+                  <a:pt x="4229" y="1363192"/>
+                  <a:pt x="0" y="1062419"/>
+                </a:cubicBezTo>
+                <a:cubicBezTo>
+                  <a:pt x="-4229" y="761646"/>
+                  <a:pt x="529" y="476222"/>
+                  <a:pt x="0" y="0"/>
+                </a:cubicBezTo>
+                <a:close/>
+              </a:path>
+              <a:path w="2048256" h="2951163" stroke="0" extrusionOk="0">
                 <a:moveTo>
                   <a:pt x="0" y="0"/>
                 </a:moveTo>
@@ -10218,6 +11783,6739 @@
     <p:extLst>
       <p:ext uri="{BB962C8B-B14F-4D97-AF65-F5344CB8AC3E}">
         <p14:creationId xmlns:p14="http://schemas.microsoft.com/office/powerpoint/2010/main" val="3240356758"/>
+      </p:ext>
+    </p:extLst>
+  </p:cSld>
+  <p:clrMapOvr>
+    <a:masterClrMapping/>
+  </p:clrMapOvr>
+</p:sld>
+</file>
+
+<file path=ppt/slides/slide2.xml><?xml version="1.0" encoding="utf-8"?>
+<p:sld xmlns:a="http://schemas.openxmlformats.org/drawingml/2006/main" xmlns:r="http://schemas.openxmlformats.org/officeDocument/2006/relationships" xmlns:p="http://schemas.openxmlformats.org/presentationml/2006/main">
+  <p:cSld>
+    <p:spTree>
+      <p:nvGrpSpPr>
+        <p:cNvPr id="1" name="">
+          <a:extLst>
+            <a:ext uri="{FF2B5EF4-FFF2-40B4-BE49-F238E27FC236}">
+              <a16:creationId xmlns:a16="http://schemas.microsoft.com/office/drawing/2014/main" id="{848366FF-E911-DFD1-264D-D5E35AF59F87}"/>
+            </a:ext>
+          </a:extLst>
+        </p:cNvPr>
+        <p:cNvGrpSpPr/>
+        <p:nvPr/>
+      </p:nvGrpSpPr>
+      <p:grpSpPr>
+        <a:xfrm>
+          <a:off x="0" y="0"/>
+          <a:ext cx="0" cy="0"/>
+          <a:chOff x="0" y="0"/>
+          <a:chExt cx="0" cy="0"/>
+        </a:xfrm>
+      </p:grpSpPr>
+      <p:sp>
+        <p:nvSpPr>
+          <p:cNvPr id="2" name="Slide Number Placeholder 1">
+            <a:extLst>
+              <a:ext uri="{FF2B5EF4-FFF2-40B4-BE49-F238E27FC236}">
+                <a16:creationId xmlns:a16="http://schemas.microsoft.com/office/drawing/2014/main" id="{BE18CB67-9813-AED7-2E09-556CF313DDCD}"/>
+              </a:ext>
+            </a:extLst>
+          </p:cNvPr>
+          <p:cNvSpPr>
+            <a:spLocks noGrp="1"/>
+          </p:cNvSpPr>
+          <p:nvPr>
+            <p:ph type="sldNum" sz="quarter" idx="10"/>
+          </p:nvPr>
+        </p:nvSpPr>
+        <p:spPr/>
+        <p:txBody>
+          <a:bodyPr/>
+          <a:lstStyle/>
+          <a:p>
+            <a:fld id="{09C44C4A-945E-4A56-A1E7-C9D60F5427FF}" type="slidenum">
+              <a:rPr lang="de-AT" smtClean="0"/>
+              <a:t>2</a:t>
+            </a:fld>
+            <a:endParaRPr lang="de-AT"/>
+          </a:p>
+        </p:txBody>
+      </p:sp>
+      <p:sp>
+        <p:nvSpPr>
+          <p:cNvPr id="4" name="Title 3">
+            <a:extLst>
+              <a:ext uri="{FF2B5EF4-FFF2-40B4-BE49-F238E27FC236}">
+                <a16:creationId xmlns:a16="http://schemas.microsoft.com/office/drawing/2014/main" id="{0CEC03E3-1DDE-9464-574D-A19060512D22}"/>
+              </a:ext>
+            </a:extLst>
+          </p:cNvPr>
+          <p:cNvSpPr>
+            <a:spLocks noGrp="1"/>
+          </p:cNvSpPr>
+          <p:nvPr>
+            <p:ph type="title" idx="4294967295"/>
+          </p:nvPr>
+        </p:nvSpPr>
+        <p:spPr>
+          <a:xfrm>
+            <a:off x="114551" y="221488"/>
+            <a:ext cx="3985335" cy="234680"/>
+          </a:xfrm>
+          <a:prstGeom prst="rect">
+            <a:avLst/>
+          </a:prstGeom>
+        </p:spPr>
+        <p:txBody>
+          <a:bodyPr/>
+          <a:lstStyle/>
+          <a:p>
+            <a:endParaRPr lang="en-US" sz="1000" dirty="0">
+              <a:latin typeface="Pangolin" panose="00000500000000000000" pitchFamily="2" charset="0"/>
+            </a:endParaRPr>
+          </a:p>
+        </p:txBody>
+      </p:sp>
+      <p:sp>
+        <p:nvSpPr>
+          <p:cNvPr id="5" name="Rechteck 1">
+            <a:extLst>
+              <a:ext uri="{FF2B5EF4-FFF2-40B4-BE49-F238E27FC236}">
+                <a16:creationId xmlns:a16="http://schemas.microsoft.com/office/drawing/2014/main" id="{E8CF5295-F679-F153-5F66-A807245CF10D}"/>
+              </a:ext>
+              <a:ext uri="{C183D7F6-B498-43B3-948B-1728B52AA6E4}">
+                <adec:decorative xmlns:adec="http://schemas.microsoft.com/office/drawing/2017/decorative" val="1"/>
+              </a:ext>
+            </a:extLst>
+          </p:cNvPr>
+          <p:cNvSpPr/>
+          <p:nvPr/>
+        </p:nvSpPr>
+        <p:spPr>
+          <a:xfrm>
+            <a:off x="2411227" y="523875"/>
+            <a:ext cx="2048256" cy="2951163"/>
+          </a:xfrm>
+          <a:custGeom>
+            <a:avLst/>
+            <a:gdLst>
+              <a:gd name="csX0" fmla="*/ 0 w 2048256"/>
+              <a:gd name="csY0" fmla="*/ 0 h 2951163"/>
+              <a:gd name="csX1" fmla="*/ 682752 w 2048256"/>
+              <a:gd name="csY1" fmla="*/ 0 h 2951163"/>
+              <a:gd name="csX2" fmla="*/ 1304056 w 2048256"/>
+              <a:gd name="csY2" fmla="*/ 0 h 2951163"/>
+              <a:gd name="csX3" fmla="*/ 2048256 w 2048256"/>
+              <a:gd name="csY3" fmla="*/ 0 h 2951163"/>
+              <a:gd name="csX4" fmla="*/ 2048256 w 2048256"/>
+              <a:gd name="csY4" fmla="*/ 619744 h 2951163"/>
+              <a:gd name="csX5" fmla="*/ 2048256 w 2048256"/>
+              <a:gd name="csY5" fmla="*/ 1239488 h 2951163"/>
+              <a:gd name="csX6" fmla="*/ 2048256 w 2048256"/>
+              <a:gd name="csY6" fmla="*/ 1770698 h 2951163"/>
+              <a:gd name="csX7" fmla="*/ 2048256 w 2048256"/>
+              <a:gd name="csY7" fmla="*/ 2360930 h 2951163"/>
+              <a:gd name="csX8" fmla="*/ 2048256 w 2048256"/>
+              <a:gd name="csY8" fmla="*/ 2951163 h 2951163"/>
+              <a:gd name="csX9" fmla="*/ 1385987 w 2048256"/>
+              <a:gd name="csY9" fmla="*/ 2951163 h 2951163"/>
+              <a:gd name="csX10" fmla="*/ 703235 w 2048256"/>
+              <a:gd name="csY10" fmla="*/ 2951163 h 2951163"/>
+              <a:gd name="csX11" fmla="*/ 0 w 2048256"/>
+              <a:gd name="csY11" fmla="*/ 2951163 h 2951163"/>
+              <a:gd name="csX12" fmla="*/ 0 w 2048256"/>
+              <a:gd name="csY12" fmla="*/ 2331419 h 2951163"/>
+              <a:gd name="csX13" fmla="*/ 0 w 2048256"/>
+              <a:gd name="csY13" fmla="*/ 1682163 h 2951163"/>
+              <a:gd name="csX14" fmla="*/ 0 w 2048256"/>
+              <a:gd name="csY14" fmla="*/ 1062419 h 2951163"/>
+              <a:gd name="csX15" fmla="*/ 0 w 2048256"/>
+              <a:gd name="csY15" fmla="*/ 0 h 2951163"/>
+            </a:gdLst>
+            <a:ahLst/>
+            <a:cxnLst>
+              <a:cxn ang="0">
+                <a:pos x="csX0" y="csY0"/>
+              </a:cxn>
+              <a:cxn ang="0">
+                <a:pos x="csX1" y="csY1"/>
+              </a:cxn>
+              <a:cxn ang="0">
+                <a:pos x="csX2" y="csY2"/>
+              </a:cxn>
+              <a:cxn ang="0">
+                <a:pos x="csX3" y="csY3"/>
+              </a:cxn>
+              <a:cxn ang="0">
+                <a:pos x="csX4" y="csY4"/>
+              </a:cxn>
+              <a:cxn ang="0">
+                <a:pos x="csX5" y="csY5"/>
+              </a:cxn>
+              <a:cxn ang="0">
+                <a:pos x="csX6" y="csY6"/>
+              </a:cxn>
+              <a:cxn ang="0">
+                <a:pos x="csX7" y="csY7"/>
+              </a:cxn>
+              <a:cxn ang="0">
+                <a:pos x="csX8" y="csY8"/>
+              </a:cxn>
+              <a:cxn ang="0">
+                <a:pos x="csX9" y="csY9"/>
+              </a:cxn>
+              <a:cxn ang="0">
+                <a:pos x="csX10" y="csY10"/>
+              </a:cxn>
+              <a:cxn ang="0">
+                <a:pos x="csX11" y="csY11"/>
+              </a:cxn>
+              <a:cxn ang="0">
+                <a:pos x="csX12" y="csY12"/>
+              </a:cxn>
+              <a:cxn ang="0">
+                <a:pos x="csX13" y="csY13"/>
+              </a:cxn>
+              <a:cxn ang="0">
+                <a:pos x="csX14" y="csY14"/>
+              </a:cxn>
+              <a:cxn ang="0">
+                <a:pos x="csX15" y="csY15"/>
+              </a:cxn>
+            </a:cxnLst>
+            <a:rect l="l" t="t" r="r" b="b"/>
+            <a:pathLst>
+              <a:path w="2048256" h="2951163" fill="none" extrusionOk="0">
+                <a:moveTo>
+                  <a:pt x="0" y="0"/>
+                </a:moveTo>
+                <a:cubicBezTo>
+                  <a:pt x="145745" y="-14563"/>
+                  <a:pt x="443531" y="-7277"/>
+                  <a:pt x="682752" y="0"/>
+                </a:cubicBezTo>
+                <a:cubicBezTo>
+                  <a:pt x="921973" y="7277"/>
+                  <a:pt x="1028656" y="-16000"/>
+                  <a:pt x="1304056" y="0"/>
+                </a:cubicBezTo>
+                <a:cubicBezTo>
+                  <a:pt x="1579456" y="16000"/>
+                  <a:pt x="1703881" y="12176"/>
+                  <a:pt x="2048256" y="0"/>
+                </a:cubicBezTo>
+                <a:cubicBezTo>
+                  <a:pt x="2046264" y="239847"/>
+                  <a:pt x="2076706" y="432103"/>
+                  <a:pt x="2048256" y="619744"/>
+                </a:cubicBezTo>
+                <a:cubicBezTo>
+                  <a:pt x="2019806" y="807385"/>
+                  <a:pt x="2034863" y="1080410"/>
+                  <a:pt x="2048256" y="1239488"/>
+                </a:cubicBezTo>
+                <a:cubicBezTo>
+                  <a:pt x="2061649" y="1398566"/>
+                  <a:pt x="2045510" y="1613183"/>
+                  <a:pt x="2048256" y="1770698"/>
+                </a:cubicBezTo>
+                <a:cubicBezTo>
+                  <a:pt x="2051003" y="1928213"/>
+                  <a:pt x="2074513" y="2089042"/>
+                  <a:pt x="2048256" y="2360930"/>
+                </a:cubicBezTo>
+                <a:cubicBezTo>
+                  <a:pt x="2021999" y="2632818"/>
+                  <a:pt x="2041826" y="2795804"/>
+                  <a:pt x="2048256" y="2951163"/>
+                </a:cubicBezTo>
+                <a:cubicBezTo>
+                  <a:pt x="1777615" y="2949990"/>
+                  <a:pt x="1590074" y="2922595"/>
+                  <a:pt x="1385987" y="2951163"/>
+                </a:cubicBezTo>
+                <a:cubicBezTo>
+                  <a:pt x="1181900" y="2979731"/>
+                  <a:pt x="937289" y="2925220"/>
+                  <a:pt x="703235" y="2951163"/>
+                </a:cubicBezTo>
+                <a:cubicBezTo>
+                  <a:pt x="469181" y="2977106"/>
+                  <a:pt x="279028" y="2952897"/>
+                  <a:pt x="0" y="2951163"/>
+                </a:cubicBezTo>
+                <a:cubicBezTo>
+                  <a:pt x="-12688" y="2660430"/>
+                  <a:pt x="3295" y="2469288"/>
+                  <a:pt x="0" y="2331419"/>
+                </a:cubicBezTo>
+                <a:cubicBezTo>
+                  <a:pt x="-3295" y="2193550"/>
+                  <a:pt x="-19903" y="1834509"/>
+                  <a:pt x="0" y="1682163"/>
+                </a:cubicBezTo>
+                <a:cubicBezTo>
+                  <a:pt x="19903" y="1529817"/>
+                  <a:pt x="4229" y="1363192"/>
+                  <a:pt x="0" y="1062419"/>
+                </a:cubicBezTo>
+                <a:cubicBezTo>
+                  <a:pt x="-4229" y="761646"/>
+                  <a:pt x="529" y="476222"/>
+                  <a:pt x="0" y="0"/>
+                </a:cubicBezTo>
+                <a:close/>
+              </a:path>
+              <a:path w="2048256" h="2951163" stroke="0" extrusionOk="0">
+                <a:moveTo>
+                  <a:pt x="0" y="0"/>
+                </a:moveTo>
+                <a:cubicBezTo>
+                  <a:pt x="202094" y="13324"/>
+                  <a:pt x="347226" y="23935"/>
+                  <a:pt x="621304" y="0"/>
+                </a:cubicBezTo>
+                <a:cubicBezTo>
+                  <a:pt x="895382" y="-23935"/>
+                  <a:pt x="1070239" y="14752"/>
+                  <a:pt x="1263091" y="0"/>
+                </a:cubicBezTo>
+                <a:cubicBezTo>
+                  <a:pt x="1455943" y="-14752"/>
+                  <a:pt x="1811845" y="25403"/>
+                  <a:pt x="2048256" y="0"/>
+                </a:cubicBezTo>
+                <a:cubicBezTo>
+                  <a:pt x="2060438" y="245709"/>
+                  <a:pt x="2038713" y="343479"/>
+                  <a:pt x="2048256" y="560721"/>
+                </a:cubicBezTo>
+                <a:cubicBezTo>
+                  <a:pt x="2057799" y="777963"/>
+                  <a:pt x="2078146" y="886218"/>
+                  <a:pt x="2048256" y="1209977"/>
+                </a:cubicBezTo>
+                <a:cubicBezTo>
+                  <a:pt x="2018366" y="1533736"/>
+                  <a:pt x="2041257" y="1542940"/>
+                  <a:pt x="2048256" y="1711675"/>
+                </a:cubicBezTo>
+                <a:cubicBezTo>
+                  <a:pt x="2055255" y="1880410"/>
+                  <a:pt x="2058153" y="2114975"/>
+                  <a:pt x="2048256" y="2242884"/>
+                </a:cubicBezTo>
+                <a:cubicBezTo>
+                  <a:pt x="2038359" y="2370793"/>
+                  <a:pt x="2079163" y="2753717"/>
+                  <a:pt x="2048256" y="2951163"/>
+                </a:cubicBezTo>
+                <a:cubicBezTo>
+                  <a:pt x="1902866" y="2942189"/>
+                  <a:pt x="1732100" y="2949788"/>
+                  <a:pt x="1426952" y="2951163"/>
+                </a:cubicBezTo>
+                <a:cubicBezTo>
+                  <a:pt x="1121804" y="2952538"/>
+                  <a:pt x="1052260" y="2937349"/>
+                  <a:pt x="785165" y="2951163"/>
+                </a:cubicBezTo>
+                <a:cubicBezTo>
+                  <a:pt x="518070" y="2964977"/>
+                  <a:pt x="300455" y="2971486"/>
+                  <a:pt x="0" y="2951163"/>
+                </a:cubicBezTo>
+                <a:cubicBezTo>
+                  <a:pt x="14797" y="2840414"/>
+                  <a:pt x="24747" y="2604392"/>
+                  <a:pt x="0" y="2449465"/>
+                </a:cubicBezTo>
+                <a:cubicBezTo>
+                  <a:pt x="-24747" y="2294538"/>
+                  <a:pt x="12162" y="2112558"/>
+                  <a:pt x="0" y="1829721"/>
+                </a:cubicBezTo>
+                <a:cubicBezTo>
+                  <a:pt x="-12162" y="1546884"/>
+                  <a:pt x="8429" y="1364361"/>
+                  <a:pt x="0" y="1239488"/>
+                </a:cubicBezTo>
+                <a:cubicBezTo>
+                  <a:pt x="-8429" y="1114615"/>
+                  <a:pt x="7141" y="949936"/>
+                  <a:pt x="0" y="708279"/>
+                </a:cubicBezTo>
+                <a:cubicBezTo>
+                  <a:pt x="-7141" y="466622"/>
+                  <a:pt x="-34761" y="237017"/>
+                  <a:pt x="0" y="0"/>
+                </a:cubicBezTo>
+                <a:close/>
+              </a:path>
+            </a:pathLst>
+          </a:custGeom>
+          <a:solidFill>
+            <a:schemeClr val="bg1"/>
+          </a:solidFill>
+          <a:ln w="25400">
+            <a:solidFill>
+              <a:schemeClr val="tx1">
+                <a:lumMod val="95000"/>
+                <a:lumOff val="5000"/>
+              </a:schemeClr>
+            </a:solidFill>
+            <a:extLst>
+              <a:ext uri="{C807C97D-BFC1-408E-A445-0C87EB9F89A2}">
+                <ask:lineSketchStyleProps xmlns:ask="http://schemas.microsoft.com/office/drawing/2018/sketchyshapes" sd="1762638383">
+                  <a:prstGeom prst="rect">
+                    <a:avLst/>
+                  </a:prstGeom>
+                  <ask:type>
+                    <ask:lineSketchFreehand/>
+                  </ask:type>
+                </ask:lineSketchStyleProps>
+              </a:ext>
+            </a:extLst>
+          </a:ln>
+        </p:spPr>
+        <p:style>
+          <a:lnRef idx="2">
+            <a:schemeClr val="accent3">
+              <a:shade val="50000"/>
+            </a:schemeClr>
+          </a:lnRef>
+          <a:fillRef idx="1">
+            <a:schemeClr val="accent3"/>
+          </a:fillRef>
+          <a:effectRef idx="0">
+            <a:schemeClr val="accent3"/>
+          </a:effectRef>
+          <a:fontRef idx="minor">
+            <a:schemeClr val="lt1"/>
+          </a:fontRef>
+        </p:style>
+        <p:txBody>
+          <a:bodyPr rtlCol="0" anchor="ctr"/>
+          <a:lstStyle/>
+          <a:p>
+            <a:pPr algn="ctr"/>
+            <a:endParaRPr lang="de-AT"/>
+          </a:p>
+        </p:txBody>
+      </p:sp>
+      <p:sp>
+        <p:nvSpPr>
+          <p:cNvPr id="9" name="Rechteck 2">
+            <a:extLst>
+              <a:ext uri="{FF2B5EF4-FFF2-40B4-BE49-F238E27FC236}">
+                <a16:creationId xmlns:a16="http://schemas.microsoft.com/office/drawing/2014/main" id="{0FA451E3-6E2F-3D3E-34EF-DEA5DFBDF183}"/>
+              </a:ext>
+              <a:ext uri="{C183D7F6-B498-43B3-948B-1728B52AA6E4}">
+                <adec:decorative xmlns:adec="http://schemas.microsoft.com/office/drawing/2017/decorative" val="1"/>
+              </a:ext>
+            </a:extLst>
+          </p:cNvPr>
+          <p:cNvSpPr/>
+          <p:nvPr/>
+        </p:nvSpPr>
+        <p:spPr>
+          <a:xfrm>
+            <a:off x="4581525" y="525462"/>
+            <a:ext cx="2051050" cy="2951163"/>
+          </a:xfrm>
+          <a:custGeom>
+            <a:avLst/>
+            <a:gdLst>
+              <a:gd name="csX0" fmla="*/ 0 w 2051050"/>
+              <a:gd name="csY0" fmla="*/ 0 h 2951163"/>
+              <a:gd name="csX1" fmla="*/ 683683 w 2051050"/>
+              <a:gd name="csY1" fmla="*/ 0 h 2951163"/>
+              <a:gd name="csX2" fmla="*/ 1305835 w 2051050"/>
+              <a:gd name="csY2" fmla="*/ 0 h 2951163"/>
+              <a:gd name="csX3" fmla="*/ 2051050 w 2051050"/>
+              <a:gd name="csY3" fmla="*/ 0 h 2951163"/>
+              <a:gd name="csX4" fmla="*/ 2051050 w 2051050"/>
+              <a:gd name="csY4" fmla="*/ 619744 h 2951163"/>
+              <a:gd name="csX5" fmla="*/ 2051050 w 2051050"/>
+              <a:gd name="csY5" fmla="*/ 1239488 h 2951163"/>
+              <a:gd name="csX6" fmla="*/ 2051050 w 2051050"/>
+              <a:gd name="csY6" fmla="*/ 1770698 h 2951163"/>
+              <a:gd name="csX7" fmla="*/ 2051050 w 2051050"/>
+              <a:gd name="csY7" fmla="*/ 2360930 h 2951163"/>
+              <a:gd name="csX8" fmla="*/ 2051050 w 2051050"/>
+              <a:gd name="csY8" fmla="*/ 2951163 h 2951163"/>
+              <a:gd name="csX9" fmla="*/ 1387877 w 2051050"/>
+              <a:gd name="csY9" fmla="*/ 2951163 h 2951163"/>
+              <a:gd name="csX10" fmla="*/ 704194 w 2051050"/>
+              <a:gd name="csY10" fmla="*/ 2951163 h 2951163"/>
+              <a:gd name="csX11" fmla="*/ 0 w 2051050"/>
+              <a:gd name="csY11" fmla="*/ 2951163 h 2951163"/>
+              <a:gd name="csX12" fmla="*/ 0 w 2051050"/>
+              <a:gd name="csY12" fmla="*/ 2331419 h 2951163"/>
+              <a:gd name="csX13" fmla="*/ 0 w 2051050"/>
+              <a:gd name="csY13" fmla="*/ 1682163 h 2951163"/>
+              <a:gd name="csX14" fmla="*/ 0 w 2051050"/>
+              <a:gd name="csY14" fmla="*/ 1062419 h 2951163"/>
+              <a:gd name="csX15" fmla="*/ 0 w 2051050"/>
+              <a:gd name="csY15" fmla="*/ 0 h 2951163"/>
+            </a:gdLst>
+            <a:ahLst/>
+            <a:cxnLst>
+              <a:cxn ang="0">
+                <a:pos x="csX0" y="csY0"/>
+              </a:cxn>
+              <a:cxn ang="0">
+                <a:pos x="csX1" y="csY1"/>
+              </a:cxn>
+              <a:cxn ang="0">
+                <a:pos x="csX2" y="csY2"/>
+              </a:cxn>
+              <a:cxn ang="0">
+                <a:pos x="csX3" y="csY3"/>
+              </a:cxn>
+              <a:cxn ang="0">
+                <a:pos x="csX4" y="csY4"/>
+              </a:cxn>
+              <a:cxn ang="0">
+                <a:pos x="csX5" y="csY5"/>
+              </a:cxn>
+              <a:cxn ang="0">
+                <a:pos x="csX6" y="csY6"/>
+              </a:cxn>
+              <a:cxn ang="0">
+                <a:pos x="csX7" y="csY7"/>
+              </a:cxn>
+              <a:cxn ang="0">
+                <a:pos x="csX8" y="csY8"/>
+              </a:cxn>
+              <a:cxn ang="0">
+                <a:pos x="csX9" y="csY9"/>
+              </a:cxn>
+              <a:cxn ang="0">
+                <a:pos x="csX10" y="csY10"/>
+              </a:cxn>
+              <a:cxn ang="0">
+                <a:pos x="csX11" y="csY11"/>
+              </a:cxn>
+              <a:cxn ang="0">
+                <a:pos x="csX12" y="csY12"/>
+              </a:cxn>
+              <a:cxn ang="0">
+                <a:pos x="csX13" y="csY13"/>
+              </a:cxn>
+              <a:cxn ang="0">
+                <a:pos x="csX14" y="csY14"/>
+              </a:cxn>
+              <a:cxn ang="0">
+                <a:pos x="csX15" y="csY15"/>
+              </a:cxn>
+            </a:cxnLst>
+            <a:rect l="l" t="t" r="r" b="b"/>
+            <a:pathLst>
+              <a:path w="2051050" h="2951163" fill="none" extrusionOk="0">
+                <a:moveTo>
+                  <a:pt x="0" y="0"/>
+                </a:moveTo>
+                <a:cubicBezTo>
+                  <a:pt x="267367" y="14427"/>
+                  <a:pt x="349033" y="-12086"/>
+                  <a:pt x="683683" y="0"/>
+                </a:cubicBezTo>
+                <a:cubicBezTo>
+                  <a:pt x="1018333" y="12086"/>
+                  <a:pt x="1022416" y="-8631"/>
+                  <a:pt x="1305835" y="0"/>
+                </a:cubicBezTo>
+                <a:cubicBezTo>
+                  <a:pt x="1589254" y="8631"/>
+                  <a:pt x="1888174" y="-24305"/>
+                  <a:pt x="2051050" y="0"/>
+                </a:cubicBezTo>
+                <a:cubicBezTo>
+                  <a:pt x="2049058" y="239847"/>
+                  <a:pt x="2079500" y="432103"/>
+                  <a:pt x="2051050" y="619744"/>
+                </a:cubicBezTo>
+                <a:cubicBezTo>
+                  <a:pt x="2022600" y="807385"/>
+                  <a:pt x="2037657" y="1080410"/>
+                  <a:pt x="2051050" y="1239488"/>
+                </a:cubicBezTo>
+                <a:cubicBezTo>
+                  <a:pt x="2064443" y="1398566"/>
+                  <a:pt x="2048304" y="1613183"/>
+                  <a:pt x="2051050" y="1770698"/>
+                </a:cubicBezTo>
+                <a:cubicBezTo>
+                  <a:pt x="2053797" y="1928213"/>
+                  <a:pt x="2077307" y="2089042"/>
+                  <a:pt x="2051050" y="2360930"/>
+                </a:cubicBezTo>
+                <a:cubicBezTo>
+                  <a:pt x="2024793" y="2632818"/>
+                  <a:pt x="2044620" y="2795804"/>
+                  <a:pt x="2051050" y="2951163"/>
+                </a:cubicBezTo>
+                <a:cubicBezTo>
+                  <a:pt x="1792864" y="2945869"/>
+                  <a:pt x="1550867" y="2982853"/>
+                  <a:pt x="1387877" y="2951163"/>
+                </a:cubicBezTo>
+                <a:cubicBezTo>
+                  <a:pt x="1224887" y="2919473"/>
+                  <a:pt x="943563" y="2930389"/>
+                  <a:pt x="704194" y="2951163"/>
+                </a:cubicBezTo>
+                <a:cubicBezTo>
+                  <a:pt x="464825" y="2971937"/>
+                  <a:pt x="330882" y="2923973"/>
+                  <a:pt x="0" y="2951163"/>
+                </a:cubicBezTo>
+                <a:cubicBezTo>
+                  <a:pt x="-12688" y="2660430"/>
+                  <a:pt x="3295" y="2469288"/>
+                  <a:pt x="0" y="2331419"/>
+                </a:cubicBezTo>
+                <a:cubicBezTo>
+                  <a:pt x="-3295" y="2193550"/>
+                  <a:pt x="-19903" y="1834509"/>
+                  <a:pt x="0" y="1682163"/>
+                </a:cubicBezTo>
+                <a:cubicBezTo>
+                  <a:pt x="19903" y="1529817"/>
+                  <a:pt x="4229" y="1363192"/>
+                  <a:pt x="0" y="1062419"/>
+                </a:cubicBezTo>
+                <a:cubicBezTo>
+                  <a:pt x="-4229" y="761646"/>
+                  <a:pt x="529" y="476222"/>
+                  <a:pt x="0" y="0"/>
+                </a:cubicBezTo>
+                <a:close/>
+              </a:path>
+              <a:path w="2051050" h="2951163" stroke="0" extrusionOk="0">
+                <a:moveTo>
+                  <a:pt x="0" y="0"/>
+                </a:moveTo>
+                <a:cubicBezTo>
+                  <a:pt x="306279" y="21950"/>
+                  <a:pt x="339620" y="1228"/>
+                  <a:pt x="622152" y="0"/>
+                </a:cubicBezTo>
+                <a:cubicBezTo>
+                  <a:pt x="904684" y="-1228"/>
+                  <a:pt x="1011457" y="20320"/>
+                  <a:pt x="1264814" y="0"/>
+                </a:cubicBezTo>
+                <a:cubicBezTo>
+                  <a:pt x="1518171" y="-20320"/>
+                  <a:pt x="1857420" y="-30729"/>
+                  <a:pt x="2051050" y="0"/>
+                </a:cubicBezTo>
+                <a:cubicBezTo>
+                  <a:pt x="2063232" y="245709"/>
+                  <a:pt x="2041507" y="343479"/>
+                  <a:pt x="2051050" y="560721"/>
+                </a:cubicBezTo>
+                <a:cubicBezTo>
+                  <a:pt x="2060593" y="777963"/>
+                  <a:pt x="2080940" y="886218"/>
+                  <a:pt x="2051050" y="1209977"/>
+                </a:cubicBezTo>
+                <a:cubicBezTo>
+                  <a:pt x="2021160" y="1533736"/>
+                  <a:pt x="2044051" y="1542940"/>
+                  <a:pt x="2051050" y="1711675"/>
+                </a:cubicBezTo>
+                <a:cubicBezTo>
+                  <a:pt x="2058049" y="1880410"/>
+                  <a:pt x="2060947" y="2114975"/>
+                  <a:pt x="2051050" y="2242884"/>
+                </a:cubicBezTo>
+                <a:cubicBezTo>
+                  <a:pt x="2041153" y="2370793"/>
+                  <a:pt x="2081957" y="2753717"/>
+                  <a:pt x="2051050" y="2951163"/>
+                </a:cubicBezTo>
+                <a:cubicBezTo>
+                  <a:pt x="1910115" y="2975025"/>
+                  <a:pt x="1602720" y="2978995"/>
+                  <a:pt x="1428898" y="2951163"/>
+                </a:cubicBezTo>
+                <a:cubicBezTo>
+                  <a:pt x="1255076" y="2923331"/>
+                  <a:pt x="924160" y="2933002"/>
+                  <a:pt x="786236" y="2951163"/>
+                </a:cubicBezTo>
+                <a:cubicBezTo>
+                  <a:pt x="648312" y="2969324"/>
+                  <a:pt x="370261" y="2923618"/>
+                  <a:pt x="0" y="2951163"/>
+                </a:cubicBezTo>
+                <a:cubicBezTo>
+                  <a:pt x="14797" y="2840414"/>
+                  <a:pt x="24747" y="2604392"/>
+                  <a:pt x="0" y="2449465"/>
+                </a:cubicBezTo>
+                <a:cubicBezTo>
+                  <a:pt x="-24747" y="2294538"/>
+                  <a:pt x="12162" y="2112558"/>
+                  <a:pt x="0" y="1829721"/>
+                </a:cubicBezTo>
+                <a:cubicBezTo>
+                  <a:pt x="-12162" y="1546884"/>
+                  <a:pt x="8429" y="1364361"/>
+                  <a:pt x="0" y="1239488"/>
+                </a:cubicBezTo>
+                <a:cubicBezTo>
+                  <a:pt x="-8429" y="1114615"/>
+                  <a:pt x="7141" y="949936"/>
+                  <a:pt x="0" y="708279"/>
+                </a:cubicBezTo>
+                <a:cubicBezTo>
+                  <a:pt x="-7141" y="466622"/>
+                  <a:pt x="-34761" y="237017"/>
+                  <a:pt x="0" y="0"/>
+                </a:cubicBezTo>
+                <a:close/>
+              </a:path>
+            </a:pathLst>
+          </a:custGeom>
+          <a:solidFill>
+            <a:schemeClr val="bg1"/>
+          </a:solidFill>
+          <a:ln w="25400">
+            <a:solidFill>
+              <a:schemeClr val="tx1">
+                <a:lumMod val="95000"/>
+                <a:lumOff val="5000"/>
+              </a:schemeClr>
+            </a:solidFill>
+            <a:extLst>
+              <a:ext uri="{C807C97D-BFC1-408E-A445-0C87EB9F89A2}">
+                <ask:lineSketchStyleProps xmlns:ask="http://schemas.microsoft.com/office/drawing/2018/sketchyshapes" sd="1762638383">
+                  <a:prstGeom prst="rect">
+                    <a:avLst/>
+                  </a:prstGeom>
+                  <ask:type>
+                    <ask:lineSketchFreehand/>
+                  </ask:type>
+                </ask:lineSketchStyleProps>
+              </a:ext>
+            </a:extLst>
+          </a:ln>
+        </p:spPr>
+        <p:style>
+          <a:lnRef idx="2">
+            <a:schemeClr val="accent3">
+              <a:shade val="50000"/>
+            </a:schemeClr>
+          </a:lnRef>
+          <a:fillRef idx="1">
+            <a:schemeClr val="accent3"/>
+          </a:fillRef>
+          <a:effectRef idx="0">
+            <a:schemeClr val="accent3"/>
+          </a:effectRef>
+          <a:fontRef idx="minor">
+            <a:schemeClr val="lt1"/>
+          </a:fontRef>
+        </p:style>
+        <p:txBody>
+          <a:bodyPr rtlCol="0" anchor="ctr"/>
+          <a:lstStyle/>
+          <a:p>
+            <a:pPr algn="ctr"/>
+            <a:endParaRPr lang="de-AT"/>
+          </a:p>
+        </p:txBody>
+      </p:sp>
+      <p:sp>
+        <p:nvSpPr>
+          <p:cNvPr id="13" name="Rechteck 3">
+            <a:extLst>
+              <a:ext uri="{FF2B5EF4-FFF2-40B4-BE49-F238E27FC236}">
+                <a16:creationId xmlns:a16="http://schemas.microsoft.com/office/drawing/2014/main" id="{1A967792-97C0-2AE0-5B2C-5095DEA6F0EC}"/>
+              </a:ext>
+              <a:ext uri="{C183D7F6-B498-43B3-948B-1728B52AA6E4}">
+                <adec:decorative xmlns:adec="http://schemas.microsoft.com/office/drawing/2017/decorative" val="1"/>
+              </a:ext>
+            </a:extLst>
+          </p:cNvPr>
+          <p:cNvSpPr/>
+          <p:nvPr/>
+        </p:nvSpPr>
+        <p:spPr>
+          <a:xfrm>
+            <a:off x="225425" y="3622675"/>
+            <a:ext cx="4248150" cy="2951163"/>
+          </a:xfrm>
+          <a:custGeom>
+            <a:avLst/>
+            <a:gdLst>
+              <a:gd name="csX0" fmla="*/ 0 w 4248150"/>
+              <a:gd name="csY0" fmla="*/ 0 h 2951163"/>
+              <a:gd name="csX1" fmla="*/ 649360 w 4248150"/>
+              <a:gd name="csY1" fmla="*/ 0 h 2951163"/>
+              <a:gd name="csX2" fmla="*/ 1256239 w 4248150"/>
+              <a:gd name="csY2" fmla="*/ 0 h 2951163"/>
+              <a:gd name="csX3" fmla="*/ 1820636 w 4248150"/>
+              <a:gd name="csY3" fmla="*/ 0 h 2951163"/>
+              <a:gd name="csX4" fmla="*/ 2512477 w 4248150"/>
+              <a:gd name="csY4" fmla="*/ 0 h 2951163"/>
+              <a:gd name="csX5" fmla="*/ 3204319 w 4248150"/>
+              <a:gd name="csY5" fmla="*/ 0 h 2951163"/>
+              <a:gd name="csX6" fmla="*/ 4248150 w 4248150"/>
+              <a:gd name="csY6" fmla="*/ 0 h 2951163"/>
+              <a:gd name="csX7" fmla="*/ 4248150 w 4248150"/>
+              <a:gd name="csY7" fmla="*/ 649256 h 2951163"/>
+              <a:gd name="csX8" fmla="*/ 4248150 w 4248150"/>
+              <a:gd name="csY8" fmla="*/ 1239488 h 2951163"/>
+              <a:gd name="csX9" fmla="*/ 4248150 w 4248150"/>
+              <a:gd name="csY9" fmla="*/ 1829721 h 2951163"/>
+              <a:gd name="csX10" fmla="*/ 4248150 w 4248150"/>
+              <a:gd name="csY10" fmla="*/ 2360930 h 2951163"/>
+              <a:gd name="csX11" fmla="*/ 4248150 w 4248150"/>
+              <a:gd name="csY11" fmla="*/ 2951163 h 2951163"/>
+              <a:gd name="csX12" fmla="*/ 3683753 w 4248150"/>
+              <a:gd name="csY12" fmla="*/ 2951163 h 2951163"/>
+              <a:gd name="csX13" fmla="*/ 3161837 w 4248150"/>
+              <a:gd name="csY13" fmla="*/ 2951163 h 2951163"/>
+              <a:gd name="csX14" fmla="*/ 2554959 w 4248150"/>
+              <a:gd name="csY14" fmla="*/ 2951163 h 2951163"/>
+              <a:gd name="csX15" fmla="*/ 2033043 w 4248150"/>
+              <a:gd name="csY15" fmla="*/ 2951163 h 2951163"/>
+              <a:gd name="csX16" fmla="*/ 1383683 w 4248150"/>
+              <a:gd name="csY16" fmla="*/ 2951163 h 2951163"/>
+              <a:gd name="csX17" fmla="*/ 819286 w 4248150"/>
+              <a:gd name="csY17" fmla="*/ 2951163 h 2951163"/>
+              <a:gd name="csX18" fmla="*/ 0 w 4248150"/>
+              <a:gd name="csY18" fmla="*/ 2951163 h 2951163"/>
+              <a:gd name="csX19" fmla="*/ 0 w 4248150"/>
+              <a:gd name="csY19" fmla="*/ 2449465 h 2951163"/>
+              <a:gd name="csX20" fmla="*/ 0 w 4248150"/>
+              <a:gd name="csY20" fmla="*/ 1947768 h 2951163"/>
+              <a:gd name="csX21" fmla="*/ 0 w 4248150"/>
+              <a:gd name="csY21" fmla="*/ 1328023 h 2951163"/>
+              <a:gd name="csX22" fmla="*/ 0 w 4248150"/>
+              <a:gd name="csY22" fmla="*/ 737791 h 2951163"/>
+              <a:gd name="csX23" fmla="*/ 0 w 4248150"/>
+              <a:gd name="csY23" fmla="*/ 0 h 2951163"/>
+            </a:gdLst>
+            <a:ahLst/>
+            <a:cxnLst>
+              <a:cxn ang="0">
+                <a:pos x="csX0" y="csY0"/>
+              </a:cxn>
+              <a:cxn ang="0">
+                <a:pos x="csX1" y="csY1"/>
+              </a:cxn>
+              <a:cxn ang="0">
+                <a:pos x="csX2" y="csY2"/>
+              </a:cxn>
+              <a:cxn ang="0">
+                <a:pos x="csX3" y="csY3"/>
+              </a:cxn>
+              <a:cxn ang="0">
+                <a:pos x="csX4" y="csY4"/>
+              </a:cxn>
+              <a:cxn ang="0">
+                <a:pos x="csX5" y="csY5"/>
+              </a:cxn>
+              <a:cxn ang="0">
+                <a:pos x="csX6" y="csY6"/>
+              </a:cxn>
+              <a:cxn ang="0">
+                <a:pos x="csX7" y="csY7"/>
+              </a:cxn>
+              <a:cxn ang="0">
+                <a:pos x="csX8" y="csY8"/>
+              </a:cxn>
+              <a:cxn ang="0">
+                <a:pos x="csX9" y="csY9"/>
+              </a:cxn>
+              <a:cxn ang="0">
+                <a:pos x="csX10" y="csY10"/>
+              </a:cxn>
+              <a:cxn ang="0">
+                <a:pos x="csX11" y="csY11"/>
+              </a:cxn>
+              <a:cxn ang="0">
+                <a:pos x="csX12" y="csY12"/>
+              </a:cxn>
+              <a:cxn ang="0">
+                <a:pos x="csX13" y="csY13"/>
+              </a:cxn>
+              <a:cxn ang="0">
+                <a:pos x="csX14" y="csY14"/>
+              </a:cxn>
+              <a:cxn ang="0">
+                <a:pos x="csX15" y="csY15"/>
+              </a:cxn>
+              <a:cxn ang="0">
+                <a:pos x="csX16" y="csY16"/>
+              </a:cxn>
+              <a:cxn ang="0">
+                <a:pos x="csX17" y="csY17"/>
+              </a:cxn>
+              <a:cxn ang="0">
+                <a:pos x="csX18" y="csY18"/>
+              </a:cxn>
+              <a:cxn ang="0">
+                <a:pos x="csX19" y="csY19"/>
+              </a:cxn>
+              <a:cxn ang="0">
+                <a:pos x="csX20" y="csY20"/>
+              </a:cxn>
+              <a:cxn ang="0">
+                <a:pos x="csX21" y="csY21"/>
+              </a:cxn>
+              <a:cxn ang="0">
+                <a:pos x="csX22" y="csY22"/>
+              </a:cxn>
+              <a:cxn ang="0">
+                <a:pos x="csX23" y="csY23"/>
+              </a:cxn>
+            </a:cxnLst>
+            <a:rect l="l" t="t" r="r" b="b"/>
+            <a:pathLst>
+              <a:path w="4248150" h="2951163" fill="none" extrusionOk="0">
+                <a:moveTo>
+                  <a:pt x="0" y="0"/>
+                </a:moveTo>
+                <a:cubicBezTo>
+                  <a:pt x="317880" y="21825"/>
+                  <a:pt x="434834" y="10906"/>
+                  <a:pt x="649360" y="0"/>
+                </a:cubicBezTo>
+                <a:cubicBezTo>
+                  <a:pt x="863886" y="-10906"/>
+                  <a:pt x="1065298" y="24423"/>
+                  <a:pt x="1256239" y="0"/>
+                </a:cubicBezTo>
+                <a:cubicBezTo>
+                  <a:pt x="1447180" y="-24423"/>
+                  <a:pt x="1566806" y="19345"/>
+                  <a:pt x="1820636" y="0"/>
+                </a:cubicBezTo>
+                <a:cubicBezTo>
+                  <a:pt x="2074466" y="-19345"/>
+                  <a:pt x="2354963" y="-20815"/>
+                  <a:pt x="2512477" y="0"/>
+                </a:cubicBezTo>
+                <a:cubicBezTo>
+                  <a:pt x="2669991" y="20815"/>
+                  <a:pt x="2900936" y="19344"/>
+                  <a:pt x="3204319" y="0"/>
+                </a:cubicBezTo>
+                <a:cubicBezTo>
+                  <a:pt x="3507702" y="-19344"/>
+                  <a:pt x="3769996" y="45574"/>
+                  <a:pt x="4248150" y="0"/>
+                </a:cubicBezTo>
+                <a:cubicBezTo>
+                  <a:pt x="4268053" y="302134"/>
+                  <a:pt x="4217183" y="366146"/>
+                  <a:pt x="4248150" y="649256"/>
+                </a:cubicBezTo>
+                <a:cubicBezTo>
+                  <a:pt x="4279117" y="932366"/>
+                  <a:pt x="4244680" y="948471"/>
+                  <a:pt x="4248150" y="1239488"/>
+                </a:cubicBezTo>
+                <a:cubicBezTo>
+                  <a:pt x="4251620" y="1530505"/>
+                  <a:pt x="4229121" y="1579728"/>
+                  <a:pt x="4248150" y="1829721"/>
+                </a:cubicBezTo>
+                <a:cubicBezTo>
+                  <a:pt x="4267179" y="2079714"/>
+                  <a:pt x="4253357" y="2167357"/>
+                  <a:pt x="4248150" y="2360930"/>
+                </a:cubicBezTo>
+                <a:cubicBezTo>
+                  <a:pt x="4242943" y="2554503"/>
+                  <a:pt x="4222023" y="2716323"/>
+                  <a:pt x="4248150" y="2951163"/>
+                </a:cubicBezTo>
+                <a:cubicBezTo>
+                  <a:pt x="4003048" y="2941943"/>
+                  <a:pt x="3963122" y="2961960"/>
+                  <a:pt x="3683753" y="2951163"/>
+                </a:cubicBezTo>
+                <a:cubicBezTo>
+                  <a:pt x="3404384" y="2940366"/>
+                  <a:pt x="3365316" y="2937697"/>
+                  <a:pt x="3161837" y="2951163"/>
+                </a:cubicBezTo>
+                <a:cubicBezTo>
+                  <a:pt x="2958358" y="2964629"/>
+                  <a:pt x="2816511" y="2935387"/>
+                  <a:pt x="2554959" y="2951163"/>
+                </a:cubicBezTo>
+                <a:cubicBezTo>
+                  <a:pt x="2293407" y="2966939"/>
+                  <a:pt x="2215392" y="2951286"/>
+                  <a:pt x="2033043" y="2951163"/>
+                </a:cubicBezTo>
+                <a:cubicBezTo>
+                  <a:pt x="1850694" y="2951040"/>
+                  <a:pt x="1623404" y="2938797"/>
+                  <a:pt x="1383683" y="2951163"/>
+                </a:cubicBezTo>
+                <a:cubicBezTo>
+                  <a:pt x="1143962" y="2963529"/>
+                  <a:pt x="974086" y="2978242"/>
+                  <a:pt x="819286" y="2951163"/>
+                </a:cubicBezTo>
+                <a:cubicBezTo>
+                  <a:pt x="664486" y="2924084"/>
+                  <a:pt x="314977" y="2985871"/>
+                  <a:pt x="0" y="2951163"/>
+                </a:cubicBezTo>
+                <a:cubicBezTo>
+                  <a:pt x="10400" y="2833403"/>
+                  <a:pt x="-8079" y="2689741"/>
+                  <a:pt x="0" y="2449465"/>
+                </a:cubicBezTo>
+                <a:cubicBezTo>
+                  <a:pt x="8079" y="2209189"/>
+                  <a:pt x="-20119" y="2145230"/>
+                  <a:pt x="0" y="1947768"/>
+                </a:cubicBezTo>
+                <a:cubicBezTo>
+                  <a:pt x="20119" y="1750306"/>
+                  <a:pt x="3698" y="1536620"/>
+                  <a:pt x="0" y="1328023"/>
+                </a:cubicBezTo>
+                <a:cubicBezTo>
+                  <a:pt x="-3698" y="1119426"/>
+                  <a:pt x="-18480" y="909479"/>
+                  <a:pt x="0" y="737791"/>
+                </a:cubicBezTo>
+                <a:cubicBezTo>
+                  <a:pt x="18480" y="566103"/>
+                  <a:pt x="-6834" y="283797"/>
+                  <a:pt x="0" y="0"/>
+                </a:cubicBezTo>
+                <a:close/>
+              </a:path>
+              <a:path w="4248150" h="2951163" stroke="0" extrusionOk="0">
+                <a:moveTo>
+                  <a:pt x="0" y="0"/>
+                </a:moveTo>
+                <a:cubicBezTo>
+                  <a:pt x="150604" y="22448"/>
+                  <a:pt x="240946" y="-1826"/>
+                  <a:pt x="479434" y="0"/>
+                </a:cubicBezTo>
+                <a:cubicBezTo>
+                  <a:pt x="717922" y="1826"/>
+                  <a:pt x="792817" y="3941"/>
+                  <a:pt x="1001350" y="0"/>
+                </a:cubicBezTo>
+                <a:cubicBezTo>
+                  <a:pt x="1209883" y="-3941"/>
+                  <a:pt x="1470736" y="22828"/>
+                  <a:pt x="1608228" y="0"/>
+                </a:cubicBezTo>
+                <a:cubicBezTo>
+                  <a:pt x="1745720" y="-22828"/>
+                  <a:pt x="2019360" y="20245"/>
+                  <a:pt x="2172625" y="0"/>
+                </a:cubicBezTo>
+                <a:cubicBezTo>
+                  <a:pt x="2325890" y="-20245"/>
+                  <a:pt x="2560964" y="-13088"/>
+                  <a:pt x="2694541" y="0"/>
+                </a:cubicBezTo>
+                <a:cubicBezTo>
+                  <a:pt x="2828118" y="13088"/>
+                  <a:pt x="3097385" y="-1340"/>
+                  <a:pt x="3343901" y="0"/>
+                </a:cubicBezTo>
+                <a:cubicBezTo>
+                  <a:pt x="3590417" y="1340"/>
+                  <a:pt x="4062877" y="28857"/>
+                  <a:pt x="4248150" y="0"/>
+                </a:cubicBezTo>
+                <a:cubicBezTo>
+                  <a:pt x="4248255" y="211258"/>
+                  <a:pt x="4241679" y="514894"/>
+                  <a:pt x="4248150" y="649256"/>
+                </a:cubicBezTo>
+                <a:cubicBezTo>
+                  <a:pt x="4254621" y="783618"/>
+                  <a:pt x="4234639" y="969180"/>
+                  <a:pt x="4248150" y="1150954"/>
+                </a:cubicBezTo>
+                <a:cubicBezTo>
+                  <a:pt x="4261661" y="1332728"/>
+                  <a:pt x="4252020" y="1576998"/>
+                  <a:pt x="4248150" y="1800209"/>
+                </a:cubicBezTo>
+                <a:cubicBezTo>
+                  <a:pt x="4244280" y="2023421"/>
+                  <a:pt x="4254041" y="2072380"/>
+                  <a:pt x="4248150" y="2331419"/>
+                </a:cubicBezTo>
+                <a:cubicBezTo>
+                  <a:pt x="4242260" y="2590458"/>
+                  <a:pt x="4225186" y="2806842"/>
+                  <a:pt x="4248150" y="2951163"/>
+                </a:cubicBezTo>
+                <a:cubicBezTo>
+                  <a:pt x="3936779" y="2918452"/>
+                  <a:pt x="3837269" y="2921316"/>
+                  <a:pt x="3556308" y="2951163"/>
+                </a:cubicBezTo>
+                <a:cubicBezTo>
+                  <a:pt x="3275347" y="2981010"/>
+                  <a:pt x="3159884" y="2933481"/>
+                  <a:pt x="2991911" y="2951163"/>
+                </a:cubicBezTo>
+                <a:cubicBezTo>
+                  <a:pt x="2823938" y="2968845"/>
+                  <a:pt x="2510767" y="2921130"/>
+                  <a:pt x="2342551" y="2951163"/>
+                </a:cubicBezTo>
+                <a:cubicBezTo>
+                  <a:pt x="2174335" y="2981196"/>
+                  <a:pt x="2030374" y="2950726"/>
+                  <a:pt x="1863117" y="2951163"/>
+                </a:cubicBezTo>
+                <a:cubicBezTo>
+                  <a:pt x="1695860" y="2951600"/>
+                  <a:pt x="1603989" y="2969319"/>
+                  <a:pt x="1383683" y="2951163"/>
+                </a:cubicBezTo>
+                <a:cubicBezTo>
+                  <a:pt x="1163377" y="2933007"/>
+                  <a:pt x="1042591" y="2962639"/>
+                  <a:pt x="861768" y="2951163"/>
+                </a:cubicBezTo>
+                <a:cubicBezTo>
+                  <a:pt x="680946" y="2939687"/>
+                  <a:pt x="239181" y="2979784"/>
+                  <a:pt x="0" y="2951163"/>
+                </a:cubicBezTo>
+                <a:cubicBezTo>
+                  <a:pt x="-26144" y="2766674"/>
+                  <a:pt x="27931" y="2563789"/>
+                  <a:pt x="0" y="2390442"/>
+                </a:cubicBezTo>
+                <a:cubicBezTo>
+                  <a:pt x="-27931" y="2217095"/>
+                  <a:pt x="-19940" y="2036067"/>
+                  <a:pt x="0" y="1800209"/>
+                </a:cubicBezTo>
+                <a:cubicBezTo>
+                  <a:pt x="19940" y="1564351"/>
+                  <a:pt x="5937" y="1533559"/>
+                  <a:pt x="0" y="1269000"/>
+                </a:cubicBezTo>
+                <a:cubicBezTo>
+                  <a:pt x="-5937" y="1004441"/>
+                  <a:pt x="-2113" y="947347"/>
+                  <a:pt x="0" y="737791"/>
+                </a:cubicBezTo>
+                <a:cubicBezTo>
+                  <a:pt x="2113" y="528235"/>
+                  <a:pt x="20187" y="343573"/>
+                  <a:pt x="0" y="0"/>
+                </a:cubicBezTo>
+                <a:close/>
+              </a:path>
+            </a:pathLst>
+          </a:custGeom>
+          <a:solidFill>
+            <a:schemeClr val="bg1"/>
+          </a:solidFill>
+          <a:ln w="25400">
+            <a:solidFill>
+              <a:schemeClr val="tx1">
+                <a:lumMod val="95000"/>
+                <a:lumOff val="5000"/>
+              </a:schemeClr>
+            </a:solidFill>
+            <a:extLst>
+              <a:ext uri="{C807C97D-BFC1-408E-A445-0C87EB9F89A2}">
+                <ask:lineSketchStyleProps xmlns:ask="http://schemas.microsoft.com/office/drawing/2018/sketchyshapes" sd="1762638383">
+                  <a:prstGeom prst="rect">
+                    <a:avLst/>
+                  </a:prstGeom>
+                  <ask:type>
+                    <ask:lineSketchFreehand/>
+                  </ask:type>
+                </ask:lineSketchStyleProps>
+              </a:ext>
+            </a:extLst>
+          </a:ln>
+        </p:spPr>
+        <p:style>
+          <a:lnRef idx="2">
+            <a:schemeClr val="accent3">
+              <a:shade val="50000"/>
+            </a:schemeClr>
+          </a:lnRef>
+          <a:fillRef idx="1">
+            <a:schemeClr val="accent3"/>
+          </a:fillRef>
+          <a:effectRef idx="0">
+            <a:schemeClr val="accent3"/>
+          </a:effectRef>
+          <a:fontRef idx="minor">
+            <a:schemeClr val="lt1"/>
+          </a:fontRef>
+        </p:style>
+        <p:txBody>
+          <a:bodyPr rtlCol="0" anchor="ctr"/>
+          <a:lstStyle/>
+          <a:p>
+            <a:pPr algn="ctr"/>
+            <a:endParaRPr lang="de-AT" dirty="0"/>
+          </a:p>
+        </p:txBody>
+      </p:sp>
+      <p:sp>
+        <p:nvSpPr>
+          <p:cNvPr id="17" name="Rechteck 4">
+            <a:extLst>
+              <a:ext uri="{FF2B5EF4-FFF2-40B4-BE49-F238E27FC236}">
+                <a16:creationId xmlns:a16="http://schemas.microsoft.com/office/drawing/2014/main" id="{89AC66E1-7A90-D7B5-5909-B82623B48D72}"/>
+              </a:ext>
+              <a:ext uri="{C183D7F6-B498-43B3-948B-1728B52AA6E4}">
+                <adec:decorative xmlns:adec="http://schemas.microsoft.com/office/drawing/2017/decorative" val="1"/>
+              </a:ext>
+            </a:extLst>
+          </p:cNvPr>
+          <p:cNvSpPr/>
+          <p:nvPr/>
+        </p:nvSpPr>
+        <p:spPr>
+          <a:xfrm>
+            <a:off x="4581525" y="3624262"/>
+            <a:ext cx="2051050" cy="2951163"/>
+          </a:xfrm>
+          <a:custGeom>
+            <a:avLst/>
+            <a:gdLst>
+              <a:gd name="csX0" fmla="*/ 0 w 2051050"/>
+              <a:gd name="csY0" fmla="*/ 0 h 2951163"/>
+              <a:gd name="csX1" fmla="*/ 683683 w 2051050"/>
+              <a:gd name="csY1" fmla="*/ 0 h 2951163"/>
+              <a:gd name="csX2" fmla="*/ 1305835 w 2051050"/>
+              <a:gd name="csY2" fmla="*/ 0 h 2951163"/>
+              <a:gd name="csX3" fmla="*/ 2051050 w 2051050"/>
+              <a:gd name="csY3" fmla="*/ 0 h 2951163"/>
+              <a:gd name="csX4" fmla="*/ 2051050 w 2051050"/>
+              <a:gd name="csY4" fmla="*/ 619744 h 2951163"/>
+              <a:gd name="csX5" fmla="*/ 2051050 w 2051050"/>
+              <a:gd name="csY5" fmla="*/ 1239488 h 2951163"/>
+              <a:gd name="csX6" fmla="*/ 2051050 w 2051050"/>
+              <a:gd name="csY6" fmla="*/ 1770698 h 2951163"/>
+              <a:gd name="csX7" fmla="*/ 2051050 w 2051050"/>
+              <a:gd name="csY7" fmla="*/ 2360930 h 2951163"/>
+              <a:gd name="csX8" fmla="*/ 2051050 w 2051050"/>
+              <a:gd name="csY8" fmla="*/ 2951163 h 2951163"/>
+              <a:gd name="csX9" fmla="*/ 1387877 w 2051050"/>
+              <a:gd name="csY9" fmla="*/ 2951163 h 2951163"/>
+              <a:gd name="csX10" fmla="*/ 704194 w 2051050"/>
+              <a:gd name="csY10" fmla="*/ 2951163 h 2951163"/>
+              <a:gd name="csX11" fmla="*/ 0 w 2051050"/>
+              <a:gd name="csY11" fmla="*/ 2951163 h 2951163"/>
+              <a:gd name="csX12" fmla="*/ 0 w 2051050"/>
+              <a:gd name="csY12" fmla="*/ 2331419 h 2951163"/>
+              <a:gd name="csX13" fmla="*/ 0 w 2051050"/>
+              <a:gd name="csY13" fmla="*/ 1682163 h 2951163"/>
+              <a:gd name="csX14" fmla="*/ 0 w 2051050"/>
+              <a:gd name="csY14" fmla="*/ 1062419 h 2951163"/>
+              <a:gd name="csX15" fmla="*/ 0 w 2051050"/>
+              <a:gd name="csY15" fmla="*/ 0 h 2951163"/>
+            </a:gdLst>
+            <a:ahLst/>
+            <a:cxnLst>
+              <a:cxn ang="0">
+                <a:pos x="csX0" y="csY0"/>
+              </a:cxn>
+              <a:cxn ang="0">
+                <a:pos x="csX1" y="csY1"/>
+              </a:cxn>
+              <a:cxn ang="0">
+                <a:pos x="csX2" y="csY2"/>
+              </a:cxn>
+              <a:cxn ang="0">
+                <a:pos x="csX3" y="csY3"/>
+              </a:cxn>
+              <a:cxn ang="0">
+                <a:pos x="csX4" y="csY4"/>
+              </a:cxn>
+              <a:cxn ang="0">
+                <a:pos x="csX5" y="csY5"/>
+              </a:cxn>
+              <a:cxn ang="0">
+                <a:pos x="csX6" y="csY6"/>
+              </a:cxn>
+              <a:cxn ang="0">
+                <a:pos x="csX7" y="csY7"/>
+              </a:cxn>
+              <a:cxn ang="0">
+                <a:pos x="csX8" y="csY8"/>
+              </a:cxn>
+              <a:cxn ang="0">
+                <a:pos x="csX9" y="csY9"/>
+              </a:cxn>
+              <a:cxn ang="0">
+                <a:pos x="csX10" y="csY10"/>
+              </a:cxn>
+              <a:cxn ang="0">
+                <a:pos x="csX11" y="csY11"/>
+              </a:cxn>
+              <a:cxn ang="0">
+                <a:pos x="csX12" y="csY12"/>
+              </a:cxn>
+              <a:cxn ang="0">
+                <a:pos x="csX13" y="csY13"/>
+              </a:cxn>
+              <a:cxn ang="0">
+                <a:pos x="csX14" y="csY14"/>
+              </a:cxn>
+              <a:cxn ang="0">
+                <a:pos x="csX15" y="csY15"/>
+              </a:cxn>
+            </a:cxnLst>
+            <a:rect l="l" t="t" r="r" b="b"/>
+            <a:pathLst>
+              <a:path w="2051050" h="2951163" fill="none" extrusionOk="0">
+                <a:moveTo>
+                  <a:pt x="0" y="0"/>
+                </a:moveTo>
+                <a:cubicBezTo>
+                  <a:pt x="267367" y="14427"/>
+                  <a:pt x="349033" y="-12086"/>
+                  <a:pt x="683683" y="0"/>
+                </a:cubicBezTo>
+                <a:cubicBezTo>
+                  <a:pt x="1018333" y="12086"/>
+                  <a:pt x="1022416" y="-8631"/>
+                  <a:pt x="1305835" y="0"/>
+                </a:cubicBezTo>
+                <a:cubicBezTo>
+                  <a:pt x="1589254" y="8631"/>
+                  <a:pt x="1888174" y="-24305"/>
+                  <a:pt x="2051050" y="0"/>
+                </a:cubicBezTo>
+                <a:cubicBezTo>
+                  <a:pt x="2049058" y="239847"/>
+                  <a:pt x="2079500" y="432103"/>
+                  <a:pt x="2051050" y="619744"/>
+                </a:cubicBezTo>
+                <a:cubicBezTo>
+                  <a:pt x="2022600" y="807385"/>
+                  <a:pt x="2037657" y="1080410"/>
+                  <a:pt x="2051050" y="1239488"/>
+                </a:cubicBezTo>
+                <a:cubicBezTo>
+                  <a:pt x="2064443" y="1398566"/>
+                  <a:pt x="2048304" y="1613183"/>
+                  <a:pt x="2051050" y="1770698"/>
+                </a:cubicBezTo>
+                <a:cubicBezTo>
+                  <a:pt x="2053797" y="1928213"/>
+                  <a:pt x="2077307" y="2089042"/>
+                  <a:pt x="2051050" y="2360930"/>
+                </a:cubicBezTo>
+                <a:cubicBezTo>
+                  <a:pt x="2024793" y="2632818"/>
+                  <a:pt x="2044620" y="2795804"/>
+                  <a:pt x="2051050" y="2951163"/>
+                </a:cubicBezTo>
+                <a:cubicBezTo>
+                  <a:pt x="1792864" y="2945869"/>
+                  <a:pt x="1550867" y="2982853"/>
+                  <a:pt x="1387877" y="2951163"/>
+                </a:cubicBezTo>
+                <a:cubicBezTo>
+                  <a:pt x="1224887" y="2919473"/>
+                  <a:pt x="943563" y="2930389"/>
+                  <a:pt x="704194" y="2951163"/>
+                </a:cubicBezTo>
+                <a:cubicBezTo>
+                  <a:pt x="464825" y="2971937"/>
+                  <a:pt x="330882" y="2923973"/>
+                  <a:pt x="0" y="2951163"/>
+                </a:cubicBezTo>
+                <a:cubicBezTo>
+                  <a:pt x="-12688" y="2660430"/>
+                  <a:pt x="3295" y="2469288"/>
+                  <a:pt x="0" y="2331419"/>
+                </a:cubicBezTo>
+                <a:cubicBezTo>
+                  <a:pt x="-3295" y="2193550"/>
+                  <a:pt x="-19903" y="1834509"/>
+                  <a:pt x="0" y="1682163"/>
+                </a:cubicBezTo>
+                <a:cubicBezTo>
+                  <a:pt x="19903" y="1529817"/>
+                  <a:pt x="4229" y="1363192"/>
+                  <a:pt x="0" y="1062419"/>
+                </a:cubicBezTo>
+                <a:cubicBezTo>
+                  <a:pt x="-4229" y="761646"/>
+                  <a:pt x="529" y="476222"/>
+                  <a:pt x="0" y="0"/>
+                </a:cubicBezTo>
+                <a:close/>
+              </a:path>
+              <a:path w="2051050" h="2951163" stroke="0" extrusionOk="0">
+                <a:moveTo>
+                  <a:pt x="0" y="0"/>
+                </a:moveTo>
+                <a:cubicBezTo>
+                  <a:pt x="306279" y="21950"/>
+                  <a:pt x="339620" y="1228"/>
+                  <a:pt x="622152" y="0"/>
+                </a:cubicBezTo>
+                <a:cubicBezTo>
+                  <a:pt x="904684" y="-1228"/>
+                  <a:pt x="1011457" y="20320"/>
+                  <a:pt x="1264814" y="0"/>
+                </a:cubicBezTo>
+                <a:cubicBezTo>
+                  <a:pt x="1518171" y="-20320"/>
+                  <a:pt x="1857420" y="-30729"/>
+                  <a:pt x="2051050" y="0"/>
+                </a:cubicBezTo>
+                <a:cubicBezTo>
+                  <a:pt x="2063232" y="245709"/>
+                  <a:pt x="2041507" y="343479"/>
+                  <a:pt x="2051050" y="560721"/>
+                </a:cubicBezTo>
+                <a:cubicBezTo>
+                  <a:pt x="2060593" y="777963"/>
+                  <a:pt x="2080940" y="886218"/>
+                  <a:pt x="2051050" y="1209977"/>
+                </a:cubicBezTo>
+                <a:cubicBezTo>
+                  <a:pt x="2021160" y="1533736"/>
+                  <a:pt x="2044051" y="1542940"/>
+                  <a:pt x="2051050" y="1711675"/>
+                </a:cubicBezTo>
+                <a:cubicBezTo>
+                  <a:pt x="2058049" y="1880410"/>
+                  <a:pt x="2060947" y="2114975"/>
+                  <a:pt x="2051050" y="2242884"/>
+                </a:cubicBezTo>
+                <a:cubicBezTo>
+                  <a:pt x="2041153" y="2370793"/>
+                  <a:pt x="2081957" y="2753717"/>
+                  <a:pt x="2051050" y="2951163"/>
+                </a:cubicBezTo>
+                <a:cubicBezTo>
+                  <a:pt x="1910115" y="2975025"/>
+                  <a:pt x="1602720" y="2978995"/>
+                  <a:pt x="1428898" y="2951163"/>
+                </a:cubicBezTo>
+                <a:cubicBezTo>
+                  <a:pt x="1255076" y="2923331"/>
+                  <a:pt x="924160" y="2933002"/>
+                  <a:pt x="786236" y="2951163"/>
+                </a:cubicBezTo>
+                <a:cubicBezTo>
+                  <a:pt x="648312" y="2969324"/>
+                  <a:pt x="370261" y="2923618"/>
+                  <a:pt x="0" y="2951163"/>
+                </a:cubicBezTo>
+                <a:cubicBezTo>
+                  <a:pt x="14797" y="2840414"/>
+                  <a:pt x="24747" y="2604392"/>
+                  <a:pt x="0" y="2449465"/>
+                </a:cubicBezTo>
+                <a:cubicBezTo>
+                  <a:pt x="-24747" y="2294538"/>
+                  <a:pt x="12162" y="2112558"/>
+                  <a:pt x="0" y="1829721"/>
+                </a:cubicBezTo>
+                <a:cubicBezTo>
+                  <a:pt x="-12162" y="1546884"/>
+                  <a:pt x="8429" y="1364361"/>
+                  <a:pt x="0" y="1239488"/>
+                </a:cubicBezTo>
+                <a:cubicBezTo>
+                  <a:pt x="-8429" y="1114615"/>
+                  <a:pt x="7141" y="949936"/>
+                  <a:pt x="0" y="708279"/>
+                </a:cubicBezTo>
+                <a:cubicBezTo>
+                  <a:pt x="-7141" y="466622"/>
+                  <a:pt x="-34761" y="237017"/>
+                  <a:pt x="0" y="0"/>
+                </a:cubicBezTo>
+                <a:close/>
+              </a:path>
+            </a:pathLst>
+          </a:custGeom>
+          <a:solidFill>
+            <a:schemeClr val="bg1"/>
+          </a:solidFill>
+          <a:ln w="25400">
+            <a:solidFill>
+              <a:schemeClr val="tx1">
+                <a:lumMod val="95000"/>
+                <a:lumOff val="5000"/>
+              </a:schemeClr>
+            </a:solidFill>
+            <a:extLst>
+              <a:ext uri="{C807C97D-BFC1-408E-A445-0C87EB9F89A2}">
+                <ask:lineSketchStyleProps xmlns:ask="http://schemas.microsoft.com/office/drawing/2018/sketchyshapes" sd="1762638383">
+                  <a:prstGeom prst="rect">
+                    <a:avLst/>
+                  </a:prstGeom>
+                  <ask:type>
+                    <ask:lineSketchFreehand/>
+                  </ask:type>
+                </ask:lineSketchStyleProps>
+              </a:ext>
+            </a:extLst>
+          </a:ln>
+        </p:spPr>
+        <p:style>
+          <a:lnRef idx="2">
+            <a:schemeClr val="accent3">
+              <a:shade val="50000"/>
+            </a:schemeClr>
+          </a:lnRef>
+          <a:fillRef idx="1">
+            <a:schemeClr val="accent3"/>
+          </a:fillRef>
+          <a:effectRef idx="0">
+            <a:schemeClr val="accent3"/>
+          </a:effectRef>
+          <a:fontRef idx="minor">
+            <a:schemeClr val="lt1"/>
+          </a:fontRef>
+        </p:style>
+        <p:txBody>
+          <a:bodyPr rtlCol="0" anchor="ctr"/>
+          <a:lstStyle/>
+          <a:p>
+            <a:pPr algn="ctr"/>
+            <a:endParaRPr lang="de-AT"/>
+          </a:p>
+        </p:txBody>
+      </p:sp>
+      <p:sp>
+        <p:nvSpPr>
+          <p:cNvPr id="21" name="Rechteck 5">
+            <a:extLst>
+              <a:ext uri="{FF2B5EF4-FFF2-40B4-BE49-F238E27FC236}">
+                <a16:creationId xmlns:a16="http://schemas.microsoft.com/office/drawing/2014/main" id="{0C5D7FD3-5450-6C35-362A-5AA9B41716E6}"/>
+              </a:ext>
+              <a:ext uri="{C183D7F6-B498-43B3-948B-1728B52AA6E4}">
+                <adec:decorative xmlns:adec="http://schemas.microsoft.com/office/drawing/2017/decorative" val="1"/>
+              </a:ext>
+            </a:extLst>
+          </p:cNvPr>
+          <p:cNvSpPr/>
+          <p:nvPr/>
+        </p:nvSpPr>
+        <p:spPr>
+          <a:xfrm>
+            <a:off x="225424" y="6721475"/>
+            <a:ext cx="6400269" cy="2951163"/>
+          </a:xfrm>
+          <a:custGeom>
+            <a:avLst/>
+            <a:gdLst>
+              <a:gd name="csX0" fmla="*/ 0 w 6400269"/>
+              <a:gd name="csY0" fmla="*/ 0 h 2951163"/>
+              <a:gd name="csX1" fmla="*/ 512022 w 6400269"/>
+              <a:gd name="csY1" fmla="*/ 0 h 2951163"/>
+              <a:gd name="csX2" fmla="*/ 1152048 w 6400269"/>
+              <a:gd name="csY2" fmla="*/ 0 h 2951163"/>
+              <a:gd name="csX3" fmla="*/ 1664070 w 6400269"/>
+              <a:gd name="csY3" fmla="*/ 0 h 2951163"/>
+              <a:gd name="csX4" fmla="*/ 2368100 w 6400269"/>
+              <a:gd name="csY4" fmla="*/ 0 h 2951163"/>
+              <a:gd name="csX5" fmla="*/ 3072129 w 6400269"/>
+              <a:gd name="csY5" fmla="*/ 0 h 2951163"/>
+              <a:gd name="csX6" fmla="*/ 3584151 w 6400269"/>
+              <a:gd name="csY6" fmla="*/ 0 h 2951163"/>
+              <a:gd name="csX7" fmla="*/ 4032169 w 6400269"/>
+              <a:gd name="csY7" fmla="*/ 0 h 2951163"/>
+              <a:gd name="csX8" fmla="*/ 4672196 w 6400269"/>
+              <a:gd name="csY8" fmla="*/ 0 h 2951163"/>
+              <a:gd name="csX9" fmla="*/ 5440229 w 6400269"/>
+              <a:gd name="csY9" fmla="*/ 0 h 2951163"/>
+              <a:gd name="csX10" fmla="*/ 6400269 w 6400269"/>
+              <a:gd name="csY10" fmla="*/ 0 h 2951163"/>
+              <a:gd name="csX11" fmla="*/ 6400269 w 6400269"/>
+              <a:gd name="csY11" fmla="*/ 560721 h 2951163"/>
+              <a:gd name="csX12" fmla="*/ 6400269 w 6400269"/>
+              <a:gd name="csY12" fmla="*/ 1091930 h 2951163"/>
+              <a:gd name="csX13" fmla="*/ 6400269 w 6400269"/>
+              <a:gd name="csY13" fmla="*/ 1711675 h 2951163"/>
+              <a:gd name="csX14" fmla="*/ 6400269 w 6400269"/>
+              <a:gd name="csY14" fmla="*/ 2272396 h 2951163"/>
+              <a:gd name="csX15" fmla="*/ 6400269 w 6400269"/>
+              <a:gd name="csY15" fmla="*/ 2951163 h 2951163"/>
+              <a:gd name="csX16" fmla="*/ 5824245 w 6400269"/>
+              <a:gd name="csY16" fmla="*/ 2951163 h 2951163"/>
+              <a:gd name="csX17" fmla="*/ 5248221 w 6400269"/>
+              <a:gd name="csY17" fmla="*/ 2951163 h 2951163"/>
+              <a:gd name="csX18" fmla="*/ 4608194 w 6400269"/>
+              <a:gd name="csY18" fmla="*/ 2951163 h 2951163"/>
+              <a:gd name="csX19" fmla="*/ 3840161 w 6400269"/>
+              <a:gd name="csY19" fmla="*/ 2951163 h 2951163"/>
+              <a:gd name="csX20" fmla="*/ 3328140 w 6400269"/>
+              <a:gd name="csY20" fmla="*/ 2951163 h 2951163"/>
+              <a:gd name="csX21" fmla="*/ 2688113 w 6400269"/>
+              <a:gd name="csY21" fmla="*/ 2951163 h 2951163"/>
+              <a:gd name="csX22" fmla="*/ 2176091 w 6400269"/>
+              <a:gd name="csY22" fmla="*/ 2951163 h 2951163"/>
+              <a:gd name="csX23" fmla="*/ 1600067 w 6400269"/>
+              <a:gd name="csY23" fmla="*/ 2951163 h 2951163"/>
+              <a:gd name="csX24" fmla="*/ 896038 w 6400269"/>
+              <a:gd name="csY24" fmla="*/ 2951163 h 2951163"/>
+              <a:gd name="csX25" fmla="*/ 0 w 6400269"/>
+              <a:gd name="csY25" fmla="*/ 2951163 h 2951163"/>
+              <a:gd name="csX26" fmla="*/ 0 w 6400269"/>
+              <a:gd name="csY26" fmla="*/ 2449465 h 2951163"/>
+              <a:gd name="csX27" fmla="*/ 0 w 6400269"/>
+              <a:gd name="csY27" fmla="*/ 1947768 h 2951163"/>
+              <a:gd name="csX28" fmla="*/ 0 w 6400269"/>
+              <a:gd name="csY28" fmla="*/ 1298512 h 2951163"/>
+              <a:gd name="csX29" fmla="*/ 0 w 6400269"/>
+              <a:gd name="csY29" fmla="*/ 796814 h 2951163"/>
+              <a:gd name="csX30" fmla="*/ 0 w 6400269"/>
+              <a:gd name="csY30" fmla="*/ 0 h 2951163"/>
+            </a:gdLst>
+            <a:ahLst/>
+            <a:cxnLst>
+              <a:cxn ang="0">
+                <a:pos x="csX0" y="csY0"/>
+              </a:cxn>
+              <a:cxn ang="0">
+                <a:pos x="csX1" y="csY1"/>
+              </a:cxn>
+              <a:cxn ang="0">
+                <a:pos x="csX2" y="csY2"/>
+              </a:cxn>
+              <a:cxn ang="0">
+                <a:pos x="csX3" y="csY3"/>
+              </a:cxn>
+              <a:cxn ang="0">
+                <a:pos x="csX4" y="csY4"/>
+              </a:cxn>
+              <a:cxn ang="0">
+                <a:pos x="csX5" y="csY5"/>
+              </a:cxn>
+              <a:cxn ang="0">
+                <a:pos x="csX6" y="csY6"/>
+              </a:cxn>
+              <a:cxn ang="0">
+                <a:pos x="csX7" y="csY7"/>
+              </a:cxn>
+              <a:cxn ang="0">
+                <a:pos x="csX8" y="csY8"/>
+              </a:cxn>
+              <a:cxn ang="0">
+                <a:pos x="csX9" y="csY9"/>
+              </a:cxn>
+              <a:cxn ang="0">
+                <a:pos x="csX10" y="csY10"/>
+              </a:cxn>
+              <a:cxn ang="0">
+                <a:pos x="csX11" y="csY11"/>
+              </a:cxn>
+              <a:cxn ang="0">
+                <a:pos x="csX12" y="csY12"/>
+              </a:cxn>
+              <a:cxn ang="0">
+                <a:pos x="csX13" y="csY13"/>
+              </a:cxn>
+              <a:cxn ang="0">
+                <a:pos x="csX14" y="csY14"/>
+              </a:cxn>
+              <a:cxn ang="0">
+                <a:pos x="csX15" y="csY15"/>
+              </a:cxn>
+              <a:cxn ang="0">
+                <a:pos x="csX16" y="csY16"/>
+              </a:cxn>
+              <a:cxn ang="0">
+                <a:pos x="csX17" y="csY17"/>
+              </a:cxn>
+              <a:cxn ang="0">
+                <a:pos x="csX18" y="csY18"/>
+              </a:cxn>
+              <a:cxn ang="0">
+                <a:pos x="csX19" y="csY19"/>
+              </a:cxn>
+              <a:cxn ang="0">
+                <a:pos x="csX20" y="csY20"/>
+              </a:cxn>
+              <a:cxn ang="0">
+                <a:pos x="csX21" y="csY21"/>
+              </a:cxn>
+              <a:cxn ang="0">
+                <a:pos x="csX22" y="csY22"/>
+              </a:cxn>
+              <a:cxn ang="0">
+                <a:pos x="csX23" y="csY23"/>
+              </a:cxn>
+              <a:cxn ang="0">
+                <a:pos x="csX24" y="csY24"/>
+              </a:cxn>
+              <a:cxn ang="0">
+                <a:pos x="csX25" y="csY25"/>
+              </a:cxn>
+              <a:cxn ang="0">
+                <a:pos x="csX26" y="csY26"/>
+              </a:cxn>
+              <a:cxn ang="0">
+                <a:pos x="csX27" y="csY27"/>
+              </a:cxn>
+              <a:cxn ang="0">
+                <a:pos x="csX28" y="csY28"/>
+              </a:cxn>
+              <a:cxn ang="0">
+                <a:pos x="csX29" y="csY29"/>
+              </a:cxn>
+              <a:cxn ang="0">
+                <a:pos x="csX30" y="csY30"/>
+              </a:cxn>
+            </a:cxnLst>
+            <a:rect l="l" t="t" r="r" b="b"/>
+            <a:pathLst>
+              <a:path w="6400269" h="2951163" fill="none" extrusionOk="0">
+                <a:moveTo>
+                  <a:pt x="0" y="0"/>
+                </a:moveTo>
+                <a:cubicBezTo>
+                  <a:pt x="155627" y="-18505"/>
+                  <a:pt x="372887" y="-1088"/>
+                  <a:pt x="512022" y="0"/>
+                </a:cubicBezTo>
+                <a:cubicBezTo>
+                  <a:pt x="651157" y="1088"/>
+                  <a:pt x="904976" y="-24611"/>
+                  <a:pt x="1152048" y="0"/>
+                </a:cubicBezTo>
+                <a:cubicBezTo>
+                  <a:pt x="1399120" y="24611"/>
+                  <a:pt x="1519881" y="-22310"/>
+                  <a:pt x="1664070" y="0"/>
+                </a:cubicBezTo>
+                <a:cubicBezTo>
+                  <a:pt x="1808259" y="22310"/>
+                  <a:pt x="2142216" y="-19893"/>
+                  <a:pt x="2368100" y="0"/>
+                </a:cubicBezTo>
+                <a:cubicBezTo>
+                  <a:pt x="2593984" y="19893"/>
+                  <a:pt x="2732400" y="-13337"/>
+                  <a:pt x="3072129" y="0"/>
+                </a:cubicBezTo>
+                <a:cubicBezTo>
+                  <a:pt x="3411858" y="13337"/>
+                  <a:pt x="3422584" y="7131"/>
+                  <a:pt x="3584151" y="0"/>
+                </a:cubicBezTo>
+                <a:cubicBezTo>
+                  <a:pt x="3745718" y="-7131"/>
+                  <a:pt x="3856681" y="-15587"/>
+                  <a:pt x="4032169" y="0"/>
+                </a:cubicBezTo>
+                <a:cubicBezTo>
+                  <a:pt x="4207657" y="15587"/>
+                  <a:pt x="4440680" y="3571"/>
+                  <a:pt x="4672196" y="0"/>
+                </a:cubicBezTo>
+                <a:cubicBezTo>
+                  <a:pt x="4903712" y="-3571"/>
+                  <a:pt x="5142227" y="10125"/>
+                  <a:pt x="5440229" y="0"/>
+                </a:cubicBezTo>
+                <a:cubicBezTo>
+                  <a:pt x="5738231" y="-10125"/>
+                  <a:pt x="6118982" y="-23249"/>
+                  <a:pt x="6400269" y="0"/>
+                </a:cubicBezTo>
+                <a:cubicBezTo>
+                  <a:pt x="6390288" y="231921"/>
+                  <a:pt x="6407697" y="367775"/>
+                  <a:pt x="6400269" y="560721"/>
+                </a:cubicBezTo>
+                <a:cubicBezTo>
+                  <a:pt x="6392841" y="753667"/>
+                  <a:pt x="6402638" y="843367"/>
+                  <a:pt x="6400269" y="1091930"/>
+                </a:cubicBezTo>
+                <a:cubicBezTo>
+                  <a:pt x="6397900" y="1340493"/>
+                  <a:pt x="6418642" y="1483989"/>
+                  <a:pt x="6400269" y="1711675"/>
+                </a:cubicBezTo>
+                <a:cubicBezTo>
+                  <a:pt x="6381896" y="1939362"/>
+                  <a:pt x="6416956" y="2014409"/>
+                  <a:pt x="6400269" y="2272396"/>
+                </a:cubicBezTo>
+                <a:cubicBezTo>
+                  <a:pt x="6383582" y="2530383"/>
+                  <a:pt x="6397198" y="2641221"/>
+                  <a:pt x="6400269" y="2951163"/>
+                </a:cubicBezTo>
+                <a:cubicBezTo>
+                  <a:pt x="6240632" y="2964985"/>
+                  <a:pt x="6081192" y="2929533"/>
+                  <a:pt x="5824245" y="2951163"/>
+                </a:cubicBezTo>
+                <a:cubicBezTo>
+                  <a:pt x="5567298" y="2972793"/>
+                  <a:pt x="5511873" y="2946992"/>
+                  <a:pt x="5248221" y="2951163"/>
+                </a:cubicBezTo>
+                <a:cubicBezTo>
+                  <a:pt x="4984569" y="2955334"/>
+                  <a:pt x="4799896" y="2942007"/>
+                  <a:pt x="4608194" y="2951163"/>
+                </a:cubicBezTo>
+                <a:cubicBezTo>
+                  <a:pt x="4416492" y="2960319"/>
+                  <a:pt x="4008282" y="2984949"/>
+                  <a:pt x="3840161" y="2951163"/>
+                </a:cubicBezTo>
+                <a:cubicBezTo>
+                  <a:pt x="3672040" y="2917377"/>
+                  <a:pt x="3485187" y="2937173"/>
+                  <a:pt x="3328140" y="2951163"/>
+                </a:cubicBezTo>
+                <a:cubicBezTo>
+                  <a:pt x="3171093" y="2965153"/>
+                  <a:pt x="2933283" y="2978693"/>
+                  <a:pt x="2688113" y="2951163"/>
+                </a:cubicBezTo>
+                <a:cubicBezTo>
+                  <a:pt x="2442943" y="2923633"/>
+                  <a:pt x="2395014" y="2941007"/>
+                  <a:pt x="2176091" y="2951163"/>
+                </a:cubicBezTo>
+                <a:cubicBezTo>
+                  <a:pt x="1957168" y="2961319"/>
+                  <a:pt x="1856637" y="2971909"/>
+                  <a:pt x="1600067" y="2951163"/>
+                </a:cubicBezTo>
+                <a:cubicBezTo>
+                  <a:pt x="1343497" y="2930417"/>
+                  <a:pt x="1224441" y="2972847"/>
+                  <a:pt x="896038" y="2951163"/>
+                </a:cubicBezTo>
+                <a:cubicBezTo>
+                  <a:pt x="567635" y="2929479"/>
+                  <a:pt x="384134" y="2973404"/>
+                  <a:pt x="0" y="2951163"/>
+                </a:cubicBezTo>
+                <a:cubicBezTo>
+                  <a:pt x="-21148" y="2823962"/>
+                  <a:pt x="4380" y="2677191"/>
+                  <a:pt x="0" y="2449465"/>
+                </a:cubicBezTo>
+                <a:cubicBezTo>
+                  <a:pt x="-4380" y="2221739"/>
+                  <a:pt x="5500" y="2141376"/>
+                  <a:pt x="0" y="1947768"/>
+                </a:cubicBezTo>
+                <a:cubicBezTo>
+                  <a:pt x="-5500" y="1754160"/>
+                  <a:pt x="1517" y="1622425"/>
+                  <a:pt x="0" y="1298512"/>
+                </a:cubicBezTo>
+                <a:cubicBezTo>
+                  <a:pt x="-1517" y="974599"/>
+                  <a:pt x="13448" y="936950"/>
+                  <a:pt x="0" y="796814"/>
+                </a:cubicBezTo>
+                <a:cubicBezTo>
+                  <a:pt x="-13448" y="656678"/>
+                  <a:pt x="18167" y="293421"/>
+                  <a:pt x="0" y="0"/>
+                </a:cubicBezTo>
+                <a:close/>
+              </a:path>
+              <a:path w="6400269" h="2951163" stroke="0" extrusionOk="0">
+                <a:moveTo>
+                  <a:pt x="0" y="0"/>
+                </a:moveTo>
+                <a:cubicBezTo>
+                  <a:pt x="218521" y="14820"/>
+                  <a:pt x="256491" y="968"/>
+                  <a:pt x="448019" y="0"/>
+                </a:cubicBezTo>
+                <a:cubicBezTo>
+                  <a:pt x="639547" y="-968"/>
+                  <a:pt x="809836" y="-4969"/>
+                  <a:pt x="960040" y="0"/>
+                </a:cubicBezTo>
+                <a:cubicBezTo>
+                  <a:pt x="1110244" y="4969"/>
+                  <a:pt x="1387062" y="12871"/>
+                  <a:pt x="1600067" y="0"/>
+                </a:cubicBezTo>
+                <a:cubicBezTo>
+                  <a:pt x="1813072" y="-12871"/>
+                  <a:pt x="1966465" y="-25712"/>
+                  <a:pt x="2176091" y="0"/>
+                </a:cubicBezTo>
+                <a:cubicBezTo>
+                  <a:pt x="2385717" y="25712"/>
+                  <a:pt x="2547337" y="-22983"/>
+                  <a:pt x="2688113" y="0"/>
+                </a:cubicBezTo>
+                <a:cubicBezTo>
+                  <a:pt x="2828889" y="22983"/>
+                  <a:pt x="3117060" y="26807"/>
+                  <a:pt x="3392143" y="0"/>
+                </a:cubicBezTo>
+                <a:cubicBezTo>
+                  <a:pt x="3667226" y="-26807"/>
+                  <a:pt x="3831649" y="-9757"/>
+                  <a:pt x="4096172" y="0"/>
+                </a:cubicBezTo>
+                <a:cubicBezTo>
+                  <a:pt x="4360695" y="9757"/>
+                  <a:pt x="4616937" y="28082"/>
+                  <a:pt x="4864204" y="0"/>
+                </a:cubicBezTo>
+                <a:cubicBezTo>
+                  <a:pt x="5111471" y="-28082"/>
+                  <a:pt x="5314230" y="-3938"/>
+                  <a:pt x="5440229" y="0"/>
+                </a:cubicBezTo>
+                <a:cubicBezTo>
+                  <a:pt x="5566229" y="3938"/>
+                  <a:pt x="6112814" y="41935"/>
+                  <a:pt x="6400269" y="0"/>
+                </a:cubicBezTo>
+                <a:cubicBezTo>
+                  <a:pt x="6416041" y="136988"/>
+                  <a:pt x="6396303" y="444909"/>
+                  <a:pt x="6400269" y="590233"/>
+                </a:cubicBezTo>
+                <a:cubicBezTo>
+                  <a:pt x="6404235" y="735557"/>
+                  <a:pt x="6387973" y="891046"/>
+                  <a:pt x="6400269" y="1091930"/>
+                </a:cubicBezTo>
+                <a:cubicBezTo>
+                  <a:pt x="6412565" y="1292814"/>
+                  <a:pt x="6404322" y="1580484"/>
+                  <a:pt x="6400269" y="1741186"/>
+                </a:cubicBezTo>
+                <a:cubicBezTo>
+                  <a:pt x="6396216" y="1901888"/>
+                  <a:pt x="6423304" y="2030121"/>
+                  <a:pt x="6400269" y="2242884"/>
+                </a:cubicBezTo>
+                <a:cubicBezTo>
+                  <a:pt x="6377234" y="2455647"/>
+                  <a:pt x="6431995" y="2746667"/>
+                  <a:pt x="6400269" y="2951163"/>
+                </a:cubicBezTo>
+                <a:cubicBezTo>
+                  <a:pt x="6270805" y="2942577"/>
+                  <a:pt x="6107950" y="2956933"/>
+                  <a:pt x="5952250" y="2951163"/>
+                </a:cubicBezTo>
+                <a:cubicBezTo>
+                  <a:pt x="5796550" y="2945393"/>
+                  <a:pt x="5712483" y="2971072"/>
+                  <a:pt x="5504231" y="2951163"/>
+                </a:cubicBezTo>
+                <a:cubicBezTo>
+                  <a:pt x="5295979" y="2931254"/>
+                  <a:pt x="5102235" y="2955012"/>
+                  <a:pt x="4992210" y="2951163"/>
+                </a:cubicBezTo>
+                <a:cubicBezTo>
+                  <a:pt x="4882185" y="2947314"/>
+                  <a:pt x="4647496" y="2963406"/>
+                  <a:pt x="4416186" y="2951163"/>
+                </a:cubicBezTo>
+                <a:cubicBezTo>
+                  <a:pt x="4184876" y="2938920"/>
+                  <a:pt x="4026902" y="2930045"/>
+                  <a:pt x="3840161" y="2951163"/>
+                </a:cubicBezTo>
+                <a:cubicBezTo>
+                  <a:pt x="3653421" y="2972281"/>
+                  <a:pt x="3570124" y="2951166"/>
+                  <a:pt x="3392143" y="2951163"/>
+                </a:cubicBezTo>
+                <a:cubicBezTo>
+                  <a:pt x="3214162" y="2951160"/>
+                  <a:pt x="3148609" y="2932066"/>
+                  <a:pt x="2944124" y="2951163"/>
+                </a:cubicBezTo>
+                <a:cubicBezTo>
+                  <a:pt x="2739639" y="2970260"/>
+                  <a:pt x="2423302" y="2950061"/>
+                  <a:pt x="2240094" y="2951163"/>
+                </a:cubicBezTo>
+                <a:cubicBezTo>
+                  <a:pt x="2056886" y="2952266"/>
+                  <a:pt x="1953480" y="2950793"/>
+                  <a:pt x="1728073" y="2951163"/>
+                </a:cubicBezTo>
+                <a:cubicBezTo>
+                  <a:pt x="1502666" y="2951533"/>
+                  <a:pt x="1371872" y="2939328"/>
+                  <a:pt x="1088046" y="2951163"/>
+                </a:cubicBezTo>
+                <a:cubicBezTo>
+                  <a:pt x="804220" y="2962998"/>
+                  <a:pt x="500368" y="2961448"/>
+                  <a:pt x="0" y="2951163"/>
+                </a:cubicBezTo>
+                <a:cubicBezTo>
+                  <a:pt x="24451" y="2723797"/>
+                  <a:pt x="27329" y="2549251"/>
+                  <a:pt x="0" y="2390442"/>
+                </a:cubicBezTo>
+                <a:cubicBezTo>
+                  <a:pt x="-27329" y="2231633"/>
+                  <a:pt x="8947" y="2043707"/>
+                  <a:pt x="0" y="1800209"/>
+                </a:cubicBezTo>
+                <a:cubicBezTo>
+                  <a:pt x="-8947" y="1556711"/>
+                  <a:pt x="-10213" y="1432854"/>
+                  <a:pt x="0" y="1269000"/>
+                </a:cubicBezTo>
+                <a:cubicBezTo>
+                  <a:pt x="10213" y="1105146"/>
+                  <a:pt x="-12688" y="792344"/>
+                  <a:pt x="0" y="649256"/>
+                </a:cubicBezTo>
+                <a:cubicBezTo>
+                  <a:pt x="12688" y="506168"/>
+                  <a:pt x="-11329" y="174899"/>
+                  <a:pt x="0" y="0"/>
+                </a:cubicBezTo>
+                <a:close/>
+              </a:path>
+            </a:pathLst>
+          </a:custGeom>
+          <a:solidFill>
+            <a:schemeClr val="bg1"/>
+          </a:solidFill>
+          <a:ln w="25400">
+            <a:solidFill>
+              <a:schemeClr val="tx1">
+                <a:lumMod val="95000"/>
+                <a:lumOff val="5000"/>
+              </a:schemeClr>
+            </a:solidFill>
+            <a:extLst>
+              <a:ext uri="{C807C97D-BFC1-408E-A445-0C87EB9F89A2}">
+                <ask:lineSketchStyleProps xmlns:ask="http://schemas.microsoft.com/office/drawing/2018/sketchyshapes" sd="1762638383">
+                  <a:prstGeom prst="rect">
+                    <a:avLst/>
+                  </a:prstGeom>
+                  <ask:type>
+                    <ask:lineSketchFreehand/>
+                  </ask:type>
+                </ask:lineSketchStyleProps>
+              </a:ext>
+            </a:extLst>
+          </a:ln>
+        </p:spPr>
+        <p:style>
+          <a:lnRef idx="2">
+            <a:schemeClr val="accent3">
+              <a:shade val="50000"/>
+            </a:schemeClr>
+          </a:lnRef>
+          <a:fillRef idx="1">
+            <a:schemeClr val="accent3"/>
+          </a:fillRef>
+          <a:effectRef idx="0">
+            <a:schemeClr val="accent3"/>
+          </a:effectRef>
+          <a:fontRef idx="minor">
+            <a:schemeClr val="lt1"/>
+          </a:fontRef>
+        </p:style>
+        <p:txBody>
+          <a:bodyPr rtlCol="0" anchor="ctr"/>
+          <a:lstStyle/>
+          <a:p>
+            <a:pPr algn="ctr"/>
+            <a:endParaRPr lang="de-AT"/>
+          </a:p>
+        </p:txBody>
+      </p:sp>
+      <p:sp>
+        <p:nvSpPr>
+          <p:cNvPr id="24" name="Rechteck 2">
+            <a:extLst>
+              <a:ext uri="{FF2B5EF4-FFF2-40B4-BE49-F238E27FC236}">
+                <a16:creationId xmlns:a16="http://schemas.microsoft.com/office/drawing/2014/main" id="{72309147-1EA1-D510-AE8F-C857585A78B3}"/>
+              </a:ext>
+              <a:ext uri="{C183D7F6-B498-43B3-948B-1728B52AA6E4}">
+                <adec:decorative xmlns:adec="http://schemas.microsoft.com/office/drawing/2017/decorative" val="1"/>
+              </a:ext>
+            </a:extLst>
+          </p:cNvPr>
+          <p:cNvSpPr/>
+          <p:nvPr/>
+        </p:nvSpPr>
+        <p:spPr>
+          <a:xfrm>
+            <a:off x="232306" y="549564"/>
+            <a:ext cx="2051050" cy="2951163"/>
+          </a:xfrm>
+          <a:custGeom>
+            <a:avLst/>
+            <a:gdLst>
+              <a:gd name="csX0" fmla="*/ 0 w 2051050"/>
+              <a:gd name="csY0" fmla="*/ 0 h 2951163"/>
+              <a:gd name="csX1" fmla="*/ 683683 w 2051050"/>
+              <a:gd name="csY1" fmla="*/ 0 h 2951163"/>
+              <a:gd name="csX2" fmla="*/ 1305835 w 2051050"/>
+              <a:gd name="csY2" fmla="*/ 0 h 2951163"/>
+              <a:gd name="csX3" fmla="*/ 2051050 w 2051050"/>
+              <a:gd name="csY3" fmla="*/ 0 h 2951163"/>
+              <a:gd name="csX4" fmla="*/ 2051050 w 2051050"/>
+              <a:gd name="csY4" fmla="*/ 619744 h 2951163"/>
+              <a:gd name="csX5" fmla="*/ 2051050 w 2051050"/>
+              <a:gd name="csY5" fmla="*/ 1239488 h 2951163"/>
+              <a:gd name="csX6" fmla="*/ 2051050 w 2051050"/>
+              <a:gd name="csY6" fmla="*/ 1770698 h 2951163"/>
+              <a:gd name="csX7" fmla="*/ 2051050 w 2051050"/>
+              <a:gd name="csY7" fmla="*/ 2360930 h 2951163"/>
+              <a:gd name="csX8" fmla="*/ 2051050 w 2051050"/>
+              <a:gd name="csY8" fmla="*/ 2951163 h 2951163"/>
+              <a:gd name="csX9" fmla="*/ 1387877 w 2051050"/>
+              <a:gd name="csY9" fmla="*/ 2951163 h 2951163"/>
+              <a:gd name="csX10" fmla="*/ 704194 w 2051050"/>
+              <a:gd name="csY10" fmla="*/ 2951163 h 2951163"/>
+              <a:gd name="csX11" fmla="*/ 0 w 2051050"/>
+              <a:gd name="csY11" fmla="*/ 2951163 h 2951163"/>
+              <a:gd name="csX12" fmla="*/ 0 w 2051050"/>
+              <a:gd name="csY12" fmla="*/ 2331419 h 2951163"/>
+              <a:gd name="csX13" fmla="*/ 0 w 2051050"/>
+              <a:gd name="csY13" fmla="*/ 1682163 h 2951163"/>
+              <a:gd name="csX14" fmla="*/ 0 w 2051050"/>
+              <a:gd name="csY14" fmla="*/ 1062419 h 2951163"/>
+              <a:gd name="csX15" fmla="*/ 0 w 2051050"/>
+              <a:gd name="csY15" fmla="*/ 0 h 2951163"/>
+            </a:gdLst>
+            <a:ahLst/>
+            <a:cxnLst>
+              <a:cxn ang="0">
+                <a:pos x="csX0" y="csY0"/>
+              </a:cxn>
+              <a:cxn ang="0">
+                <a:pos x="csX1" y="csY1"/>
+              </a:cxn>
+              <a:cxn ang="0">
+                <a:pos x="csX2" y="csY2"/>
+              </a:cxn>
+              <a:cxn ang="0">
+                <a:pos x="csX3" y="csY3"/>
+              </a:cxn>
+              <a:cxn ang="0">
+                <a:pos x="csX4" y="csY4"/>
+              </a:cxn>
+              <a:cxn ang="0">
+                <a:pos x="csX5" y="csY5"/>
+              </a:cxn>
+              <a:cxn ang="0">
+                <a:pos x="csX6" y="csY6"/>
+              </a:cxn>
+              <a:cxn ang="0">
+                <a:pos x="csX7" y="csY7"/>
+              </a:cxn>
+              <a:cxn ang="0">
+                <a:pos x="csX8" y="csY8"/>
+              </a:cxn>
+              <a:cxn ang="0">
+                <a:pos x="csX9" y="csY9"/>
+              </a:cxn>
+              <a:cxn ang="0">
+                <a:pos x="csX10" y="csY10"/>
+              </a:cxn>
+              <a:cxn ang="0">
+                <a:pos x="csX11" y="csY11"/>
+              </a:cxn>
+              <a:cxn ang="0">
+                <a:pos x="csX12" y="csY12"/>
+              </a:cxn>
+              <a:cxn ang="0">
+                <a:pos x="csX13" y="csY13"/>
+              </a:cxn>
+              <a:cxn ang="0">
+                <a:pos x="csX14" y="csY14"/>
+              </a:cxn>
+              <a:cxn ang="0">
+                <a:pos x="csX15" y="csY15"/>
+              </a:cxn>
+            </a:cxnLst>
+            <a:rect l="l" t="t" r="r" b="b"/>
+            <a:pathLst>
+              <a:path w="2051050" h="2951163" fill="none" extrusionOk="0">
+                <a:moveTo>
+                  <a:pt x="0" y="0"/>
+                </a:moveTo>
+                <a:cubicBezTo>
+                  <a:pt x="267367" y="14427"/>
+                  <a:pt x="349033" y="-12086"/>
+                  <a:pt x="683683" y="0"/>
+                </a:cubicBezTo>
+                <a:cubicBezTo>
+                  <a:pt x="1018333" y="12086"/>
+                  <a:pt x="1022416" y="-8631"/>
+                  <a:pt x="1305835" y="0"/>
+                </a:cubicBezTo>
+                <a:cubicBezTo>
+                  <a:pt x="1589254" y="8631"/>
+                  <a:pt x="1888174" y="-24305"/>
+                  <a:pt x="2051050" y="0"/>
+                </a:cubicBezTo>
+                <a:cubicBezTo>
+                  <a:pt x="2049058" y="239847"/>
+                  <a:pt x="2079500" y="432103"/>
+                  <a:pt x="2051050" y="619744"/>
+                </a:cubicBezTo>
+                <a:cubicBezTo>
+                  <a:pt x="2022600" y="807385"/>
+                  <a:pt x="2037657" y="1080410"/>
+                  <a:pt x="2051050" y="1239488"/>
+                </a:cubicBezTo>
+                <a:cubicBezTo>
+                  <a:pt x="2064443" y="1398566"/>
+                  <a:pt x="2048304" y="1613183"/>
+                  <a:pt x="2051050" y="1770698"/>
+                </a:cubicBezTo>
+                <a:cubicBezTo>
+                  <a:pt x="2053797" y="1928213"/>
+                  <a:pt x="2077307" y="2089042"/>
+                  <a:pt x="2051050" y="2360930"/>
+                </a:cubicBezTo>
+                <a:cubicBezTo>
+                  <a:pt x="2024793" y="2632818"/>
+                  <a:pt x="2044620" y="2795804"/>
+                  <a:pt x="2051050" y="2951163"/>
+                </a:cubicBezTo>
+                <a:cubicBezTo>
+                  <a:pt x="1792864" y="2945869"/>
+                  <a:pt x="1550867" y="2982853"/>
+                  <a:pt x="1387877" y="2951163"/>
+                </a:cubicBezTo>
+                <a:cubicBezTo>
+                  <a:pt x="1224887" y="2919473"/>
+                  <a:pt x="943563" y="2930389"/>
+                  <a:pt x="704194" y="2951163"/>
+                </a:cubicBezTo>
+                <a:cubicBezTo>
+                  <a:pt x="464825" y="2971937"/>
+                  <a:pt x="330882" y="2923973"/>
+                  <a:pt x="0" y="2951163"/>
+                </a:cubicBezTo>
+                <a:cubicBezTo>
+                  <a:pt x="-12688" y="2660430"/>
+                  <a:pt x="3295" y="2469288"/>
+                  <a:pt x="0" y="2331419"/>
+                </a:cubicBezTo>
+                <a:cubicBezTo>
+                  <a:pt x="-3295" y="2193550"/>
+                  <a:pt x="-19903" y="1834509"/>
+                  <a:pt x="0" y="1682163"/>
+                </a:cubicBezTo>
+                <a:cubicBezTo>
+                  <a:pt x="19903" y="1529817"/>
+                  <a:pt x="4229" y="1363192"/>
+                  <a:pt x="0" y="1062419"/>
+                </a:cubicBezTo>
+                <a:cubicBezTo>
+                  <a:pt x="-4229" y="761646"/>
+                  <a:pt x="529" y="476222"/>
+                  <a:pt x="0" y="0"/>
+                </a:cubicBezTo>
+                <a:close/>
+              </a:path>
+              <a:path w="2051050" h="2951163" stroke="0" extrusionOk="0">
+                <a:moveTo>
+                  <a:pt x="0" y="0"/>
+                </a:moveTo>
+                <a:cubicBezTo>
+                  <a:pt x="306279" y="21950"/>
+                  <a:pt x="339620" y="1228"/>
+                  <a:pt x="622152" y="0"/>
+                </a:cubicBezTo>
+                <a:cubicBezTo>
+                  <a:pt x="904684" y="-1228"/>
+                  <a:pt x="1011457" y="20320"/>
+                  <a:pt x="1264814" y="0"/>
+                </a:cubicBezTo>
+                <a:cubicBezTo>
+                  <a:pt x="1518171" y="-20320"/>
+                  <a:pt x="1857420" y="-30729"/>
+                  <a:pt x="2051050" y="0"/>
+                </a:cubicBezTo>
+                <a:cubicBezTo>
+                  <a:pt x="2063232" y="245709"/>
+                  <a:pt x="2041507" y="343479"/>
+                  <a:pt x="2051050" y="560721"/>
+                </a:cubicBezTo>
+                <a:cubicBezTo>
+                  <a:pt x="2060593" y="777963"/>
+                  <a:pt x="2080940" y="886218"/>
+                  <a:pt x="2051050" y="1209977"/>
+                </a:cubicBezTo>
+                <a:cubicBezTo>
+                  <a:pt x="2021160" y="1533736"/>
+                  <a:pt x="2044051" y="1542940"/>
+                  <a:pt x="2051050" y="1711675"/>
+                </a:cubicBezTo>
+                <a:cubicBezTo>
+                  <a:pt x="2058049" y="1880410"/>
+                  <a:pt x="2060947" y="2114975"/>
+                  <a:pt x="2051050" y="2242884"/>
+                </a:cubicBezTo>
+                <a:cubicBezTo>
+                  <a:pt x="2041153" y="2370793"/>
+                  <a:pt x="2081957" y="2753717"/>
+                  <a:pt x="2051050" y="2951163"/>
+                </a:cubicBezTo>
+                <a:cubicBezTo>
+                  <a:pt x="1910115" y="2975025"/>
+                  <a:pt x="1602720" y="2978995"/>
+                  <a:pt x="1428898" y="2951163"/>
+                </a:cubicBezTo>
+                <a:cubicBezTo>
+                  <a:pt x="1255076" y="2923331"/>
+                  <a:pt x="924160" y="2933002"/>
+                  <a:pt x="786236" y="2951163"/>
+                </a:cubicBezTo>
+                <a:cubicBezTo>
+                  <a:pt x="648312" y="2969324"/>
+                  <a:pt x="370261" y="2923618"/>
+                  <a:pt x="0" y="2951163"/>
+                </a:cubicBezTo>
+                <a:cubicBezTo>
+                  <a:pt x="14797" y="2840414"/>
+                  <a:pt x="24747" y="2604392"/>
+                  <a:pt x="0" y="2449465"/>
+                </a:cubicBezTo>
+                <a:cubicBezTo>
+                  <a:pt x="-24747" y="2294538"/>
+                  <a:pt x="12162" y="2112558"/>
+                  <a:pt x="0" y="1829721"/>
+                </a:cubicBezTo>
+                <a:cubicBezTo>
+                  <a:pt x="-12162" y="1546884"/>
+                  <a:pt x="8429" y="1364361"/>
+                  <a:pt x="0" y="1239488"/>
+                </a:cubicBezTo>
+                <a:cubicBezTo>
+                  <a:pt x="-8429" y="1114615"/>
+                  <a:pt x="7141" y="949936"/>
+                  <a:pt x="0" y="708279"/>
+                </a:cubicBezTo>
+                <a:cubicBezTo>
+                  <a:pt x="-7141" y="466622"/>
+                  <a:pt x="-34761" y="237017"/>
+                  <a:pt x="0" y="0"/>
+                </a:cubicBezTo>
+                <a:close/>
+              </a:path>
+            </a:pathLst>
+          </a:custGeom>
+          <a:solidFill>
+            <a:schemeClr val="bg1"/>
+          </a:solidFill>
+          <a:ln w="25400">
+            <a:solidFill>
+              <a:schemeClr val="tx1">
+                <a:lumMod val="95000"/>
+                <a:lumOff val="5000"/>
+              </a:schemeClr>
+            </a:solidFill>
+            <a:extLst>
+              <a:ext uri="{C807C97D-BFC1-408E-A445-0C87EB9F89A2}">
+                <ask:lineSketchStyleProps xmlns:ask="http://schemas.microsoft.com/office/drawing/2018/sketchyshapes" sd="1762638383">
+                  <a:prstGeom prst="rect">
+                    <a:avLst/>
+                  </a:prstGeom>
+                  <ask:type>
+                    <ask:lineSketchFreehand/>
+                  </ask:type>
+                </ask:lineSketchStyleProps>
+              </a:ext>
+            </a:extLst>
+          </a:ln>
+        </p:spPr>
+        <p:style>
+          <a:lnRef idx="2">
+            <a:schemeClr val="accent3">
+              <a:shade val="50000"/>
+            </a:schemeClr>
+          </a:lnRef>
+          <a:fillRef idx="1">
+            <a:schemeClr val="accent3"/>
+          </a:fillRef>
+          <a:effectRef idx="0">
+            <a:schemeClr val="accent3"/>
+          </a:effectRef>
+          <a:fontRef idx="minor">
+            <a:schemeClr val="lt1"/>
+          </a:fontRef>
+        </p:style>
+        <p:txBody>
+          <a:bodyPr rtlCol="0" anchor="ctr"/>
+          <a:lstStyle/>
+          <a:p>
+            <a:pPr algn="ctr"/>
+            <a:endParaRPr lang="de-AT"/>
+          </a:p>
+        </p:txBody>
+      </p:sp>
+    </p:spTree>
+    <p:extLst>
+      <p:ext uri="{BB962C8B-B14F-4D97-AF65-F5344CB8AC3E}">
+        <p14:creationId xmlns:p14="http://schemas.microsoft.com/office/powerpoint/2010/main" val="1861485868"/>
+      </p:ext>
+    </p:extLst>
+  </p:cSld>
+  <p:clrMapOvr>
+    <a:masterClrMapping/>
+  </p:clrMapOvr>
+</p:sld>
+</file>
+
+<file path=ppt/slides/slide3.xml><?xml version="1.0" encoding="utf-8"?>
+<p:sld xmlns:a="http://schemas.openxmlformats.org/drawingml/2006/main" xmlns:r="http://schemas.openxmlformats.org/officeDocument/2006/relationships" xmlns:p="http://schemas.openxmlformats.org/presentationml/2006/main">
+  <p:cSld>
+    <p:spTree>
+      <p:nvGrpSpPr>
+        <p:cNvPr id="1" name=""/>
+        <p:cNvGrpSpPr/>
+        <p:nvPr/>
+      </p:nvGrpSpPr>
+      <p:grpSpPr>
+        <a:xfrm>
+          <a:off x="0" y="0"/>
+          <a:ext cx="0" cy="0"/>
+          <a:chOff x="0" y="0"/>
+          <a:chExt cx="0" cy="0"/>
+        </a:xfrm>
+      </p:grpSpPr>
+      <p:sp>
+        <p:nvSpPr>
+          <p:cNvPr id="2" name="Slide Number Placeholder 1">
+            <a:extLst>
+              <a:ext uri="{FF2B5EF4-FFF2-40B4-BE49-F238E27FC236}">
+                <a16:creationId xmlns:a16="http://schemas.microsoft.com/office/drawing/2014/main" id="{9B5F35AF-FCA3-698A-9EFF-6635CDE7C510}"/>
+              </a:ext>
+            </a:extLst>
+          </p:cNvPr>
+          <p:cNvSpPr>
+            <a:spLocks noGrp="1"/>
+          </p:cNvSpPr>
+          <p:nvPr>
+            <p:ph type="sldNum" sz="quarter" idx="10"/>
+          </p:nvPr>
+        </p:nvSpPr>
+        <p:spPr/>
+        <p:txBody>
+          <a:bodyPr/>
+          <a:lstStyle/>
+          <a:p>
+            <a:fld id="{09C44C4A-945E-4A56-A1E7-C9D60F5427FF}" type="slidenum">
+              <a:rPr lang="de-AT" smtClean="0"/>
+              <a:t>3</a:t>
+            </a:fld>
+            <a:endParaRPr lang="de-AT"/>
+          </a:p>
+        </p:txBody>
+      </p:sp>
+      <p:sp>
+        <p:nvSpPr>
+          <p:cNvPr id="4" name="Title 3">
+            <a:extLst>
+              <a:ext uri="{FF2B5EF4-FFF2-40B4-BE49-F238E27FC236}">
+                <a16:creationId xmlns:a16="http://schemas.microsoft.com/office/drawing/2014/main" id="{FD4CBBB4-C4BF-1C28-9E1B-021370D54D78}"/>
+              </a:ext>
+            </a:extLst>
+          </p:cNvPr>
+          <p:cNvSpPr>
+            <a:spLocks noGrp="1"/>
+          </p:cNvSpPr>
+          <p:nvPr>
+            <p:ph type="title" idx="4294967295"/>
+          </p:nvPr>
+        </p:nvSpPr>
+        <p:spPr>
+          <a:xfrm>
+            <a:off x="114551" y="221488"/>
+            <a:ext cx="3985335" cy="234680"/>
+          </a:xfrm>
+          <a:prstGeom prst="rect">
+            <a:avLst/>
+          </a:prstGeom>
+        </p:spPr>
+        <p:txBody>
+          <a:bodyPr/>
+          <a:lstStyle/>
+          <a:p>
+            <a:endParaRPr lang="en-US">
+              <a:latin typeface="Pangolin" panose="00000500000000000000" pitchFamily="2" charset="0"/>
+            </a:endParaRPr>
+          </a:p>
+        </p:txBody>
+      </p:sp>
+      <p:sp>
+        <p:nvSpPr>
+          <p:cNvPr id="6" name="Rechteck 1">
+            <a:extLst>
+              <a:ext uri="{FF2B5EF4-FFF2-40B4-BE49-F238E27FC236}">
+                <a16:creationId xmlns:a16="http://schemas.microsoft.com/office/drawing/2014/main" id="{469474F8-568B-B960-152F-A30F12D3D653}"/>
+              </a:ext>
+              <a:ext uri="{C183D7F6-B498-43B3-948B-1728B52AA6E4}">
+                <adec:decorative xmlns:adec="http://schemas.microsoft.com/office/drawing/2017/decorative" val="1"/>
+              </a:ext>
+            </a:extLst>
+          </p:cNvPr>
+          <p:cNvSpPr/>
+          <p:nvPr/>
+        </p:nvSpPr>
+        <p:spPr>
+          <a:xfrm>
+            <a:off x="2411227" y="523875"/>
+            <a:ext cx="2048256" cy="2951163"/>
+          </a:xfrm>
+          <a:custGeom>
+            <a:avLst/>
+            <a:gdLst>
+              <a:gd name="csX0" fmla="*/ 0 w 2048256"/>
+              <a:gd name="csY0" fmla="*/ 0 h 2951163"/>
+              <a:gd name="csX1" fmla="*/ 682752 w 2048256"/>
+              <a:gd name="csY1" fmla="*/ 0 h 2951163"/>
+              <a:gd name="csX2" fmla="*/ 1304056 w 2048256"/>
+              <a:gd name="csY2" fmla="*/ 0 h 2951163"/>
+              <a:gd name="csX3" fmla="*/ 2048256 w 2048256"/>
+              <a:gd name="csY3" fmla="*/ 0 h 2951163"/>
+              <a:gd name="csX4" fmla="*/ 2048256 w 2048256"/>
+              <a:gd name="csY4" fmla="*/ 619744 h 2951163"/>
+              <a:gd name="csX5" fmla="*/ 2048256 w 2048256"/>
+              <a:gd name="csY5" fmla="*/ 1239488 h 2951163"/>
+              <a:gd name="csX6" fmla="*/ 2048256 w 2048256"/>
+              <a:gd name="csY6" fmla="*/ 1770698 h 2951163"/>
+              <a:gd name="csX7" fmla="*/ 2048256 w 2048256"/>
+              <a:gd name="csY7" fmla="*/ 2360930 h 2951163"/>
+              <a:gd name="csX8" fmla="*/ 2048256 w 2048256"/>
+              <a:gd name="csY8" fmla="*/ 2951163 h 2951163"/>
+              <a:gd name="csX9" fmla="*/ 1385987 w 2048256"/>
+              <a:gd name="csY9" fmla="*/ 2951163 h 2951163"/>
+              <a:gd name="csX10" fmla="*/ 703235 w 2048256"/>
+              <a:gd name="csY10" fmla="*/ 2951163 h 2951163"/>
+              <a:gd name="csX11" fmla="*/ 0 w 2048256"/>
+              <a:gd name="csY11" fmla="*/ 2951163 h 2951163"/>
+              <a:gd name="csX12" fmla="*/ 0 w 2048256"/>
+              <a:gd name="csY12" fmla="*/ 2331419 h 2951163"/>
+              <a:gd name="csX13" fmla="*/ 0 w 2048256"/>
+              <a:gd name="csY13" fmla="*/ 1682163 h 2951163"/>
+              <a:gd name="csX14" fmla="*/ 0 w 2048256"/>
+              <a:gd name="csY14" fmla="*/ 1062419 h 2951163"/>
+              <a:gd name="csX15" fmla="*/ 0 w 2048256"/>
+              <a:gd name="csY15" fmla="*/ 0 h 2951163"/>
+            </a:gdLst>
+            <a:ahLst/>
+            <a:cxnLst>
+              <a:cxn ang="0">
+                <a:pos x="csX0" y="csY0"/>
+              </a:cxn>
+              <a:cxn ang="0">
+                <a:pos x="csX1" y="csY1"/>
+              </a:cxn>
+              <a:cxn ang="0">
+                <a:pos x="csX2" y="csY2"/>
+              </a:cxn>
+              <a:cxn ang="0">
+                <a:pos x="csX3" y="csY3"/>
+              </a:cxn>
+              <a:cxn ang="0">
+                <a:pos x="csX4" y="csY4"/>
+              </a:cxn>
+              <a:cxn ang="0">
+                <a:pos x="csX5" y="csY5"/>
+              </a:cxn>
+              <a:cxn ang="0">
+                <a:pos x="csX6" y="csY6"/>
+              </a:cxn>
+              <a:cxn ang="0">
+                <a:pos x="csX7" y="csY7"/>
+              </a:cxn>
+              <a:cxn ang="0">
+                <a:pos x="csX8" y="csY8"/>
+              </a:cxn>
+              <a:cxn ang="0">
+                <a:pos x="csX9" y="csY9"/>
+              </a:cxn>
+              <a:cxn ang="0">
+                <a:pos x="csX10" y="csY10"/>
+              </a:cxn>
+              <a:cxn ang="0">
+                <a:pos x="csX11" y="csY11"/>
+              </a:cxn>
+              <a:cxn ang="0">
+                <a:pos x="csX12" y="csY12"/>
+              </a:cxn>
+              <a:cxn ang="0">
+                <a:pos x="csX13" y="csY13"/>
+              </a:cxn>
+              <a:cxn ang="0">
+                <a:pos x="csX14" y="csY14"/>
+              </a:cxn>
+              <a:cxn ang="0">
+                <a:pos x="csX15" y="csY15"/>
+              </a:cxn>
+            </a:cxnLst>
+            <a:rect l="l" t="t" r="r" b="b"/>
+            <a:pathLst>
+              <a:path w="2048256" h="2951163" fill="none" extrusionOk="0">
+                <a:moveTo>
+                  <a:pt x="0" y="0"/>
+                </a:moveTo>
+                <a:cubicBezTo>
+                  <a:pt x="145745" y="-14563"/>
+                  <a:pt x="443531" y="-7277"/>
+                  <a:pt x="682752" y="0"/>
+                </a:cubicBezTo>
+                <a:cubicBezTo>
+                  <a:pt x="921973" y="7277"/>
+                  <a:pt x="1028656" y="-16000"/>
+                  <a:pt x="1304056" y="0"/>
+                </a:cubicBezTo>
+                <a:cubicBezTo>
+                  <a:pt x="1579456" y="16000"/>
+                  <a:pt x="1703881" y="12176"/>
+                  <a:pt x="2048256" y="0"/>
+                </a:cubicBezTo>
+                <a:cubicBezTo>
+                  <a:pt x="2046264" y="239847"/>
+                  <a:pt x="2076706" y="432103"/>
+                  <a:pt x="2048256" y="619744"/>
+                </a:cubicBezTo>
+                <a:cubicBezTo>
+                  <a:pt x="2019806" y="807385"/>
+                  <a:pt x="2034863" y="1080410"/>
+                  <a:pt x="2048256" y="1239488"/>
+                </a:cubicBezTo>
+                <a:cubicBezTo>
+                  <a:pt x="2061649" y="1398566"/>
+                  <a:pt x="2045510" y="1613183"/>
+                  <a:pt x="2048256" y="1770698"/>
+                </a:cubicBezTo>
+                <a:cubicBezTo>
+                  <a:pt x="2051003" y="1928213"/>
+                  <a:pt x="2074513" y="2089042"/>
+                  <a:pt x="2048256" y="2360930"/>
+                </a:cubicBezTo>
+                <a:cubicBezTo>
+                  <a:pt x="2021999" y="2632818"/>
+                  <a:pt x="2041826" y="2795804"/>
+                  <a:pt x="2048256" y="2951163"/>
+                </a:cubicBezTo>
+                <a:cubicBezTo>
+                  <a:pt x="1777615" y="2949990"/>
+                  <a:pt x="1590074" y="2922595"/>
+                  <a:pt x="1385987" y="2951163"/>
+                </a:cubicBezTo>
+                <a:cubicBezTo>
+                  <a:pt x="1181900" y="2979731"/>
+                  <a:pt x="937289" y="2925220"/>
+                  <a:pt x="703235" y="2951163"/>
+                </a:cubicBezTo>
+                <a:cubicBezTo>
+                  <a:pt x="469181" y="2977106"/>
+                  <a:pt x="279028" y="2952897"/>
+                  <a:pt x="0" y="2951163"/>
+                </a:cubicBezTo>
+                <a:cubicBezTo>
+                  <a:pt x="-12688" y="2660430"/>
+                  <a:pt x="3295" y="2469288"/>
+                  <a:pt x="0" y="2331419"/>
+                </a:cubicBezTo>
+                <a:cubicBezTo>
+                  <a:pt x="-3295" y="2193550"/>
+                  <a:pt x="-19903" y="1834509"/>
+                  <a:pt x="0" y="1682163"/>
+                </a:cubicBezTo>
+                <a:cubicBezTo>
+                  <a:pt x="19903" y="1529817"/>
+                  <a:pt x="4229" y="1363192"/>
+                  <a:pt x="0" y="1062419"/>
+                </a:cubicBezTo>
+                <a:cubicBezTo>
+                  <a:pt x="-4229" y="761646"/>
+                  <a:pt x="529" y="476222"/>
+                  <a:pt x="0" y="0"/>
+                </a:cubicBezTo>
+                <a:close/>
+              </a:path>
+              <a:path w="2048256" h="2951163" stroke="0" extrusionOk="0">
+                <a:moveTo>
+                  <a:pt x="0" y="0"/>
+                </a:moveTo>
+                <a:cubicBezTo>
+                  <a:pt x="202094" y="13324"/>
+                  <a:pt x="347226" y="23935"/>
+                  <a:pt x="621304" y="0"/>
+                </a:cubicBezTo>
+                <a:cubicBezTo>
+                  <a:pt x="895382" y="-23935"/>
+                  <a:pt x="1070239" y="14752"/>
+                  <a:pt x="1263091" y="0"/>
+                </a:cubicBezTo>
+                <a:cubicBezTo>
+                  <a:pt x="1455943" y="-14752"/>
+                  <a:pt x="1811845" y="25403"/>
+                  <a:pt x="2048256" y="0"/>
+                </a:cubicBezTo>
+                <a:cubicBezTo>
+                  <a:pt x="2060438" y="245709"/>
+                  <a:pt x="2038713" y="343479"/>
+                  <a:pt x="2048256" y="560721"/>
+                </a:cubicBezTo>
+                <a:cubicBezTo>
+                  <a:pt x="2057799" y="777963"/>
+                  <a:pt x="2078146" y="886218"/>
+                  <a:pt x="2048256" y="1209977"/>
+                </a:cubicBezTo>
+                <a:cubicBezTo>
+                  <a:pt x="2018366" y="1533736"/>
+                  <a:pt x="2041257" y="1542940"/>
+                  <a:pt x="2048256" y="1711675"/>
+                </a:cubicBezTo>
+                <a:cubicBezTo>
+                  <a:pt x="2055255" y="1880410"/>
+                  <a:pt x="2058153" y="2114975"/>
+                  <a:pt x="2048256" y="2242884"/>
+                </a:cubicBezTo>
+                <a:cubicBezTo>
+                  <a:pt x="2038359" y="2370793"/>
+                  <a:pt x="2079163" y="2753717"/>
+                  <a:pt x="2048256" y="2951163"/>
+                </a:cubicBezTo>
+                <a:cubicBezTo>
+                  <a:pt x="1902866" y="2942189"/>
+                  <a:pt x="1732100" y="2949788"/>
+                  <a:pt x="1426952" y="2951163"/>
+                </a:cubicBezTo>
+                <a:cubicBezTo>
+                  <a:pt x="1121804" y="2952538"/>
+                  <a:pt x="1052260" y="2937349"/>
+                  <a:pt x="785165" y="2951163"/>
+                </a:cubicBezTo>
+                <a:cubicBezTo>
+                  <a:pt x="518070" y="2964977"/>
+                  <a:pt x="300455" y="2971486"/>
+                  <a:pt x="0" y="2951163"/>
+                </a:cubicBezTo>
+                <a:cubicBezTo>
+                  <a:pt x="14797" y="2840414"/>
+                  <a:pt x="24747" y="2604392"/>
+                  <a:pt x="0" y="2449465"/>
+                </a:cubicBezTo>
+                <a:cubicBezTo>
+                  <a:pt x="-24747" y="2294538"/>
+                  <a:pt x="12162" y="2112558"/>
+                  <a:pt x="0" y="1829721"/>
+                </a:cubicBezTo>
+                <a:cubicBezTo>
+                  <a:pt x="-12162" y="1546884"/>
+                  <a:pt x="8429" y="1364361"/>
+                  <a:pt x="0" y="1239488"/>
+                </a:cubicBezTo>
+                <a:cubicBezTo>
+                  <a:pt x="-8429" y="1114615"/>
+                  <a:pt x="7141" y="949936"/>
+                  <a:pt x="0" y="708279"/>
+                </a:cubicBezTo>
+                <a:cubicBezTo>
+                  <a:pt x="-7141" y="466622"/>
+                  <a:pt x="-34761" y="237017"/>
+                  <a:pt x="0" y="0"/>
+                </a:cubicBezTo>
+                <a:close/>
+              </a:path>
+            </a:pathLst>
+          </a:custGeom>
+          <a:solidFill>
+            <a:schemeClr val="bg1"/>
+          </a:solidFill>
+          <a:ln w="25400">
+            <a:solidFill>
+              <a:schemeClr val="tx1">
+                <a:lumMod val="95000"/>
+                <a:lumOff val="5000"/>
+              </a:schemeClr>
+            </a:solidFill>
+            <a:extLst>
+              <a:ext uri="{C807C97D-BFC1-408E-A445-0C87EB9F89A2}">
+                <ask:lineSketchStyleProps xmlns:ask="http://schemas.microsoft.com/office/drawing/2018/sketchyshapes" sd="1762638383">
+                  <a:prstGeom prst="rect">
+                    <a:avLst/>
+                  </a:prstGeom>
+                  <ask:type>
+                    <ask:lineSketchFreehand/>
+                  </ask:type>
+                </ask:lineSketchStyleProps>
+              </a:ext>
+            </a:extLst>
+          </a:ln>
+        </p:spPr>
+        <p:style>
+          <a:lnRef idx="2">
+            <a:schemeClr val="accent3">
+              <a:shade val="50000"/>
+            </a:schemeClr>
+          </a:lnRef>
+          <a:fillRef idx="1">
+            <a:schemeClr val="accent3"/>
+          </a:fillRef>
+          <a:effectRef idx="0">
+            <a:schemeClr val="accent3"/>
+          </a:effectRef>
+          <a:fontRef idx="minor">
+            <a:schemeClr val="lt1"/>
+          </a:fontRef>
+        </p:style>
+        <p:txBody>
+          <a:bodyPr rtlCol="0" anchor="ctr"/>
+          <a:lstStyle/>
+          <a:p>
+            <a:pPr algn="ctr"/>
+            <a:endParaRPr lang="de-AT"/>
+          </a:p>
+        </p:txBody>
+      </p:sp>
+      <p:sp>
+        <p:nvSpPr>
+          <p:cNvPr id="8" name="Rechteck 2">
+            <a:extLst>
+              <a:ext uri="{FF2B5EF4-FFF2-40B4-BE49-F238E27FC236}">
+                <a16:creationId xmlns:a16="http://schemas.microsoft.com/office/drawing/2014/main" id="{484FF906-7B9B-BC0C-B069-005A2D3E62B9}"/>
+              </a:ext>
+              <a:ext uri="{C183D7F6-B498-43B3-948B-1728B52AA6E4}">
+                <adec:decorative xmlns:adec="http://schemas.microsoft.com/office/drawing/2017/decorative" val="1"/>
+              </a:ext>
+            </a:extLst>
+          </p:cNvPr>
+          <p:cNvSpPr/>
+          <p:nvPr/>
+        </p:nvSpPr>
+        <p:spPr>
+          <a:xfrm>
+            <a:off x="4581525" y="525462"/>
+            <a:ext cx="2051050" cy="2951163"/>
+          </a:xfrm>
+          <a:custGeom>
+            <a:avLst/>
+            <a:gdLst>
+              <a:gd name="csX0" fmla="*/ 0 w 2051050"/>
+              <a:gd name="csY0" fmla="*/ 0 h 2951163"/>
+              <a:gd name="csX1" fmla="*/ 683683 w 2051050"/>
+              <a:gd name="csY1" fmla="*/ 0 h 2951163"/>
+              <a:gd name="csX2" fmla="*/ 1305835 w 2051050"/>
+              <a:gd name="csY2" fmla="*/ 0 h 2951163"/>
+              <a:gd name="csX3" fmla="*/ 2051050 w 2051050"/>
+              <a:gd name="csY3" fmla="*/ 0 h 2951163"/>
+              <a:gd name="csX4" fmla="*/ 2051050 w 2051050"/>
+              <a:gd name="csY4" fmla="*/ 619744 h 2951163"/>
+              <a:gd name="csX5" fmla="*/ 2051050 w 2051050"/>
+              <a:gd name="csY5" fmla="*/ 1239488 h 2951163"/>
+              <a:gd name="csX6" fmla="*/ 2051050 w 2051050"/>
+              <a:gd name="csY6" fmla="*/ 1770698 h 2951163"/>
+              <a:gd name="csX7" fmla="*/ 2051050 w 2051050"/>
+              <a:gd name="csY7" fmla="*/ 2360930 h 2951163"/>
+              <a:gd name="csX8" fmla="*/ 2051050 w 2051050"/>
+              <a:gd name="csY8" fmla="*/ 2951163 h 2951163"/>
+              <a:gd name="csX9" fmla="*/ 1387877 w 2051050"/>
+              <a:gd name="csY9" fmla="*/ 2951163 h 2951163"/>
+              <a:gd name="csX10" fmla="*/ 704194 w 2051050"/>
+              <a:gd name="csY10" fmla="*/ 2951163 h 2951163"/>
+              <a:gd name="csX11" fmla="*/ 0 w 2051050"/>
+              <a:gd name="csY11" fmla="*/ 2951163 h 2951163"/>
+              <a:gd name="csX12" fmla="*/ 0 w 2051050"/>
+              <a:gd name="csY12" fmla="*/ 2331419 h 2951163"/>
+              <a:gd name="csX13" fmla="*/ 0 w 2051050"/>
+              <a:gd name="csY13" fmla="*/ 1682163 h 2951163"/>
+              <a:gd name="csX14" fmla="*/ 0 w 2051050"/>
+              <a:gd name="csY14" fmla="*/ 1062419 h 2951163"/>
+              <a:gd name="csX15" fmla="*/ 0 w 2051050"/>
+              <a:gd name="csY15" fmla="*/ 0 h 2951163"/>
+            </a:gdLst>
+            <a:ahLst/>
+            <a:cxnLst>
+              <a:cxn ang="0">
+                <a:pos x="csX0" y="csY0"/>
+              </a:cxn>
+              <a:cxn ang="0">
+                <a:pos x="csX1" y="csY1"/>
+              </a:cxn>
+              <a:cxn ang="0">
+                <a:pos x="csX2" y="csY2"/>
+              </a:cxn>
+              <a:cxn ang="0">
+                <a:pos x="csX3" y="csY3"/>
+              </a:cxn>
+              <a:cxn ang="0">
+                <a:pos x="csX4" y="csY4"/>
+              </a:cxn>
+              <a:cxn ang="0">
+                <a:pos x="csX5" y="csY5"/>
+              </a:cxn>
+              <a:cxn ang="0">
+                <a:pos x="csX6" y="csY6"/>
+              </a:cxn>
+              <a:cxn ang="0">
+                <a:pos x="csX7" y="csY7"/>
+              </a:cxn>
+              <a:cxn ang="0">
+                <a:pos x="csX8" y="csY8"/>
+              </a:cxn>
+              <a:cxn ang="0">
+                <a:pos x="csX9" y="csY9"/>
+              </a:cxn>
+              <a:cxn ang="0">
+                <a:pos x="csX10" y="csY10"/>
+              </a:cxn>
+              <a:cxn ang="0">
+                <a:pos x="csX11" y="csY11"/>
+              </a:cxn>
+              <a:cxn ang="0">
+                <a:pos x="csX12" y="csY12"/>
+              </a:cxn>
+              <a:cxn ang="0">
+                <a:pos x="csX13" y="csY13"/>
+              </a:cxn>
+              <a:cxn ang="0">
+                <a:pos x="csX14" y="csY14"/>
+              </a:cxn>
+              <a:cxn ang="0">
+                <a:pos x="csX15" y="csY15"/>
+              </a:cxn>
+            </a:cxnLst>
+            <a:rect l="l" t="t" r="r" b="b"/>
+            <a:pathLst>
+              <a:path w="2051050" h="2951163" fill="none" extrusionOk="0">
+                <a:moveTo>
+                  <a:pt x="0" y="0"/>
+                </a:moveTo>
+                <a:cubicBezTo>
+                  <a:pt x="267367" y="14427"/>
+                  <a:pt x="349033" y="-12086"/>
+                  <a:pt x="683683" y="0"/>
+                </a:cubicBezTo>
+                <a:cubicBezTo>
+                  <a:pt x="1018333" y="12086"/>
+                  <a:pt x="1022416" y="-8631"/>
+                  <a:pt x="1305835" y="0"/>
+                </a:cubicBezTo>
+                <a:cubicBezTo>
+                  <a:pt x="1589254" y="8631"/>
+                  <a:pt x="1888174" y="-24305"/>
+                  <a:pt x="2051050" y="0"/>
+                </a:cubicBezTo>
+                <a:cubicBezTo>
+                  <a:pt x="2049058" y="239847"/>
+                  <a:pt x="2079500" y="432103"/>
+                  <a:pt x="2051050" y="619744"/>
+                </a:cubicBezTo>
+                <a:cubicBezTo>
+                  <a:pt x="2022600" y="807385"/>
+                  <a:pt x="2037657" y="1080410"/>
+                  <a:pt x="2051050" y="1239488"/>
+                </a:cubicBezTo>
+                <a:cubicBezTo>
+                  <a:pt x="2064443" y="1398566"/>
+                  <a:pt x="2048304" y="1613183"/>
+                  <a:pt x="2051050" y="1770698"/>
+                </a:cubicBezTo>
+                <a:cubicBezTo>
+                  <a:pt x="2053797" y="1928213"/>
+                  <a:pt x="2077307" y="2089042"/>
+                  <a:pt x="2051050" y="2360930"/>
+                </a:cubicBezTo>
+                <a:cubicBezTo>
+                  <a:pt x="2024793" y="2632818"/>
+                  <a:pt x="2044620" y="2795804"/>
+                  <a:pt x="2051050" y="2951163"/>
+                </a:cubicBezTo>
+                <a:cubicBezTo>
+                  <a:pt x="1792864" y="2945869"/>
+                  <a:pt x="1550867" y="2982853"/>
+                  <a:pt x="1387877" y="2951163"/>
+                </a:cubicBezTo>
+                <a:cubicBezTo>
+                  <a:pt x="1224887" y="2919473"/>
+                  <a:pt x="943563" y="2930389"/>
+                  <a:pt x="704194" y="2951163"/>
+                </a:cubicBezTo>
+                <a:cubicBezTo>
+                  <a:pt x="464825" y="2971937"/>
+                  <a:pt x="330882" y="2923973"/>
+                  <a:pt x="0" y="2951163"/>
+                </a:cubicBezTo>
+                <a:cubicBezTo>
+                  <a:pt x="-12688" y="2660430"/>
+                  <a:pt x="3295" y="2469288"/>
+                  <a:pt x="0" y="2331419"/>
+                </a:cubicBezTo>
+                <a:cubicBezTo>
+                  <a:pt x="-3295" y="2193550"/>
+                  <a:pt x="-19903" y="1834509"/>
+                  <a:pt x="0" y="1682163"/>
+                </a:cubicBezTo>
+                <a:cubicBezTo>
+                  <a:pt x="19903" y="1529817"/>
+                  <a:pt x="4229" y="1363192"/>
+                  <a:pt x="0" y="1062419"/>
+                </a:cubicBezTo>
+                <a:cubicBezTo>
+                  <a:pt x="-4229" y="761646"/>
+                  <a:pt x="529" y="476222"/>
+                  <a:pt x="0" y="0"/>
+                </a:cubicBezTo>
+                <a:close/>
+              </a:path>
+              <a:path w="2051050" h="2951163" stroke="0" extrusionOk="0">
+                <a:moveTo>
+                  <a:pt x="0" y="0"/>
+                </a:moveTo>
+                <a:cubicBezTo>
+                  <a:pt x="306279" y="21950"/>
+                  <a:pt x="339620" y="1228"/>
+                  <a:pt x="622152" y="0"/>
+                </a:cubicBezTo>
+                <a:cubicBezTo>
+                  <a:pt x="904684" y="-1228"/>
+                  <a:pt x="1011457" y="20320"/>
+                  <a:pt x="1264814" y="0"/>
+                </a:cubicBezTo>
+                <a:cubicBezTo>
+                  <a:pt x="1518171" y="-20320"/>
+                  <a:pt x="1857420" y="-30729"/>
+                  <a:pt x="2051050" y="0"/>
+                </a:cubicBezTo>
+                <a:cubicBezTo>
+                  <a:pt x="2063232" y="245709"/>
+                  <a:pt x="2041507" y="343479"/>
+                  <a:pt x="2051050" y="560721"/>
+                </a:cubicBezTo>
+                <a:cubicBezTo>
+                  <a:pt x="2060593" y="777963"/>
+                  <a:pt x="2080940" y="886218"/>
+                  <a:pt x="2051050" y="1209977"/>
+                </a:cubicBezTo>
+                <a:cubicBezTo>
+                  <a:pt x="2021160" y="1533736"/>
+                  <a:pt x="2044051" y="1542940"/>
+                  <a:pt x="2051050" y="1711675"/>
+                </a:cubicBezTo>
+                <a:cubicBezTo>
+                  <a:pt x="2058049" y="1880410"/>
+                  <a:pt x="2060947" y="2114975"/>
+                  <a:pt x="2051050" y="2242884"/>
+                </a:cubicBezTo>
+                <a:cubicBezTo>
+                  <a:pt x="2041153" y="2370793"/>
+                  <a:pt x="2081957" y="2753717"/>
+                  <a:pt x="2051050" y="2951163"/>
+                </a:cubicBezTo>
+                <a:cubicBezTo>
+                  <a:pt x="1910115" y="2975025"/>
+                  <a:pt x="1602720" y="2978995"/>
+                  <a:pt x="1428898" y="2951163"/>
+                </a:cubicBezTo>
+                <a:cubicBezTo>
+                  <a:pt x="1255076" y="2923331"/>
+                  <a:pt x="924160" y="2933002"/>
+                  <a:pt x="786236" y="2951163"/>
+                </a:cubicBezTo>
+                <a:cubicBezTo>
+                  <a:pt x="648312" y="2969324"/>
+                  <a:pt x="370261" y="2923618"/>
+                  <a:pt x="0" y="2951163"/>
+                </a:cubicBezTo>
+                <a:cubicBezTo>
+                  <a:pt x="14797" y="2840414"/>
+                  <a:pt x="24747" y="2604392"/>
+                  <a:pt x="0" y="2449465"/>
+                </a:cubicBezTo>
+                <a:cubicBezTo>
+                  <a:pt x="-24747" y="2294538"/>
+                  <a:pt x="12162" y="2112558"/>
+                  <a:pt x="0" y="1829721"/>
+                </a:cubicBezTo>
+                <a:cubicBezTo>
+                  <a:pt x="-12162" y="1546884"/>
+                  <a:pt x="8429" y="1364361"/>
+                  <a:pt x="0" y="1239488"/>
+                </a:cubicBezTo>
+                <a:cubicBezTo>
+                  <a:pt x="-8429" y="1114615"/>
+                  <a:pt x="7141" y="949936"/>
+                  <a:pt x="0" y="708279"/>
+                </a:cubicBezTo>
+                <a:cubicBezTo>
+                  <a:pt x="-7141" y="466622"/>
+                  <a:pt x="-34761" y="237017"/>
+                  <a:pt x="0" y="0"/>
+                </a:cubicBezTo>
+                <a:close/>
+              </a:path>
+            </a:pathLst>
+          </a:custGeom>
+          <a:solidFill>
+            <a:schemeClr val="bg1"/>
+          </a:solidFill>
+          <a:ln w="25400">
+            <a:solidFill>
+              <a:schemeClr val="tx1">
+                <a:lumMod val="95000"/>
+                <a:lumOff val="5000"/>
+              </a:schemeClr>
+            </a:solidFill>
+            <a:extLst>
+              <a:ext uri="{C807C97D-BFC1-408E-A445-0C87EB9F89A2}">
+                <ask:lineSketchStyleProps xmlns:ask="http://schemas.microsoft.com/office/drawing/2018/sketchyshapes" sd="1762638383">
+                  <a:prstGeom prst="rect">
+                    <a:avLst/>
+                  </a:prstGeom>
+                  <ask:type>
+                    <ask:lineSketchFreehand/>
+                  </ask:type>
+                </ask:lineSketchStyleProps>
+              </a:ext>
+            </a:extLst>
+          </a:ln>
+        </p:spPr>
+        <p:style>
+          <a:lnRef idx="2">
+            <a:schemeClr val="accent3">
+              <a:shade val="50000"/>
+            </a:schemeClr>
+          </a:lnRef>
+          <a:fillRef idx="1">
+            <a:schemeClr val="accent3"/>
+          </a:fillRef>
+          <a:effectRef idx="0">
+            <a:schemeClr val="accent3"/>
+          </a:effectRef>
+          <a:fontRef idx="minor">
+            <a:schemeClr val="lt1"/>
+          </a:fontRef>
+        </p:style>
+        <p:txBody>
+          <a:bodyPr rtlCol="0" anchor="ctr"/>
+          <a:lstStyle/>
+          <a:p>
+            <a:pPr algn="ctr"/>
+            <a:endParaRPr lang="de-AT"/>
+          </a:p>
+        </p:txBody>
+      </p:sp>
+      <p:sp>
+        <p:nvSpPr>
+          <p:cNvPr id="10" name="Rechteck 3">
+            <a:extLst>
+              <a:ext uri="{FF2B5EF4-FFF2-40B4-BE49-F238E27FC236}">
+                <a16:creationId xmlns:a16="http://schemas.microsoft.com/office/drawing/2014/main" id="{06425659-00EF-DAA2-A1EF-9CED0407A812}"/>
+              </a:ext>
+              <a:ext uri="{C183D7F6-B498-43B3-948B-1728B52AA6E4}">
+                <adec:decorative xmlns:adec="http://schemas.microsoft.com/office/drawing/2017/decorative" val="1"/>
+              </a:ext>
+            </a:extLst>
+          </p:cNvPr>
+          <p:cNvSpPr/>
+          <p:nvPr/>
+        </p:nvSpPr>
+        <p:spPr>
+          <a:xfrm>
+            <a:off x="225425" y="3622675"/>
+            <a:ext cx="2051050" cy="2951163"/>
+          </a:xfrm>
+          <a:custGeom>
+            <a:avLst/>
+            <a:gdLst>
+              <a:gd name="csX0" fmla="*/ 0 w 2051050"/>
+              <a:gd name="csY0" fmla="*/ 0 h 2951163"/>
+              <a:gd name="csX1" fmla="*/ 683683 w 2051050"/>
+              <a:gd name="csY1" fmla="*/ 0 h 2951163"/>
+              <a:gd name="csX2" fmla="*/ 1305835 w 2051050"/>
+              <a:gd name="csY2" fmla="*/ 0 h 2951163"/>
+              <a:gd name="csX3" fmla="*/ 2051050 w 2051050"/>
+              <a:gd name="csY3" fmla="*/ 0 h 2951163"/>
+              <a:gd name="csX4" fmla="*/ 2051050 w 2051050"/>
+              <a:gd name="csY4" fmla="*/ 619744 h 2951163"/>
+              <a:gd name="csX5" fmla="*/ 2051050 w 2051050"/>
+              <a:gd name="csY5" fmla="*/ 1239488 h 2951163"/>
+              <a:gd name="csX6" fmla="*/ 2051050 w 2051050"/>
+              <a:gd name="csY6" fmla="*/ 1770698 h 2951163"/>
+              <a:gd name="csX7" fmla="*/ 2051050 w 2051050"/>
+              <a:gd name="csY7" fmla="*/ 2360930 h 2951163"/>
+              <a:gd name="csX8" fmla="*/ 2051050 w 2051050"/>
+              <a:gd name="csY8" fmla="*/ 2951163 h 2951163"/>
+              <a:gd name="csX9" fmla="*/ 1387877 w 2051050"/>
+              <a:gd name="csY9" fmla="*/ 2951163 h 2951163"/>
+              <a:gd name="csX10" fmla="*/ 704194 w 2051050"/>
+              <a:gd name="csY10" fmla="*/ 2951163 h 2951163"/>
+              <a:gd name="csX11" fmla="*/ 0 w 2051050"/>
+              <a:gd name="csY11" fmla="*/ 2951163 h 2951163"/>
+              <a:gd name="csX12" fmla="*/ 0 w 2051050"/>
+              <a:gd name="csY12" fmla="*/ 2331419 h 2951163"/>
+              <a:gd name="csX13" fmla="*/ 0 w 2051050"/>
+              <a:gd name="csY13" fmla="*/ 1682163 h 2951163"/>
+              <a:gd name="csX14" fmla="*/ 0 w 2051050"/>
+              <a:gd name="csY14" fmla="*/ 1062419 h 2951163"/>
+              <a:gd name="csX15" fmla="*/ 0 w 2051050"/>
+              <a:gd name="csY15" fmla="*/ 0 h 2951163"/>
+            </a:gdLst>
+            <a:ahLst/>
+            <a:cxnLst>
+              <a:cxn ang="0">
+                <a:pos x="csX0" y="csY0"/>
+              </a:cxn>
+              <a:cxn ang="0">
+                <a:pos x="csX1" y="csY1"/>
+              </a:cxn>
+              <a:cxn ang="0">
+                <a:pos x="csX2" y="csY2"/>
+              </a:cxn>
+              <a:cxn ang="0">
+                <a:pos x="csX3" y="csY3"/>
+              </a:cxn>
+              <a:cxn ang="0">
+                <a:pos x="csX4" y="csY4"/>
+              </a:cxn>
+              <a:cxn ang="0">
+                <a:pos x="csX5" y="csY5"/>
+              </a:cxn>
+              <a:cxn ang="0">
+                <a:pos x="csX6" y="csY6"/>
+              </a:cxn>
+              <a:cxn ang="0">
+                <a:pos x="csX7" y="csY7"/>
+              </a:cxn>
+              <a:cxn ang="0">
+                <a:pos x="csX8" y="csY8"/>
+              </a:cxn>
+              <a:cxn ang="0">
+                <a:pos x="csX9" y="csY9"/>
+              </a:cxn>
+              <a:cxn ang="0">
+                <a:pos x="csX10" y="csY10"/>
+              </a:cxn>
+              <a:cxn ang="0">
+                <a:pos x="csX11" y="csY11"/>
+              </a:cxn>
+              <a:cxn ang="0">
+                <a:pos x="csX12" y="csY12"/>
+              </a:cxn>
+              <a:cxn ang="0">
+                <a:pos x="csX13" y="csY13"/>
+              </a:cxn>
+              <a:cxn ang="0">
+                <a:pos x="csX14" y="csY14"/>
+              </a:cxn>
+              <a:cxn ang="0">
+                <a:pos x="csX15" y="csY15"/>
+              </a:cxn>
+            </a:cxnLst>
+            <a:rect l="l" t="t" r="r" b="b"/>
+            <a:pathLst>
+              <a:path w="2051050" h="2951163" fill="none" extrusionOk="0">
+                <a:moveTo>
+                  <a:pt x="0" y="0"/>
+                </a:moveTo>
+                <a:cubicBezTo>
+                  <a:pt x="267367" y="14427"/>
+                  <a:pt x="349033" y="-12086"/>
+                  <a:pt x="683683" y="0"/>
+                </a:cubicBezTo>
+                <a:cubicBezTo>
+                  <a:pt x="1018333" y="12086"/>
+                  <a:pt x="1022416" y="-8631"/>
+                  <a:pt x="1305835" y="0"/>
+                </a:cubicBezTo>
+                <a:cubicBezTo>
+                  <a:pt x="1589254" y="8631"/>
+                  <a:pt x="1888174" y="-24305"/>
+                  <a:pt x="2051050" y="0"/>
+                </a:cubicBezTo>
+                <a:cubicBezTo>
+                  <a:pt x="2049058" y="239847"/>
+                  <a:pt x="2079500" y="432103"/>
+                  <a:pt x="2051050" y="619744"/>
+                </a:cubicBezTo>
+                <a:cubicBezTo>
+                  <a:pt x="2022600" y="807385"/>
+                  <a:pt x="2037657" y="1080410"/>
+                  <a:pt x="2051050" y="1239488"/>
+                </a:cubicBezTo>
+                <a:cubicBezTo>
+                  <a:pt x="2064443" y="1398566"/>
+                  <a:pt x="2048304" y="1613183"/>
+                  <a:pt x="2051050" y="1770698"/>
+                </a:cubicBezTo>
+                <a:cubicBezTo>
+                  <a:pt x="2053797" y="1928213"/>
+                  <a:pt x="2077307" y="2089042"/>
+                  <a:pt x="2051050" y="2360930"/>
+                </a:cubicBezTo>
+                <a:cubicBezTo>
+                  <a:pt x="2024793" y="2632818"/>
+                  <a:pt x="2044620" y="2795804"/>
+                  <a:pt x="2051050" y="2951163"/>
+                </a:cubicBezTo>
+                <a:cubicBezTo>
+                  <a:pt x="1792864" y="2945869"/>
+                  <a:pt x="1550867" y="2982853"/>
+                  <a:pt x="1387877" y="2951163"/>
+                </a:cubicBezTo>
+                <a:cubicBezTo>
+                  <a:pt x="1224887" y="2919473"/>
+                  <a:pt x="943563" y="2930389"/>
+                  <a:pt x="704194" y="2951163"/>
+                </a:cubicBezTo>
+                <a:cubicBezTo>
+                  <a:pt x="464825" y="2971937"/>
+                  <a:pt x="330882" y="2923973"/>
+                  <a:pt x="0" y="2951163"/>
+                </a:cubicBezTo>
+                <a:cubicBezTo>
+                  <a:pt x="-12688" y="2660430"/>
+                  <a:pt x="3295" y="2469288"/>
+                  <a:pt x="0" y="2331419"/>
+                </a:cubicBezTo>
+                <a:cubicBezTo>
+                  <a:pt x="-3295" y="2193550"/>
+                  <a:pt x="-19903" y="1834509"/>
+                  <a:pt x="0" y="1682163"/>
+                </a:cubicBezTo>
+                <a:cubicBezTo>
+                  <a:pt x="19903" y="1529817"/>
+                  <a:pt x="4229" y="1363192"/>
+                  <a:pt x="0" y="1062419"/>
+                </a:cubicBezTo>
+                <a:cubicBezTo>
+                  <a:pt x="-4229" y="761646"/>
+                  <a:pt x="529" y="476222"/>
+                  <a:pt x="0" y="0"/>
+                </a:cubicBezTo>
+                <a:close/>
+              </a:path>
+              <a:path w="2051050" h="2951163" stroke="0" extrusionOk="0">
+                <a:moveTo>
+                  <a:pt x="0" y="0"/>
+                </a:moveTo>
+                <a:cubicBezTo>
+                  <a:pt x="306279" y="21950"/>
+                  <a:pt x="339620" y="1228"/>
+                  <a:pt x="622152" y="0"/>
+                </a:cubicBezTo>
+                <a:cubicBezTo>
+                  <a:pt x="904684" y="-1228"/>
+                  <a:pt x="1011457" y="20320"/>
+                  <a:pt x="1264814" y="0"/>
+                </a:cubicBezTo>
+                <a:cubicBezTo>
+                  <a:pt x="1518171" y="-20320"/>
+                  <a:pt x="1857420" y="-30729"/>
+                  <a:pt x="2051050" y="0"/>
+                </a:cubicBezTo>
+                <a:cubicBezTo>
+                  <a:pt x="2063232" y="245709"/>
+                  <a:pt x="2041507" y="343479"/>
+                  <a:pt x="2051050" y="560721"/>
+                </a:cubicBezTo>
+                <a:cubicBezTo>
+                  <a:pt x="2060593" y="777963"/>
+                  <a:pt x="2080940" y="886218"/>
+                  <a:pt x="2051050" y="1209977"/>
+                </a:cubicBezTo>
+                <a:cubicBezTo>
+                  <a:pt x="2021160" y="1533736"/>
+                  <a:pt x="2044051" y="1542940"/>
+                  <a:pt x="2051050" y="1711675"/>
+                </a:cubicBezTo>
+                <a:cubicBezTo>
+                  <a:pt x="2058049" y="1880410"/>
+                  <a:pt x="2060947" y="2114975"/>
+                  <a:pt x="2051050" y="2242884"/>
+                </a:cubicBezTo>
+                <a:cubicBezTo>
+                  <a:pt x="2041153" y="2370793"/>
+                  <a:pt x="2081957" y="2753717"/>
+                  <a:pt x="2051050" y="2951163"/>
+                </a:cubicBezTo>
+                <a:cubicBezTo>
+                  <a:pt x="1910115" y="2975025"/>
+                  <a:pt x="1602720" y="2978995"/>
+                  <a:pt x="1428898" y="2951163"/>
+                </a:cubicBezTo>
+                <a:cubicBezTo>
+                  <a:pt x="1255076" y="2923331"/>
+                  <a:pt x="924160" y="2933002"/>
+                  <a:pt x="786236" y="2951163"/>
+                </a:cubicBezTo>
+                <a:cubicBezTo>
+                  <a:pt x="648312" y="2969324"/>
+                  <a:pt x="370261" y="2923618"/>
+                  <a:pt x="0" y="2951163"/>
+                </a:cubicBezTo>
+                <a:cubicBezTo>
+                  <a:pt x="14797" y="2840414"/>
+                  <a:pt x="24747" y="2604392"/>
+                  <a:pt x="0" y="2449465"/>
+                </a:cubicBezTo>
+                <a:cubicBezTo>
+                  <a:pt x="-24747" y="2294538"/>
+                  <a:pt x="12162" y="2112558"/>
+                  <a:pt x="0" y="1829721"/>
+                </a:cubicBezTo>
+                <a:cubicBezTo>
+                  <a:pt x="-12162" y="1546884"/>
+                  <a:pt x="8429" y="1364361"/>
+                  <a:pt x="0" y="1239488"/>
+                </a:cubicBezTo>
+                <a:cubicBezTo>
+                  <a:pt x="-8429" y="1114615"/>
+                  <a:pt x="7141" y="949936"/>
+                  <a:pt x="0" y="708279"/>
+                </a:cubicBezTo>
+                <a:cubicBezTo>
+                  <a:pt x="-7141" y="466622"/>
+                  <a:pt x="-34761" y="237017"/>
+                  <a:pt x="0" y="0"/>
+                </a:cubicBezTo>
+                <a:close/>
+              </a:path>
+            </a:pathLst>
+          </a:custGeom>
+          <a:solidFill>
+            <a:schemeClr val="bg1"/>
+          </a:solidFill>
+          <a:ln w="25400">
+            <a:solidFill>
+              <a:schemeClr val="tx1">
+                <a:lumMod val="95000"/>
+                <a:lumOff val="5000"/>
+              </a:schemeClr>
+            </a:solidFill>
+            <a:extLst>
+              <a:ext uri="{C807C97D-BFC1-408E-A445-0C87EB9F89A2}">
+                <ask:lineSketchStyleProps xmlns:ask="http://schemas.microsoft.com/office/drawing/2018/sketchyshapes" sd="1762638383">
+                  <a:prstGeom prst="rect">
+                    <a:avLst/>
+                  </a:prstGeom>
+                  <ask:type>
+                    <ask:lineSketchFreehand/>
+                  </ask:type>
+                </ask:lineSketchStyleProps>
+              </a:ext>
+            </a:extLst>
+          </a:ln>
+        </p:spPr>
+        <p:style>
+          <a:lnRef idx="2">
+            <a:schemeClr val="accent3">
+              <a:shade val="50000"/>
+            </a:schemeClr>
+          </a:lnRef>
+          <a:fillRef idx="1">
+            <a:schemeClr val="accent3"/>
+          </a:fillRef>
+          <a:effectRef idx="0">
+            <a:schemeClr val="accent3"/>
+          </a:effectRef>
+          <a:fontRef idx="minor">
+            <a:schemeClr val="lt1"/>
+          </a:fontRef>
+        </p:style>
+        <p:txBody>
+          <a:bodyPr rtlCol="0" anchor="ctr"/>
+          <a:lstStyle/>
+          <a:p>
+            <a:pPr algn="ctr"/>
+            <a:endParaRPr lang="de-AT" dirty="0"/>
+          </a:p>
+        </p:txBody>
+      </p:sp>
+      <p:sp>
+        <p:nvSpPr>
+          <p:cNvPr id="12" name="Rechteck 4">
+            <a:extLst>
+              <a:ext uri="{FF2B5EF4-FFF2-40B4-BE49-F238E27FC236}">
+                <a16:creationId xmlns:a16="http://schemas.microsoft.com/office/drawing/2014/main" id="{3D8EF94D-8EB1-37EB-0955-F5FFEF7FA334}"/>
+              </a:ext>
+              <a:ext uri="{C183D7F6-B498-43B3-948B-1728B52AA6E4}">
+                <adec:decorative xmlns:adec="http://schemas.microsoft.com/office/drawing/2017/decorative" val="1"/>
+              </a:ext>
+            </a:extLst>
+          </p:cNvPr>
+          <p:cNvSpPr/>
+          <p:nvPr/>
+        </p:nvSpPr>
+        <p:spPr>
+          <a:xfrm>
+            <a:off x="4581525" y="3624262"/>
+            <a:ext cx="2051050" cy="2951163"/>
+          </a:xfrm>
+          <a:custGeom>
+            <a:avLst/>
+            <a:gdLst>
+              <a:gd name="csX0" fmla="*/ 0 w 2051050"/>
+              <a:gd name="csY0" fmla="*/ 0 h 2951163"/>
+              <a:gd name="csX1" fmla="*/ 683683 w 2051050"/>
+              <a:gd name="csY1" fmla="*/ 0 h 2951163"/>
+              <a:gd name="csX2" fmla="*/ 1305835 w 2051050"/>
+              <a:gd name="csY2" fmla="*/ 0 h 2951163"/>
+              <a:gd name="csX3" fmla="*/ 2051050 w 2051050"/>
+              <a:gd name="csY3" fmla="*/ 0 h 2951163"/>
+              <a:gd name="csX4" fmla="*/ 2051050 w 2051050"/>
+              <a:gd name="csY4" fmla="*/ 619744 h 2951163"/>
+              <a:gd name="csX5" fmla="*/ 2051050 w 2051050"/>
+              <a:gd name="csY5" fmla="*/ 1239488 h 2951163"/>
+              <a:gd name="csX6" fmla="*/ 2051050 w 2051050"/>
+              <a:gd name="csY6" fmla="*/ 1770698 h 2951163"/>
+              <a:gd name="csX7" fmla="*/ 2051050 w 2051050"/>
+              <a:gd name="csY7" fmla="*/ 2360930 h 2951163"/>
+              <a:gd name="csX8" fmla="*/ 2051050 w 2051050"/>
+              <a:gd name="csY8" fmla="*/ 2951163 h 2951163"/>
+              <a:gd name="csX9" fmla="*/ 1387877 w 2051050"/>
+              <a:gd name="csY9" fmla="*/ 2951163 h 2951163"/>
+              <a:gd name="csX10" fmla="*/ 704194 w 2051050"/>
+              <a:gd name="csY10" fmla="*/ 2951163 h 2951163"/>
+              <a:gd name="csX11" fmla="*/ 0 w 2051050"/>
+              <a:gd name="csY11" fmla="*/ 2951163 h 2951163"/>
+              <a:gd name="csX12" fmla="*/ 0 w 2051050"/>
+              <a:gd name="csY12" fmla="*/ 2331419 h 2951163"/>
+              <a:gd name="csX13" fmla="*/ 0 w 2051050"/>
+              <a:gd name="csY13" fmla="*/ 1682163 h 2951163"/>
+              <a:gd name="csX14" fmla="*/ 0 w 2051050"/>
+              <a:gd name="csY14" fmla="*/ 1062419 h 2951163"/>
+              <a:gd name="csX15" fmla="*/ 0 w 2051050"/>
+              <a:gd name="csY15" fmla="*/ 0 h 2951163"/>
+            </a:gdLst>
+            <a:ahLst/>
+            <a:cxnLst>
+              <a:cxn ang="0">
+                <a:pos x="csX0" y="csY0"/>
+              </a:cxn>
+              <a:cxn ang="0">
+                <a:pos x="csX1" y="csY1"/>
+              </a:cxn>
+              <a:cxn ang="0">
+                <a:pos x="csX2" y="csY2"/>
+              </a:cxn>
+              <a:cxn ang="0">
+                <a:pos x="csX3" y="csY3"/>
+              </a:cxn>
+              <a:cxn ang="0">
+                <a:pos x="csX4" y="csY4"/>
+              </a:cxn>
+              <a:cxn ang="0">
+                <a:pos x="csX5" y="csY5"/>
+              </a:cxn>
+              <a:cxn ang="0">
+                <a:pos x="csX6" y="csY6"/>
+              </a:cxn>
+              <a:cxn ang="0">
+                <a:pos x="csX7" y="csY7"/>
+              </a:cxn>
+              <a:cxn ang="0">
+                <a:pos x="csX8" y="csY8"/>
+              </a:cxn>
+              <a:cxn ang="0">
+                <a:pos x="csX9" y="csY9"/>
+              </a:cxn>
+              <a:cxn ang="0">
+                <a:pos x="csX10" y="csY10"/>
+              </a:cxn>
+              <a:cxn ang="0">
+                <a:pos x="csX11" y="csY11"/>
+              </a:cxn>
+              <a:cxn ang="0">
+                <a:pos x="csX12" y="csY12"/>
+              </a:cxn>
+              <a:cxn ang="0">
+                <a:pos x="csX13" y="csY13"/>
+              </a:cxn>
+              <a:cxn ang="0">
+                <a:pos x="csX14" y="csY14"/>
+              </a:cxn>
+              <a:cxn ang="0">
+                <a:pos x="csX15" y="csY15"/>
+              </a:cxn>
+            </a:cxnLst>
+            <a:rect l="l" t="t" r="r" b="b"/>
+            <a:pathLst>
+              <a:path w="2051050" h="2951163" fill="none" extrusionOk="0">
+                <a:moveTo>
+                  <a:pt x="0" y="0"/>
+                </a:moveTo>
+                <a:cubicBezTo>
+                  <a:pt x="267367" y="14427"/>
+                  <a:pt x="349033" y="-12086"/>
+                  <a:pt x="683683" y="0"/>
+                </a:cubicBezTo>
+                <a:cubicBezTo>
+                  <a:pt x="1018333" y="12086"/>
+                  <a:pt x="1022416" y="-8631"/>
+                  <a:pt x="1305835" y="0"/>
+                </a:cubicBezTo>
+                <a:cubicBezTo>
+                  <a:pt x="1589254" y="8631"/>
+                  <a:pt x="1888174" y="-24305"/>
+                  <a:pt x="2051050" y="0"/>
+                </a:cubicBezTo>
+                <a:cubicBezTo>
+                  <a:pt x="2049058" y="239847"/>
+                  <a:pt x="2079500" y="432103"/>
+                  <a:pt x="2051050" y="619744"/>
+                </a:cubicBezTo>
+                <a:cubicBezTo>
+                  <a:pt x="2022600" y="807385"/>
+                  <a:pt x="2037657" y="1080410"/>
+                  <a:pt x="2051050" y="1239488"/>
+                </a:cubicBezTo>
+                <a:cubicBezTo>
+                  <a:pt x="2064443" y="1398566"/>
+                  <a:pt x="2048304" y="1613183"/>
+                  <a:pt x="2051050" y="1770698"/>
+                </a:cubicBezTo>
+                <a:cubicBezTo>
+                  <a:pt x="2053797" y="1928213"/>
+                  <a:pt x="2077307" y="2089042"/>
+                  <a:pt x="2051050" y="2360930"/>
+                </a:cubicBezTo>
+                <a:cubicBezTo>
+                  <a:pt x="2024793" y="2632818"/>
+                  <a:pt x="2044620" y="2795804"/>
+                  <a:pt x="2051050" y="2951163"/>
+                </a:cubicBezTo>
+                <a:cubicBezTo>
+                  <a:pt x="1792864" y="2945869"/>
+                  <a:pt x="1550867" y="2982853"/>
+                  <a:pt x="1387877" y="2951163"/>
+                </a:cubicBezTo>
+                <a:cubicBezTo>
+                  <a:pt x="1224887" y="2919473"/>
+                  <a:pt x="943563" y="2930389"/>
+                  <a:pt x="704194" y="2951163"/>
+                </a:cubicBezTo>
+                <a:cubicBezTo>
+                  <a:pt x="464825" y="2971937"/>
+                  <a:pt x="330882" y="2923973"/>
+                  <a:pt x="0" y="2951163"/>
+                </a:cubicBezTo>
+                <a:cubicBezTo>
+                  <a:pt x="-12688" y="2660430"/>
+                  <a:pt x="3295" y="2469288"/>
+                  <a:pt x="0" y="2331419"/>
+                </a:cubicBezTo>
+                <a:cubicBezTo>
+                  <a:pt x="-3295" y="2193550"/>
+                  <a:pt x="-19903" y="1834509"/>
+                  <a:pt x="0" y="1682163"/>
+                </a:cubicBezTo>
+                <a:cubicBezTo>
+                  <a:pt x="19903" y="1529817"/>
+                  <a:pt x="4229" y="1363192"/>
+                  <a:pt x="0" y="1062419"/>
+                </a:cubicBezTo>
+                <a:cubicBezTo>
+                  <a:pt x="-4229" y="761646"/>
+                  <a:pt x="529" y="476222"/>
+                  <a:pt x="0" y="0"/>
+                </a:cubicBezTo>
+                <a:close/>
+              </a:path>
+              <a:path w="2051050" h="2951163" stroke="0" extrusionOk="0">
+                <a:moveTo>
+                  <a:pt x="0" y="0"/>
+                </a:moveTo>
+                <a:cubicBezTo>
+                  <a:pt x="306279" y="21950"/>
+                  <a:pt x="339620" y="1228"/>
+                  <a:pt x="622152" y="0"/>
+                </a:cubicBezTo>
+                <a:cubicBezTo>
+                  <a:pt x="904684" y="-1228"/>
+                  <a:pt x="1011457" y="20320"/>
+                  <a:pt x="1264814" y="0"/>
+                </a:cubicBezTo>
+                <a:cubicBezTo>
+                  <a:pt x="1518171" y="-20320"/>
+                  <a:pt x="1857420" y="-30729"/>
+                  <a:pt x="2051050" y="0"/>
+                </a:cubicBezTo>
+                <a:cubicBezTo>
+                  <a:pt x="2063232" y="245709"/>
+                  <a:pt x="2041507" y="343479"/>
+                  <a:pt x="2051050" y="560721"/>
+                </a:cubicBezTo>
+                <a:cubicBezTo>
+                  <a:pt x="2060593" y="777963"/>
+                  <a:pt x="2080940" y="886218"/>
+                  <a:pt x="2051050" y="1209977"/>
+                </a:cubicBezTo>
+                <a:cubicBezTo>
+                  <a:pt x="2021160" y="1533736"/>
+                  <a:pt x="2044051" y="1542940"/>
+                  <a:pt x="2051050" y="1711675"/>
+                </a:cubicBezTo>
+                <a:cubicBezTo>
+                  <a:pt x="2058049" y="1880410"/>
+                  <a:pt x="2060947" y="2114975"/>
+                  <a:pt x="2051050" y="2242884"/>
+                </a:cubicBezTo>
+                <a:cubicBezTo>
+                  <a:pt x="2041153" y="2370793"/>
+                  <a:pt x="2081957" y="2753717"/>
+                  <a:pt x="2051050" y="2951163"/>
+                </a:cubicBezTo>
+                <a:cubicBezTo>
+                  <a:pt x="1910115" y="2975025"/>
+                  <a:pt x="1602720" y="2978995"/>
+                  <a:pt x="1428898" y="2951163"/>
+                </a:cubicBezTo>
+                <a:cubicBezTo>
+                  <a:pt x="1255076" y="2923331"/>
+                  <a:pt x="924160" y="2933002"/>
+                  <a:pt x="786236" y="2951163"/>
+                </a:cubicBezTo>
+                <a:cubicBezTo>
+                  <a:pt x="648312" y="2969324"/>
+                  <a:pt x="370261" y="2923618"/>
+                  <a:pt x="0" y="2951163"/>
+                </a:cubicBezTo>
+                <a:cubicBezTo>
+                  <a:pt x="14797" y="2840414"/>
+                  <a:pt x="24747" y="2604392"/>
+                  <a:pt x="0" y="2449465"/>
+                </a:cubicBezTo>
+                <a:cubicBezTo>
+                  <a:pt x="-24747" y="2294538"/>
+                  <a:pt x="12162" y="2112558"/>
+                  <a:pt x="0" y="1829721"/>
+                </a:cubicBezTo>
+                <a:cubicBezTo>
+                  <a:pt x="-12162" y="1546884"/>
+                  <a:pt x="8429" y="1364361"/>
+                  <a:pt x="0" y="1239488"/>
+                </a:cubicBezTo>
+                <a:cubicBezTo>
+                  <a:pt x="-8429" y="1114615"/>
+                  <a:pt x="7141" y="949936"/>
+                  <a:pt x="0" y="708279"/>
+                </a:cubicBezTo>
+                <a:cubicBezTo>
+                  <a:pt x="-7141" y="466622"/>
+                  <a:pt x="-34761" y="237017"/>
+                  <a:pt x="0" y="0"/>
+                </a:cubicBezTo>
+                <a:close/>
+              </a:path>
+            </a:pathLst>
+          </a:custGeom>
+          <a:solidFill>
+            <a:schemeClr val="bg1"/>
+          </a:solidFill>
+          <a:ln w="25400">
+            <a:solidFill>
+              <a:schemeClr val="tx1">
+                <a:lumMod val="95000"/>
+                <a:lumOff val="5000"/>
+              </a:schemeClr>
+            </a:solidFill>
+            <a:extLst>
+              <a:ext uri="{C807C97D-BFC1-408E-A445-0C87EB9F89A2}">
+                <ask:lineSketchStyleProps xmlns:ask="http://schemas.microsoft.com/office/drawing/2018/sketchyshapes" sd="1762638383">
+                  <a:prstGeom prst="rect">
+                    <a:avLst/>
+                  </a:prstGeom>
+                  <ask:type>
+                    <ask:lineSketchFreehand/>
+                  </ask:type>
+                </ask:lineSketchStyleProps>
+              </a:ext>
+            </a:extLst>
+          </a:ln>
+        </p:spPr>
+        <p:style>
+          <a:lnRef idx="2">
+            <a:schemeClr val="accent3">
+              <a:shade val="50000"/>
+            </a:schemeClr>
+          </a:lnRef>
+          <a:fillRef idx="1">
+            <a:schemeClr val="accent3"/>
+          </a:fillRef>
+          <a:effectRef idx="0">
+            <a:schemeClr val="accent3"/>
+          </a:effectRef>
+          <a:fontRef idx="minor">
+            <a:schemeClr val="lt1"/>
+          </a:fontRef>
+        </p:style>
+        <p:txBody>
+          <a:bodyPr rtlCol="0" anchor="ctr"/>
+          <a:lstStyle/>
+          <a:p>
+            <a:pPr algn="ctr"/>
+            <a:endParaRPr lang="de-AT"/>
+          </a:p>
+        </p:txBody>
+      </p:sp>
+      <p:sp>
+        <p:nvSpPr>
+          <p:cNvPr id="14" name="Rechteck 5">
+            <a:extLst>
+              <a:ext uri="{FF2B5EF4-FFF2-40B4-BE49-F238E27FC236}">
+                <a16:creationId xmlns:a16="http://schemas.microsoft.com/office/drawing/2014/main" id="{FCCC295C-8AA4-9629-E9E8-6DC2E7CFF622}"/>
+              </a:ext>
+              <a:ext uri="{C183D7F6-B498-43B3-948B-1728B52AA6E4}">
+                <adec:decorative xmlns:adec="http://schemas.microsoft.com/office/drawing/2017/decorative" val="1"/>
+              </a:ext>
+            </a:extLst>
+          </p:cNvPr>
+          <p:cNvSpPr/>
+          <p:nvPr/>
+        </p:nvSpPr>
+        <p:spPr>
+          <a:xfrm>
+            <a:off x="225425" y="6721475"/>
+            <a:ext cx="2057932" cy="2951163"/>
+          </a:xfrm>
+          <a:custGeom>
+            <a:avLst/>
+            <a:gdLst>
+              <a:gd name="csX0" fmla="*/ 0 w 2057932"/>
+              <a:gd name="csY0" fmla="*/ 0 h 2951163"/>
+              <a:gd name="csX1" fmla="*/ 685977 w 2057932"/>
+              <a:gd name="csY1" fmla="*/ 0 h 2951163"/>
+              <a:gd name="csX2" fmla="*/ 1310217 w 2057932"/>
+              <a:gd name="csY2" fmla="*/ 0 h 2951163"/>
+              <a:gd name="csX3" fmla="*/ 2057932 w 2057932"/>
+              <a:gd name="csY3" fmla="*/ 0 h 2951163"/>
+              <a:gd name="csX4" fmla="*/ 2057932 w 2057932"/>
+              <a:gd name="csY4" fmla="*/ 619744 h 2951163"/>
+              <a:gd name="csX5" fmla="*/ 2057932 w 2057932"/>
+              <a:gd name="csY5" fmla="*/ 1239488 h 2951163"/>
+              <a:gd name="csX6" fmla="*/ 2057932 w 2057932"/>
+              <a:gd name="csY6" fmla="*/ 1770698 h 2951163"/>
+              <a:gd name="csX7" fmla="*/ 2057932 w 2057932"/>
+              <a:gd name="csY7" fmla="*/ 2360930 h 2951163"/>
+              <a:gd name="csX8" fmla="*/ 2057932 w 2057932"/>
+              <a:gd name="csY8" fmla="*/ 2951163 h 2951163"/>
+              <a:gd name="csX9" fmla="*/ 1392534 w 2057932"/>
+              <a:gd name="csY9" fmla="*/ 2951163 h 2951163"/>
+              <a:gd name="csX10" fmla="*/ 706557 w 2057932"/>
+              <a:gd name="csY10" fmla="*/ 2951163 h 2951163"/>
+              <a:gd name="csX11" fmla="*/ 0 w 2057932"/>
+              <a:gd name="csY11" fmla="*/ 2951163 h 2951163"/>
+              <a:gd name="csX12" fmla="*/ 0 w 2057932"/>
+              <a:gd name="csY12" fmla="*/ 2331419 h 2951163"/>
+              <a:gd name="csX13" fmla="*/ 0 w 2057932"/>
+              <a:gd name="csY13" fmla="*/ 1682163 h 2951163"/>
+              <a:gd name="csX14" fmla="*/ 0 w 2057932"/>
+              <a:gd name="csY14" fmla="*/ 1062419 h 2951163"/>
+              <a:gd name="csX15" fmla="*/ 0 w 2057932"/>
+              <a:gd name="csY15" fmla="*/ 0 h 2951163"/>
+            </a:gdLst>
+            <a:ahLst/>
+            <a:cxnLst>
+              <a:cxn ang="0">
+                <a:pos x="csX0" y="csY0"/>
+              </a:cxn>
+              <a:cxn ang="0">
+                <a:pos x="csX1" y="csY1"/>
+              </a:cxn>
+              <a:cxn ang="0">
+                <a:pos x="csX2" y="csY2"/>
+              </a:cxn>
+              <a:cxn ang="0">
+                <a:pos x="csX3" y="csY3"/>
+              </a:cxn>
+              <a:cxn ang="0">
+                <a:pos x="csX4" y="csY4"/>
+              </a:cxn>
+              <a:cxn ang="0">
+                <a:pos x="csX5" y="csY5"/>
+              </a:cxn>
+              <a:cxn ang="0">
+                <a:pos x="csX6" y="csY6"/>
+              </a:cxn>
+              <a:cxn ang="0">
+                <a:pos x="csX7" y="csY7"/>
+              </a:cxn>
+              <a:cxn ang="0">
+                <a:pos x="csX8" y="csY8"/>
+              </a:cxn>
+              <a:cxn ang="0">
+                <a:pos x="csX9" y="csY9"/>
+              </a:cxn>
+              <a:cxn ang="0">
+                <a:pos x="csX10" y="csY10"/>
+              </a:cxn>
+              <a:cxn ang="0">
+                <a:pos x="csX11" y="csY11"/>
+              </a:cxn>
+              <a:cxn ang="0">
+                <a:pos x="csX12" y="csY12"/>
+              </a:cxn>
+              <a:cxn ang="0">
+                <a:pos x="csX13" y="csY13"/>
+              </a:cxn>
+              <a:cxn ang="0">
+                <a:pos x="csX14" y="csY14"/>
+              </a:cxn>
+              <a:cxn ang="0">
+                <a:pos x="csX15" y="csY15"/>
+              </a:cxn>
+            </a:cxnLst>
+            <a:rect l="l" t="t" r="r" b="b"/>
+            <a:pathLst>
+              <a:path w="2057932" h="2951163" fill="none" extrusionOk="0">
+                <a:moveTo>
+                  <a:pt x="0" y="0"/>
+                </a:moveTo>
+                <a:cubicBezTo>
+                  <a:pt x="307298" y="18856"/>
+                  <a:pt x="390280" y="-2913"/>
+                  <a:pt x="685977" y="0"/>
+                </a:cubicBezTo>
+                <a:cubicBezTo>
+                  <a:pt x="981674" y="2913"/>
+                  <a:pt x="1107368" y="8660"/>
+                  <a:pt x="1310217" y="0"/>
+                </a:cubicBezTo>
+                <a:cubicBezTo>
+                  <a:pt x="1513066" y="-8660"/>
+                  <a:pt x="1807343" y="30970"/>
+                  <a:pt x="2057932" y="0"/>
+                </a:cubicBezTo>
+                <a:cubicBezTo>
+                  <a:pt x="2055940" y="239847"/>
+                  <a:pt x="2086382" y="432103"/>
+                  <a:pt x="2057932" y="619744"/>
+                </a:cubicBezTo>
+                <a:cubicBezTo>
+                  <a:pt x="2029482" y="807385"/>
+                  <a:pt x="2044539" y="1080410"/>
+                  <a:pt x="2057932" y="1239488"/>
+                </a:cubicBezTo>
+                <a:cubicBezTo>
+                  <a:pt x="2071325" y="1398566"/>
+                  <a:pt x="2055186" y="1613183"/>
+                  <a:pt x="2057932" y="1770698"/>
+                </a:cubicBezTo>
+                <a:cubicBezTo>
+                  <a:pt x="2060679" y="1928213"/>
+                  <a:pt x="2084189" y="2089042"/>
+                  <a:pt x="2057932" y="2360930"/>
+                </a:cubicBezTo>
+                <a:cubicBezTo>
+                  <a:pt x="2031675" y="2632818"/>
+                  <a:pt x="2051502" y="2795804"/>
+                  <a:pt x="2057932" y="2951163"/>
+                </a:cubicBezTo>
+                <a:cubicBezTo>
+                  <a:pt x="1790244" y="2960948"/>
+                  <a:pt x="1633915" y="2930769"/>
+                  <a:pt x="1392534" y="2951163"/>
+                </a:cubicBezTo>
+                <a:cubicBezTo>
+                  <a:pt x="1151153" y="2971557"/>
+                  <a:pt x="1003410" y="2949952"/>
+                  <a:pt x="706557" y="2951163"/>
+                </a:cubicBezTo>
+                <a:cubicBezTo>
+                  <a:pt x="409704" y="2952374"/>
+                  <a:pt x="166034" y="2972217"/>
+                  <a:pt x="0" y="2951163"/>
+                </a:cubicBezTo>
+                <a:cubicBezTo>
+                  <a:pt x="-12688" y="2660430"/>
+                  <a:pt x="3295" y="2469288"/>
+                  <a:pt x="0" y="2331419"/>
+                </a:cubicBezTo>
+                <a:cubicBezTo>
+                  <a:pt x="-3295" y="2193550"/>
+                  <a:pt x="-19903" y="1834509"/>
+                  <a:pt x="0" y="1682163"/>
+                </a:cubicBezTo>
+                <a:cubicBezTo>
+                  <a:pt x="19903" y="1529817"/>
+                  <a:pt x="4229" y="1363192"/>
+                  <a:pt x="0" y="1062419"/>
+                </a:cubicBezTo>
+                <a:cubicBezTo>
+                  <a:pt x="-4229" y="761646"/>
+                  <a:pt x="529" y="476222"/>
+                  <a:pt x="0" y="0"/>
+                </a:cubicBezTo>
+                <a:close/>
+              </a:path>
+              <a:path w="2057932" h="2951163" stroke="0" extrusionOk="0">
+                <a:moveTo>
+                  <a:pt x="0" y="0"/>
+                </a:moveTo>
+                <a:cubicBezTo>
+                  <a:pt x="265600" y="20397"/>
+                  <a:pt x="453265" y="14680"/>
+                  <a:pt x="624239" y="0"/>
+                </a:cubicBezTo>
+                <a:cubicBezTo>
+                  <a:pt x="795213" y="-14680"/>
+                  <a:pt x="1080079" y="13609"/>
+                  <a:pt x="1269058" y="0"/>
+                </a:cubicBezTo>
+                <a:cubicBezTo>
+                  <a:pt x="1458037" y="-13609"/>
+                  <a:pt x="1694969" y="29626"/>
+                  <a:pt x="2057932" y="0"/>
+                </a:cubicBezTo>
+                <a:cubicBezTo>
+                  <a:pt x="2070114" y="245709"/>
+                  <a:pt x="2048389" y="343479"/>
+                  <a:pt x="2057932" y="560721"/>
+                </a:cubicBezTo>
+                <a:cubicBezTo>
+                  <a:pt x="2067475" y="777963"/>
+                  <a:pt x="2087822" y="886218"/>
+                  <a:pt x="2057932" y="1209977"/>
+                </a:cubicBezTo>
+                <a:cubicBezTo>
+                  <a:pt x="2028042" y="1533736"/>
+                  <a:pt x="2050933" y="1542940"/>
+                  <a:pt x="2057932" y="1711675"/>
+                </a:cubicBezTo>
+                <a:cubicBezTo>
+                  <a:pt x="2064931" y="1880410"/>
+                  <a:pt x="2067829" y="2114975"/>
+                  <a:pt x="2057932" y="2242884"/>
+                </a:cubicBezTo>
+                <a:cubicBezTo>
+                  <a:pt x="2048035" y="2370793"/>
+                  <a:pt x="2088839" y="2753717"/>
+                  <a:pt x="2057932" y="2951163"/>
+                </a:cubicBezTo>
+                <a:cubicBezTo>
+                  <a:pt x="1907229" y="2959468"/>
+                  <a:pt x="1646668" y="2975239"/>
+                  <a:pt x="1433693" y="2951163"/>
+                </a:cubicBezTo>
+                <a:cubicBezTo>
+                  <a:pt x="1220718" y="2927087"/>
+                  <a:pt x="1098860" y="2967386"/>
+                  <a:pt x="788874" y="2951163"/>
+                </a:cubicBezTo>
+                <a:cubicBezTo>
+                  <a:pt x="478888" y="2934940"/>
+                  <a:pt x="167909" y="2932722"/>
+                  <a:pt x="0" y="2951163"/>
+                </a:cubicBezTo>
+                <a:cubicBezTo>
+                  <a:pt x="14797" y="2840414"/>
+                  <a:pt x="24747" y="2604392"/>
+                  <a:pt x="0" y="2449465"/>
+                </a:cubicBezTo>
+                <a:cubicBezTo>
+                  <a:pt x="-24747" y="2294538"/>
+                  <a:pt x="12162" y="2112558"/>
+                  <a:pt x="0" y="1829721"/>
+                </a:cubicBezTo>
+                <a:cubicBezTo>
+                  <a:pt x="-12162" y="1546884"/>
+                  <a:pt x="8429" y="1364361"/>
+                  <a:pt x="0" y="1239488"/>
+                </a:cubicBezTo>
+                <a:cubicBezTo>
+                  <a:pt x="-8429" y="1114615"/>
+                  <a:pt x="7141" y="949936"/>
+                  <a:pt x="0" y="708279"/>
+                </a:cubicBezTo>
+                <a:cubicBezTo>
+                  <a:pt x="-7141" y="466622"/>
+                  <a:pt x="-34761" y="237017"/>
+                  <a:pt x="0" y="0"/>
+                </a:cubicBezTo>
+                <a:close/>
+              </a:path>
+            </a:pathLst>
+          </a:custGeom>
+          <a:solidFill>
+            <a:schemeClr val="bg1"/>
+          </a:solidFill>
+          <a:ln w="25400">
+            <a:solidFill>
+              <a:schemeClr val="tx1">
+                <a:lumMod val="95000"/>
+                <a:lumOff val="5000"/>
+              </a:schemeClr>
+            </a:solidFill>
+            <a:extLst>
+              <a:ext uri="{C807C97D-BFC1-408E-A445-0C87EB9F89A2}">
+                <ask:lineSketchStyleProps xmlns:ask="http://schemas.microsoft.com/office/drawing/2018/sketchyshapes" sd="1762638383">
+                  <a:prstGeom prst="rect">
+                    <a:avLst/>
+                  </a:prstGeom>
+                  <ask:type>
+                    <ask:lineSketchFreehand/>
+                  </ask:type>
+                </ask:lineSketchStyleProps>
+              </a:ext>
+            </a:extLst>
+          </a:ln>
+        </p:spPr>
+        <p:style>
+          <a:lnRef idx="2">
+            <a:schemeClr val="accent3">
+              <a:shade val="50000"/>
+            </a:schemeClr>
+          </a:lnRef>
+          <a:fillRef idx="1">
+            <a:schemeClr val="accent3"/>
+          </a:fillRef>
+          <a:effectRef idx="0">
+            <a:schemeClr val="accent3"/>
+          </a:effectRef>
+          <a:fontRef idx="minor">
+            <a:schemeClr val="lt1"/>
+          </a:fontRef>
+        </p:style>
+        <p:txBody>
+          <a:bodyPr rtlCol="0" anchor="ctr"/>
+          <a:lstStyle/>
+          <a:p>
+            <a:pPr algn="ctr"/>
+            <a:endParaRPr lang="de-AT"/>
+          </a:p>
+        </p:txBody>
+      </p:sp>
+      <p:sp>
+        <p:nvSpPr>
+          <p:cNvPr id="16" name="Rechteck 2">
+            <a:extLst>
+              <a:ext uri="{FF2B5EF4-FFF2-40B4-BE49-F238E27FC236}">
+                <a16:creationId xmlns:a16="http://schemas.microsoft.com/office/drawing/2014/main" id="{1255A5B6-41AA-D249-4606-CD299E775F60}"/>
+              </a:ext>
+              <a:ext uri="{C183D7F6-B498-43B3-948B-1728B52AA6E4}">
+                <adec:decorative xmlns:adec="http://schemas.microsoft.com/office/drawing/2017/decorative" val="1"/>
+              </a:ext>
+            </a:extLst>
+          </p:cNvPr>
+          <p:cNvSpPr/>
+          <p:nvPr/>
+        </p:nvSpPr>
+        <p:spPr>
+          <a:xfrm>
+            <a:off x="232306" y="549564"/>
+            <a:ext cx="2051050" cy="2951163"/>
+          </a:xfrm>
+          <a:custGeom>
+            <a:avLst/>
+            <a:gdLst>
+              <a:gd name="csX0" fmla="*/ 0 w 2051050"/>
+              <a:gd name="csY0" fmla="*/ 0 h 2951163"/>
+              <a:gd name="csX1" fmla="*/ 683683 w 2051050"/>
+              <a:gd name="csY1" fmla="*/ 0 h 2951163"/>
+              <a:gd name="csX2" fmla="*/ 1305835 w 2051050"/>
+              <a:gd name="csY2" fmla="*/ 0 h 2951163"/>
+              <a:gd name="csX3" fmla="*/ 2051050 w 2051050"/>
+              <a:gd name="csY3" fmla="*/ 0 h 2951163"/>
+              <a:gd name="csX4" fmla="*/ 2051050 w 2051050"/>
+              <a:gd name="csY4" fmla="*/ 619744 h 2951163"/>
+              <a:gd name="csX5" fmla="*/ 2051050 w 2051050"/>
+              <a:gd name="csY5" fmla="*/ 1239488 h 2951163"/>
+              <a:gd name="csX6" fmla="*/ 2051050 w 2051050"/>
+              <a:gd name="csY6" fmla="*/ 1770698 h 2951163"/>
+              <a:gd name="csX7" fmla="*/ 2051050 w 2051050"/>
+              <a:gd name="csY7" fmla="*/ 2360930 h 2951163"/>
+              <a:gd name="csX8" fmla="*/ 2051050 w 2051050"/>
+              <a:gd name="csY8" fmla="*/ 2951163 h 2951163"/>
+              <a:gd name="csX9" fmla="*/ 1387877 w 2051050"/>
+              <a:gd name="csY9" fmla="*/ 2951163 h 2951163"/>
+              <a:gd name="csX10" fmla="*/ 704194 w 2051050"/>
+              <a:gd name="csY10" fmla="*/ 2951163 h 2951163"/>
+              <a:gd name="csX11" fmla="*/ 0 w 2051050"/>
+              <a:gd name="csY11" fmla="*/ 2951163 h 2951163"/>
+              <a:gd name="csX12" fmla="*/ 0 w 2051050"/>
+              <a:gd name="csY12" fmla="*/ 2331419 h 2951163"/>
+              <a:gd name="csX13" fmla="*/ 0 w 2051050"/>
+              <a:gd name="csY13" fmla="*/ 1682163 h 2951163"/>
+              <a:gd name="csX14" fmla="*/ 0 w 2051050"/>
+              <a:gd name="csY14" fmla="*/ 1062419 h 2951163"/>
+              <a:gd name="csX15" fmla="*/ 0 w 2051050"/>
+              <a:gd name="csY15" fmla="*/ 0 h 2951163"/>
+            </a:gdLst>
+            <a:ahLst/>
+            <a:cxnLst>
+              <a:cxn ang="0">
+                <a:pos x="csX0" y="csY0"/>
+              </a:cxn>
+              <a:cxn ang="0">
+                <a:pos x="csX1" y="csY1"/>
+              </a:cxn>
+              <a:cxn ang="0">
+                <a:pos x="csX2" y="csY2"/>
+              </a:cxn>
+              <a:cxn ang="0">
+                <a:pos x="csX3" y="csY3"/>
+              </a:cxn>
+              <a:cxn ang="0">
+                <a:pos x="csX4" y="csY4"/>
+              </a:cxn>
+              <a:cxn ang="0">
+                <a:pos x="csX5" y="csY5"/>
+              </a:cxn>
+              <a:cxn ang="0">
+                <a:pos x="csX6" y="csY6"/>
+              </a:cxn>
+              <a:cxn ang="0">
+                <a:pos x="csX7" y="csY7"/>
+              </a:cxn>
+              <a:cxn ang="0">
+                <a:pos x="csX8" y="csY8"/>
+              </a:cxn>
+              <a:cxn ang="0">
+                <a:pos x="csX9" y="csY9"/>
+              </a:cxn>
+              <a:cxn ang="0">
+                <a:pos x="csX10" y="csY10"/>
+              </a:cxn>
+              <a:cxn ang="0">
+                <a:pos x="csX11" y="csY11"/>
+              </a:cxn>
+              <a:cxn ang="0">
+                <a:pos x="csX12" y="csY12"/>
+              </a:cxn>
+              <a:cxn ang="0">
+                <a:pos x="csX13" y="csY13"/>
+              </a:cxn>
+              <a:cxn ang="0">
+                <a:pos x="csX14" y="csY14"/>
+              </a:cxn>
+              <a:cxn ang="0">
+                <a:pos x="csX15" y="csY15"/>
+              </a:cxn>
+            </a:cxnLst>
+            <a:rect l="l" t="t" r="r" b="b"/>
+            <a:pathLst>
+              <a:path w="2051050" h="2951163" fill="none" extrusionOk="0">
+                <a:moveTo>
+                  <a:pt x="0" y="0"/>
+                </a:moveTo>
+                <a:cubicBezTo>
+                  <a:pt x="267367" y="14427"/>
+                  <a:pt x="349033" y="-12086"/>
+                  <a:pt x="683683" y="0"/>
+                </a:cubicBezTo>
+                <a:cubicBezTo>
+                  <a:pt x="1018333" y="12086"/>
+                  <a:pt x="1022416" y="-8631"/>
+                  <a:pt x="1305835" y="0"/>
+                </a:cubicBezTo>
+                <a:cubicBezTo>
+                  <a:pt x="1589254" y="8631"/>
+                  <a:pt x="1888174" y="-24305"/>
+                  <a:pt x="2051050" y="0"/>
+                </a:cubicBezTo>
+                <a:cubicBezTo>
+                  <a:pt x="2049058" y="239847"/>
+                  <a:pt x="2079500" y="432103"/>
+                  <a:pt x="2051050" y="619744"/>
+                </a:cubicBezTo>
+                <a:cubicBezTo>
+                  <a:pt x="2022600" y="807385"/>
+                  <a:pt x="2037657" y="1080410"/>
+                  <a:pt x="2051050" y="1239488"/>
+                </a:cubicBezTo>
+                <a:cubicBezTo>
+                  <a:pt x="2064443" y="1398566"/>
+                  <a:pt x="2048304" y="1613183"/>
+                  <a:pt x="2051050" y="1770698"/>
+                </a:cubicBezTo>
+                <a:cubicBezTo>
+                  <a:pt x="2053797" y="1928213"/>
+                  <a:pt x="2077307" y="2089042"/>
+                  <a:pt x="2051050" y="2360930"/>
+                </a:cubicBezTo>
+                <a:cubicBezTo>
+                  <a:pt x="2024793" y="2632818"/>
+                  <a:pt x="2044620" y="2795804"/>
+                  <a:pt x="2051050" y="2951163"/>
+                </a:cubicBezTo>
+                <a:cubicBezTo>
+                  <a:pt x="1792864" y="2945869"/>
+                  <a:pt x="1550867" y="2982853"/>
+                  <a:pt x="1387877" y="2951163"/>
+                </a:cubicBezTo>
+                <a:cubicBezTo>
+                  <a:pt x="1224887" y="2919473"/>
+                  <a:pt x="943563" y="2930389"/>
+                  <a:pt x="704194" y="2951163"/>
+                </a:cubicBezTo>
+                <a:cubicBezTo>
+                  <a:pt x="464825" y="2971937"/>
+                  <a:pt x="330882" y="2923973"/>
+                  <a:pt x="0" y="2951163"/>
+                </a:cubicBezTo>
+                <a:cubicBezTo>
+                  <a:pt x="-12688" y="2660430"/>
+                  <a:pt x="3295" y="2469288"/>
+                  <a:pt x="0" y="2331419"/>
+                </a:cubicBezTo>
+                <a:cubicBezTo>
+                  <a:pt x="-3295" y="2193550"/>
+                  <a:pt x="-19903" y="1834509"/>
+                  <a:pt x="0" y="1682163"/>
+                </a:cubicBezTo>
+                <a:cubicBezTo>
+                  <a:pt x="19903" y="1529817"/>
+                  <a:pt x="4229" y="1363192"/>
+                  <a:pt x="0" y="1062419"/>
+                </a:cubicBezTo>
+                <a:cubicBezTo>
+                  <a:pt x="-4229" y="761646"/>
+                  <a:pt x="529" y="476222"/>
+                  <a:pt x="0" y="0"/>
+                </a:cubicBezTo>
+                <a:close/>
+              </a:path>
+              <a:path w="2051050" h="2951163" stroke="0" extrusionOk="0">
+                <a:moveTo>
+                  <a:pt x="0" y="0"/>
+                </a:moveTo>
+                <a:cubicBezTo>
+                  <a:pt x="306279" y="21950"/>
+                  <a:pt x="339620" y="1228"/>
+                  <a:pt x="622152" y="0"/>
+                </a:cubicBezTo>
+                <a:cubicBezTo>
+                  <a:pt x="904684" y="-1228"/>
+                  <a:pt x="1011457" y="20320"/>
+                  <a:pt x="1264814" y="0"/>
+                </a:cubicBezTo>
+                <a:cubicBezTo>
+                  <a:pt x="1518171" y="-20320"/>
+                  <a:pt x="1857420" y="-30729"/>
+                  <a:pt x="2051050" y="0"/>
+                </a:cubicBezTo>
+                <a:cubicBezTo>
+                  <a:pt x="2063232" y="245709"/>
+                  <a:pt x="2041507" y="343479"/>
+                  <a:pt x="2051050" y="560721"/>
+                </a:cubicBezTo>
+                <a:cubicBezTo>
+                  <a:pt x="2060593" y="777963"/>
+                  <a:pt x="2080940" y="886218"/>
+                  <a:pt x="2051050" y="1209977"/>
+                </a:cubicBezTo>
+                <a:cubicBezTo>
+                  <a:pt x="2021160" y="1533736"/>
+                  <a:pt x="2044051" y="1542940"/>
+                  <a:pt x="2051050" y="1711675"/>
+                </a:cubicBezTo>
+                <a:cubicBezTo>
+                  <a:pt x="2058049" y="1880410"/>
+                  <a:pt x="2060947" y="2114975"/>
+                  <a:pt x="2051050" y="2242884"/>
+                </a:cubicBezTo>
+                <a:cubicBezTo>
+                  <a:pt x="2041153" y="2370793"/>
+                  <a:pt x="2081957" y="2753717"/>
+                  <a:pt x="2051050" y="2951163"/>
+                </a:cubicBezTo>
+                <a:cubicBezTo>
+                  <a:pt x="1910115" y="2975025"/>
+                  <a:pt x="1602720" y="2978995"/>
+                  <a:pt x="1428898" y="2951163"/>
+                </a:cubicBezTo>
+                <a:cubicBezTo>
+                  <a:pt x="1255076" y="2923331"/>
+                  <a:pt x="924160" y="2933002"/>
+                  <a:pt x="786236" y="2951163"/>
+                </a:cubicBezTo>
+                <a:cubicBezTo>
+                  <a:pt x="648312" y="2969324"/>
+                  <a:pt x="370261" y="2923618"/>
+                  <a:pt x="0" y="2951163"/>
+                </a:cubicBezTo>
+                <a:cubicBezTo>
+                  <a:pt x="14797" y="2840414"/>
+                  <a:pt x="24747" y="2604392"/>
+                  <a:pt x="0" y="2449465"/>
+                </a:cubicBezTo>
+                <a:cubicBezTo>
+                  <a:pt x="-24747" y="2294538"/>
+                  <a:pt x="12162" y="2112558"/>
+                  <a:pt x="0" y="1829721"/>
+                </a:cubicBezTo>
+                <a:cubicBezTo>
+                  <a:pt x="-12162" y="1546884"/>
+                  <a:pt x="8429" y="1364361"/>
+                  <a:pt x="0" y="1239488"/>
+                </a:cubicBezTo>
+                <a:cubicBezTo>
+                  <a:pt x="-8429" y="1114615"/>
+                  <a:pt x="7141" y="949936"/>
+                  <a:pt x="0" y="708279"/>
+                </a:cubicBezTo>
+                <a:cubicBezTo>
+                  <a:pt x="-7141" y="466622"/>
+                  <a:pt x="-34761" y="237017"/>
+                  <a:pt x="0" y="0"/>
+                </a:cubicBezTo>
+                <a:close/>
+              </a:path>
+            </a:pathLst>
+          </a:custGeom>
+          <a:solidFill>
+            <a:schemeClr val="bg1"/>
+          </a:solidFill>
+          <a:ln w="25400">
+            <a:solidFill>
+              <a:schemeClr val="tx1">
+                <a:lumMod val="95000"/>
+                <a:lumOff val="5000"/>
+              </a:schemeClr>
+            </a:solidFill>
+            <a:extLst>
+              <a:ext uri="{C807C97D-BFC1-408E-A445-0C87EB9F89A2}">
+                <ask:lineSketchStyleProps xmlns:ask="http://schemas.microsoft.com/office/drawing/2018/sketchyshapes" sd="1762638383">
+                  <a:prstGeom prst="rect">
+                    <a:avLst/>
+                  </a:prstGeom>
+                  <ask:type>
+                    <ask:lineSketchFreehand/>
+                  </ask:type>
+                </ask:lineSketchStyleProps>
+              </a:ext>
+            </a:extLst>
+          </a:ln>
+        </p:spPr>
+        <p:style>
+          <a:lnRef idx="2">
+            <a:schemeClr val="accent3">
+              <a:shade val="50000"/>
+            </a:schemeClr>
+          </a:lnRef>
+          <a:fillRef idx="1">
+            <a:schemeClr val="accent3"/>
+          </a:fillRef>
+          <a:effectRef idx="0">
+            <a:schemeClr val="accent3"/>
+          </a:effectRef>
+          <a:fontRef idx="minor">
+            <a:schemeClr val="lt1"/>
+          </a:fontRef>
+        </p:style>
+        <p:txBody>
+          <a:bodyPr rtlCol="0" anchor="ctr"/>
+          <a:lstStyle/>
+          <a:p>
+            <a:pPr algn="ctr"/>
+            <a:endParaRPr lang="de-AT"/>
+          </a:p>
+        </p:txBody>
+      </p:sp>
+      <p:sp>
+        <p:nvSpPr>
+          <p:cNvPr id="18" name="Rechteck 1">
+            <a:extLst>
+              <a:ext uri="{FF2B5EF4-FFF2-40B4-BE49-F238E27FC236}">
+                <a16:creationId xmlns:a16="http://schemas.microsoft.com/office/drawing/2014/main" id="{EDF6B5D4-E29A-9775-78F5-7857BDF1E1CA}"/>
+              </a:ext>
+              <a:ext uri="{C183D7F6-B498-43B3-948B-1728B52AA6E4}">
+                <adec:decorative xmlns:adec="http://schemas.microsoft.com/office/drawing/2017/decorative" val="1"/>
+              </a:ext>
+            </a:extLst>
+          </p:cNvPr>
+          <p:cNvSpPr/>
+          <p:nvPr/>
+        </p:nvSpPr>
+        <p:spPr>
+          <a:xfrm>
+            <a:off x="2411227" y="3622675"/>
+            <a:ext cx="2048256" cy="2951163"/>
+          </a:xfrm>
+          <a:custGeom>
+            <a:avLst/>
+            <a:gdLst>
+              <a:gd name="csX0" fmla="*/ 0 w 2048256"/>
+              <a:gd name="csY0" fmla="*/ 0 h 2951163"/>
+              <a:gd name="csX1" fmla="*/ 682752 w 2048256"/>
+              <a:gd name="csY1" fmla="*/ 0 h 2951163"/>
+              <a:gd name="csX2" fmla="*/ 1304056 w 2048256"/>
+              <a:gd name="csY2" fmla="*/ 0 h 2951163"/>
+              <a:gd name="csX3" fmla="*/ 2048256 w 2048256"/>
+              <a:gd name="csY3" fmla="*/ 0 h 2951163"/>
+              <a:gd name="csX4" fmla="*/ 2048256 w 2048256"/>
+              <a:gd name="csY4" fmla="*/ 619744 h 2951163"/>
+              <a:gd name="csX5" fmla="*/ 2048256 w 2048256"/>
+              <a:gd name="csY5" fmla="*/ 1239488 h 2951163"/>
+              <a:gd name="csX6" fmla="*/ 2048256 w 2048256"/>
+              <a:gd name="csY6" fmla="*/ 1770698 h 2951163"/>
+              <a:gd name="csX7" fmla="*/ 2048256 w 2048256"/>
+              <a:gd name="csY7" fmla="*/ 2360930 h 2951163"/>
+              <a:gd name="csX8" fmla="*/ 2048256 w 2048256"/>
+              <a:gd name="csY8" fmla="*/ 2951163 h 2951163"/>
+              <a:gd name="csX9" fmla="*/ 1385987 w 2048256"/>
+              <a:gd name="csY9" fmla="*/ 2951163 h 2951163"/>
+              <a:gd name="csX10" fmla="*/ 703235 w 2048256"/>
+              <a:gd name="csY10" fmla="*/ 2951163 h 2951163"/>
+              <a:gd name="csX11" fmla="*/ 0 w 2048256"/>
+              <a:gd name="csY11" fmla="*/ 2951163 h 2951163"/>
+              <a:gd name="csX12" fmla="*/ 0 w 2048256"/>
+              <a:gd name="csY12" fmla="*/ 2331419 h 2951163"/>
+              <a:gd name="csX13" fmla="*/ 0 w 2048256"/>
+              <a:gd name="csY13" fmla="*/ 1682163 h 2951163"/>
+              <a:gd name="csX14" fmla="*/ 0 w 2048256"/>
+              <a:gd name="csY14" fmla="*/ 1062419 h 2951163"/>
+              <a:gd name="csX15" fmla="*/ 0 w 2048256"/>
+              <a:gd name="csY15" fmla="*/ 0 h 2951163"/>
+            </a:gdLst>
+            <a:ahLst/>
+            <a:cxnLst>
+              <a:cxn ang="0">
+                <a:pos x="csX0" y="csY0"/>
+              </a:cxn>
+              <a:cxn ang="0">
+                <a:pos x="csX1" y="csY1"/>
+              </a:cxn>
+              <a:cxn ang="0">
+                <a:pos x="csX2" y="csY2"/>
+              </a:cxn>
+              <a:cxn ang="0">
+                <a:pos x="csX3" y="csY3"/>
+              </a:cxn>
+              <a:cxn ang="0">
+                <a:pos x="csX4" y="csY4"/>
+              </a:cxn>
+              <a:cxn ang="0">
+                <a:pos x="csX5" y="csY5"/>
+              </a:cxn>
+              <a:cxn ang="0">
+                <a:pos x="csX6" y="csY6"/>
+              </a:cxn>
+              <a:cxn ang="0">
+                <a:pos x="csX7" y="csY7"/>
+              </a:cxn>
+              <a:cxn ang="0">
+                <a:pos x="csX8" y="csY8"/>
+              </a:cxn>
+              <a:cxn ang="0">
+                <a:pos x="csX9" y="csY9"/>
+              </a:cxn>
+              <a:cxn ang="0">
+                <a:pos x="csX10" y="csY10"/>
+              </a:cxn>
+              <a:cxn ang="0">
+                <a:pos x="csX11" y="csY11"/>
+              </a:cxn>
+              <a:cxn ang="0">
+                <a:pos x="csX12" y="csY12"/>
+              </a:cxn>
+              <a:cxn ang="0">
+                <a:pos x="csX13" y="csY13"/>
+              </a:cxn>
+              <a:cxn ang="0">
+                <a:pos x="csX14" y="csY14"/>
+              </a:cxn>
+              <a:cxn ang="0">
+                <a:pos x="csX15" y="csY15"/>
+              </a:cxn>
+            </a:cxnLst>
+            <a:rect l="l" t="t" r="r" b="b"/>
+            <a:pathLst>
+              <a:path w="2048256" h="2951163" fill="none" extrusionOk="0">
+                <a:moveTo>
+                  <a:pt x="0" y="0"/>
+                </a:moveTo>
+                <a:cubicBezTo>
+                  <a:pt x="145745" y="-14563"/>
+                  <a:pt x="443531" y="-7277"/>
+                  <a:pt x="682752" y="0"/>
+                </a:cubicBezTo>
+                <a:cubicBezTo>
+                  <a:pt x="921973" y="7277"/>
+                  <a:pt x="1028656" y="-16000"/>
+                  <a:pt x="1304056" y="0"/>
+                </a:cubicBezTo>
+                <a:cubicBezTo>
+                  <a:pt x="1579456" y="16000"/>
+                  <a:pt x="1703881" y="12176"/>
+                  <a:pt x="2048256" y="0"/>
+                </a:cubicBezTo>
+                <a:cubicBezTo>
+                  <a:pt x="2046264" y="239847"/>
+                  <a:pt x="2076706" y="432103"/>
+                  <a:pt x="2048256" y="619744"/>
+                </a:cubicBezTo>
+                <a:cubicBezTo>
+                  <a:pt x="2019806" y="807385"/>
+                  <a:pt x="2034863" y="1080410"/>
+                  <a:pt x="2048256" y="1239488"/>
+                </a:cubicBezTo>
+                <a:cubicBezTo>
+                  <a:pt x="2061649" y="1398566"/>
+                  <a:pt x="2045510" y="1613183"/>
+                  <a:pt x="2048256" y="1770698"/>
+                </a:cubicBezTo>
+                <a:cubicBezTo>
+                  <a:pt x="2051003" y="1928213"/>
+                  <a:pt x="2074513" y="2089042"/>
+                  <a:pt x="2048256" y="2360930"/>
+                </a:cubicBezTo>
+                <a:cubicBezTo>
+                  <a:pt x="2021999" y="2632818"/>
+                  <a:pt x="2041826" y="2795804"/>
+                  <a:pt x="2048256" y="2951163"/>
+                </a:cubicBezTo>
+                <a:cubicBezTo>
+                  <a:pt x="1777615" y="2949990"/>
+                  <a:pt x="1590074" y="2922595"/>
+                  <a:pt x="1385987" y="2951163"/>
+                </a:cubicBezTo>
+                <a:cubicBezTo>
+                  <a:pt x="1181900" y="2979731"/>
+                  <a:pt x="937289" y="2925220"/>
+                  <a:pt x="703235" y="2951163"/>
+                </a:cubicBezTo>
+                <a:cubicBezTo>
+                  <a:pt x="469181" y="2977106"/>
+                  <a:pt x="279028" y="2952897"/>
+                  <a:pt x="0" y="2951163"/>
+                </a:cubicBezTo>
+                <a:cubicBezTo>
+                  <a:pt x="-12688" y="2660430"/>
+                  <a:pt x="3295" y="2469288"/>
+                  <a:pt x="0" y="2331419"/>
+                </a:cubicBezTo>
+                <a:cubicBezTo>
+                  <a:pt x="-3295" y="2193550"/>
+                  <a:pt x="-19903" y="1834509"/>
+                  <a:pt x="0" y="1682163"/>
+                </a:cubicBezTo>
+                <a:cubicBezTo>
+                  <a:pt x="19903" y="1529817"/>
+                  <a:pt x="4229" y="1363192"/>
+                  <a:pt x="0" y="1062419"/>
+                </a:cubicBezTo>
+                <a:cubicBezTo>
+                  <a:pt x="-4229" y="761646"/>
+                  <a:pt x="529" y="476222"/>
+                  <a:pt x="0" y="0"/>
+                </a:cubicBezTo>
+                <a:close/>
+              </a:path>
+              <a:path w="2048256" h="2951163" stroke="0" extrusionOk="0">
+                <a:moveTo>
+                  <a:pt x="0" y="0"/>
+                </a:moveTo>
+                <a:cubicBezTo>
+                  <a:pt x="202094" y="13324"/>
+                  <a:pt x="347226" y="23935"/>
+                  <a:pt x="621304" y="0"/>
+                </a:cubicBezTo>
+                <a:cubicBezTo>
+                  <a:pt x="895382" y="-23935"/>
+                  <a:pt x="1070239" y="14752"/>
+                  <a:pt x="1263091" y="0"/>
+                </a:cubicBezTo>
+                <a:cubicBezTo>
+                  <a:pt x="1455943" y="-14752"/>
+                  <a:pt x="1811845" y="25403"/>
+                  <a:pt x="2048256" y="0"/>
+                </a:cubicBezTo>
+                <a:cubicBezTo>
+                  <a:pt x="2060438" y="245709"/>
+                  <a:pt x="2038713" y="343479"/>
+                  <a:pt x="2048256" y="560721"/>
+                </a:cubicBezTo>
+                <a:cubicBezTo>
+                  <a:pt x="2057799" y="777963"/>
+                  <a:pt x="2078146" y="886218"/>
+                  <a:pt x="2048256" y="1209977"/>
+                </a:cubicBezTo>
+                <a:cubicBezTo>
+                  <a:pt x="2018366" y="1533736"/>
+                  <a:pt x="2041257" y="1542940"/>
+                  <a:pt x="2048256" y="1711675"/>
+                </a:cubicBezTo>
+                <a:cubicBezTo>
+                  <a:pt x="2055255" y="1880410"/>
+                  <a:pt x="2058153" y="2114975"/>
+                  <a:pt x="2048256" y="2242884"/>
+                </a:cubicBezTo>
+                <a:cubicBezTo>
+                  <a:pt x="2038359" y="2370793"/>
+                  <a:pt x="2079163" y="2753717"/>
+                  <a:pt x="2048256" y="2951163"/>
+                </a:cubicBezTo>
+                <a:cubicBezTo>
+                  <a:pt x="1902866" y="2942189"/>
+                  <a:pt x="1732100" y="2949788"/>
+                  <a:pt x="1426952" y="2951163"/>
+                </a:cubicBezTo>
+                <a:cubicBezTo>
+                  <a:pt x="1121804" y="2952538"/>
+                  <a:pt x="1052260" y="2937349"/>
+                  <a:pt x="785165" y="2951163"/>
+                </a:cubicBezTo>
+                <a:cubicBezTo>
+                  <a:pt x="518070" y="2964977"/>
+                  <a:pt x="300455" y="2971486"/>
+                  <a:pt x="0" y="2951163"/>
+                </a:cubicBezTo>
+                <a:cubicBezTo>
+                  <a:pt x="14797" y="2840414"/>
+                  <a:pt x="24747" y="2604392"/>
+                  <a:pt x="0" y="2449465"/>
+                </a:cubicBezTo>
+                <a:cubicBezTo>
+                  <a:pt x="-24747" y="2294538"/>
+                  <a:pt x="12162" y="2112558"/>
+                  <a:pt x="0" y="1829721"/>
+                </a:cubicBezTo>
+                <a:cubicBezTo>
+                  <a:pt x="-12162" y="1546884"/>
+                  <a:pt x="8429" y="1364361"/>
+                  <a:pt x="0" y="1239488"/>
+                </a:cubicBezTo>
+                <a:cubicBezTo>
+                  <a:pt x="-8429" y="1114615"/>
+                  <a:pt x="7141" y="949936"/>
+                  <a:pt x="0" y="708279"/>
+                </a:cubicBezTo>
+                <a:cubicBezTo>
+                  <a:pt x="-7141" y="466622"/>
+                  <a:pt x="-34761" y="237017"/>
+                  <a:pt x="0" y="0"/>
+                </a:cubicBezTo>
+                <a:close/>
+              </a:path>
+            </a:pathLst>
+          </a:custGeom>
+          <a:solidFill>
+            <a:schemeClr val="bg1"/>
+          </a:solidFill>
+          <a:ln w="25400">
+            <a:solidFill>
+              <a:schemeClr val="tx1">
+                <a:lumMod val="95000"/>
+                <a:lumOff val="5000"/>
+              </a:schemeClr>
+            </a:solidFill>
+            <a:extLst>
+              <a:ext uri="{C807C97D-BFC1-408E-A445-0C87EB9F89A2}">
+                <ask:lineSketchStyleProps xmlns:ask="http://schemas.microsoft.com/office/drawing/2018/sketchyshapes" sd="1762638383">
+                  <a:prstGeom prst="rect">
+                    <a:avLst/>
+                  </a:prstGeom>
+                  <ask:type>
+                    <ask:lineSketchFreehand/>
+                  </ask:type>
+                </ask:lineSketchStyleProps>
+              </a:ext>
+            </a:extLst>
+          </a:ln>
+        </p:spPr>
+        <p:style>
+          <a:lnRef idx="2">
+            <a:schemeClr val="accent3">
+              <a:shade val="50000"/>
+            </a:schemeClr>
+          </a:lnRef>
+          <a:fillRef idx="1">
+            <a:schemeClr val="accent3"/>
+          </a:fillRef>
+          <a:effectRef idx="0">
+            <a:schemeClr val="accent3"/>
+          </a:effectRef>
+          <a:fontRef idx="minor">
+            <a:schemeClr val="lt1"/>
+          </a:fontRef>
+        </p:style>
+        <p:txBody>
+          <a:bodyPr rtlCol="0" anchor="ctr"/>
+          <a:lstStyle/>
+          <a:p>
+            <a:pPr algn="ctr"/>
+            <a:endParaRPr lang="de-AT"/>
+          </a:p>
+        </p:txBody>
+      </p:sp>
+      <p:sp>
+        <p:nvSpPr>
+          <p:cNvPr id="20" name="Rechteck 4">
+            <a:extLst>
+              <a:ext uri="{FF2B5EF4-FFF2-40B4-BE49-F238E27FC236}">
+                <a16:creationId xmlns:a16="http://schemas.microsoft.com/office/drawing/2014/main" id="{2CD46CE6-F763-54B9-1D74-5F14523CE637}"/>
+              </a:ext>
+              <a:ext uri="{C183D7F6-B498-43B3-948B-1728B52AA6E4}">
+                <adec:decorative xmlns:adec="http://schemas.microsoft.com/office/drawing/2017/decorative" val="1"/>
+              </a:ext>
+            </a:extLst>
+          </p:cNvPr>
+          <p:cNvSpPr/>
+          <p:nvPr/>
+        </p:nvSpPr>
+        <p:spPr>
+          <a:xfrm>
+            <a:off x="2409830" y="6721474"/>
+            <a:ext cx="2051050" cy="2951163"/>
+          </a:xfrm>
+          <a:custGeom>
+            <a:avLst/>
+            <a:gdLst>
+              <a:gd name="csX0" fmla="*/ 0 w 2051050"/>
+              <a:gd name="csY0" fmla="*/ 0 h 2951163"/>
+              <a:gd name="csX1" fmla="*/ 683683 w 2051050"/>
+              <a:gd name="csY1" fmla="*/ 0 h 2951163"/>
+              <a:gd name="csX2" fmla="*/ 1305835 w 2051050"/>
+              <a:gd name="csY2" fmla="*/ 0 h 2951163"/>
+              <a:gd name="csX3" fmla="*/ 2051050 w 2051050"/>
+              <a:gd name="csY3" fmla="*/ 0 h 2951163"/>
+              <a:gd name="csX4" fmla="*/ 2051050 w 2051050"/>
+              <a:gd name="csY4" fmla="*/ 619744 h 2951163"/>
+              <a:gd name="csX5" fmla="*/ 2051050 w 2051050"/>
+              <a:gd name="csY5" fmla="*/ 1239488 h 2951163"/>
+              <a:gd name="csX6" fmla="*/ 2051050 w 2051050"/>
+              <a:gd name="csY6" fmla="*/ 1770698 h 2951163"/>
+              <a:gd name="csX7" fmla="*/ 2051050 w 2051050"/>
+              <a:gd name="csY7" fmla="*/ 2360930 h 2951163"/>
+              <a:gd name="csX8" fmla="*/ 2051050 w 2051050"/>
+              <a:gd name="csY8" fmla="*/ 2951163 h 2951163"/>
+              <a:gd name="csX9" fmla="*/ 1387877 w 2051050"/>
+              <a:gd name="csY9" fmla="*/ 2951163 h 2951163"/>
+              <a:gd name="csX10" fmla="*/ 704194 w 2051050"/>
+              <a:gd name="csY10" fmla="*/ 2951163 h 2951163"/>
+              <a:gd name="csX11" fmla="*/ 0 w 2051050"/>
+              <a:gd name="csY11" fmla="*/ 2951163 h 2951163"/>
+              <a:gd name="csX12" fmla="*/ 0 w 2051050"/>
+              <a:gd name="csY12" fmla="*/ 2331419 h 2951163"/>
+              <a:gd name="csX13" fmla="*/ 0 w 2051050"/>
+              <a:gd name="csY13" fmla="*/ 1682163 h 2951163"/>
+              <a:gd name="csX14" fmla="*/ 0 w 2051050"/>
+              <a:gd name="csY14" fmla="*/ 1062419 h 2951163"/>
+              <a:gd name="csX15" fmla="*/ 0 w 2051050"/>
+              <a:gd name="csY15" fmla="*/ 0 h 2951163"/>
+            </a:gdLst>
+            <a:ahLst/>
+            <a:cxnLst>
+              <a:cxn ang="0">
+                <a:pos x="csX0" y="csY0"/>
+              </a:cxn>
+              <a:cxn ang="0">
+                <a:pos x="csX1" y="csY1"/>
+              </a:cxn>
+              <a:cxn ang="0">
+                <a:pos x="csX2" y="csY2"/>
+              </a:cxn>
+              <a:cxn ang="0">
+                <a:pos x="csX3" y="csY3"/>
+              </a:cxn>
+              <a:cxn ang="0">
+                <a:pos x="csX4" y="csY4"/>
+              </a:cxn>
+              <a:cxn ang="0">
+                <a:pos x="csX5" y="csY5"/>
+              </a:cxn>
+              <a:cxn ang="0">
+                <a:pos x="csX6" y="csY6"/>
+              </a:cxn>
+              <a:cxn ang="0">
+                <a:pos x="csX7" y="csY7"/>
+              </a:cxn>
+              <a:cxn ang="0">
+                <a:pos x="csX8" y="csY8"/>
+              </a:cxn>
+              <a:cxn ang="0">
+                <a:pos x="csX9" y="csY9"/>
+              </a:cxn>
+              <a:cxn ang="0">
+                <a:pos x="csX10" y="csY10"/>
+              </a:cxn>
+              <a:cxn ang="0">
+                <a:pos x="csX11" y="csY11"/>
+              </a:cxn>
+              <a:cxn ang="0">
+                <a:pos x="csX12" y="csY12"/>
+              </a:cxn>
+              <a:cxn ang="0">
+                <a:pos x="csX13" y="csY13"/>
+              </a:cxn>
+              <a:cxn ang="0">
+                <a:pos x="csX14" y="csY14"/>
+              </a:cxn>
+              <a:cxn ang="0">
+                <a:pos x="csX15" y="csY15"/>
+              </a:cxn>
+            </a:cxnLst>
+            <a:rect l="l" t="t" r="r" b="b"/>
+            <a:pathLst>
+              <a:path w="2051050" h="2951163" fill="none" extrusionOk="0">
+                <a:moveTo>
+                  <a:pt x="0" y="0"/>
+                </a:moveTo>
+                <a:cubicBezTo>
+                  <a:pt x="267367" y="14427"/>
+                  <a:pt x="349033" y="-12086"/>
+                  <a:pt x="683683" y="0"/>
+                </a:cubicBezTo>
+                <a:cubicBezTo>
+                  <a:pt x="1018333" y="12086"/>
+                  <a:pt x="1022416" y="-8631"/>
+                  <a:pt x="1305835" y="0"/>
+                </a:cubicBezTo>
+                <a:cubicBezTo>
+                  <a:pt x="1589254" y="8631"/>
+                  <a:pt x="1888174" y="-24305"/>
+                  <a:pt x="2051050" y="0"/>
+                </a:cubicBezTo>
+                <a:cubicBezTo>
+                  <a:pt x="2049058" y="239847"/>
+                  <a:pt x="2079500" y="432103"/>
+                  <a:pt x="2051050" y="619744"/>
+                </a:cubicBezTo>
+                <a:cubicBezTo>
+                  <a:pt x="2022600" y="807385"/>
+                  <a:pt x="2037657" y="1080410"/>
+                  <a:pt x="2051050" y="1239488"/>
+                </a:cubicBezTo>
+                <a:cubicBezTo>
+                  <a:pt x="2064443" y="1398566"/>
+                  <a:pt x="2048304" y="1613183"/>
+                  <a:pt x="2051050" y="1770698"/>
+                </a:cubicBezTo>
+                <a:cubicBezTo>
+                  <a:pt x="2053797" y="1928213"/>
+                  <a:pt x="2077307" y="2089042"/>
+                  <a:pt x="2051050" y="2360930"/>
+                </a:cubicBezTo>
+                <a:cubicBezTo>
+                  <a:pt x="2024793" y="2632818"/>
+                  <a:pt x="2044620" y="2795804"/>
+                  <a:pt x="2051050" y="2951163"/>
+                </a:cubicBezTo>
+                <a:cubicBezTo>
+                  <a:pt x="1792864" y="2945869"/>
+                  <a:pt x="1550867" y="2982853"/>
+                  <a:pt x="1387877" y="2951163"/>
+                </a:cubicBezTo>
+                <a:cubicBezTo>
+                  <a:pt x="1224887" y="2919473"/>
+                  <a:pt x="943563" y="2930389"/>
+                  <a:pt x="704194" y="2951163"/>
+                </a:cubicBezTo>
+                <a:cubicBezTo>
+                  <a:pt x="464825" y="2971937"/>
+                  <a:pt x="330882" y="2923973"/>
+                  <a:pt x="0" y="2951163"/>
+                </a:cubicBezTo>
+                <a:cubicBezTo>
+                  <a:pt x="-12688" y="2660430"/>
+                  <a:pt x="3295" y="2469288"/>
+                  <a:pt x="0" y="2331419"/>
+                </a:cubicBezTo>
+                <a:cubicBezTo>
+                  <a:pt x="-3295" y="2193550"/>
+                  <a:pt x="-19903" y="1834509"/>
+                  <a:pt x="0" y="1682163"/>
+                </a:cubicBezTo>
+                <a:cubicBezTo>
+                  <a:pt x="19903" y="1529817"/>
+                  <a:pt x="4229" y="1363192"/>
+                  <a:pt x="0" y="1062419"/>
+                </a:cubicBezTo>
+                <a:cubicBezTo>
+                  <a:pt x="-4229" y="761646"/>
+                  <a:pt x="529" y="476222"/>
+                  <a:pt x="0" y="0"/>
+                </a:cubicBezTo>
+                <a:close/>
+              </a:path>
+              <a:path w="2051050" h="2951163" stroke="0" extrusionOk="0">
+                <a:moveTo>
+                  <a:pt x="0" y="0"/>
+                </a:moveTo>
+                <a:cubicBezTo>
+                  <a:pt x="306279" y="21950"/>
+                  <a:pt x="339620" y="1228"/>
+                  <a:pt x="622152" y="0"/>
+                </a:cubicBezTo>
+                <a:cubicBezTo>
+                  <a:pt x="904684" y="-1228"/>
+                  <a:pt x="1011457" y="20320"/>
+                  <a:pt x="1264814" y="0"/>
+                </a:cubicBezTo>
+                <a:cubicBezTo>
+                  <a:pt x="1518171" y="-20320"/>
+                  <a:pt x="1857420" y="-30729"/>
+                  <a:pt x="2051050" y="0"/>
+                </a:cubicBezTo>
+                <a:cubicBezTo>
+                  <a:pt x="2063232" y="245709"/>
+                  <a:pt x="2041507" y="343479"/>
+                  <a:pt x="2051050" y="560721"/>
+                </a:cubicBezTo>
+                <a:cubicBezTo>
+                  <a:pt x="2060593" y="777963"/>
+                  <a:pt x="2080940" y="886218"/>
+                  <a:pt x="2051050" y="1209977"/>
+                </a:cubicBezTo>
+                <a:cubicBezTo>
+                  <a:pt x="2021160" y="1533736"/>
+                  <a:pt x="2044051" y="1542940"/>
+                  <a:pt x="2051050" y="1711675"/>
+                </a:cubicBezTo>
+                <a:cubicBezTo>
+                  <a:pt x="2058049" y="1880410"/>
+                  <a:pt x="2060947" y="2114975"/>
+                  <a:pt x="2051050" y="2242884"/>
+                </a:cubicBezTo>
+                <a:cubicBezTo>
+                  <a:pt x="2041153" y="2370793"/>
+                  <a:pt x="2081957" y="2753717"/>
+                  <a:pt x="2051050" y="2951163"/>
+                </a:cubicBezTo>
+                <a:cubicBezTo>
+                  <a:pt x="1910115" y="2975025"/>
+                  <a:pt x="1602720" y="2978995"/>
+                  <a:pt x="1428898" y="2951163"/>
+                </a:cubicBezTo>
+                <a:cubicBezTo>
+                  <a:pt x="1255076" y="2923331"/>
+                  <a:pt x="924160" y="2933002"/>
+                  <a:pt x="786236" y="2951163"/>
+                </a:cubicBezTo>
+                <a:cubicBezTo>
+                  <a:pt x="648312" y="2969324"/>
+                  <a:pt x="370261" y="2923618"/>
+                  <a:pt x="0" y="2951163"/>
+                </a:cubicBezTo>
+                <a:cubicBezTo>
+                  <a:pt x="14797" y="2840414"/>
+                  <a:pt x="24747" y="2604392"/>
+                  <a:pt x="0" y="2449465"/>
+                </a:cubicBezTo>
+                <a:cubicBezTo>
+                  <a:pt x="-24747" y="2294538"/>
+                  <a:pt x="12162" y="2112558"/>
+                  <a:pt x="0" y="1829721"/>
+                </a:cubicBezTo>
+                <a:cubicBezTo>
+                  <a:pt x="-12162" y="1546884"/>
+                  <a:pt x="8429" y="1364361"/>
+                  <a:pt x="0" y="1239488"/>
+                </a:cubicBezTo>
+                <a:cubicBezTo>
+                  <a:pt x="-8429" y="1114615"/>
+                  <a:pt x="7141" y="949936"/>
+                  <a:pt x="0" y="708279"/>
+                </a:cubicBezTo>
+                <a:cubicBezTo>
+                  <a:pt x="-7141" y="466622"/>
+                  <a:pt x="-34761" y="237017"/>
+                  <a:pt x="0" y="0"/>
+                </a:cubicBezTo>
+                <a:close/>
+              </a:path>
+            </a:pathLst>
+          </a:custGeom>
+          <a:solidFill>
+            <a:schemeClr val="bg1"/>
+          </a:solidFill>
+          <a:ln w="25400">
+            <a:solidFill>
+              <a:schemeClr val="tx1">
+                <a:lumMod val="95000"/>
+                <a:lumOff val="5000"/>
+              </a:schemeClr>
+            </a:solidFill>
+            <a:extLst>
+              <a:ext uri="{C807C97D-BFC1-408E-A445-0C87EB9F89A2}">
+                <ask:lineSketchStyleProps xmlns:ask="http://schemas.microsoft.com/office/drawing/2018/sketchyshapes" sd="1762638383">
+                  <a:prstGeom prst="rect">
+                    <a:avLst/>
+                  </a:prstGeom>
+                  <ask:type>
+                    <ask:lineSketchFreehand/>
+                  </ask:type>
+                </ask:lineSketchStyleProps>
+              </a:ext>
+            </a:extLst>
+          </a:ln>
+        </p:spPr>
+        <p:style>
+          <a:lnRef idx="2">
+            <a:schemeClr val="accent3">
+              <a:shade val="50000"/>
+            </a:schemeClr>
+          </a:lnRef>
+          <a:fillRef idx="1">
+            <a:schemeClr val="accent3"/>
+          </a:fillRef>
+          <a:effectRef idx="0">
+            <a:schemeClr val="accent3"/>
+          </a:effectRef>
+          <a:fontRef idx="minor">
+            <a:schemeClr val="lt1"/>
+          </a:fontRef>
+        </p:style>
+        <p:txBody>
+          <a:bodyPr rtlCol="0" anchor="ctr"/>
+          <a:lstStyle/>
+          <a:p>
+            <a:pPr algn="ctr"/>
+            <a:endParaRPr lang="de-AT"/>
+          </a:p>
+        </p:txBody>
+      </p:sp>
+      <p:sp>
+        <p:nvSpPr>
+          <p:cNvPr id="22" name="Rechteck 1">
+            <a:extLst>
+              <a:ext uri="{FF2B5EF4-FFF2-40B4-BE49-F238E27FC236}">
+                <a16:creationId xmlns:a16="http://schemas.microsoft.com/office/drawing/2014/main" id="{D4C17E7D-8E2E-1A12-1F86-EAAF634D6369}"/>
+              </a:ext>
+              <a:ext uri="{C183D7F6-B498-43B3-948B-1728B52AA6E4}">
+                <adec:decorative xmlns:adec="http://schemas.microsoft.com/office/drawing/2017/decorative" val="1"/>
+              </a:ext>
+            </a:extLst>
+          </p:cNvPr>
+          <p:cNvSpPr/>
+          <p:nvPr/>
+        </p:nvSpPr>
+        <p:spPr>
+          <a:xfrm>
+            <a:off x="4581525" y="6721474"/>
+            <a:ext cx="2048256" cy="2951163"/>
+          </a:xfrm>
+          <a:custGeom>
+            <a:avLst/>
+            <a:gdLst>
+              <a:gd name="csX0" fmla="*/ 0 w 2048256"/>
+              <a:gd name="csY0" fmla="*/ 0 h 2951163"/>
+              <a:gd name="csX1" fmla="*/ 682752 w 2048256"/>
+              <a:gd name="csY1" fmla="*/ 0 h 2951163"/>
+              <a:gd name="csX2" fmla="*/ 1304056 w 2048256"/>
+              <a:gd name="csY2" fmla="*/ 0 h 2951163"/>
+              <a:gd name="csX3" fmla="*/ 2048256 w 2048256"/>
+              <a:gd name="csY3" fmla="*/ 0 h 2951163"/>
+              <a:gd name="csX4" fmla="*/ 2048256 w 2048256"/>
+              <a:gd name="csY4" fmla="*/ 619744 h 2951163"/>
+              <a:gd name="csX5" fmla="*/ 2048256 w 2048256"/>
+              <a:gd name="csY5" fmla="*/ 1239488 h 2951163"/>
+              <a:gd name="csX6" fmla="*/ 2048256 w 2048256"/>
+              <a:gd name="csY6" fmla="*/ 1770698 h 2951163"/>
+              <a:gd name="csX7" fmla="*/ 2048256 w 2048256"/>
+              <a:gd name="csY7" fmla="*/ 2360930 h 2951163"/>
+              <a:gd name="csX8" fmla="*/ 2048256 w 2048256"/>
+              <a:gd name="csY8" fmla="*/ 2951163 h 2951163"/>
+              <a:gd name="csX9" fmla="*/ 1385987 w 2048256"/>
+              <a:gd name="csY9" fmla="*/ 2951163 h 2951163"/>
+              <a:gd name="csX10" fmla="*/ 703235 w 2048256"/>
+              <a:gd name="csY10" fmla="*/ 2951163 h 2951163"/>
+              <a:gd name="csX11" fmla="*/ 0 w 2048256"/>
+              <a:gd name="csY11" fmla="*/ 2951163 h 2951163"/>
+              <a:gd name="csX12" fmla="*/ 0 w 2048256"/>
+              <a:gd name="csY12" fmla="*/ 2331419 h 2951163"/>
+              <a:gd name="csX13" fmla="*/ 0 w 2048256"/>
+              <a:gd name="csY13" fmla="*/ 1682163 h 2951163"/>
+              <a:gd name="csX14" fmla="*/ 0 w 2048256"/>
+              <a:gd name="csY14" fmla="*/ 1062419 h 2951163"/>
+              <a:gd name="csX15" fmla="*/ 0 w 2048256"/>
+              <a:gd name="csY15" fmla="*/ 0 h 2951163"/>
+            </a:gdLst>
+            <a:ahLst/>
+            <a:cxnLst>
+              <a:cxn ang="0">
+                <a:pos x="csX0" y="csY0"/>
+              </a:cxn>
+              <a:cxn ang="0">
+                <a:pos x="csX1" y="csY1"/>
+              </a:cxn>
+              <a:cxn ang="0">
+                <a:pos x="csX2" y="csY2"/>
+              </a:cxn>
+              <a:cxn ang="0">
+                <a:pos x="csX3" y="csY3"/>
+              </a:cxn>
+              <a:cxn ang="0">
+                <a:pos x="csX4" y="csY4"/>
+              </a:cxn>
+              <a:cxn ang="0">
+                <a:pos x="csX5" y="csY5"/>
+              </a:cxn>
+              <a:cxn ang="0">
+                <a:pos x="csX6" y="csY6"/>
+              </a:cxn>
+              <a:cxn ang="0">
+                <a:pos x="csX7" y="csY7"/>
+              </a:cxn>
+              <a:cxn ang="0">
+                <a:pos x="csX8" y="csY8"/>
+              </a:cxn>
+              <a:cxn ang="0">
+                <a:pos x="csX9" y="csY9"/>
+              </a:cxn>
+              <a:cxn ang="0">
+                <a:pos x="csX10" y="csY10"/>
+              </a:cxn>
+              <a:cxn ang="0">
+                <a:pos x="csX11" y="csY11"/>
+              </a:cxn>
+              <a:cxn ang="0">
+                <a:pos x="csX12" y="csY12"/>
+              </a:cxn>
+              <a:cxn ang="0">
+                <a:pos x="csX13" y="csY13"/>
+              </a:cxn>
+              <a:cxn ang="0">
+                <a:pos x="csX14" y="csY14"/>
+              </a:cxn>
+              <a:cxn ang="0">
+                <a:pos x="csX15" y="csY15"/>
+              </a:cxn>
+            </a:cxnLst>
+            <a:rect l="l" t="t" r="r" b="b"/>
+            <a:pathLst>
+              <a:path w="2048256" h="2951163" fill="none" extrusionOk="0">
+                <a:moveTo>
+                  <a:pt x="0" y="0"/>
+                </a:moveTo>
+                <a:cubicBezTo>
+                  <a:pt x="145745" y="-14563"/>
+                  <a:pt x="443531" y="-7277"/>
+                  <a:pt x="682752" y="0"/>
+                </a:cubicBezTo>
+                <a:cubicBezTo>
+                  <a:pt x="921973" y="7277"/>
+                  <a:pt x="1028656" y="-16000"/>
+                  <a:pt x="1304056" y="0"/>
+                </a:cubicBezTo>
+                <a:cubicBezTo>
+                  <a:pt x="1579456" y="16000"/>
+                  <a:pt x="1703881" y="12176"/>
+                  <a:pt x="2048256" y="0"/>
+                </a:cubicBezTo>
+                <a:cubicBezTo>
+                  <a:pt x="2046264" y="239847"/>
+                  <a:pt x="2076706" y="432103"/>
+                  <a:pt x="2048256" y="619744"/>
+                </a:cubicBezTo>
+                <a:cubicBezTo>
+                  <a:pt x="2019806" y="807385"/>
+                  <a:pt x="2034863" y="1080410"/>
+                  <a:pt x="2048256" y="1239488"/>
+                </a:cubicBezTo>
+                <a:cubicBezTo>
+                  <a:pt x="2061649" y="1398566"/>
+                  <a:pt x="2045510" y="1613183"/>
+                  <a:pt x="2048256" y="1770698"/>
+                </a:cubicBezTo>
+                <a:cubicBezTo>
+                  <a:pt x="2051003" y="1928213"/>
+                  <a:pt x="2074513" y="2089042"/>
+                  <a:pt x="2048256" y="2360930"/>
+                </a:cubicBezTo>
+                <a:cubicBezTo>
+                  <a:pt x="2021999" y="2632818"/>
+                  <a:pt x="2041826" y="2795804"/>
+                  <a:pt x="2048256" y="2951163"/>
+                </a:cubicBezTo>
+                <a:cubicBezTo>
+                  <a:pt x="1777615" y="2949990"/>
+                  <a:pt x="1590074" y="2922595"/>
+                  <a:pt x="1385987" y="2951163"/>
+                </a:cubicBezTo>
+                <a:cubicBezTo>
+                  <a:pt x="1181900" y="2979731"/>
+                  <a:pt x="937289" y="2925220"/>
+                  <a:pt x="703235" y="2951163"/>
+                </a:cubicBezTo>
+                <a:cubicBezTo>
+                  <a:pt x="469181" y="2977106"/>
+                  <a:pt x="279028" y="2952897"/>
+                  <a:pt x="0" y="2951163"/>
+                </a:cubicBezTo>
+                <a:cubicBezTo>
+                  <a:pt x="-12688" y="2660430"/>
+                  <a:pt x="3295" y="2469288"/>
+                  <a:pt x="0" y="2331419"/>
+                </a:cubicBezTo>
+                <a:cubicBezTo>
+                  <a:pt x="-3295" y="2193550"/>
+                  <a:pt x="-19903" y="1834509"/>
+                  <a:pt x="0" y="1682163"/>
+                </a:cubicBezTo>
+                <a:cubicBezTo>
+                  <a:pt x="19903" y="1529817"/>
+                  <a:pt x="4229" y="1363192"/>
+                  <a:pt x="0" y="1062419"/>
+                </a:cubicBezTo>
+                <a:cubicBezTo>
+                  <a:pt x="-4229" y="761646"/>
+                  <a:pt x="529" y="476222"/>
+                  <a:pt x="0" y="0"/>
+                </a:cubicBezTo>
+                <a:close/>
+              </a:path>
+              <a:path w="2048256" h="2951163" stroke="0" extrusionOk="0">
+                <a:moveTo>
+                  <a:pt x="0" y="0"/>
+                </a:moveTo>
+                <a:cubicBezTo>
+                  <a:pt x="202094" y="13324"/>
+                  <a:pt x="347226" y="23935"/>
+                  <a:pt x="621304" y="0"/>
+                </a:cubicBezTo>
+                <a:cubicBezTo>
+                  <a:pt x="895382" y="-23935"/>
+                  <a:pt x="1070239" y="14752"/>
+                  <a:pt x="1263091" y="0"/>
+                </a:cubicBezTo>
+                <a:cubicBezTo>
+                  <a:pt x="1455943" y="-14752"/>
+                  <a:pt x="1811845" y="25403"/>
+                  <a:pt x="2048256" y="0"/>
+                </a:cubicBezTo>
+                <a:cubicBezTo>
+                  <a:pt x="2060438" y="245709"/>
+                  <a:pt x="2038713" y="343479"/>
+                  <a:pt x="2048256" y="560721"/>
+                </a:cubicBezTo>
+                <a:cubicBezTo>
+                  <a:pt x="2057799" y="777963"/>
+                  <a:pt x="2078146" y="886218"/>
+                  <a:pt x="2048256" y="1209977"/>
+                </a:cubicBezTo>
+                <a:cubicBezTo>
+                  <a:pt x="2018366" y="1533736"/>
+                  <a:pt x="2041257" y="1542940"/>
+                  <a:pt x="2048256" y="1711675"/>
+                </a:cubicBezTo>
+                <a:cubicBezTo>
+                  <a:pt x="2055255" y="1880410"/>
+                  <a:pt x="2058153" y="2114975"/>
+                  <a:pt x="2048256" y="2242884"/>
+                </a:cubicBezTo>
+                <a:cubicBezTo>
+                  <a:pt x="2038359" y="2370793"/>
+                  <a:pt x="2079163" y="2753717"/>
+                  <a:pt x="2048256" y="2951163"/>
+                </a:cubicBezTo>
+                <a:cubicBezTo>
+                  <a:pt x="1902866" y="2942189"/>
+                  <a:pt x="1732100" y="2949788"/>
+                  <a:pt x="1426952" y="2951163"/>
+                </a:cubicBezTo>
+                <a:cubicBezTo>
+                  <a:pt x="1121804" y="2952538"/>
+                  <a:pt x="1052260" y="2937349"/>
+                  <a:pt x="785165" y="2951163"/>
+                </a:cubicBezTo>
+                <a:cubicBezTo>
+                  <a:pt x="518070" y="2964977"/>
+                  <a:pt x="300455" y="2971486"/>
+                  <a:pt x="0" y="2951163"/>
+                </a:cubicBezTo>
+                <a:cubicBezTo>
+                  <a:pt x="14797" y="2840414"/>
+                  <a:pt x="24747" y="2604392"/>
+                  <a:pt x="0" y="2449465"/>
+                </a:cubicBezTo>
+                <a:cubicBezTo>
+                  <a:pt x="-24747" y="2294538"/>
+                  <a:pt x="12162" y="2112558"/>
+                  <a:pt x="0" y="1829721"/>
+                </a:cubicBezTo>
+                <a:cubicBezTo>
+                  <a:pt x="-12162" y="1546884"/>
+                  <a:pt x="8429" y="1364361"/>
+                  <a:pt x="0" y="1239488"/>
+                </a:cubicBezTo>
+                <a:cubicBezTo>
+                  <a:pt x="-8429" y="1114615"/>
+                  <a:pt x="7141" y="949936"/>
+                  <a:pt x="0" y="708279"/>
+                </a:cubicBezTo>
+                <a:cubicBezTo>
+                  <a:pt x="-7141" y="466622"/>
+                  <a:pt x="-34761" y="237017"/>
+                  <a:pt x="0" y="0"/>
+                </a:cubicBezTo>
+                <a:close/>
+              </a:path>
+            </a:pathLst>
+          </a:custGeom>
+          <a:solidFill>
+            <a:schemeClr val="bg1"/>
+          </a:solidFill>
+          <a:ln w="25400">
+            <a:solidFill>
+              <a:schemeClr val="tx1">
+                <a:lumMod val="95000"/>
+                <a:lumOff val="5000"/>
+              </a:schemeClr>
+            </a:solidFill>
+            <a:extLst>
+              <a:ext uri="{C807C97D-BFC1-408E-A445-0C87EB9F89A2}">
+                <ask:lineSketchStyleProps xmlns:ask="http://schemas.microsoft.com/office/drawing/2018/sketchyshapes" sd="1762638383">
+                  <a:prstGeom prst="rect">
+                    <a:avLst/>
+                  </a:prstGeom>
+                  <ask:type>
+                    <ask:lineSketchFreehand/>
+                  </ask:type>
+                </ask:lineSketchStyleProps>
+              </a:ext>
+            </a:extLst>
+          </a:ln>
+        </p:spPr>
+        <p:style>
+          <a:lnRef idx="2">
+            <a:schemeClr val="accent3">
+              <a:shade val="50000"/>
+            </a:schemeClr>
+          </a:lnRef>
+          <a:fillRef idx="1">
+            <a:schemeClr val="accent3"/>
+          </a:fillRef>
+          <a:effectRef idx="0">
+            <a:schemeClr val="accent3"/>
+          </a:effectRef>
+          <a:fontRef idx="minor">
+            <a:schemeClr val="lt1"/>
+          </a:fontRef>
+        </p:style>
+        <p:txBody>
+          <a:bodyPr rtlCol="0" anchor="ctr"/>
+          <a:lstStyle/>
+          <a:p>
+            <a:pPr algn="ctr"/>
+            <a:endParaRPr lang="de-AT"/>
+          </a:p>
+        </p:txBody>
+      </p:sp>
+    </p:spTree>
+    <p:extLst>
+      <p:ext uri="{BB962C8B-B14F-4D97-AF65-F5344CB8AC3E}">
+        <p14:creationId xmlns:p14="http://schemas.microsoft.com/office/powerpoint/2010/main" val="1148238684"/>
+      </p:ext>
+    </p:extLst>
+  </p:cSld>
+  <p:clrMapOvr>
+    <a:masterClrMapping/>
+  </p:clrMapOvr>
+</p:sld>
+</file>
+
+<file path=ppt/slides/slide4.xml><?xml version="1.0" encoding="utf-8"?>
+<p:sld xmlns:a="http://schemas.openxmlformats.org/drawingml/2006/main" xmlns:r="http://schemas.openxmlformats.org/officeDocument/2006/relationships" xmlns:p="http://schemas.openxmlformats.org/presentationml/2006/main">
+  <p:cSld>
+    <p:spTree>
+      <p:nvGrpSpPr>
+        <p:cNvPr id="1" name="">
+          <a:extLst>
+            <a:ext uri="{FF2B5EF4-FFF2-40B4-BE49-F238E27FC236}">
+              <a16:creationId xmlns:a16="http://schemas.microsoft.com/office/drawing/2014/main" id="{CDB54751-81D8-D9C6-E0DD-CB3A3459BA30}"/>
+            </a:ext>
+          </a:extLst>
+        </p:cNvPr>
+        <p:cNvGrpSpPr/>
+        <p:nvPr/>
+      </p:nvGrpSpPr>
+      <p:grpSpPr>
+        <a:xfrm>
+          <a:off x="0" y="0"/>
+          <a:ext cx="0" cy="0"/>
+          <a:chOff x="0" y="0"/>
+          <a:chExt cx="0" cy="0"/>
+        </a:xfrm>
+      </p:grpSpPr>
+      <p:sp>
+        <p:nvSpPr>
+          <p:cNvPr id="2" name="Slide Number Placeholder 1">
+            <a:extLst>
+              <a:ext uri="{FF2B5EF4-FFF2-40B4-BE49-F238E27FC236}">
+                <a16:creationId xmlns:a16="http://schemas.microsoft.com/office/drawing/2014/main" id="{3D3918AB-417F-3E4D-E445-851EB16D6CAE}"/>
+              </a:ext>
+            </a:extLst>
+          </p:cNvPr>
+          <p:cNvSpPr>
+            <a:spLocks noGrp="1"/>
+          </p:cNvSpPr>
+          <p:nvPr>
+            <p:ph type="sldNum" sz="quarter" idx="10"/>
+          </p:nvPr>
+        </p:nvSpPr>
+        <p:spPr/>
+        <p:txBody>
+          <a:bodyPr/>
+          <a:lstStyle/>
+          <a:p>
+            <a:fld id="{09C44C4A-945E-4A56-A1E7-C9D60F5427FF}" type="slidenum">
+              <a:rPr lang="de-AT" smtClean="0"/>
+              <a:t>4</a:t>
+            </a:fld>
+            <a:endParaRPr lang="de-AT"/>
+          </a:p>
+        </p:txBody>
+      </p:sp>
+      <p:sp>
+        <p:nvSpPr>
+          <p:cNvPr id="4" name="Title 3">
+            <a:extLst>
+              <a:ext uri="{FF2B5EF4-FFF2-40B4-BE49-F238E27FC236}">
+                <a16:creationId xmlns:a16="http://schemas.microsoft.com/office/drawing/2014/main" id="{25D95BA8-911A-FB7A-C910-D3468D3C508B}"/>
+              </a:ext>
+            </a:extLst>
+          </p:cNvPr>
+          <p:cNvSpPr>
+            <a:spLocks noGrp="1"/>
+          </p:cNvSpPr>
+          <p:nvPr>
+            <p:ph type="title" idx="4294967295"/>
+          </p:nvPr>
+        </p:nvSpPr>
+        <p:spPr>
+          <a:xfrm>
+            <a:off x="114551" y="221488"/>
+            <a:ext cx="3985335" cy="234680"/>
+          </a:xfrm>
+          <a:prstGeom prst="rect">
+            <a:avLst/>
+          </a:prstGeom>
+        </p:spPr>
+        <p:txBody>
+          <a:bodyPr/>
+          <a:lstStyle/>
+          <a:p>
+            <a:endParaRPr lang="en-US" sz="1000" dirty="0">
+              <a:latin typeface="Pangolin" panose="00000500000000000000" pitchFamily="2" charset="0"/>
+            </a:endParaRPr>
+          </a:p>
+        </p:txBody>
+      </p:sp>
+      <p:sp>
+        <p:nvSpPr>
+          <p:cNvPr id="5" name="Rechteck 2">
+            <a:extLst>
+              <a:ext uri="{FF2B5EF4-FFF2-40B4-BE49-F238E27FC236}">
+                <a16:creationId xmlns:a16="http://schemas.microsoft.com/office/drawing/2014/main" id="{F435C4AC-76DD-8EBC-E6B8-C2FDBB20C20C}"/>
+              </a:ext>
+              <a:ext uri="{C183D7F6-B498-43B3-948B-1728B52AA6E4}">
+                <adec:decorative xmlns:adec="http://schemas.microsoft.com/office/drawing/2017/decorative" val="1"/>
+              </a:ext>
+            </a:extLst>
+          </p:cNvPr>
+          <p:cNvSpPr/>
+          <p:nvPr/>
+        </p:nvSpPr>
+        <p:spPr>
+          <a:xfrm>
+            <a:off x="232306" y="549564"/>
+            <a:ext cx="6397094" cy="9123073"/>
+          </a:xfrm>
+          <a:custGeom>
+            <a:avLst/>
+            <a:gdLst>
+              <a:gd name="csX0" fmla="*/ 0 w 6397094"/>
+              <a:gd name="csY0" fmla="*/ 0 h 9123073"/>
+              <a:gd name="csX1" fmla="*/ 575738 w 6397094"/>
+              <a:gd name="csY1" fmla="*/ 0 h 9123073"/>
+              <a:gd name="csX2" fmla="*/ 1087506 w 6397094"/>
+              <a:gd name="csY2" fmla="*/ 0 h 9123073"/>
+              <a:gd name="csX3" fmla="*/ 1727215 w 6397094"/>
+              <a:gd name="csY3" fmla="*/ 0 h 9123073"/>
+              <a:gd name="csX4" fmla="*/ 2494867 w 6397094"/>
+              <a:gd name="csY4" fmla="*/ 0 h 9123073"/>
+              <a:gd name="csX5" fmla="*/ 3070605 w 6397094"/>
+              <a:gd name="csY5" fmla="*/ 0 h 9123073"/>
+              <a:gd name="csX6" fmla="*/ 3518402 w 6397094"/>
+              <a:gd name="csY6" fmla="*/ 0 h 9123073"/>
+              <a:gd name="csX7" fmla="*/ 4158111 w 6397094"/>
+              <a:gd name="csY7" fmla="*/ 0 h 9123073"/>
+              <a:gd name="csX8" fmla="*/ 4733850 w 6397094"/>
+              <a:gd name="csY8" fmla="*/ 0 h 9123073"/>
+              <a:gd name="csX9" fmla="*/ 5437530 w 6397094"/>
+              <a:gd name="csY9" fmla="*/ 0 h 9123073"/>
+              <a:gd name="csX10" fmla="*/ 6397094 w 6397094"/>
+              <a:gd name="csY10" fmla="*/ 0 h 9123073"/>
+              <a:gd name="csX11" fmla="*/ 6397094 w 6397094"/>
+              <a:gd name="csY11" fmla="*/ 377956 h 9123073"/>
+              <a:gd name="csX12" fmla="*/ 6397094 w 6397094"/>
+              <a:gd name="csY12" fmla="*/ 938373 h 9123073"/>
+              <a:gd name="csX13" fmla="*/ 6397094 w 6397094"/>
+              <a:gd name="csY13" fmla="*/ 1590021 h 9123073"/>
+              <a:gd name="csX14" fmla="*/ 6397094 w 6397094"/>
+              <a:gd name="csY14" fmla="*/ 2241669 h 9123073"/>
+              <a:gd name="csX15" fmla="*/ 6397094 w 6397094"/>
+              <a:gd name="csY15" fmla="*/ 2710856 h 9123073"/>
+              <a:gd name="csX16" fmla="*/ 6397094 w 6397094"/>
+              <a:gd name="csY16" fmla="*/ 3544966 h 9123073"/>
+              <a:gd name="csX17" fmla="*/ 6397094 w 6397094"/>
+              <a:gd name="csY17" fmla="*/ 4379075 h 9123073"/>
+              <a:gd name="csX18" fmla="*/ 6397094 w 6397094"/>
+              <a:gd name="csY18" fmla="*/ 5213185 h 9123073"/>
+              <a:gd name="csX19" fmla="*/ 6397094 w 6397094"/>
+              <a:gd name="csY19" fmla="*/ 5956063 h 9123073"/>
+              <a:gd name="csX20" fmla="*/ 6397094 w 6397094"/>
+              <a:gd name="csY20" fmla="*/ 6698942 h 9123073"/>
+              <a:gd name="csX21" fmla="*/ 6397094 w 6397094"/>
+              <a:gd name="csY21" fmla="*/ 7441821 h 9123073"/>
+              <a:gd name="csX22" fmla="*/ 6397094 w 6397094"/>
+              <a:gd name="csY22" fmla="*/ 8002238 h 9123073"/>
+              <a:gd name="csX23" fmla="*/ 6397094 w 6397094"/>
+              <a:gd name="csY23" fmla="*/ 8471425 h 9123073"/>
+              <a:gd name="csX24" fmla="*/ 6397094 w 6397094"/>
+              <a:gd name="csY24" fmla="*/ 9123073 h 9123073"/>
+              <a:gd name="csX25" fmla="*/ 5821356 w 6397094"/>
+              <a:gd name="csY25" fmla="*/ 9123073 h 9123073"/>
+              <a:gd name="csX26" fmla="*/ 5245617 w 6397094"/>
+              <a:gd name="csY26" fmla="*/ 9123073 h 9123073"/>
+              <a:gd name="csX27" fmla="*/ 4605908 w 6397094"/>
+              <a:gd name="csY27" fmla="*/ 9123073 h 9123073"/>
+              <a:gd name="csX28" fmla="*/ 3966198 w 6397094"/>
+              <a:gd name="csY28" fmla="*/ 9123073 h 9123073"/>
+              <a:gd name="csX29" fmla="*/ 3454431 w 6397094"/>
+              <a:gd name="csY29" fmla="*/ 9123073 h 9123073"/>
+              <a:gd name="csX30" fmla="*/ 3006634 w 6397094"/>
+              <a:gd name="csY30" fmla="*/ 9123073 h 9123073"/>
+              <a:gd name="csX31" fmla="*/ 2430896 w 6397094"/>
+              <a:gd name="csY31" fmla="*/ 9123073 h 9123073"/>
+              <a:gd name="csX32" fmla="*/ 1791186 w 6397094"/>
+              <a:gd name="csY32" fmla="*/ 9123073 h 9123073"/>
+              <a:gd name="csX33" fmla="*/ 1343390 w 6397094"/>
+              <a:gd name="csY33" fmla="*/ 9123073 h 9123073"/>
+              <a:gd name="csX34" fmla="*/ 639709 w 6397094"/>
+              <a:gd name="csY34" fmla="*/ 9123073 h 9123073"/>
+              <a:gd name="csX35" fmla="*/ 0 w 6397094"/>
+              <a:gd name="csY35" fmla="*/ 9123073 h 9123073"/>
+              <a:gd name="csX36" fmla="*/ 0 w 6397094"/>
+              <a:gd name="csY36" fmla="*/ 8288963 h 9123073"/>
+              <a:gd name="csX37" fmla="*/ 0 w 6397094"/>
+              <a:gd name="csY37" fmla="*/ 7819777 h 9123073"/>
+              <a:gd name="csX38" fmla="*/ 0 w 6397094"/>
+              <a:gd name="csY38" fmla="*/ 7350590 h 9123073"/>
+              <a:gd name="csX39" fmla="*/ 0 w 6397094"/>
+              <a:gd name="csY39" fmla="*/ 6881404 h 9123073"/>
+              <a:gd name="csX40" fmla="*/ 0 w 6397094"/>
+              <a:gd name="csY40" fmla="*/ 6503448 h 9123073"/>
+              <a:gd name="csX41" fmla="*/ 0 w 6397094"/>
+              <a:gd name="csY41" fmla="*/ 5760569 h 9123073"/>
+              <a:gd name="csX42" fmla="*/ 0 w 6397094"/>
+              <a:gd name="csY42" fmla="*/ 5017690 h 9123073"/>
+              <a:gd name="csX43" fmla="*/ 0 w 6397094"/>
+              <a:gd name="csY43" fmla="*/ 4274811 h 9123073"/>
+              <a:gd name="csX44" fmla="*/ 0 w 6397094"/>
+              <a:gd name="csY44" fmla="*/ 3805625 h 9123073"/>
+              <a:gd name="csX45" fmla="*/ 0 w 6397094"/>
+              <a:gd name="csY45" fmla="*/ 3427669 h 9123073"/>
+              <a:gd name="csX46" fmla="*/ 0 w 6397094"/>
+              <a:gd name="csY46" fmla="*/ 3049713 h 9123073"/>
+              <a:gd name="csX47" fmla="*/ 0 w 6397094"/>
+              <a:gd name="csY47" fmla="*/ 2580526 h 9123073"/>
+              <a:gd name="csX48" fmla="*/ 0 w 6397094"/>
+              <a:gd name="csY48" fmla="*/ 2202570 h 9123073"/>
+              <a:gd name="csX49" fmla="*/ 0 w 6397094"/>
+              <a:gd name="csY49" fmla="*/ 1642153 h 9123073"/>
+              <a:gd name="csX50" fmla="*/ 0 w 6397094"/>
+              <a:gd name="csY50" fmla="*/ 1172967 h 9123073"/>
+              <a:gd name="csX51" fmla="*/ 0 w 6397094"/>
+              <a:gd name="csY51" fmla="*/ 703780 h 9123073"/>
+              <a:gd name="csX52" fmla="*/ 0 w 6397094"/>
+              <a:gd name="csY52" fmla="*/ 0 h 9123073"/>
+            </a:gdLst>
+            <a:ahLst/>
+            <a:cxnLst>
+              <a:cxn ang="0">
+                <a:pos x="csX0" y="csY0"/>
+              </a:cxn>
+              <a:cxn ang="0">
+                <a:pos x="csX1" y="csY1"/>
+              </a:cxn>
+              <a:cxn ang="0">
+                <a:pos x="csX2" y="csY2"/>
+              </a:cxn>
+              <a:cxn ang="0">
+                <a:pos x="csX3" y="csY3"/>
+              </a:cxn>
+              <a:cxn ang="0">
+                <a:pos x="csX4" y="csY4"/>
+              </a:cxn>
+              <a:cxn ang="0">
+                <a:pos x="csX5" y="csY5"/>
+              </a:cxn>
+              <a:cxn ang="0">
+                <a:pos x="csX6" y="csY6"/>
+              </a:cxn>
+              <a:cxn ang="0">
+                <a:pos x="csX7" y="csY7"/>
+              </a:cxn>
+              <a:cxn ang="0">
+                <a:pos x="csX8" y="csY8"/>
+              </a:cxn>
+              <a:cxn ang="0">
+                <a:pos x="csX9" y="csY9"/>
+              </a:cxn>
+              <a:cxn ang="0">
+                <a:pos x="csX10" y="csY10"/>
+              </a:cxn>
+              <a:cxn ang="0">
+                <a:pos x="csX11" y="csY11"/>
+              </a:cxn>
+              <a:cxn ang="0">
+                <a:pos x="csX12" y="csY12"/>
+              </a:cxn>
+              <a:cxn ang="0">
+                <a:pos x="csX13" y="csY13"/>
+              </a:cxn>
+              <a:cxn ang="0">
+                <a:pos x="csX14" y="csY14"/>
+              </a:cxn>
+              <a:cxn ang="0">
+                <a:pos x="csX15" y="csY15"/>
+              </a:cxn>
+              <a:cxn ang="0">
+                <a:pos x="csX16" y="csY16"/>
+              </a:cxn>
+              <a:cxn ang="0">
+                <a:pos x="csX17" y="csY17"/>
+              </a:cxn>
+              <a:cxn ang="0">
+                <a:pos x="csX18" y="csY18"/>
+              </a:cxn>
+              <a:cxn ang="0">
+                <a:pos x="csX19" y="csY19"/>
+              </a:cxn>
+              <a:cxn ang="0">
+                <a:pos x="csX20" y="csY20"/>
+              </a:cxn>
+              <a:cxn ang="0">
+                <a:pos x="csX21" y="csY21"/>
+              </a:cxn>
+              <a:cxn ang="0">
+                <a:pos x="csX22" y="csY22"/>
+              </a:cxn>
+              <a:cxn ang="0">
+                <a:pos x="csX23" y="csY23"/>
+              </a:cxn>
+              <a:cxn ang="0">
+                <a:pos x="csX24" y="csY24"/>
+              </a:cxn>
+              <a:cxn ang="0">
+                <a:pos x="csX25" y="csY25"/>
+              </a:cxn>
+              <a:cxn ang="0">
+                <a:pos x="csX26" y="csY26"/>
+              </a:cxn>
+              <a:cxn ang="0">
+                <a:pos x="csX27" y="csY27"/>
+              </a:cxn>
+              <a:cxn ang="0">
+                <a:pos x="csX28" y="csY28"/>
+              </a:cxn>
+              <a:cxn ang="0">
+                <a:pos x="csX29" y="csY29"/>
+              </a:cxn>
+              <a:cxn ang="0">
+                <a:pos x="csX30" y="csY30"/>
+              </a:cxn>
+              <a:cxn ang="0">
+                <a:pos x="csX31" y="csY31"/>
+              </a:cxn>
+              <a:cxn ang="0">
+                <a:pos x="csX32" y="csY32"/>
+              </a:cxn>
+              <a:cxn ang="0">
+                <a:pos x="csX33" y="csY33"/>
+              </a:cxn>
+              <a:cxn ang="0">
+                <a:pos x="csX34" y="csY34"/>
+              </a:cxn>
+              <a:cxn ang="0">
+                <a:pos x="csX35" y="csY35"/>
+              </a:cxn>
+              <a:cxn ang="0">
+                <a:pos x="csX36" y="csY36"/>
+              </a:cxn>
+              <a:cxn ang="0">
+                <a:pos x="csX37" y="csY37"/>
+              </a:cxn>
+              <a:cxn ang="0">
+                <a:pos x="csX38" y="csY38"/>
+              </a:cxn>
+              <a:cxn ang="0">
+                <a:pos x="csX39" y="csY39"/>
+              </a:cxn>
+              <a:cxn ang="0">
+                <a:pos x="csX40" y="csY40"/>
+              </a:cxn>
+              <a:cxn ang="0">
+                <a:pos x="csX41" y="csY41"/>
+              </a:cxn>
+              <a:cxn ang="0">
+                <a:pos x="csX42" y="csY42"/>
+              </a:cxn>
+              <a:cxn ang="0">
+                <a:pos x="csX43" y="csY43"/>
+              </a:cxn>
+              <a:cxn ang="0">
+                <a:pos x="csX44" y="csY44"/>
+              </a:cxn>
+              <a:cxn ang="0">
+                <a:pos x="csX45" y="csY45"/>
+              </a:cxn>
+              <a:cxn ang="0">
+                <a:pos x="csX46" y="csY46"/>
+              </a:cxn>
+              <a:cxn ang="0">
+                <a:pos x="csX47" y="csY47"/>
+              </a:cxn>
+              <a:cxn ang="0">
+                <a:pos x="csX48" y="csY48"/>
+              </a:cxn>
+              <a:cxn ang="0">
+                <a:pos x="csX49" y="csY49"/>
+              </a:cxn>
+              <a:cxn ang="0">
+                <a:pos x="csX50" y="csY50"/>
+              </a:cxn>
+              <a:cxn ang="0">
+                <a:pos x="csX51" y="csY51"/>
+              </a:cxn>
+              <a:cxn ang="0">
+                <a:pos x="csX52" y="csY52"/>
+              </a:cxn>
+            </a:cxnLst>
+            <a:rect l="l" t="t" r="r" b="b"/>
+            <a:pathLst>
+              <a:path w="6397094" h="9123073" fill="none" extrusionOk="0">
+                <a:moveTo>
+                  <a:pt x="0" y="0"/>
+                </a:moveTo>
+                <a:cubicBezTo>
+                  <a:pt x="216278" y="-18822"/>
+                  <a:pt x="388853" y="2676"/>
+                  <a:pt x="575738" y="0"/>
+                </a:cubicBezTo>
+                <a:cubicBezTo>
+                  <a:pt x="762623" y="-2676"/>
+                  <a:pt x="971628" y="22691"/>
+                  <a:pt x="1087506" y="0"/>
+                </a:cubicBezTo>
+                <a:cubicBezTo>
+                  <a:pt x="1203384" y="-22691"/>
+                  <a:pt x="1463955" y="-9562"/>
+                  <a:pt x="1727215" y="0"/>
+                </a:cubicBezTo>
+                <a:cubicBezTo>
+                  <a:pt x="1990475" y="9562"/>
+                  <a:pt x="2256857" y="5817"/>
+                  <a:pt x="2494867" y="0"/>
+                </a:cubicBezTo>
+                <a:cubicBezTo>
+                  <a:pt x="2732877" y="-5817"/>
+                  <a:pt x="2931471" y="20548"/>
+                  <a:pt x="3070605" y="0"/>
+                </a:cubicBezTo>
+                <a:cubicBezTo>
+                  <a:pt x="3209739" y="-20548"/>
+                  <a:pt x="3305849" y="11437"/>
+                  <a:pt x="3518402" y="0"/>
+                </a:cubicBezTo>
+                <a:cubicBezTo>
+                  <a:pt x="3730955" y="-11437"/>
+                  <a:pt x="4018443" y="18493"/>
+                  <a:pt x="4158111" y="0"/>
+                </a:cubicBezTo>
+                <a:cubicBezTo>
+                  <a:pt x="4297779" y="-18493"/>
+                  <a:pt x="4461033" y="-9061"/>
+                  <a:pt x="4733850" y="0"/>
+                </a:cubicBezTo>
+                <a:cubicBezTo>
+                  <a:pt x="5006667" y="9061"/>
+                  <a:pt x="5223635" y="24578"/>
+                  <a:pt x="5437530" y="0"/>
+                </a:cubicBezTo>
+                <a:cubicBezTo>
+                  <a:pt x="5651425" y="-24578"/>
+                  <a:pt x="5968179" y="34593"/>
+                  <a:pt x="6397094" y="0"/>
+                </a:cubicBezTo>
+                <a:cubicBezTo>
+                  <a:pt x="6394579" y="88539"/>
+                  <a:pt x="6407492" y="235144"/>
+                  <a:pt x="6397094" y="377956"/>
+                </a:cubicBezTo>
+                <a:cubicBezTo>
+                  <a:pt x="6386696" y="520768"/>
+                  <a:pt x="6416225" y="665829"/>
+                  <a:pt x="6397094" y="938373"/>
+                </a:cubicBezTo>
+                <a:cubicBezTo>
+                  <a:pt x="6377963" y="1210917"/>
+                  <a:pt x="6390171" y="1362417"/>
+                  <a:pt x="6397094" y="1590021"/>
+                </a:cubicBezTo>
+                <a:cubicBezTo>
+                  <a:pt x="6404017" y="1817625"/>
+                  <a:pt x="6389713" y="2095266"/>
+                  <a:pt x="6397094" y="2241669"/>
+                </a:cubicBezTo>
+                <a:cubicBezTo>
+                  <a:pt x="6404475" y="2388072"/>
+                  <a:pt x="6403939" y="2550971"/>
+                  <a:pt x="6397094" y="2710856"/>
+                </a:cubicBezTo>
+                <a:cubicBezTo>
+                  <a:pt x="6390249" y="2870741"/>
+                  <a:pt x="6393858" y="3361150"/>
+                  <a:pt x="6397094" y="3544966"/>
+                </a:cubicBezTo>
+                <a:cubicBezTo>
+                  <a:pt x="6400331" y="3728782"/>
+                  <a:pt x="6378754" y="4054786"/>
+                  <a:pt x="6397094" y="4379075"/>
+                </a:cubicBezTo>
+                <a:cubicBezTo>
+                  <a:pt x="6415434" y="4703364"/>
+                  <a:pt x="6434581" y="4871397"/>
+                  <a:pt x="6397094" y="5213185"/>
+                </a:cubicBezTo>
+                <a:cubicBezTo>
+                  <a:pt x="6359608" y="5554973"/>
+                  <a:pt x="6382540" y="5806200"/>
+                  <a:pt x="6397094" y="5956063"/>
+                </a:cubicBezTo>
+                <a:cubicBezTo>
+                  <a:pt x="6411648" y="6105926"/>
+                  <a:pt x="6426518" y="6481783"/>
+                  <a:pt x="6397094" y="6698942"/>
+                </a:cubicBezTo>
+                <a:cubicBezTo>
+                  <a:pt x="6367670" y="6916101"/>
+                  <a:pt x="6380355" y="7255944"/>
+                  <a:pt x="6397094" y="7441821"/>
+                </a:cubicBezTo>
+                <a:cubicBezTo>
+                  <a:pt x="6413833" y="7627698"/>
+                  <a:pt x="6416374" y="7844131"/>
+                  <a:pt x="6397094" y="8002238"/>
+                </a:cubicBezTo>
+                <a:cubicBezTo>
+                  <a:pt x="6377814" y="8160345"/>
+                  <a:pt x="6376961" y="8354778"/>
+                  <a:pt x="6397094" y="8471425"/>
+                </a:cubicBezTo>
+                <a:cubicBezTo>
+                  <a:pt x="6417227" y="8588072"/>
+                  <a:pt x="6378219" y="8883339"/>
+                  <a:pt x="6397094" y="9123073"/>
+                </a:cubicBezTo>
+                <a:cubicBezTo>
+                  <a:pt x="6195245" y="9131862"/>
+                  <a:pt x="6081239" y="9115532"/>
+                  <a:pt x="5821356" y="9123073"/>
+                </a:cubicBezTo>
+                <a:cubicBezTo>
+                  <a:pt x="5561473" y="9130614"/>
+                  <a:pt x="5480211" y="9149162"/>
+                  <a:pt x="5245617" y="9123073"/>
+                </a:cubicBezTo>
+                <a:cubicBezTo>
+                  <a:pt x="5011023" y="9096984"/>
+                  <a:pt x="4760920" y="9110894"/>
+                  <a:pt x="4605908" y="9123073"/>
+                </a:cubicBezTo>
+                <a:cubicBezTo>
+                  <a:pt x="4450896" y="9135252"/>
+                  <a:pt x="4256682" y="9111265"/>
+                  <a:pt x="3966198" y="9123073"/>
+                </a:cubicBezTo>
+                <a:cubicBezTo>
+                  <a:pt x="3675714" y="9134882"/>
+                  <a:pt x="3706150" y="9145056"/>
+                  <a:pt x="3454431" y="9123073"/>
+                </a:cubicBezTo>
+                <a:cubicBezTo>
+                  <a:pt x="3202712" y="9101090"/>
+                  <a:pt x="3143615" y="9127098"/>
+                  <a:pt x="3006634" y="9123073"/>
+                </a:cubicBezTo>
+                <a:cubicBezTo>
+                  <a:pt x="2869653" y="9119048"/>
+                  <a:pt x="2546775" y="9138428"/>
+                  <a:pt x="2430896" y="9123073"/>
+                </a:cubicBezTo>
+                <a:cubicBezTo>
+                  <a:pt x="2315017" y="9107718"/>
+                  <a:pt x="2031624" y="9135938"/>
+                  <a:pt x="1791186" y="9123073"/>
+                </a:cubicBezTo>
+                <a:cubicBezTo>
+                  <a:pt x="1550748" y="9110209"/>
+                  <a:pt x="1447073" y="9123334"/>
+                  <a:pt x="1343390" y="9123073"/>
+                </a:cubicBezTo>
+                <a:cubicBezTo>
+                  <a:pt x="1239707" y="9122812"/>
+                  <a:pt x="959990" y="9104295"/>
+                  <a:pt x="639709" y="9123073"/>
+                </a:cubicBezTo>
+                <a:cubicBezTo>
+                  <a:pt x="319428" y="9141851"/>
+                  <a:pt x="204555" y="9120649"/>
+                  <a:pt x="0" y="9123073"/>
+                </a:cubicBezTo>
+                <a:cubicBezTo>
+                  <a:pt x="9873" y="8752443"/>
+                  <a:pt x="-31180" y="8572995"/>
+                  <a:pt x="0" y="8288963"/>
+                </a:cubicBezTo>
+                <a:cubicBezTo>
+                  <a:pt x="31180" y="8004931"/>
+                  <a:pt x="10221" y="7984440"/>
+                  <a:pt x="0" y="7819777"/>
+                </a:cubicBezTo>
+                <a:cubicBezTo>
+                  <a:pt x="-10221" y="7655114"/>
+                  <a:pt x="11573" y="7528162"/>
+                  <a:pt x="0" y="7350590"/>
+                </a:cubicBezTo>
+                <a:cubicBezTo>
+                  <a:pt x="-11573" y="7173018"/>
+                  <a:pt x="-4590" y="7108084"/>
+                  <a:pt x="0" y="6881404"/>
+                </a:cubicBezTo>
+                <a:cubicBezTo>
+                  <a:pt x="4590" y="6654724"/>
+                  <a:pt x="16326" y="6650481"/>
+                  <a:pt x="0" y="6503448"/>
+                </a:cubicBezTo>
+                <a:cubicBezTo>
+                  <a:pt x="-16326" y="6356415"/>
+                  <a:pt x="36566" y="6019256"/>
+                  <a:pt x="0" y="5760569"/>
+                </a:cubicBezTo>
+                <a:cubicBezTo>
+                  <a:pt x="-36566" y="5501882"/>
+                  <a:pt x="28459" y="5200297"/>
+                  <a:pt x="0" y="5017690"/>
+                </a:cubicBezTo>
+                <a:cubicBezTo>
+                  <a:pt x="-28459" y="4835083"/>
+                  <a:pt x="-30194" y="4522426"/>
+                  <a:pt x="0" y="4274811"/>
+                </a:cubicBezTo>
+                <a:cubicBezTo>
+                  <a:pt x="30194" y="4027196"/>
+                  <a:pt x="12419" y="3989952"/>
+                  <a:pt x="0" y="3805625"/>
+                </a:cubicBezTo>
+                <a:cubicBezTo>
+                  <a:pt x="-12419" y="3621298"/>
+                  <a:pt x="4377" y="3540700"/>
+                  <a:pt x="0" y="3427669"/>
+                </a:cubicBezTo>
+                <a:cubicBezTo>
+                  <a:pt x="-4377" y="3314638"/>
+                  <a:pt x="12379" y="3158491"/>
+                  <a:pt x="0" y="3049713"/>
+                </a:cubicBezTo>
+                <a:cubicBezTo>
+                  <a:pt x="-12379" y="2940935"/>
+                  <a:pt x="9067" y="2783688"/>
+                  <a:pt x="0" y="2580526"/>
+                </a:cubicBezTo>
+                <a:cubicBezTo>
+                  <a:pt x="-9067" y="2377364"/>
+                  <a:pt x="18511" y="2337340"/>
+                  <a:pt x="0" y="2202570"/>
+                </a:cubicBezTo>
+                <a:cubicBezTo>
+                  <a:pt x="-18511" y="2067800"/>
+                  <a:pt x="-6774" y="1873791"/>
+                  <a:pt x="0" y="1642153"/>
+                </a:cubicBezTo>
+                <a:cubicBezTo>
+                  <a:pt x="6774" y="1410515"/>
+                  <a:pt x="-21403" y="1288706"/>
+                  <a:pt x="0" y="1172967"/>
+                </a:cubicBezTo>
+                <a:cubicBezTo>
+                  <a:pt x="21403" y="1057228"/>
+                  <a:pt x="-13781" y="861889"/>
+                  <a:pt x="0" y="703780"/>
+                </a:cubicBezTo>
+                <a:cubicBezTo>
+                  <a:pt x="13781" y="545671"/>
+                  <a:pt x="-23967" y="282502"/>
+                  <a:pt x="0" y="0"/>
+                </a:cubicBezTo>
+                <a:close/>
+              </a:path>
+              <a:path w="6397094" h="9123073" stroke="0" extrusionOk="0">
+                <a:moveTo>
+                  <a:pt x="0" y="0"/>
+                </a:moveTo>
+                <a:cubicBezTo>
+                  <a:pt x="197254" y="-18887"/>
+                  <a:pt x="267580" y="13563"/>
+                  <a:pt x="447797" y="0"/>
+                </a:cubicBezTo>
+                <a:cubicBezTo>
+                  <a:pt x="628014" y="-13563"/>
+                  <a:pt x="822131" y="17334"/>
+                  <a:pt x="959564" y="0"/>
+                </a:cubicBezTo>
+                <a:cubicBezTo>
+                  <a:pt x="1096997" y="-17334"/>
+                  <a:pt x="1394504" y="-6930"/>
+                  <a:pt x="1599274" y="0"/>
+                </a:cubicBezTo>
+                <a:cubicBezTo>
+                  <a:pt x="1804044" y="6930"/>
+                  <a:pt x="1917769" y="-246"/>
+                  <a:pt x="2175012" y="0"/>
+                </a:cubicBezTo>
+                <a:cubicBezTo>
+                  <a:pt x="2432255" y="246"/>
+                  <a:pt x="2577734" y="-20548"/>
+                  <a:pt x="2686779" y="0"/>
+                </a:cubicBezTo>
+                <a:cubicBezTo>
+                  <a:pt x="2795824" y="20548"/>
+                  <a:pt x="3130776" y="-7173"/>
+                  <a:pt x="3390460" y="0"/>
+                </a:cubicBezTo>
+                <a:cubicBezTo>
+                  <a:pt x="3650144" y="7173"/>
+                  <a:pt x="3911907" y="27565"/>
+                  <a:pt x="4094140" y="0"/>
+                </a:cubicBezTo>
+                <a:cubicBezTo>
+                  <a:pt x="4276373" y="-27565"/>
+                  <a:pt x="4512465" y="18582"/>
+                  <a:pt x="4861791" y="0"/>
+                </a:cubicBezTo>
+                <a:cubicBezTo>
+                  <a:pt x="5211117" y="-18582"/>
+                  <a:pt x="5202306" y="11588"/>
+                  <a:pt x="5437530" y="0"/>
+                </a:cubicBezTo>
+                <a:cubicBezTo>
+                  <a:pt x="5672754" y="-11588"/>
+                  <a:pt x="6140681" y="-15094"/>
+                  <a:pt x="6397094" y="0"/>
+                </a:cubicBezTo>
+                <a:cubicBezTo>
+                  <a:pt x="6370087" y="252886"/>
+                  <a:pt x="6421018" y="336239"/>
+                  <a:pt x="6397094" y="651648"/>
+                </a:cubicBezTo>
+                <a:cubicBezTo>
+                  <a:pt x="6373170" y="967057"/>
+                  <a:pt x="6408868" y="927164"/>
+                  <a:pt x="6397094" y="1029604"/>
+                </a:cubicBezTo>
+                <a:cubicBezTo>
+                  <a:pt x="6385320" y="1132044"/>
+                  <a:pt x="6361413" y="1666233"/>
+                  <a:pt x="6397094" y="1863713"/>
+                </a:cubicBezTo>
+                <a:cubicBezTo>
+                  <a:pt x="6432775" y="2061193"/>
+                  <a:pt x="6397381" y="2140488"/>
+                  <a:pt x="6397094" y="2241669"/>
+                </a:cubicBezTo>
+                <a:cubicBezTo>
+                  <a:pt x="6396807" y="2342850"/>
+                  <a:pt x="6399277" y="2637970"/>
+                  <a:pt x="6397094" y="2802087"/>
+                </a:cubicBezTo>
+                <a:cubicBezTo>
+                  <a:pt x="6394911" y="2966204"/>
+                  <a:pt x="6396408" y="3060995"/>
+                  <a:pt x="6397094" y="3180043"/>
+                </a:cubicBezTo>
+                <a:cubicBezTo>
+                  <a:pt x="6397780" y="3299091"/>
+                  <a:pt x="6413650" y="3551514"/>
+                  <a:pt x="6397094" y="3831691"/>
+                </a:cubicBezTo>
+                <a:cubicBezTo>
+                  <a:pt x="6380538" y="4111868"/>
+                  <a:pt x="6419954" y="4381555"/>
+                  <a:pt x="6397094" y="4574569"/>
+                </a:cubicBezTo>
+                <a:cubicBezTo>
+                  <a:pt x="6374234" y="4767583"/>
+                  <a:pt x="6401461" y="5102870"/>
+                  <a:pt x="6397094" y="5317448"/>
+                </a:cubicBezTo>
+                <a:cubicBezTo>
+                  <a:pt x="6392727" y="5532026"/>
+                  <a:pt x="6392013" y="5549256"/>
+                  <a:pt x="6397094" y="5695404"/>
+                </a:cubicBezTo>
+                <a:cubicBezTo>
+                  <a:pt x="6402175" y="5841552"/>
+                  <a:pt x="6394538" y="6134224"/>
+                  <a:pt x="6397094" y="6255821"/>
+                </a:cubicBezTo>
+                <a:cubicBezTo>
+                  <a:pt x="6399650" y="6377418"/>
+                  <a:pt x="6369474" y="6782699"/>
+                  <a:pt x="6397094" y="6998700"/>
+                </a:cubicBezTo>
+                <a:cubicBezTo>
+                  <a:pt x="6424714" y="7214701"/>
+                  <a:pt x="6380138" y="7503996"/>
+                  <a:pt x="6397094" y="7741579"/>
+                </a:cubicBezTo>
+                <a:cubicBezTo>
+                  <a:pt x="6414050" y="7979162"/>
+                  <a:pt x="6364237" y="8664495"/>
+                  <a:pt x="6397094" y="9123073"/>
+                </a:cubicBezTo>
+                <a:cubicBezTo>
+                  <a:pt x="6118672" y="9124710"/>
+                  <a:pt x="5974471" y="9121269"/>
+                  <a:pt x="5821356" y="9123073"/>
+                </a:cubicBezTo>
+                <a:cubicBezTo>
+                  <a:pt x="5668241" y="9124877"/>
+                  <a:pt x="5477029" y="9145394"/>
+                  <a:pt x="5245617" y="9123073"/>
+                </a:cubicBezTo>
+                <a:cubicBezTo>
+                  <a:pt x="5014205" y="9100752"/>
+                  <a:pt x="4814523" y="9142909"/>
+                  <a:pt x="4669879" y="9123073"/>
+                </a:cubicBezTo>
+                <a:cubicBezTo>
+                  <a:pt x="4525235" y="9103237"/>
+                  <a:pt x="4214761" y="9138140"/>
+                  <a:pt x="3902227" y="9123073"/>
+                </a:cubicBezTo>
+                <a:cubicBezTo>
+                  <a:pt x="3589693" y="9108006"/>
+                  <a:pt x="3452993" y="9123062"/>
+                  <a:pt x="3262518" y="9123073"/>
+                </a:cubicBezTo>
+                <a:cubicBezTo>
+                  <a:pt x="3072043" y="9123084"/>
+                  <a:pt x="2706651" y="9130460"/>
+                  <a:pt x="2494867" y="9123073"/>
+                </a:cubicBezTo>
+                <a:cubicBezTo>
+                  <a:pt x="2283083" y="9115686"/>
+                  <a:pt x="2189324" y="9136494"/>
+                  <a:pt x="1983099" y="9123073"/>
+                </a:cubicBezTo>
+                <a:cubicBezTo>
+                  <a:pt x="1776874" y="9109652"/>
+                  <a:pt x="1499513" y="9152168"/>
+                  <a:pt x="1343390" y="9123073"/>
+                </a:cubicBezTo>
+                <a:cubicBezTo>
+                  <a:pt x="1187267" y="9093978"/>
+                  <a:pt x="776136" y="9148035"/>
+                  <a:pt x="575738" y="9123073"/>
+                </a:cubicBezTo>
+                <a:cubicBezTo>
+                  <a:pt x="375340" y="9098111"/>
+                  <a:pt x="204522" y="9148252"/>
+                  <a:pt x="0" y="9123073"/>
+                </a:cubicBezTo>
+                <a:cubicBezTo>
+                  <a:pt x="-29918" y="8911712"/>
+                  <a:pt x="10935" y="8671499"/>
+                  <a:pt x="0" y="8471425"/>
+                </a:cubicBezTo>
+                <a:cubicBezTo>
+                  <a:pt x="-10935" y="8271351"/>
+                  <a:pt x="37567" y="7990866"/>
+                  <a:pt x="0" y="7637315"/>
+                </a:cubicBezTo>
+                <a:cubicBezTo>
+                  <a:pt x="-37567" y="7283764"/>
+                  <a:pt x="-18763" y="7442440"/>
+                  <a:pt x="0" y="7259360"/>
+                </a:cubicBezTo>
+                <a:cubicBezTo>
+                  <a:pt x="18763" y="7076281"/>
+                  <a:pt x="-32217" y="6797013"/>
+                  <a:pt x="0" y="6516481"/>
+                </a:cubicBezTo>
+                <a:cubicBezTo>
+                  <a:pt x="32217" y="6235949"/>
+                  <a:pt x="-20353" y="6193545"/>
+                  <a:pt x="0" y="6047294"/>
+                </a:cubicBezTo>
+                <a:cubicBezTo>
+                  <a:pt x="20353" y="5901043"/>
+                  <a:pt x="-9765" y="5715415"/>
+                  <a:pt x="0" y="5395646"/>
+                </a:cubicBezTo>
+                <a:cubicBezTo>
+                  <a:pt x="9765" y="5075877"/>
+                  <a:pt x="-8029" y="5053356"/>
+                  <a:pt x="0" y="4926459"/>
+                </a:cubicBezTo>
+                <a:cubicBezTo>
+                  <a:pt x="8029" y="4799562"/>
+                  <a:pt x="-23839" y="4507975"/>
+                  <a:pt x="0" y="4183581"/>
+                </a:cubicBezTo>
+                <a:cubicBezTo>
+                  <a:pt x="23839" y="3859187"/>
+                  <a:pt x="8784" y="3769066"/>
+                  <a:pt x="0" y="3623163"/>
+                </a:cubicBezTo>
+                <a:cubicBezTo>
+                  <a:pt x="-8784" y="3477260"/>
+                  <a:pt x="24754" y="3109573"/>
+                  <a:pt x="0" y="2971515"/>
+                </a:cubicBezTo>
+                <a:cubicBezTo>
+                  <a:pt x="-24754" y="2833457"/>
+                  <a:pt x="15782" y="2729139"/>
+                  <a:pt x="0" y="2593559"/>
+                </a:cubicBezTo>
+                <a:cubicBezTo>
+                  <a:pt x="-15782" y="2457979"/>
+                  <a:pt x="15318" y="2322221"/>
+                  <a:pt x="0" y="2124373"/>
+                </a:cubicBezTo>
+                <a:cubicBezTo>
+                  <a:pt x="-15318" y="1926525"/>
+                  <a:pt x="-12201" y="1741632"/>
+                  <a:pt x="0" y="1472725"/>
+                </a:cubicBezTo>
+                <a:cubicBezTo>
+                  <a:pt x="12201" y="1203818"/>
+                  <a:pt x="-25697" y="1143180"/>
+                  <a:pt x="0" y="912307"/>
+                </a:cubicBezTo>
+                <a:cubicBezTo>
+                  <a:pt x="25697" y="681434"/>
+                  <a:pt x="40209" y="297595"/>
+                  <a:pt x="0" y="0"/>
+                </a:cubicBezTo>
+                <a:close/>
+              </a:path>
+            </a:pathLst>
+          </a:custGeom>
+          <a:solidFill>
+            <a:schemeClr val="bg1"/>
+          </a:solidFill>
+          <a:ln w="25400">
+            <a:solidFill>
+              <a:schemeClr val="tx1">
+                <a:lumMod val="95000"/>
+                <a:lumOff val="5000"/>
+              </a:schemeClr>
+            </a:solidFill>
+            <a:extLst>
+              <a:ext uri="{C807C97D-BFC1-408E-A445-0C87EB9F89A2}">
+                <ask:lineSketchStyleProps xmlns:ask="http://schemas.microsoft.com/office/drawing/2018/sketchyshapes" sd="1762638383">
+                  <a:prstGeom prst="rect">
+                    <a:avLst/>
+                  </a:prstGeom>
+                  <ask:type>
+                    <ask:lineSketchFreehand/>
+                  </ask:type>
+                </ask:lineSketchStyleProps>
+              </a:ext>
+            </a:extLst>
+          </a:ln>
+        </p:spPr>
+        <p:style>
+          <a:lnRef idx="2">
+            <a:schemeClr val="accent3">
+              <a:shade val="50000"/>
+            </a:schemeClr>
+          </a:lnRef>
+          <a:fillRef idx="1">
+            <a:schemeClr val="accent3"/>
+          </a:fillRef>
+          <a:effectRef idx="0">
+            <a:schemeClr val="accent3"/>
+          </a:effectRef>
+          <a:fontRef idx="minor">
+            <a:schemeClr val="lt1"/>
+          </a:fontRef>
+        </p:style>
+        <p:txBody>
+          <a:bodyPr rtlCol="0" anchor="ctr"/>
+          <a:lstStyle/>
+          <a:p>
+            <a:pPr algn="ctr"/>
+            <a:endParaRPr lang="de-AT"/>
+          </a:p>
+        </p:txBody>
+      </p:sp>
+      <p:sp>
+        <p:nvSpPr>
+          <p:cNvPr id="7" name="Rechteck 2">
+            <a:extLst>
+              <a:ext uri="{FF2B5EF4-FFF2-40B4-BE49-F238E27FC236}">
+                <a16:creationId xmlns:a16="http://schemas.microsoft.com/office/drawing/2014/main" id="{C262763A-6C3B-1812-1C7C-E12E8CC787BB}"/>
+              </a:ext>
+            </a:extLst>
+          </p:cNvPr>
+          <p:cNvSpPr/>
+          <p:nvPr/>
+        </p:nvSpPr>
+        <p:spPr>
+          <a:xfrm>
+            <a:off x="403784" y="669926"/>
+            <a:ext cx="3401733" cy="447674"/>
+          </a:xfrm>
+          <a:custGeom>
+            <a:avLst/>
+            <a:gdLst>
+              <a:gd name="csX0" fmla="*/ 0 w 3401733"/>
+              <a:gd name="csY0" fmla="*/ 0 h 447674"/>
+              <a:gd name="csX1" fmla="*/ 714364 w 3401733"/>
+              <a:gd name="csY1" fmla="*/ 0 h 447674"/>
+              <a:gd name="csX2" fmla="*/ 1292659 w 3401733"/>
+              <a:gd name="csY2" fmla="*/ 0 h 447674"/>
+              <a:gd name="csX3" fmla="*/ 1973005 w 3401733"/>
+              <a:gd name="csY3" fmla="*/ 0 h 447674"/>
+              <a:gd name="csX4" fmla="*/ 2687369 w 3401733"/>
+              <a:gd name="csY4" fmla="*/ 0 h 447674"/>
+              <a:gd name="csX5" fmla="*/ 3401733 w 3401733"/>
+              <a:gd name="csY5" fmla="*/ 0 h 447674"/>
+              <a:gd name="csX6" fmla="*/ 3401733 w 3401733"/>
+              <a:gd name="csY6" fmla="*/ 447674 h 447674"/>
+              <a:gd name="csX7" fmla="*/ 2823438 w 3401733"/>
+              <a:gd name="csY7" fmla="*/ 447674 h 447674"/>
+              <a:gd name="csX8" fmla="*/ 2211126 w 3401733"/>
+              <a:gd name="csY8" fmla="*/ 447674 h 447674"/>
+              <a:gd name="csX9" fmla="*/ 1598815 w 3401733"/>
+              <a:gd name="csY9" fmla="*/ 447674 h 447674"/>
+              <a:gd name="csX10" fmla="*/ 1020520 w 3401733"/>
+              <a:gd name="csY10" fmla="*/ 447674 h 447674"/>
+              <a:gd name="csX11" fmla="*/ 0 w 3401733"/>
+              <a:gd name="csY11" fmla="*/ 447674 h 447674"/>
+              <a:gd name="csX12" fmla="*/ 0 w 3401733"/>
+              <a:gd name="csY12" fmla="*/ 0 h 447674"/>
+            </a:gdLst>
+            <a:ahLst/>
+            <a:cxnLst>
+              <a:cxn ang="0">
+                <a:pos x="csX0" y="csY0"/>
+              </a:cxn>
+              <a:cxn ang="0">
+                <a:pos x="csX1" y="csY1"/>
+              </a:cxn>
+              <a:cxn ang="0">
+                <a:pos x="csX2" y="csY2"/>
+              </a:cxn>
+              <a:cxn ang="0">
+                <a:pos x="csX3" y="csY3"/>
+              </a:cxn>
+              <a:cxn ang="0">
+                <a:pos x="csX4" y="csY4"/>
+              </a:cxn>
+              <a:cxn ang="0">
+                <a:pos x="csX5" y="csY5"/>
+              </a:cxn>
+              <a:cxn ang="0">
+                <a:pos x="csX6" y="csY6"/>
+              </a:cxn>
+              <a:cxn ang="0">
+                <a:pos x="csX7" y="csY7"/>
+              </a:cxn>
+              <a:cxn ang="0">
+                <a:pos x="csX8" y="csY8"/>
+              </a:cxn>
+              <a:cxn ang="0">
+                <a:pos x="csX9" y="csY9"/>
+              </a:cxn>
+              <a:cxn ang="0">
+                <a:pos x="csX10" y="csY10"/>
+              </a:cxn>
+              <a:cxn ang="0">
+                <a:pos x="csX11" y="csY11"/>
+              </a:cxn>
+              <a:cxn ang="0">
+                <a:pos x="csX12" y="csY12"/>
+              </a:cxn>
+            </a:cxnLst>
+            <a:rect l="l" t="t" r="r" b="b"/>
+            <a:pathLst>
+              <a:path w="3401733" h="447674" fill="none" extrusionOk="0">
+                <a:moveTo>
+                  <a:pt x="0" y="0"/>
+                </a:moveTo>
+                <a:cubicBezTo>
+                  <a:pt x="302120" y="3179"/>
+                  <a:pt x="512713" y="-12242"/>
+                  <a:pt x="714364" y="0"/>
+                </a:cubicBezTo>
+                <a:cubicBezTo>
+                  <a:pt x="916015" y="12242"/>
+                  <a:pt x="1021432" y="7531"/>
+                  <a:pt x="1292659" y="0"/>
+                </a:cubicBezTo>
+                <a:cubicBezTo>
+                  <a:pt x="1563886" y="-7531"/>
+                  <a:pt x="1703407" y="30785"/>
+                  <a:pt x="1973005" y="0"/>
+                </a:cubicBezTo>
+                <a:cubicBezTo>
+                  <a:pt x="2242603" y="-30785"/>
+                  <a:pt x="2341039" y="-4048"/>
+                  <a:pt x="2687369" y="0"/>
+                </a:cubicBezTo>
+                <a:cubicBezTo>
+                  <a:pt x="3033699" y="4048"/>
+                  <a:pt x="3157434" y="22497"/>
+                  <a:pt x="3401733" y="0"/>
+                </a:cubicBezTo>
+                <a:cubicBezTo>
+                  <a:pt x="3401515" y="149421"/>
+                  <a:pt x="3422469" y="321181"/>
+                  <a:pt x="3401733" y="447674"/>
+                </a:cubicBezTo>
+                <a:cubicBezTo>
+                  <a:pt x="3217936" y="467898"/>
+                  <a:pt x="3047052" y="474158"/>
+                  <a:pt x="2823438" y="447674"/>
+                </a:cubicBezTo>
+                <a:cubicBezTo>
+                  <a:pt x="2599824" y="421190"/>
+                  <a:pt x="2340490" y="433513"/>
+                  <a:pt x="2211126" y="447674"/>
+                </a:cubicBezTo>
+                <a:cubicBezTo>
+                  <a:pt x="2081762" y="461835"/>
+                  <a:pt x="1853593" y="448774"/>
+                  <a:pt x="1598815" y="447674"/>
+                </a:cubicBezTo>
+                <a:cubicBezTo>
+                  <a:pt x="1344037" y="446574"/>
+                  <a:pt x="1184514" y="427711"/>
+                  <a:pt x="1020520" y="447674"/>
+                </a:cubicBezTo>
+                <a:cubicBezTo>
+                  <a:pt x="856526" y="467637"/>
+                  <a:pt x="430913" y="457891"/>
+                  <a:pt x="0" y="447674"/>
+                </a:cubicBezTo>
+                <a:cubicBezTo>
+                  <a:pt x="-21053" y="329391"/>
+                  <a:pt x="-594" y="169531"/>
+                  <a:pt x="0" y="0"/>
+                </a:cubicBezTo>
+                <a:close/>
+              </a:path>
+              <a:path w="3401733" h="447674" stroke="0" extrusionOk="0">
+                <a:moveTo>
+                  <a:pt x="0" y="0"/>
+                </a:moveTo>
+                <a:cubicBezTo>
+                  <a:pt x="262673" y="18055"/>
+                  <a:pt x="369283" y="-14567"/>
+                  <a:pt x="578295" y="0"/>
+                </a:cubicBezTo>
+                <a:cubicBezTo>
+                  <a:pt x="787307" y="14567"/>
+                  <a:pt x="945458" y="-7275"/>
+                  <a:pt x="1190607" y="0"/>
+                </a:cubicBezTo>
+                <a:cubicBezTo>
+                  <a:pt x="1435756" y="7275"/>
+                  <a:pt x="1676433" y="19152"/>
+                  <a:pt x="1870953" y="0"/>
+                </a:cubicBezTo>
+                <a:cubicBezTo>
+                  <a:pt x="2065473" y="-19152"/>
+                  <a:pt x="2226255" y="-14773"/>
+                  <a:pt x="2517282" y="0"/>
+                </a:cubicBezTo>
+                <a:cubicBezTo>
+                  <a:pt x="2808309" y="14773"/>
+                  <a:pt x="3038651" y="-41876"/>
+                  <a:pt x="3401733" y="0"/>
+                </a:cubicBezTo>
+                <a:cubicBezTo>
+                  <a:pt x="3388524" y="119632"/>
+                  <a:pt x="3406307" y="284989"/>
+                  <a:pt x="3401733" y="447674"/>
+                </a:cubicBezTo>
+                <a:cubicBezTo>
+                  <a:pt x="3270661" y="422383"/>
+                  <a:pt x="2956684" y="454147"/>
+                  <a:pt x="2789421" y="447674"/>
+                </a:cubicBezTo>
+                <a:cubicBezTo>
+                  <a:pt x="2622158" y="441201"/>
+                  <a:pt x="2283623" y="440441"/>
+                  <a:pt x="2143092" y="447674"/>
+                </a:cubicBezTo>
+                <a:cubicBezTo>
+                  <a:pt x="2002561" y="454907"/>
+                  <a:pt x="1851174" y="436774"/>
+                  <a:pt x="1564797" y="447674"/>
+                </a:cubicBezTo>
+                <a:cubicBezTo>
+                  <a:pt x="1278420" y="458574"/>
+                  <a:pt x="1244093" y="460849"/>
+                  <a:pt x="952485" y="447674"/>
+                </a:cubicBezTo>
+                <a:cubicBezTo>
+                  <a:pt x="660877" y="434499"/>
+                  <a:pt x="209066" y="458995"/>
+                  <a:pt x="0" y="447674"/>
+                </a:cubicBezTo>
+                <a:cubicBezTo>
+                  <a:pt x="828" y="249060"/>
+                  <a:pt x="-10661" y="124146"/>
+                  <a:pt x="0" y="0"/>
+                </a:cubicBezTo>
+                <a:close/>
+              </a:path>
+            </a:pathLst>
+          </a:custGeom>
+          <a:solidFill>
+            <a:schemeClr val="bg1"/>
+          </a:solidFill>
+          <a:ln w="25400">
+            <a:solidFill>
+              <a:schemeClr val="tx1">
+                <a:lumMod val="95000"/>
+                <a:lumOff val="5000"/>
+              </a:schemeClr>
+            </a:solidFill>
+            <a:extLst>
+              <a:ext uri="{C807C97D-BFC1-408E-A445-0C87EB9F89A2}">
+                <ask:lineSketchStyleProps xmlns:ask="http://schemas.microsoft.com/office/drawing/2018/sketchyshapes" sd="1762638383">
+                  <a:prstGeom prst="rect">
+                    <a:avLst/>
+                  </a:prstGeom>
+                  <ask:type>
+                    <ask:lineSketchFreehand/>
+                  </ask:type>
+                </ask:lineSketchStyleProps>
+              </a:ext>
+            </a:extLst>
+          </a:ln>
+        </p:spPr>
+        <p:style>
+          <a:lnRef idx="2">
+            <a:schemeClr val="accent3">
+              <a:shade val="50000"/>
+            </a:schemeClr>
+          </a:lnRef>
+          <a:fillRef idx="1">
+            <a:schemeClr val="accent3"/>
+          </a:fillRef>
+          <a:effectRef idx="0">
+            <a:schemeClr val="accent3"/>
+          </a:effectRef>
+          <a:fontRef idx="minor">
+            <a:schemeClr val="lt1"/>
+          </a:fontRef>
+        </p:style>
+        <p:txBody>
+          <a:bodyPr rtlCol="0" anchor="ctr"/>
+          <a:lstStyle/>
+          <a:p>
+            <a:pPr algn="ctr"/>
+            <a:r>
+              <a:rPr lang="de-DE" sz="1000" dirty="0">
+                <a:solidFill>
+                  <a:schemeClr val="tx1"/>
+                </a:solidFill>
+                <a:latin typeface="Pangolin" panose="00000500000000000000" pitchFamily="2" charset="0"/>
+              </a:rPr>
+              <a:t>You can take notes on this page!</a:t>
+            </a:r>
+            <a:endParaRPr lang="de-AT" sz="1000" dirty="0">
+              <a:solidFill>
+                <a:schemeClr val="tx1"/>
+              </a:solidFill>
+              <a:latin typeface="Pangolin" panose="00000500000000000000" pitchFamily="2" charset="0"/>
+            </a:endParaRPr>
+          </a:p>
+        </p:txBody>
+      </p:sp>
+      <p:pic>
+        <p:nvPicPr>
+          <p:cNvPr id="9" name="Grafik 4">
+            <a:extLst>
+              <a:ext uri="{FF2B5EF4-FFF2-40B4-BE49-F238E27FC236}">
+                <a16:creationId xmlns:a16="http://schemas.microsoft.com/office/drawing/2014/main" id="{B744471A-6F9E-6C5C-B103-F15415802752}"/>
+              </a:ext>
+              <a:ext uri="{C183D7F6-B498-43B3-948B-1728B52AA6E4}">
+                <adec:decorative xmlns:adec="http://schemas.microsoft.com/office/drawing/2017/decorative" val="1"/>
+              </a:ext>
+            </a:extLst>
+          </p:cNvPr>
+          <p:cNvPicPr>
+            <a:picLocks noChangeAspect="1"/>
+          </p:cNvPicPr>
+          <p:nvPr/>
+        </p:nvPicPr>
+        <p:blipFill>
+          <a:blip r:embed="rId2">
+            <a:extLst>
+              <a:ext uri="{28A0092B-C50C-407E-A947-70E740481C1C}">
+                <a14:useLocalDpi xmlns:a14="http://schemas.microsoft.com/office/drawing/2010/main" val="0"/>
+              </a:ext>
+            </a:extLst>
+          </a:blip>
+          <a:stretch>
+            <a:fillRect/>
+          </a:stretch>
+        </p:blipFill>
+        <p:spPr>
+          <a:xfrm>
+            <a:off x="304799" y="595700"/>
+            <a:ext cx="304801" cy="256033"/>
+          </a:xfrm>
+          <a:prstGeom prst="rect">
+            <a:avLst/>
+          </a:prstGeom>
+        </p:spPr>
+      </p:pic>
+    </p:spTree>
+    <p:extLst>
+      <p:ext uri="{BB962C8B-B14F-4D97-AF65-F5344CB8AC3E}">
+        <p14:creationId xmlns:p14="http://schemas.microsoft.com/office/powerpoint/2010/main" val="1375120078"/>
       </p:ext>
     </p:extLst>
   </p:cSld>
@@ -11119,26 +19417,6 @@
 </file>
 
 <file path=customXml/item1.xml><?xml version="1.0" encoding="utf-8"?>
-<?mso-contentType ?>
-<FormTemplates xmlns="http://schemas.microsoft.com/sharepoint/v3/contenttype/forms">
-  <Display>DocumentLibraryForm</Display>
-  <Edit>DocumentLibraryForm</Edit>
-  <New>DocumentLibraryForm</New>
-</FormTemplates>
-</file>
-
-<file path=customXml/item2.xml><?xml version="1.0" encoding="utf-8"?>
-<p:properties xmlns:p="http://schemas.microsoft.com/office/2006/metadata/properties" xmlns:xsi="http://www.w3.org/2001/XMLSchema-instance" xmlns:pc="http://schemas.microsoft.com/office/infopath/2007/PartnerControls">
-  <documentManagement>
-    <lcf76f155ced4ddcb4097134ff3c332f xmlns="da1b7603-f8b8-47c9-9682-dc6aa8e9acd7">
-      <Terms xmlns="http://schemas.microsoft.com/office/infopath/2007/PartnerControls"/>
-    </lcf76f155ced4ddcb4097134ff3c332f>
-    <TaxCatchAll xmlns="94bcf745-830c-42f4-885c-a1d7342e6e36" xsi:nil="true"/>
-  </documentManagement>
-</p:properties>
-</file>
-
-<file path=customXml/item3.xml><?xml version="1.0" encoding="utf-8"?>
 <ct:contentTypeSchema xmlns:ct="http://schemas.microsoft.com/office/2006/metadata/contentType" xmlns:ma="http://schemas.microsoft.com/office/2006/metadata/properties/metaAttributes" ct:_="" ma:_="" ma:contentTypeName="Document" ma:contentTypeID="0x0101009BF7B09DBF6D7B4DA35692C22AFAF86F" ma:contentTypeVersion="16" ma:contentTypeDescription="Create a new document." ma:contentTypeScope="" ma:versionID="a553d2f84db4c091a5493ef1916fe82f">
   <xsd:schema xmlns:xsd="http://www.w3.org/2001/XMLSchema" xmlns:xs="http://www.w3.org/2001/XMLSchema" xmlns:p="http://schemas.microsoft.com/office/2006/metadata/properties" xmlns:ns2="da1b7603-f8b8-47c9-9682-dc6aa8e9acd7" xmlns:ns3="94bcf745-830c-42f4-885c-a1d7342e6e36" targetNamespace="http://schemas.microsoft.com/office/2006/metadata/properties" ma:root="true" ma:fieldsID="665665ec797ffc185cafc5ee0cc7ff48" ns2:_="" ns3:_="">
     <xsd:import namespace="da1b7603-f8b8-47c9-9682-dc6aa8e9acd7"/>
@@ -11381,10 +19659,41 @@
 </ct:contentTypeSchema>
 </file>
 
+<file path=customXml/item2.xml><?xml version="1.0" encoding="utf-8"?>
+<p:properties xmlns:p="http://schemas.microsoft.com/office/2006/metadata/properties" xmlns:xsi="http://www.w3.org/2001/XMLSchema-instance" xmlns:pc="http://schemas.microsoft.com/office/infopath/2007/PartnerControls">
+  <documentManagement>
+    <lcf76f155ced4ddcb4097134ff3c332f xmlns="da1b7603-f8b8-47c9-9682-dc6aa8e9acd7">
+      <Terms xmlns="http://schemas.microsoft.com/office/infopath/2007/PartnerControls"/>
+    </lcf76f155ced4ddcb4097134ff3c332f>
+    <TaxCatchAll xmlns="94bcf745-830c-42f4-885c-a1d7342e6e36" xsi:nil="true"/>
+  </documentManagement>
+</p:properties>
+</file>
+
+<file path=customXml/item3.xml><?xml version="1.0" encoding="utf-8"?>
+<?mso-contentType ?>
+<FormTemplates xmlns="http://schemas.microsoft.com/sharepoint/v3/contenttype/forms">
+  <Display>DocumentLibraryForm</Display>
+  <Edit>DocumentLibraryForm</Edit>
+  <New>DocumentLibraryForm</New>
+</FormTemplates>
+</file>
+
 <file path=customXml/itemProps1.xml><?xml version="1.0" encoding="utf-8"?>
-<ds:datastoreItem xmlns:ds="http://schemas.openxmlformats.org/officeDocument/2006/customXml" ds:itemID="{329A8B4E-FDB2-442F-A1FE-63815B7A5BA7}">
+<ds:datastoreItem xmlns:ds="http://schemas.openxmlformats.org/officeDocument/2006/customXml" ds:itemID="{B4F426B3-7B89-4C59-B484-ECF81DDEA7A8}">
   <ds:schemaRefs>
-    <ds:schemaRef ds:uri="http://schemas.microsoft.com/sharepoint/v3/contenttype/forms"/>
+    <ds:schemaRef ds:uri="http://schemas.microsoft.com/office/2006/metadata/contentType"/>
+    <ds:schemaRef ds:uri="http://schemas.microsoft.com/office/2006/metadata/properties/metaAttributes"/>
+    <ds:schemaRef ds:uri="http://www.w3.org/2001/XMLSchema"/>
+    <ds:schemaRef ds:uri="http://schemas.microsoft.com/office/2006/metadata/properties"/>
+    <ds:schemaRef ds:uri="da1b7603-f8b8-47c9-9682-dc6aa8e9acd7"/>
+    <ds:schemaRef ds:uri="94bcf745-830c-42f4-885c-a1d7342e6e36"/>
+    <ds:schemaRef ds:uri="http://schemas.microsoft.com/office/2006/documentManagement/types"/>
+    <ds:schemaRef ds:uri="http://schemas.microsoft.com/office/infopath/2007/PartnerControls"/>
+    <ds:schemaRef ds:uri="http://schemas.openxmlformats.org/package/2006/metadata/core-properties"/>
+    <ds:schemaRef ds:uri="http://purl.org/dc/elements/1.1/"/>
+    <ds:schemaRef ds:uri="http://purl.org/dc/terms/"/>
+    <ds:schemaRef ds:uri="http://schemas.microsoft.com/internal/obd"/>
   </ds:schemaRefs>
 </ds:datastoreItem>
 </file>
@@ -11407,20 +19716,9 @@
 </file>
 
 <file path=customXml/itemProps3.xml><?xml version="1.0" encoding="utf-8"?>
-<ds:datastoreItem xmlns:ds="http://schemas.openxmlformats.org/officeDocument/2006/customXml" ds:itemID="{B4F426B3-7B89-4C59-B484-ECF81DDEA7A8}">
+<ds:datastoreItem xmlns:ds="http://schemas.openxmlformats.org/officeDocument/2006/customXml" ds:itemID="{329A8B4E-FDB2-442F-A1FE-63815B7A5BA7}">
   <ds:schemaRefs>
-    <ds:schemaRef ds:uri="http://schemas.microsoft.com/office/2006/metadata/contentType"/>
-    <ds:schemaRef ds:uri="http://schemas.microsoft.com/office/2006/metadata/properties/metaAttributes"/>
-    <ds:schemaRef ds:uri="http://www.w3.org/2001/XMLSchema"/>
-    <ds:schemaRef ds:uri="http://schemas.microsoft.com/office/2006/metadata/properties"/>
-    <ds:schemaRef ds:uri="da1b7603-f8b8-47c9-9682-dc6aa8e9acd7"/>
-    <ds:schemaRef ds:uri="94bcf745-830c-42f4-885c-a1d7342e6e36"/>
-    <ds:schemaRef ds:uri="http://schemas.microsoft.com/office/2006/documentManagement/types"/>
-    <ds:schemaRef ds:uri="http://schemas.microsoft.com/office/infopath/2007/PartnerControls"/>
-    <ds:schemaRef ds:uri="http://schemas.openxmlformats.org/package/2006/metadata/core-properties"/>
-    <ds:schemaRef ds:uri="http://purl.org/dc/elements/1.1/"/>
-    <ds:schemaRef ds:uri="http://purl.org/dc/terms/"/>
-    <ds:schemaRef ds:uri="http://schemas.microsoft.com/internal/obd"/>
+    <ds:schemaRef ds:uri="http://schemas.microsoft.com/sharepoint/v3/contenttype/forms"/>
   </ds:schemaRefs>
 </ds:datastoreItem>
 </file>